--- a/korad-경영평가-ppt/KORAD_경영평가_레이아웃_카탈로그_A4세로.pptx
+++ b/korad-경영평가-ppt/KORAD_경영평가_레이아웃_카탈로그_A4세로.pptx
@@ -14,6 +14,8 @@
     <p:sldId id="262" r:id="rId14"/>
     <p:sldId id="263" r:id="rId15"/>
     <p:sldId id="264" r:id="rId16"/>
+    <p:sldId id="265" r:id="rId17"/>
+    <p:sldId id="266" r:id="rId18"/>
   </p:sldIdLst>
   <p:sldSz cx="7560000" cy="10692000" type="screen4x3"/>
   <p:notesSz cx="6858000" cy="9144000"/>
@@ -466,6 +468,146 @@
 </file>
 
 <file path=ppt/notesSlides/notesSlide1.xml><?xml version="1.0" encoding="utf-8"?>
+<p:notes xmlns:a="http://schemas.openxmlformats.org/drawingml/2006/main" xmlns:p="http://schemas.openxmlformats.org/presentationml/2006/main" xmlns:r="http://schemas.openxmlformats.org/officeDocument/2006/relationships">
+  <p:cSld>
+    <p:spTree>
+      <p:nvGrpSpPr>
+        <p:cNvPr id="1" name=""/>
+        <p:cNvGrpSpPr/>
+        <p:nvPr/>
+      </p:nvGrpSpPr>
+      <p:grpSpPr>
+        <a:xfrm>
+          <a:off x="0" y="0"/>
+          <a:ext cx="0" cy="0"/>
+          <a:chOff x="0" y="0"/>
+          <a:chExt cx="0" cy="0"/>
+        </a:xfrm>
+      </p:grpSpPr>
+      <p:sp>
+        <p:nvSpPr>
+          <p:cNvPr id="2" name="Slide Image Placeholder 1"/>
+          <p:cNvSpPr>
+            <a:spLocks noGrp="1"/>
+          </p:cNvSpPr>
+          <p:nvPr>
+            <p:ph type="sldImg" idx="2"/>
+          </p:nvPr>
+        </p:nvSpPr>
+        <p:spPr/>
+      </p:sp>
+      <p:sp>
+        <p:nvSpPr>
+          <p:cNvPr id="3" name="Notes Placeholder 2"/>
+          <p:cNvSpPr>
+            <a:spLocks noGrp="1"/>
+          </p:cNvSpPr>
+          <p:nvPr>
+            <p:ph type="body" idx="3" sz="quarter"/>
+          </p:nvPr>
+        </p:nvSpPr>
+        <p:spPr/>
+        <p:txBody>
+          <a:bodyPr/>
+          <a:lstStyle/>
+          <a:p>
+            <a:r>
+              <a:t>구조 확인용 예시 문구이며 KORAD 실적이 아닙니다.</a:t>
+            </a:r>
+          </a:p>
+        </p:txBody>
+      </p:sp>
+      <p:sp>
+        <p:nvSpPr>
+          <p:cNvPr id="4" name="Slide Number Placeholder 3"/>
+          <p:cNvSpPr>
+            <a:spLocks noGrp="1"/>
+          </p:cNvSpPr>
+          <p:nvPr>
+            <p:ph type="sldNum" idx="5" sz="quarter"/>
+          </p:nvPr>
+        </p:nvSpPr>
+        <p:spPr/>
+      </p:sp>
+    </p:spTree>
+  </p:cSld>
+  <p:clrMapOvr>
+    <a:masterClrMapping/>
+  </p:clrMapOvr>
+</p:notes>
+</file>
+
+<file path=ppt/notesSlides/notesSlide10.xml><?xml version="1.0" encoding="utf-8"?>
+<p:notes xmlns:a="http://schemas.openxmlformats.org/drawingml/2006/main" xmlns:p="http://schemas.openxmlformats.org/presentationml/2006/main" xmlns:r="http://schemas.openxmlformats.org/officeDocument/2006/relationships">
+  <p:cSld>
+    <p:spTree>
+      <p:nvGrpSpPr>
+        <p:cNvPr id="1" name=""/>
+        <p:cNvGrpSpPr/>
+        <p:nvPr/>
+      </p:nvGrpSpPr>
+      <p:grpSpPr>
+        <a:xfrm>
+          <a:off x="0" y="0"/>
+          <a:ext cx="0" cy="0"/>
+          <a:chOff x="0" y="0"/>
+          <a:chExt cx="0" cy="0"/>
+        </a:xfrm>
+      </p:grpSpPr>
+      <p:sp>
+        <p:nvSpPr>
+          <p:cNvPr id="2" name="Slide Image Placeholder 1"/>
+          <p:cNvSpPr>
+            <a:spLocks noGrp="1"/>
+          </p:cNvSpPr>
+          <p:nvPr>
+            <p:ph type="sldImg" idx="2"/>
+          </p:nvPr>
+        </p:nvSpPr>
+        <p:spPr/>
+      </p:sp>
+      <p:sp>
+        <p:nvSpPr>
+          <p:cNvPr id="3" name="Notes Placeholder 2"/>
+          <p:cNvSpPr>
+            <a:spLocks noGrp="1"/>
+          </p:cNvSpPr>
+          <p:nvPr>
+            <p:ph type="body" idx="3" sz="quarter"/>
+          </p:nvPr>
+        </p:nvSpPr>
+        <p:spPr/>
+        <p:txBody>
+          <a:bodyPr/>
+          <a:lstStyle/>
+          <a:p>
+            <a:r>
+              <a:t>구조 확인용 예시 문구이며 KORAD 실적이 아닙니다.</a:t>
+            </a:r>
+          </a:p>
+        </p:txBody>
+      </p:sp>
+      <p:sp>
+        <p:nvSpPr>
+          <p:cNvPr id="4" name="Slide Number Placeholder 3"/>
+          <p:cNvSpPr>
+            <a:spLocks noGrp="1"/>
+          </p:cNvSpPr>
+          <p:nvPr>
+            <p:ph type="sldNum" idx="5" sz="quarter"/>
+          </p:nvPr>
+        </p:nvSpPr>
+        <p:spPr/>
+      </p:sp>
+    </p:spTree>
+  </p:cSld>
+  <p:clrMapOvr>
+    <a:masterClrMapping/>
+  </p:clrMapOvr>
+</p:notes>
+</file>
+
+<file path=ppt/notesSlides/notesSlide11.xml><?xml version="1.0" encoding="utf-8"?>
 <p:notes xmlns:a="http://schemas.openxmlformats.org/drawingml/2006/main" xmlns:p="http://schemas.openxmlformats.org/presentationml/2006/main" xmlns:r="http://schemas.openxmlformats.org/officeDocument/2006/relationships">
   <p:cSld>
     <p:spTree>
@@ -3556,14 +3698,14 @@
       </p:sp>
       <p:sp>
         <p:nvSpPr>
-          <p:cNvPr id="34" name="레일 쐐기"/>
+          <p:cNvPr id="34" name="레일 삼각형"/>
           <p:cNvSpPr/>
           <p:nvPr/>
         </p:nvSpPr>
         <p:spPr>
           <a:xfrm>
             <a:off x="547826" y="3678667"/>
-            <a:ext cx="580695" cy="142435"/>
+            <a:ext cx="580695" cy="131479"/>
           </a:xfrm>
           <a:custGeom>
             <a:avLst/>
@@ -3572,7 +3714,7 @@
             <a:cxnLst/>
             <a:rect l="l" t="t" r="r" b="b"/>
             <a:pathLst>
-              <a:path w="580695" h="142435">
+              <a:path w="580695" h="131479">
                 <a:moveTo>
                   <a:pt x="0" y="0"/>
                 </a:moveTo>
@@ -3580,7 +3722,7 @@
                   <a:pt x="580695" y="0"/>
                 </a:lnTo>
                 <a:lnTo>
-                  <a:pt x="290347" y="142435"/>
+                  <a:pt x="290347" y="131479"/>
                 </a:lnTo>
                 <a:close/>
               </a:path>
@@ -3954,14 +4096,14 @@
       </p:sp>
       <p:sp>
         <p:nvSpPr>
-          <p:cNvPr id="42" name="레일 쐐기"/>
+          <p:cNvPr id="42" name="레일 삼각형"/>
           <p:cNvSpPr/>
           <p:nvPr/>
         </p:nvSpPr>
         <p:spPr>
           <a:xfrm>
             <a:off x="547826" y="4352493"/>
-            <a:ext cx="580695" cy="142435"/>
+            <a:ext cx="580695" cy="131479"/>
           </a:xfrm>
           <a:custGeom>
             <a:avLst/>
@@ -3970,7 +4112,7 @@
             <a:cxnLst/>
             <a:rect l="l" t="t" r="r" b="b"/>
             <a:pathLst>
-              <a:path w="580695" h="142435">
+              <a:path w="580695" h="131479">
                 <a:moveTo>
                   <a:pt x="0" y="0"/>
                 </a:moveTo>
@@ -3978,7 +4120,7 @@
                   <a:pt x="580695" y="0"/>
                 </a:lnTo>
                 <a:lnTo>
-                  <a:pt x="290347" y="142435"/>
+                  <a:pt x="290347" y="131479"/>
                 </a:lnTo>
                 <a:close/>
               </a:path>
@@ -4009,12 +4151,10 @@
         <p:spPr>
           <a:xfrm>
             <a:off x="1161391" y="4374407"/>
-            <a:ext cx="1948435" cy="230087"/>
-          </a:xfrm>
-          <a:prstGeom prst="homePlate">
-            <a:avLst>
-              <a:gd name="adj" fmla="val 30000"/>
-            </a:avLst>
+            <a:ext cx="1882696" cy="230087"/>
+          </a:xfrm>
+          <a:prstGeom prst="rect">
+            <a:avLst/>
           </a:prstGeom>
           <a:solidFill>
             <a:srgbClr val="BDE0FF"/>
@@ -4061,13 +4201,11 @@
         </p:nvSpPr>
         <p:spPr>
           <a:xfrm>
-            <a:off x="2978348" y="4374407"/>
-            <a:ext cx="2014174" cy="230087"/>
-          </a:xfrm>
-          <a:prstGeom prst="chevron">
-            <a:avLst>
-              <a:gd name="adj" fmla="val 30000"/>
-            </a:avLst>
+            <a:off x="3044087" y="4374407"/>
+            <a:ext cx="1882696" cy="230087"/>
+          </a:xfrm>
+          <a:prstGeom prst="rect">
+            <a:avLst/>
           </a:prstGeom>
           <a:solidFill>
             <a:srgbClr val="30C2FF"/>
@@ -4114,13 +4252,11 @@
         </p:nvSpPr>
         <p:spPr>
           <a:xfrm>
-            <a:off x="4861043" y="4374407"/>
-            <a:ext cx="1948435" cy="230087"/>
-          </a:xfrm>
-          <a:prstGeom prst="chevron">
-            <a:avLst>
-              <a:gd name="adj" fmla="val 30000"/>
-            </a:avLst>
+            <a:off x="4926783" y="4374407"/>
+            <a:ext cx="1882696" cy="230087"/>
+          </a:xfrm>
+          <a:prstGeom prst="rect">
+            <a:avLst/>
           </a:prstGeom>
           <a:solidFill>
             <a:srgbClr val="0051BC"/>
@@ -4161,7 +4297,103 @@
       </p:sp>
       <p:sp>
         <p:nvSpPr>
-          <p:cNvPr id="46" name="칸 본문"/>
+          <p:cNvPr id="46" name="단계 삼각형"/>
+          <p:cNvSpPr/>
+          <p:nvPr/>
+        </p:nvSpPr>
+        <p:spPr>
+          <a:xfrm>
+            <a:off x="3044086" y="4374406"/>
+            <a:ext cx="109566" cy="230087"/>
+          </a:xfrm>
+          <a:custGeom>
+            <a:avLst/>
+            <a:gdLst/>
+            <a:ahLst/>
+            <a:cxnLst/>
+            <a:rect l="l" t="t" r="r" b="b"/>
+            <a:pathLst>
+              <a:path w="109566" h="230087">
+                <a:moveTo>
+                  <a:pt x="0" y="0"/>
+                </a:moveTo>
+                <a:lnTo>
+                  <a:pt x="109566" y="115044"/>
+                </a:lnTo>
+                <a:lnTo>
+                  <a:pt x="0" y="230087"/>
+                </a:lnTo>
+                <a:close/>
+              </a:path>
+            </a:pathLst>
+          </a:custGeom>
+          <a:solidFill>
+            <a:srgbClr val="BDE0FF"/>
+          </a:solidFill>
+          <a:ln>
+            <a:noFill/>
+          </a:ln>
+          <a:effectLst/>
+        </p:spPr>
+        <p:txBody>
+          <a:bodyPr rtlCol="0" anchor="ctr"/>
+          <a:lstStyle/>
+          <a:p>
+            <a:pPr algn="ctr"/>
+          </a:p>
+        </p:txBody>
+      </p:sp>
+      <p:sp>
+        <p:nvSpPr>
+          <p:cNvPr id="47" name="단계 삼각형"/>
+          <p:cNvSpPr/>
+          <p:nvPr/>
+        </p:nvSpPr>
+        <p:spPr>
+          <a:xfrm>
+            <a:off x="4926782" y="4374406"/>
+            <a:ext cx="109565" cy="230087"/>
+          </a:xfrm>
+          <a:custGeom>
+            <a:avLst/>
+            <a:gdLst/>
+            <a:ahLst/>
+            <a:cxnLst/>
+            <a:rect l="l" t="t" r="r" b="b"/>
+            <a:pathLst>
+              <a:path w="109565" h="230087">
+                <a:moveTo>
+                  <a:pt x="0" y="0"/>
+                </a:moveTo>
+                <a:lnTo>
+                  <a:pt x="109565" y="115044"/>
+                </a:lnTo>
+                <a:lnTo>
+                  <a:pt x="0" y="230087"/>
+                </a:lnTo>
+                <a:close/>
+              </a:path>
+            </a:pathLst>
+          </a:custGeom>
+          <a:solidFill>
+            <a:srgbClr val="30C2FF"/>
+          </a:solidFill>
+          <a:ln>
+            <a:noFill/>
+          </a:ln>
+          <a:effectLst/>
+        </p:spPr>
+        <p:txBody>
+          <a:bodyPr rtlCol="0" anchor="ctr"/>
+          <a:lstStyle/>
+          <a:p>
+            <a:pPr algn="ctr"/>
+          </a:p>
+        </p:txBody>
+      </p:sp>
+      <p:sp>
+        <p:nvSpPr>
+          <p:cNvPr id="48" name="칸 본문"/>
           <p:cNvSpPr txBox="1"/>
           <p:nvPr/>
         </p:nvSpPr>
@@ -4240,7 +4472,7 @@
       </p:sp>
       <p:sp>
         <p:nvSpPr>
-          <p:cNvPr id="47" name="칸 본문"/>
+          <p:cNvPr id="49" name="칸 본문"/>
           <p:cNvSpPr txBox="1"/>
           <p:nvPr/>
         </p:nvSpPr>
@@ -4291,7 +4523,7 @@
       </p:sp>
       <p:cxnSp>
         <p:nvCxnSpPr>
-          <p:cNvPr id="48" name="Connector 47"/>
+          <p:cNvPr id="50" name="Connector 49"/>
           <p:cNvCxnSpPr/>
           <p:nvPr/>
         </p:nvCxnSpPr>
@@ -4312,7 +4544,7 @@
       </p:cxnSp>
       <p:sp>
         <p:nvSpPr>
-          <p:cNvPr id="49" name="칸 본문"/>
+          <p:cNvPr id="51" name="칸 본문"/>
           <p:cNvSpPr txBox="1"/>
           <p:nvPr/>
         </p:nvSpPr>
@@ -4391,7 +4623,7 @@
       </p:sp>
       <p:cxnSp>
         <p:nvCxnSpPr>
-          <p:cNvPr id="50" name="Connector 49"/>
+          <p:cNvPr id="52" name="Connector 51"/>
           <p:cNvCxnSpPr/>
           <p:nvPr/>
         </p:nvCxnSpPr>
@@ -4412,108 +4644,36 @@
       </p:cxnSp>
       <p:sp>
         <p:nvSpPr>
-          <p:cNvPr id="51" name="연결 막대"/>
+          <p:cNvPr id="53" name="삼각 화살표"/>
           <p:cNvSpPr/>
           <p:nvPr/>
         </p:nvSpPr>
         <p:spPr>
           <a:xfrm>
-            <a:off x="1698261" y="5084765"/>
-            <a:ext cx="4601739" cy="32870"/>
-          </a:xfrm>
-          <a:prstGeom prst="rect">
-            <a:avLst/>
-          </a:prstGeom>
-          <a:solidFill>
-            <a:srgbClr val="BDE0FF"/>
-          </a:solidFill>
-          <a:ln>
-            <a:noFill/>
-          </a:ln>
-          <a:effectLst/>
-        </p:spPr>
-        <p:txBody>
-          <a:bodyPr rtlCol="0" anchor="ctr" lIns="0" rIns="0" tIns="0" bIns="0"/>
-          <a:lstStyle/>
-          <a:p>
-            <a:pPr algn="ctr"/>
-          </a:p>
-        </p:txBody>
-      </p:sp>
-      <p:sp>
-        <p:nvSpPr>
-          <p:cNvPr id="52" name="연결 끝"/>
-          <p:cNvSpPr/>
-          <p:nvPr/>
-        </p:nvSpPr>
-        <p:spPr>
-          <a:xfrm>
-            <a:off x="1698261" y="5084765"/>
-            <a:ext cx="27391" cy="76696"/>
-          </a:xfrm>
-          <a:prstGeom prst="rect">
-            <a:avLst/>
-          </a:prstGeom>
-          <a:solidFill>
-            <a:srgbClr val="BDE0FF"/>
-          </a:solidFill>
-          <a:ln>
-            <a:noFill/>
-          </a:ln>
-          <a:effectLst/>
-        </p:spPr>
-        <p:txBody>
-          <a:bodyPr rtlCol="0" anchor="ctr" lIns="0" rIns="0" tIns="0" bIns="0"/>
-          <a:lstStyle/>
-          <a:p>
-            <a:pPr algn="ctr"/>
-          </a:p>
-        </p:txBody>
-      </p:sp>
-      <p:sp>
-        <p:nvSpPr>
-          <p:cNvPr id="53" name="연결 끝"/>
-          <p:cNvSpPr/>
-          <p:nvPr/>
-        </p:nvSpPr>
-        <p:spPr>
-          <a:xfrm>
-            <a:off x="6272609" y="5084765"/>
-            <a:ext cx="27391" cy="76696"/>
-          </a:xfrm>
-          <a:prstGeom prst="rect">
-            <a:avLst/>
-          </a:prstGeom>
-          <a:solidFill>
-            <a:srgbClr val="BDE0FF"/>
-          </a:solidFill>
-          <a:ln>
-            <a:noFill/>
-          </a:ln>
-          <a:effectLst/>
-        </p:spPr>
-        <p:txBody>
-          <a:bodyPr rtlCol="0" anchor="ctr" lIns="0" rIns="0" tIns="0" bIns="0"/>
-          <a:lstStyle/>
-          <a:p>
-            <a:pPr algn="ctr"/>
-          </a:p>
-        </p:txBody>
-      </p:sp>
-      <p:sp>
-        <p:nvSpPr>
-          <p:cNvPr id="54" name="연결 화살표"/>
-          <p:cNvSpPr/>
-          <p:nvPr/>
-        </p:nvSpPr>
-        <p:spPr>
-          <a:xfrm>
-            <a:off x="3889565" y="5101200"/>
-            <a:ext cx="219130" cy="169826"/>
-          </a:xfrm>
-          <a:prstGeom prst="downArrow">
-            <a:avLst/>
-          </a:prstGeom>
+            <a:off x="3823826" y="5101200"/>
+            <a:ext cx="350608" cy="142434"/>
+          </a:xfrm>
+          <a:custGeom>
+            <a:avLst/>
+            <a:gdLst/>
+            <a:ahLst/>
+            <a:cxnLst/>
+            <a:rect l="l" t="t" r="r" b="b"/>
+            <a:pathLst>
+              <a:path w="350608" h="142434">
+                <a:moveTo>
+                  <a:pt x="0" y="0"/>
+                </a:moveTo>
+                <a:lnTo>
+                  <a:pt x="350608" y="0"/>
+                </a:lnTo>
+                <a:lnTo>
+                  <a:pt x="175304" y="142434"/>
+                </a:lnTo>
+                <a:close/>
+              </a:path>
+            </a:pathLst>
+          </a:custGeom>
           <a:solidFill>
             <a:srgbClr val="0051BC"/>
           </a:solidFill>
@@ -4523,7 +4683,7 @@
           <a:effectLst/>
         </p:spPr>
         <p:txBody>
-          <a:bodyPr rtlCol="0" anchor="ctr" lIns="0" rIns="0" tIns="0" bIns="0"/>
+          <a:bodyPr rtlCol="0" anchor="ctr"/>
           <a:lstStyle/>
           <a:p>
             <a:pPr algn="ctr"/>
@@ -4532,7 +4692,7 @@
       </p:sp>
       <p:sp>
         <p:nvSpPr>
-          <p:cNvPr id="55" name="라벨 박스"/>
+          <p:cNvPr id="54" name="라벨 박스"/>
           <p:cNvSpPr/>
           <p:nvPr/>
         </p:nvSpPr>
@@ -4564,7 +4724,7 @@
       </p:sp>
       <p:sp>
         <p:nvSpPr>
-          <p:cNvPr id="56" name="레일"/>
+          <p:cNvPr id="55" name="레일"/>
           <p:cNvSpPr/>
           <p:nvPr/>
         </p:nvSpPr>
@@ -4620,7 +4780,7 @@
       </p:sp>
       <p:sp>
         <p:nvSpPr>
-          <p:cNvPr id="57" name="강조 바"/>
+          <p:cNvPr id="56" name="강조 바"/>
           <p:cNvSpPr/>
           <p:nvPr/>
         </p:nvSpPr>
@@ -4650,7 +4810,7 @@
       </p:sp>
       <p:sp>
         <p:nvSpPr>
-          <p:cNvPr id="58" name="강조 바 글"/>
+          <p:cNvPr id="57" name="강조 바 글"/>
           <p:cNvSpPr txBox="1"/>
           <p:nvPr/>
         </p:nvSpPr>
@@ -4697,7 +4857,7 @@
       </p:sp>
       <p:sp>
         <p:nvSpPr>
-          <p:cNvPr id="59" name="라벨 박스"/>
+          <p:cNvPr id="58" name="라벨 박스"/>
           <p:cNvSpPr/>
           <p:nvPr/>
         </p:nvSpPr>
@@ -4729,7 +4889,7 @@
       </p:sp>
       <p:sp>
         <p:nvSpPr>
-          <p:cNvPr id="60" name="레일"/>
+          <p:cNvPr id="59" name="레일"/>
           <p:cNvSpPr/>
           <p:nvPr/>
         </p:nvSpPr>
@@ -4785,7 +4945,7 @@
       </p:sp>
       <p:sp>
         <p:nvSpPr>
-          <p:cNvPr id="61" name="가운데 글"/>
+          <p:cNvPr id="60" name="가운데 글"/>
           <p:cNvSpPr txBox="1"/>
           <p:nvPr/>
         </p:nvSpPr>
@@ -4832,7 +4992,7 @@
       </p:sp>
       <p:sp>
         <p:nvSpPr>
-          <p:cNvPr id="62" name="가운데 글"/>
+          <p:cNvPr id="61" name="가운데 글"/>
           <p:cNvSpPr txBox="1"/>
           <p:nvPr/>
         </p:nvSpPr>
@@ -4879,7 +5039,7 @@
       </p:sp>
       <p:cxnSp>
         <p:nvCxnSpPr>
-          <p:cNvPr id="63" name="Connector 62"/>
+          <p:cNvPr id="62" name="Connector 61"/>
           <p:cNvCxnSpPr/>
           <p:nvPr/>
         </p:nvCxnSpPr>
@@ -4900,7 +5060,7 @@
       </p:cxnSp>
       <p:sp>
         <p:nvSpPr>
-          <p:cNvPr id="64" name="가운데 글"/>
+          <p:cNvPr id="63" name="가운데 글"/>
           <p:cNvSpPr txBox="1"/>
           <p:nvPr/>
         </p:nvSpPr>
@@ -4947,7 +5107,7 @@
       </p:sp>
       <p:cxnSp>
         <p:nvCxnSpPr>
-          <p:cNvPr id="65" name="Connector 64"/>
+          <p:cNvPr id="64" name="Connector 63"/>
           <p:cNvCxnSpPr/>
           <p:nvPr/>
         </p:nvCxnSpPr>
@@ -4968,7 +5128,7 @@
       </p:cxnSp>
       <p:sp>
         <p:nvSpPr>
-          <p:cNvPr id="66" name="라벨 박스"/>
+          <p:cNvPr id="65" name="라벨 박스"/>
           <p:cNvSpPr/>
           <p:nvPr/>
         </p:nvSpPr>
@@ -5000,7 +5160,7 @@
       </p:sp>
       <p:sp>
         <p:nvSpPr>
-          <p:cNvPr id="67" name="레일"/>
+          <p:cNvPr id="66" name="레일"/>
           <p:cNvSpPr/>
           <p:nvPr/>
         </p:nvSpPr>
@@ -5056,7 +5216,7 @@
       </p:sp>
       <p:sp>
         <p:nvSpPr>
-          <p:cNvPr id="68" name="칸 본문"/>
+          <p:cNvPr id="67" name="칸 본문"/>
           <p:cNvSpPr txBox="1"/>
           <p:nvPr/>
         </p:nvSpPr>
@@ -5163,7 +5323,7 @@
       </p:sp>
       <p:sp>
         <p:nvSpPr>
-          <p:cNvPr id="69" name="칸 본문"/>
+          <p:cNvPr id="68" name="칸 본문"/>
           <p:cNvSpPr txBox="1"/>
           <p:nvPr/>
         </p:nvSpPr>
@@ -5270,7 +5430,7 @@
       </p:sp>
       <p:cxnSp>
         <p:nvCxnSpPr>
-          <p:cNvPr id="70" name="Connector 69"/>
+          <p:cNvPr id="69" name="Connector 68"/>
           <p:cNvCxnSpPr/>
           <p:nvPr/>
         </p:nvCxnSpPr>
@@ -5291,7 +5451,7 @@
       </p:cxnSp>
       <p:sp>
         <p:nvSpPr>
-          <p:cNvPr id="71" name="칸 본문"/>
+          <p:cNvPr id="70" name="칸 본문"/>
           <p:cNvSpPr txBox="1"/>
           <p:nvPr/>
         </p:nvSpPr>
@@ -5398,7 +5558,7 @@
       </p:sp>
       <p:cxnSp>
         <p:nvCxnSpPr>
-          <p:cNvPr id="72" name="Connector 71"/>
+          <p:cNvPr id="71" name="Connector 70"/>
           <p:cNvCxnSpPr/>
           <p:nvPr/>
         </p:nvCxnSpPr>
@@ -5419,7 +5579,7 @@
       </p:cxnSp>
       <p:sp>
         <p:nvSpPr>
-          <p:cNvPr id="73" name="라벨 박스"/>
+          <p:cNvPr id="72" name="라벨 박스"/>
           <p:cNvSpPr/>
           <p:nvPr/>
         </p:nvSpPr>
@@ -5451,7 +5611,7 @@
       </p:sp>
       <p:sp>
         <p:nvSpPr>
-          <p:cNvPr id="74" name="레일"/>
+          <p:cNvPr id="73" name="레일"/>
           <p:cNvSpPr/>
           <p:nvPr/>
         </p:nvSpPr>
@@ -5507,7 +5667,7 @@
       </p:sp>
       <p:sp>
         <p:nvSpPr>
-          <p:cNvPr id="75" name="칸 본문"/>
+          <p:cNvPr id="74" name="칸 본문"/>
           <p:cNvSpPr txBox="1"/>
           <p:nvPr/>
         </p:nvSpPr>
@@ -5586,7 +5746,7 @@
       </p:sp>
       <p:sp>
         <p:nvSpPr>
-          <p:cNvPr id="76" name="칸 본문"/>
+          <p:cNvPr id="75" name="칸 본문"/>
           <p:cNvSpPr txBox="1"/>
           <p:nvPr/>
         </p:nvSpPr>
@@ -5665,7 +5825,7 @@
       </p:sp>
       <p:cxnSp>
         <p:nvCxnSpPr>
-          <p:cNvPr id="77" name="Connector 76"/>
+          <p:cNvPr id="76" name="Connector 75"/>
           <p:cNvCxnSpPr/>
           <p:nvPr/>
         </p:nvCxnSpPr>
@@ -5686,7 +5846,7 @@
       </p:cxnSp>
       <p:sp>
         <p:nvSpPr>
-          <p:cNvPr id="78" name="칸 본문"/>
+          <p:cNvPr id="77" name="칸 본문"/>
           <p:cNvSpPr txBox="1"/>
           <p:nvPr/>
         </p:nvSpPr>
@@ -5765,7 +5925,7 @@
       </p:sp>
       <p:cxnSp>
         <p:nvCxnSpPr>
-          <p:cNvPr id="79" name="Connector 78"/>
+          <p:cNvPr id="78" name="Connector 77"/>
           <p:cNvCxnSpPr/>
           <p:nvPr/>
         </p:nvCxnSpPr>
@@ -5786,7 +5946,7 @@
       </p:cxnSp>
       <p:sp>
         <p:nvSpPr>
-          <p:cNvPr id="80" name="라벨 박스"/>
+          <p:cNvPr id="79" name="라벨 박스"/>
           <p:cNvSpPr/>
           <p:nvPr/>
         </p:nvSpPr>
@@ -5818,7 +5978,7 @@
       </p:sp>
       <p:sp>
         <p:nvSpPr>
-          <p:cNvPr id="81" name="레일"/>
+          <p:cNvPr id="80" name="레일"/>
           <p:cNvSpPr/>
           <p:nvPr/>
         </p:nvSpPr>
@@ -5874,7 +6034,7 @@
       </p:sp>
       <p:sp>
         <p:nvSpPr>
-          <p:cNvPr id="82" name="칸 본문"/>
+          <p:cNvPr id="81" name="칸 본문"/>
           <p:cNvSpPr txBox="1"/>
           <p:nvPr/>
         </p:nvSpPr>
@@ -5953,7 +6113,7 @@
       </p:sp>
       <p:sp>
         <p:nvSpPr>
-          <p:cNvPr id="83" name="칸 본문"/>
+          <p:cNvPr id="82" name="칸 본문"/>
           <p:cNvSpPr txBox="1"/>
           <p:nvPr/>
         </p:nvSpPr>
@@ -6032,7 +6192,7 @@
       </p:sp>
       <p:cxnSp>
         <p:nvCxnSpPr>
-          <p:cNvPr id="84" name="Connector 83"/>
+          <p:cNvPr id="83" name="Connector 82"/>
           <p:cNvCxnSpPr/>
           <p:nvPr/>
         </p:nvCxnSpPr>
@@ -6053,7 +6213,7 @@
       </p:cxnSp>
       <p:sp>
         <p:nvSpPr>
-          <p:cNvPr id="85" name="칸 본문"/>
+          <p:cNvPr id="84" name="칸 본문"/>
           <p:cNvSpPr txBox="1"/>
           <p:nvPr/>
         </p:nvSpPr>
@@ -6132,7 +6292,7 @@
       </p:sp>
       <p:cxnSp>
         <p:nvCxnSpPr>
-          <p:cNvPr id="86" name="Connector 85"/>
+          <p:cNvPr id="85" name="Connector 84"/>
           <p:cNvCxnSpPr/>
           <p:nvPr/>
         </p:nvCxnSpPr>
@@ -6153,7 +6313,7 @@
       </p:cxnSp>
       <p:sp>
         <p:nvSpPr>
-          <p:cNvPr id="87" name="핵심성과 박스"/>
+          <p:cNvPr id="86" name="핵심성과 박스"/>
           <p:cNvSpPr/>
           <p:nvPr/>
         </p:nvSpPr>
@@ -6185,7 +6345,7 @@
       </p:sp>
       <p:sp>
         <p:nvSpPr>
-          <p:cNvPr id="88" name="핵심성과 라벨"/>
+          <p:cNvPr id="87" name="핵심성과 라벨"/>
           <p:cNvSpPr/>
           <p:nvPr/>
         </p:nvSpPr>
@@ -6238,7 +6398,7 @@
       </p:sp>
       <p:sp>
         <p:nvSpPr>
-          <p:cNvPr id="89" name="핵심성과 문구"/>
+          <p:cNvPr id="88" name="핵심성과 문구"/>
           <p:cNvSpPr txBox="1"/>
           <p:nvPr/>
         </p:nvSpPr>
@@ -6283,6 +6443,5259 @@
                 <a:ea typeface="Pretendard"/>
               </a:rPr>
               <a:t>노사협력지수 전년대비 1.2점 상승(91.0 → 92.2점)</a:t>
+            </a:r>
+          </a:p>
+        </p:txBody>
+      </p:sp>
+    </p:spTree>
+  </p:cSld>
+  <p:clrMapOvr>
+    <a:masterClrMapping/>
+  </p:clrMapOvr>
+</p:sld>
+</file>
+
+<file path=ppt/slides/slide10.xml><?xml version="1.0" encoding="utf-8"?>
+<p:sld xmlns:a="http://schemas.openxmlformats.org/drawingml/2006/main" xmlns:p="http://schemas.openxmlformats.org/presentationml/2006/main" xmlns:r="http://schemas.openxmlformats.org/officeDocument/2006/relationships">
+  <p:cSld>
+    <p:spTree>
+      <p:nvGrpSpPr>
+        <p:cNvPr id="1" name=""/>
+        <p:cNvGrpSpPr/>
+        <p:nvPr/>
+      </p:nvGrpSpPr>
+      <p:grpSpPr/>
+      <p:sp>
+        <p:nvSpPr>
+          <p:cNvPr id="2" name="Text Placeholder 1"/>
+          <p:cNvSpPr>
+            <a:spLocks noGrp="1"/>
+          </p:cNvSpPr>
+          <p:nvPr>
+            <p:ph type="body" idx="13" sz="quarter"/>
+          </p:nvPr>
+        </p:nvSpPr>
+        <p:spPr/>
+        <p:txBody>
+          <a:bodyPr/>
+          <a:lstStyle/>
+          <a:p>
+            <a:r>
+              <a:t>노사관계</a:t>
+            </a:r>
+          </a:p>
+        </p:txBody>
+      </p:sp>
+      <p:sp>
+        <p:nvSpPr>
+          <p:cNvPr id="3" name="Text Placeholder 2"/>
+          <p:cNvSpPr>
+            <a:spLocks noGrp="1"/>
+          </p:cNvSpPr>
+          <p:nvPr>
+            <p:ph type="body" idx="14" sz="quarter"/>
+          </p:nvPr>
+        </p:nvSpPr>
+        <p:spPr/>
+        <p:txBody>
+          <a:bodyPr/>
+          <a:lstStyle/>
+          <a:p>
+            <a:r>
+              <a:t>10</a:t>
+            </a:r>
+          </a:p>
+        </p:txBody>
+      </p:sp>
+      <p:sp>
+        <p:nvSpPr>
+          <p:cNvPr id="4" name="번호 띠"/>
+          <p:cNvSpPr/>
+          <p:nvPr/>
+        </p:nvSpPr>
+        <p:spPr>
+          <a:xfrm>
+            <a:off x="723130" y="777913"/>
+            <a:ext cx="6300000" cy="306783"/>
+          </a:xfrm>
+          <a:prstGeom prst="rect">
+            <a:avLst/>
+          </a:prstGeom>
+          <a:gradFill rotWithShape="1">
+            <a:gsLst>
+              <a:gs pos="0">
+                <a:srgbClr val="DEEEFF"/>
+              </a:gs>
+              <a:gs pos="100000">
+                <a:srgbClr val="FFFFFF"/>
+              </a:gs>
+            </a:gsLst>
+            <a:lin scaled="0" ang="0"/>
+          </a:gradFill>
+          <a:ln w="9525">
+            <a:solidFill>
+              <a:srgbClr val="BDE0FF"/>
+            </a:solidFill>
+          </a:ln>
+          <a:effectLst/>
+        </p:spPr>
+        <p:txBody>
+          <a:bodyPr rtlCol="0" anchor="ctr" lIns="0" rIns="0" tIns="0" bIns="0"/>
+          <a:lstStyle/>
+          <a:p>
+            <a:pPr algn="ctr"/>
+          </a:p>
+        </p:txBody>
+      </p:sp>
+      <p:sp>
+        <p:nvSpPr>
+          <p:cNvPr id="5" name="번호 탭"/>
+          <p:cNvSpPr/>
+          <p:nvPr/>
+        </p:nvSpPr>
+        <p:spPr>
+          <a:xfrm>
+            <a:off x="745043" y="799826"/>
+            <a:ext cx="471130" cy="262956"/>
+          </a:xfrm>
+          <a:custGeom>
+            <a:avLst/>
+            <a:gdLst/>
+            <a:ahLst/>
+            <a:cxnLst/>
+            <a:rect l="l" t="t" r="r" b="b"/>
+            <a:pathLst>
+              <a:path w="471130" h="262956">
+                <a:moveTo>
+                  <a:pt x="0" y="0"/>
+                </a:moveTo>
+                <a:lnTo>
+                  <a:pt x="394435" y="0"/>
+                </a:lnTo>
+                <a:lnTo>
+                  <a:pt x="471130" y="262956"/>
+                </a:lnTo>
+                <a:lnTo>
+                  <a:pt x="0" y="262956"/>
+                </a:lnTo>
+                <a:close/>
+              </a:path>
+            </a:pathLst>
+          </a:custGeom>
+          <a:gradFill rotWithShape="1">
+            <a:gsLst>
+              <a:gs pos="0">
+                <a:srgbClr val="002060"/>
+              </a:gs>
+              <a:gs pos="100000">
+                <a:srgbClr val="008EFF"/>
+              </a:gs>
+            </a:gsLst>
+            <a:lin scaled="0" ang="0"/>
+          </a:gradFill>
+          <a:ln>
+            <a:noFill/>
+          </a:ln>
+          <a:effectLst/>
+        </p:spPr>
+        <p:txBody>
+          <a:bodyPr rtlCol="0" anchor="ctr"/>
+          <a:lstStyle/>
+          <a:p>
+            <a:pPr algn="ctr"/>
+          </a:p>
+        </p:txBody>
+      </p:sp>
+      <p:sp>
+        <p:nvSpPr>
+          <p:cNvPr id="6" name="번호 탭 빗면"/>
+          <p:cNvSpPr/>
+          <p:nvPr/>
+        </p:nvSpPr>
+        <p:spPr>
+          <a:xfrm>
+            <a:off x="1139478" y="799826"/>
+            <a:ext cx="142435" cy="262956"/>
+          </a:xfrm>
+          <a:custGeom>
+            <a:avLst/>
+            <a:gdLst/>
+            <a:ahLst/>
+            <a:cxnLst/>
+            <a:rect l="l" t="t" r="r" b="b"/>
+            <a:pathLst>
+              <a:path w="142435" h="262956">
+                <a:moveTo>
+                  <a:pt x="0" y="0"/>
+                </a:moveTo>
+                <a:lnTo>
+                  <a:pt x="65739" y="0"/>
+                </a:lnTo>
+                <a:lnTo>
+                  <a:pt x="142435" y="262956"/>
+                </a:lnTo>
+                <a:lnTo>
+                  <a:pt x="76695" y="262956"/>
+                </a:lnTo>
+                <a:close/>
+              </a:path>
+            </a:pathLst>
+          </a:custGeom>
+          <a:solidFill>
+            <a:srgbClr val="BDE0FF"/>
+          </a:solidFill>
+          <a:ln>
+            <a:noFill/>
+          </a:ln>
+          <a:effectLst/>
+        </p:spPr>
+        <p:txBody>
+          <a:bodyPr rtlCol="0" anchor="ctr"/>
+          <a:lstStyle/>
+          <a:p>
+            <a:pPr algn="ctr"/>
+          </a:p>
+        </p:txBody>
+      </p:sp>
+      <p:sp>
+        <p:nvSpPr>
+          <p:cNvPr id="7" name="번호"/>
+          <p:cNvSpPr txBox="1"/>
+          <p:nvPr/>
+        </p:nvSpPr>
+        <p:spPr>
+          <a:xfrm>
+            <a:off x="745043" y="777913"/>
+            <a:ext cx="383478" cy="306783"/>
+          </a:xfrm>
+          <a:prstGeom prst="rect">
+            <a:avLst/>
+          </a:prstGeom>
+          <a:noFill/>
+        </p:spPr>
+        <p:txBody>
+          <a:bodyPr wrap="square" lIns="0" tIns="0" rIns="0" bIns="0" anchor="ctr">
+            <a:noAutofit/>
+          </a:bodyPr>
+          <a:lstStyle/>
+          <a:p>
+            <a:pPr marL="0" indent="0" algn="ctr">
+              <a:lnSpc>
+                <a:spcPct val="110000"/>
+              </a:lnSpc>
+              <a:spcBef>
+                <a:spcPts val="0"/>
+              </a:spcBef>
+              <a:spcAft>
+                <a:spcPts val="0"/>
+              </a:spcAft>
+              <a:buNone/>
+            </a:pPr>
+            <a:r>
+              <a:rPr lang="ko-KR" sz="2200" b="1" spc="-110" dirty="0">
+                <a:solidFill>
+                  <a:srgbClr val="FFFFFF"/>
+                </a:solidFill>
+                <a:latin typeface="Pretendard"/>
+                <a:ea typeface="Pretendard"/>
+              </a:rPr>
+              <a:t>2</a:t>
+            </a:r>
+          </a:p>
+        </p:txBody>
+      </p:sp>
+      <p:sp>
+        <p:nvSpPr>
+          <p:cNvPr id="8" name="번호 띠 제목"/>
+          <p:cNvSpPr txBox="1"/>
+          <p:nvPr/>
+        </p:nvSpPr>
+        <p:spPr>
+          <a:xfrm>
+            <a:off x="1369565" y="799826"/>
+            <a:ext cx="5587826" cy="262957"/>
+          </a:xfrm>
+          <a:prstGeom prst="rect">
+            <a:avLst/>
+          </a:prstGeom>
+          <a:noFill/>
+        </p:spPr>
+        <p:txBody>
+          <a:bodyPr wrap="square" lIns="36000" tIns="10800" rIns="36000" bIns="10800" anchor="ctr">
+            <a:noAutofit/>
+          </a:bodyPr>
+          <a:lstStyle/>
+          <a:p>
+            <a:pPr marL="0" indent="0" algn="l">
+              <a:lnSpc>
+                <a:spcPct val="110000"/>
+              </a:lnSpc>
+              <a:spcBef>
+                <a:spcPts val="0"/>
+              </a:spcBef>
+              <a:spcAft>
+                <a:spcPts val="0"/>
+              </a:spcAft>
+              <a:buNone/>
+            </a:pPr>
+            <a:r>
+              <a:rPr lang="ko-KR" sz="1500" b="1" spc="-75" dirty="0">
+                <a:solidFill>
+                  <a:srgbClr val="000359"/>
+                </a:solidFill>
+                <a:latin typeface="Pretendard"/>
+                <a:ea typeface="Pretendard"/>
+              </a:rPr>
+              <a:t>누구나 즐겁고 차별 없이 일할 수 있는 근로환경 구현</a:t>
+            </a:r>
+          </a:p>
+        </p:txBody>
+      </p:sp>
+      <p:sp>
+        <p:nvSpPr>
+          <p:cNvPr id="9" name="형광 밑줄"/>
+          <p:cNvSpPr/>
+          <p:nvPr/>
+        </p:nvSpPr>
+        <p:spPr>
+          <a:xfrm>
+            <a:off x="723130" y="1358609"/>
+            <a:ext cx="3801004" cy="43826"/>
+          </a:xfrm>
+          <a:prstGeom prst="rect">
+            <a:avLst/>
+          </a:prstGeom>
+          <a:solidFill>
+            <a:srgbClr val="29FFBD"/>
+          </a:solidFill>
+          <a:ln>
+            <a:noFill/>
+          </a:ln>
+          <a:effectLst/>
+        </p:spPr>
+        <p:txBody>
+          <a:bodyPr rtlCol="0" anchor="ctr" lIns="0" rIns="0" tIns="0" bIns="0"/>
+          <a:lstStyle/>
+          <a:p>
+            <a:pPr algn="ctr"/>
+          </a:p>
+        </p:txBody>
+      </p:sp>
+      <p:sp>
+        <p:nvSpPr>
+          <p:cNvPr id="10" name="소제목"/>
+          <p:cNvSpPr txBox="1"/>
+          <p:nvPr/>
+        </p:nvSpPr>
+        <p:spPr>
+          <a:xfrm>
+            <a:off x="723130" y="1205217"/>
+            <a:ext cx="6300000" cy="241043"/>
+          </a:xfrm>
+          <a:prstGeom prst="rect">
+            <a:avLst/>
+          </a:prstGeom>
+          <a:noFill/>
+        </p:spPr>
+        <p:txBody>
+          <a:bodyPr wrap="square" lIns="0" tIns="0" rIns="0" bIns="0" anchor="ctr">
+            <a:noAutofit/>
+          </a:bodyPr>
+          <a:lstStyle/>
+          <a:p>
+            <a:pPr marL="0" indent="0" algn="l">
+              <a:lnSpc>
+                <a:spcPct val="110000"/>
+              </a:lnSpc>
+              <a:spcBef>
+                <a:spcPts val="0"/>
+              </a:spcBef>
+              <a:spcAft>
+                <a:spcPts val="0"/>
+              </a:spcAft>
+              <a:buNone/>
+            </a:pPr>
+            <a:r>
+              <a:rPr lang="ko-KR" sz="1200" b="1" spc="-60" dirty="0">
+                <a:solidFill>
+                  <a:srgbClr val="000359"/>
+                </a:solidFill>
+                <a:latin typeface="Pretendard"/>
+                <a:ea typeface="Pretendard"/>
+              </a:rPr>
+              <a:t>가. 직원 니즈를 반영한 근로조건 개선과 복리후생 향상 과제 도출</a:t>
+            </a:r>
+          </a:p>
+        </p:txBody>
+      </p:sp>
+      <p:sp>
+        <p:nvSpPr>
+          <p:cNvPr id="11" name="라벨 박스"/>
+          <p:cNvSpPr/>
+          <p:nvPr/>
+        </p:nvSpPr>
+        <p:spPr>
+          <a:xfrm>
+            <a:off x="723130" y="1501043"/>
+            <a:ext cx="6300000" cy="1745781"/>
+          </a:xfrm>
+          <a:prstGeom prst="rect">
+            <a:avLst/>
+          </a:prstGeom>
+          <a:solidFill>
+            <a:srgbClr val="FFFFFF"/>
+          </a:solidFill>
+          <a:ln w="9525">
+            <a:solidFill>
+              <a:srgbClr val="008EFF"/>
+            </a:solidFill>
+          </a:ln>
+          <a:effectLst/>
+        </p:spPr>
+        <p:txBody>
+          <a:bodyPr rtlCol="0" anchor="ctr" lIns="0" rIns="0" tIns="0" bIns="0"/>
+          <a:lstStyle/>
+          <a:p>
+            <a:pPr algn="ctr"/>
+          </a:p>
+        </p:txBody>
+      </p:sp>
+      <p:sp>
+        <p:nvSpPr>
+          <p:cNvPr id="12" name="레일"/>
+          <p:cNvSpPr/>
+          <p:nvPr/>
+        </p:nvSpPr>
+        <p:spPr>
+          <a:xfrm>
+            <a:off x="734087" y="1512000"/>
+            <a:ext cx="591652" cy="1723868"/>
+          </a:xfrm>
+          <a:prstGeom prst="rect">
+            <a:avLst/>
+          </a:prstGeom>
+          <a:pattFill prst="trellis">
+            <a:fgClr>
+              <a:srgbClr val="00BEC2"/>
+            </a:fgClr>
+            <a:bgClr>
+              <a:srgbClr val="00B0B4"/>
+            </a:bgClr>
+          </a:pattFill>
+          <a:ln>
+            <a:noFill/>
+          </a:ln>
+          <a:effectLst/>
+        </p:spPr>
+        <p:txBody>
+          <a:bodyPr rtlCol="0" anchor="ctr" lIns="10800" rIns="10800" tIns="0" bIns="0" wrap="square"/>
+          <a:lstStyle/>
+          <a:p>
+            <a:pPr marL="0" indent="0" algn="ctr">
+              <a:lnSpc>
+                <a:spcPct val="110000"/>
+              </a:lnSpc>
+              <a:spcBef>
+                <a:spcPts val="0"/>
+              </a:spcBef>
+              <a:spcAft>
+                <a:spcPts val="0"/>
+              </a:spcAft>
+              <a:buNone/>
+            </a:pPr>
+            <a:r>
+              <a:rPr lang="ko-KR" sz="1000" b="1" spc="-50" dirty="0">
+                <a:solidFill>
+                  <a:srgbClr val="FFFFFF"/>
+                </a:solidFill>
+                <a:latin typeface="Pretendard"/>
+                <a:ea typeface="Pretendard"/>
+              </a:rPr>
+              <a:t>환경분석</a:t>
+            </a:r>
+          </a:p>
+        </p:txBody>
+      </p:sp>
+      <p:sp>
+        <p:nvSpPr>
+          <p:cNvPr id="13" name="머리칸"/>
+          <p:cNvSpPr/>
+          <p:nvPr/>
+        </p:nvSpPr>
+        <p:spPr>
+          <a:xfrm>
+            <a:off x="1358609" y="1528435"/>
+            <a:ext cx="1860783" cy="230087"/>
+          </a:xfrm>
+          <a:prstGeom prst="rect">
+            <a:avLst/>
+          </a:prstGeom>
+          <a:solidFill>
+            <a:srgbClr val="DEEEFF"/>
+          </a:solidFill>
+          <a:ln>
+            <a:noFill/>
+          </a:ln>
+          <a:effectLst/>
+        </p:spPr>
+        <p:txBody>
+          <a:bodyPr rtlCol="0" anchor="ctr" lIns="21600" rIns="21600" tIns="3600" bIns="3600" wrap="square"/>
+          <a:lstStyle/>
+          <a:p>
+            <a:pPr marL="0" indent="0" algn="ctr">
+              <a:lnSpc>
+                <a:spcPct val="110000"/>
+              </a:lnSpc>
+              <a:spcBef>
+                <a:spcPts val="0"/>
+              </a:spcBef>
+              <a:spcAft>
+                <a:spcPts val="0"/>
+              </a:spcAft>
+              <a:buNone/>
+            </a:pPr>
+            <a:r>
+              <a:rPr lang="ko-KR" sz="1000" b="1" spc="-50" dirty="0">
+                <a:solidFill>
+                  <a:srgbClr val="000359"/>
+                </a:solidFill>
+                <a:latin typeface="Pretendard"/>
+                <a:ea typeface="Pretendard"/>
+              </a:rPr>
+              <a:t>외부환경</a:t>
+            </a:r>
+          </a:p>
+        </p:txBody>
+      </p:sp>
+      <p:sp>
+        <p:nvSpPr>
+          <p:cNvPr id="14" name="머리칸"/>
+          <p:cNvSpPr/>
+          <p:nvPr/>
+        </p:nvSpPr>
+        <p:spPr>
+          <a:xfrm>
+            <a:off x="3235826" y="1528435"/>
+            <a:ext cx="1860783" cy="230087"/>
+          </a:xfrm>
+          <a:prstGeom prst="rect">
+            <a:avLst/>
+          </a:prstGeom>
+          <a:solidFill>
+            <a:srgbClr val="DEEEFF"/>
+          </a:solidFill>
+          <a:ln>
+            <a:noFill/>
+          </a:ln>
+          <a:effectLst/>
+        </p:spPr>
+        <p:txBody>
+          <a:bodyPr rtlCol="0" anchor="ctr" lIns="21600" rIns="21600" tIns="3600" bIns="3600" wrap="square"/>
+          <a:lstStyle/>
+          <a:p>
+            <a:pPr marL="0" indent="0" algn="ctr">
+              <a:lnSpc>
+                <a:spcPct val="110000"/>
+              </a:lnSpc>
+              <a:spcBef>
+                <a:spcPts val="0"/>
+              </a:spcBef>
+              <a:spcAft>
+                <a:spcPts val="0"/>
+              </a:spcAft>
+              <a:buNone/>
+            </a:pPr>
+            <a:r>
+              <a:rPr lang="ko-KR" sz="1000" b="1" spc="-50" dirty="0">
+                <a:solidFill>
+                  <a:srgbClr val="000359"/>
+                </a:solidFill>
+                <a:latin typeface="Pretendard"/>
+                <a:ea typeface="Pretendard"/>
+              </a:rPr>
+              <a:t>전년도 환류</a:t>
+            </a:r>
+          </a:p>
+        </p:txBody>
+      </p:sp>
+      <p:sp>
+        <p:nvSpPr>
+          <p:cNvPr id="15" name="머리칸"/>
+          <p:cNvSpPr/>
+          <p:nvPr/>
+        </p:nvSpPr>
+        <p:spPr>
+          <a:xfrm>
+            <a:off x="5113043" y="1528435"/>
+            <a:ext cx="1860783" cy="230087"/>
+          </a:xfrm>
+          <a:prstGeom prst="rect">
+            <a:avLst/>
+          </a:prstGeom>
+          <a:solidFill>
+            <a:srgbClr val="DEEEFF"/>
+          </a:solidFill>
+          <a:ln>
+            <a:noFill/>
+          </a:ln>
+          <a:effectLst/>
+        </p:spPr>
+        <p:txBody>
+          <a:bodyPr rtlCol="0" anchor="ctr" lIns="21600" rIns="21600" tIns="3600" bIns="3600" wrap="square"/>
+          <a:lstStyle/>
+          <a:p>
+            <a:pPr marL="0" indent="0" algn="ctr">
+              <a:lnSpc>
+                <a:spcPct val="110000"/>
+              </a:lnSpc>
+              <a:spcBef>
+                <a:spcPts val="0"/>
+              </a:spcBef>
+              <a:spcAft>
+                <a:spcPts val="0"/>
+              </a:spcAft>
+              <a:buNone/>
+            </a:pPr>
+            <a:r>
+              <a:rPr lang="ko-KR" sz="1000" b="1" spc="-50" dirty="0">
+                <a:solidFill>
+                  <a:srgbClr val="000359"/>
+                </a:solidFill>
+                <a:latin typeface="Pretendard"/>
+                <a:ea typeface="Pretendard"/>
+              </a:rPr>
+              <a:t>직원니즈</a:t>
+            </a:r>
+          </a:p>
+        </p:txBody>
+      </p:sp>
+      <p:sp>
+        <p:nvSpPr>
+          <p:cNvPr id="16" name="칸 본문"/>
+          <p:cNvSpPr txBox="1"/>
+          <p:nvPr/>
+        </p:nvSpPr>
+        <p:spPr>
+          <a:xfrm>
+            <a:off x="1369565" y="1769478"/>
+            <a:ext cx="1855304" cy="1460911"/>
+          </a:xfrm>
+          <a:prstGeom prst="rect">
+            <a:avLst/>
+          </a:prstGeom>
+          <a:noFill/>
+        </p:spPr>
+        <p:txBody>
+          <a:bodyPr wrap="square" lIns="50400" tIns="7200" rIns="21600" bIns="7200" anchor="ctr">
+            <a:noAutofit/>
+          </a:bodyPr>
+          <a:lstStyle/>
+          <a:p>
+            <a:pPr marL="118800" indent="-118800" algn="l">
+              <a:lnSpc>
+                <a:spcPct val="110000"/>
+              </a:lnSpc>
+              <a:spcBef>
+                <a:spcPts val="0"/>
+              </a:spcBef>
+              <a:spcAft>
+                <a:spcPts val="50"/>
+              </a:spcAft>
+              <a:buClr>
+                <a:srgbClr val="000359"/>
+              </a:buClr>
+              <a:buFont typeface="Pretendard"/>
+              <a:buChar char="•"/>
+            </a:pPr>
+            <a:r>
+              <a:rPr lang="ko-KR" sz="1000" spc="-50" dirty="0">
+                <a:solidFill>
+                  <a:srgbClr val="000359"/>
+                </a:solidFill>
+                <a:latin typeface="Pretendard"/>
+                <a:ea typeface="Pretendard"/>
+              </a:rPr>
+              <a:t>육아지원 3법에 따른 출산·양육 강화</a:t>
+            </a:r>
+          </a:p>
+          <a:p>
+            <a:pPr marL="118800" indent="-118800" algn="l">
+              <a:lnSpc>
+                <a:spcPct val="110000"/>
+              </a:lnSpc>
+              <a:spcBef>
+                <a:spcPts val="0"/>
+              </a:spcBef>
+              <a:spcAft>
+                <a:spcPts val="50"/>
+              </a:spcAft>
+              <a:buClr>
+                <a:srgbClr val="000359"/>
+              </a:buClr>
+              <a:buFont typeface="Pretendard"/>
+              <a:buChar char="•"/>
+            </a:pPr>
+            <a:r>
+              <a:rPr lang="ko-KR" sz="1000" spc="-50" dirty="0">
+                <a:solidFill>
+                  <a:srgbClr val="000359"/>
+                </a:solidFill>
+                <a:latin typeface="Pretendard"/>
+                <a:ea typeface="Pretendard"/>
+              </a:rPr>
+              <a:t>장기재직휴가·임신검진동행휴가 신설</a:t>
+            </a:r>
+          </a:p>
+          <a:p>
+            <a:pPr marL="118800" indent="-118800" algn="l">
+              <a:lnSpc>
+                <a:spcPct val="110000"/>
+              </a:lnSpc>
+              <a:spcBef>
+                <a:spcPts val="0"/>
+              </a:spcBef>
+              <a:spcAft>
+                <a:spcPts val="50"/>
+              </a:spcAft>
+              <a:buClr>
+                <a:srgbClr val="000359"/>
+              </a:buClr>
+              <a:buFont typeface="Pretendard"/>
+              <a:buChar char="•"/>
+            </a:pPr>
+            <a:r>
+              <a:rPr lang="ko-KR" sz="1000" spc="-50" dirty="0">
+                <a:solidFill>
+                  <a:srgbClr val="000359"/>
+                </a:solidFill>
+                <a:latin typeface="Pretendard"/>
+                <a:ea typeface="Pretendard"/>
+              </a:rPr>
+              <a:t>국정과제에 따른 안전일터 조성</a:t>
+            </a:r>
+          </a:p>
+        </p:txBody>
+      </p:sp>
+      <p:sp>
+        <p:nvSpPr>
+          <p:cNvPr id="17" name="칸 본문"/>
+          <p:cNvSpPr txBox="1"/>
+          <p:nvPr/>
+        </p:nvSpPr>
+        <p:spPr>
+          <a:xfrm>
+            <a:off x="3246783" y="1769478"/>
+            <a:ext cx="1855304" cy="1460911"/>
+          </a:xfrm>
+          <a:prstGeom prst="rect">
+            <a:avLst/>
+          </a:prstGeom>
+          <a:noFill/>
+        </p:spPr>
+        <p:txBody>
+          <a:bodyPr wrap="square" lIns="50400" tIns="7200" rIns="21600" bIns="7200" anchor="ctr">
+            <a:noAutofit/>
+          </a:bodyPr>
+          <a:lstStyle/>
+          <a:p>
+            <a:pPr marL="118800" indent="-118800" algn="l">
+              <a:lnSpc>
+                <a:spcPct val="110000"/>
+              </a:lnSpc>
+              <a:spcBef>
+                <a:spcPts val="0"/>
+              </a:spcBef>
+              <a:spcAft>
+                <a:spcPts val="50"/>
+              </a:spcAft>
+              <a:buClr>
+                <a:srgbClr val="000359"/>
+              </a:buClr>
+              <a:buFont typeface="Pretendard"/>
+              <a:buChar char="•"/>
+            </a:pPr>
+            <a:r>
+              <a:rPr lang="ko-KR" sz="1000" spc="-50" dirty="0">
+                <a:solidFill>
+                  <a:srgbClr val="000359"/>
+                </a:solidFill>
+                <a:latin typeface="Pretendard"/>
+                <a:ea typeface="Pretendard"/>
+              </a:rPr>
+              <a:t>체감할 수 있는 질적인 근로조건 개선 성과 필요</a:t>
+            </a:r>
+          </a:p>
+          <a:p>
+            <a:pPr marL="118800" indent="-118800" algn="l">
+              <a:lnSpc>
+                <a:spcPct val="110000"/>
+              </a:lnSpc>
+              <a:spcBef>
+                <a:spcPts val="0"/>
+              </a:spcBef>
+              <a:spcAft>
+                <a:spcPts val="50"/>
+              </a:spcAft>
+              <a:buClr>
+                <a:srgbClr val="000359"/>
+              </a:buClr>
+              <a:buFont typeface="Pretendard"/>
+              <a:buChar char="•"/>
+            </a:pPr>
+            <a:r>
+              <a:rPr lang="ko-KR" sz="1000" spc="-50" dirty="0">
+                <a:solidFill>
+                  <a:srgbClr val="000359"/>
+                </a:solidFill>
+                <a:latin typeface="Pretendard"/>
+                <a:ea typeface="Pretendard"/>
+              </a:rPr>
+              <a:t>취약직종 근로조건 향상 노력 지속 필요</a:t>
+            </a:r>
+          </a:p>
+        </p:txBody>
+      </p:sp>
+      <p:cxnSp>
+        <p:nvCxnSpPr>
+          <p:cNvPr id="18" name="Connector 17"/>
+          <p:cNvCxnSpPr/>
+          <p:nvPr/>
+        </p:nvCxnSpPr>
+        <p:spPr>
+          <a:xfrm>
+            <a:off x="3235826" y="1802348"/>
+            <a:ext cx="0" cy="1395172"/>
+          </a:xfrm>
+          <a:prstGeom prst="line">
+            <a:avLst/>
+          </a:prstGeom>
+          <a:ln w="9525">
+            <a:solidFill>
+              <a:srgbClr val="BDE0FF"/>
+            </a:solidFill>
+          </a:ln>
+        </p:spPr>
+      </p:cxnSp>
+      <p:sp>
+        <p:nvSpPr>
+          <p:cNvPr id="19" name="레일"/>
+          <p:cNvSpPr/>
+          <p:nvPr/>
+        </p:nvSpPr>
+        <p:spPr>
+          <a:xfrm>
+            <a:off x="5134957" y="1780435"/>
+            <a:ext cx="525913" cy="703064"/>
+          </a:xfrm>
+          <a:prstGeom prst="rect">
+            <a:avLst/>
+          </a:prstGeom>
+          <a:pattFill prst="trellis">
+            <a:fgClr>
+              <a:srgbClr val="0990FF"/>
+            </a:fgClr>
+            <a:bgClr>
+              <a:srgbClr val="0080EA"/>
+            </a:bgClr>
+          </a:pattFill>
+          <a:ln>
+            <a:noFill/>
+          </a:ln>
+          <a:effectLst/>
+        </p:spPr>
+        <p:txBody>
+          <a:bodyPr rtlCol="0" anchor="ctr" lIns="10800" rIns="10800" tIns="0" bIns="0" wrap="square"/>
+          <a:lstStyle/>
+          <a:p>
+            <a:pPr marL="0" indent="0" algn="ctr">
+              <a:lnSpc>
+                <a:spcPct val="110000"/>
+              </a:lnSpc>
+              <a:spcBef>
+                <a:spcPts val="0"/>
+              </a:spcBef>
+              <a:spcAft>
+                <a:spcPts val="0"/>
+              </a:spcAft>
+              <a:buNone/>
+            </a:pPr>
+            <a:r>
+              <a:rPr lang="ko-KR" sz="1000" b="1" spc="-50" dirty="0">
+                <a:solidFill>
+                  <a:srgbClr val="FFFFFF"/>
+                </a:solidFill>
+                <a:latin typeface="Pretendard"/>
+                <a:ea typeface="Pretendard"/>
+              </a:rPr>
+              <a:t>복지개선</a:t>
+            </a:r>
+          </a:p>
+          <a:p>
+            <a:pPr marL="0" indent="0" algn="ctr">
+              <a:lnSpc>
+                <a:spcPct val="110000"/>
+              </a:lnSpc>
+              <a:spcBef>
+                <a:spcPts val="0"/>
+              </a:spcBef>
+              <a:spcAft>
+                <a:spcPts val="0"/>
+              </a:spcAft>
+              <a:buNone/>
+            </a:pPr>
+            <a:r>
+              <a:rPr lang="ko-KR" sz="1000" b="1" spc="-50" dirty="0">
+                <a:solidFill>
+                  <a:srgbClr val="FFFFFF"/>
+                </a:solidFill>
+                <a:latin typeface="Pretendard"/>
+                <a:ea typeface="Pretendard"/>
+              </a:rPr>
+              <a:t>TF</a:t>
+            </a:r>
+          </a:p>
+        </p:txBody>
+      </p:sp>
+      <p:sp>
+        <p:nvSpPr>
+          <p:cNvPr id="20" name="소행 본문"/>
+          <p:cNvSpPr txBox="1"/>
+          <p:nvPr/>
+        </p:nvSpPr>
+        <p:spPr>
+          <a:xfrm>
+            <a:off x="5682783" y="1780435"/>
+            <a:ext cx="1296522" cy="703064"/>
+          </a:xfrm>
+          <a:prstGeom prst="rect">
+            <a:avLst/>
+          </a:prstGeom>
+          <a:noFill/>
+        </p:spPr>
+        <p:txBody>
+          <a:bodyPr wrap="square" lIns="43200" tIns="7200" rIns="21600" bIns="7200" anchor="ctr">
+            <a:noAutofit/>
+          </a:bodyPr>
+          <a:lstStyle/>
+          <a:p>
+            <a:pPr marL="118800" indent="-118800" algn="l">
+              <a:lnSpc>
+                <a:spcPct val="110000"/>
+              </a:lnSpc>
+              <a:spcBef>
+                <a:spcPts val="0"/>
+              </a:spcBef>
+              <a:spcAft>
+                <a:spcPts val="50"/>
+              </a:spcAft>
+              <a:buClr>
+                <a:srgbClr val="000359"/>
+              </a:buClr>
+              <a:buFont typeface="Pretendard"/>
+              <a:buChar char="•"/>
+            </a:pPr>
+            <a:r>
+              <a:rPr lang="ko-KR" sz="1000" spc="-50" dirty="0">
+                <a:solidFill>
+                  <a:srgbClr val="000359"/>
+                </a:solidFill>
+                <a:latin typeface="Pretendard"/>
+                <a:ea typeface="Pretendard"/>
+              </a:rPr>
+              <a:t>문화여가·가족친화 강화</a:t>
+            </a:r>
+          </a:p>
+          <a:p>
+            <a:pPr marL="118800" indent="-118800" algn="l">
+              <a:lnSpc>
+                <a:spcPct val="110000"/>
+              </a:lnSpc>
+              <a:spcBef>
+                <a:spcPts val="0"/>
+              </a:spcBef>
+              <a:spcAft>
+                <a:spcPts val="50"/>
+              </a:spcAft>
+              <a:buClr>
+                <a:srgbClr val="000359"/>
+              </a:buClr>
+              <a:buFont typeface="Pretendard"/>
+              <a:buChar char="•"/>
+            </a:pPr>
+            <a:r>
+              <a:rPr lang="ko-KR" sz="1000" spc="-50" dirty="0">
+                <a:solidFill>
+                  <a:srgbClr val="000359"/>
+                </a:solidFill>
+                <a:latin typeface="Pretendard"/>
+                <a:ea typeface="Pretendard"/>
+              </a:rPr>
+              <a:t>경조사 등 생활밀착 지원</a:t>
+            </a:r>
+          </a:p>
+        </p:txBody>
+      </p:sp>
+      <p:cxnSp>
+        <p:nvCxnSpPr>
+          <p:cNvPr id="21" name="Connector 20"/>
+          <p:cNvCxnSpPr/>
+          <p:nvPr/>
+        </p:nvCxnSpPr>
+        <p:spPr>
+          <a:xfrm>
+            <a:off x="5134957" y="2494456"/>
+            <a:ext cx="1833391" cy="0"/>
+          </a:xfrm>
+          <a:prstGeom prst="line">
+            <a:avLst/>
+          </a:prstGeom>
+          <a:ln w="9525">
+            <a:solidFill>
+              <a:srgbClr val="BDE0FF"/>
+            </a:solidFill>
+          </a:ln>
+        </p:spPr>
+      </p:cxnSp>
+      <p:sp>
+        <p:nvSpPr>
+          <p:cNvPr id="22" name="레일"/>
+          <p:cNvSpPr/>
+          <p:nvPr/>
+        </p:nvSpPr>
+        <p:spPr>
+          <a:xfrm>
+            <a:off x="5134957" y="2499934"/>
+            <a:ext cx="525913" cy="703064"/>
+          </a:xfrm>
+          <a:prstGeom prst="rect">
+            <a:avLst/>
+          </a:prstGeom>
+          <a:pattFill prst="trellis">
+            <a:fgClr>
+              <a:srgbClr val="0990FF"/>
+            </a:fgClr>
+            <a:bgClr>
+              <a:srgbClr val="0080EA"/>
+            </a:bgClr>
+          </a:pattFill>
+          <a:ln>
+            <a:noFill/>
+          </a:ln>
+          <a:effectLst/>
+        </p:spPr>
+        <p:txBody>
+          <a:bodyPr rtlCol="0" anchor="ctr" lIns="10800" rIns="10800" tIns="0" bIns="0" wrap="square"/>
+          <a:lstStyle/>
+          <a:p>
+            <a:pPr marL="0" indent="0" algn="ctr">
+              <a:lnSpc>
+                <a:spcPct val="110000"/>
+              </a:lnSpc>
+              <a:spcBef>
+                <a:spcPts val="0"/>
+              </a:spcBef>
+              <a:spcAft>
+                <a:spcPts val="0"/>
+              </a:spcAft>
+              <a:buNone/>
+            </a:pPr>
+            <a:r>
+              <a:rPr lang="ko-KR" sz="1000" b="1" spc="-50" dirty="0">
+                <a:solidFill>
+                  <a:srgbClr val="FFFFFF"/>
+                </a:solidFill>
+                <a:latin typeface="Pretendard"/>
+                <a:ea typeface="Pretendard"/>
+              </a:rPr>
+              <a:t>안전경영</a:t>
+            </a:r>
+          </a:p>
+          <a:p>
+            <a:pPr marL="0" indent="0" algn="ctr">
+              <a:lnSpc>
+                <a:spcPct val="110000"/>
+              </a:lnSpc>
+              <a:spcBef>
+                <a:spcPts val="0"/>
+              </a:spcBef>
+              <a:spcAft>
+                <a:spcPts val="0"/>
+              </a:spcAft>
+              <a:buNone/>
+            </a:pPr>
+            <a:r>
+              <a:rPr lang="ko-KR" sz="1000" b="1" spc="-50" dirty="0">
+                <a:solidFill>
+                  <a:srgbClr val="FFFFFF"/>
+                </a:solidFill>
+                <a:latin typeface="Pretendard"/>
+                <a:ea typeface="Pretendard"/>
+              </a:rPr>
+              <a:t>위원회</a:t>
+            </a:r>
+          </a:p>
+        </p:txBody>
+      </p:sp>
+      <p:sp>
+        <p:nvSpPr>
+          <p:cNvPr id="23" name="소행 본문"/>
+          <p:cNvSpPr txBox="1"/>
+          <p:nvPr/>
+        </p:nvSpPr>
+        <p:spPr>
+          <a:xfrm>
+            <a:off x="5682783" y="2499934"/>
+            <a:ext cx="1296522" cy="703064"/>
+          </a:xfrm>
+          <a:prstGeom prst="rect">
+            <a:avLst/>
+          </a:prstGeom>
+          <a:noFill/>
+        </p:spPr>
+        <p:txBody>
+          <a:bodyPr wrap="square" lIns="43200" tIns="7200" rIns="21600" bIns="7200" anchor="ctr">
+            <a:noAutofit/>
+          </a:bodyPr>
+          <a:lstStyle/>
+          <a:p>
+            <a:pPr marL="118800" indent="-118800" algn="l">
+              <a:lnSpc>
+                <a:spcPct val="110000"/>
+              </a:lnSpc>
+              <a:spcBef>
+                <a:spcPts val="0"/>
+              </a:spcBef>
+              <a:spcAft>
+                <a:spcPts val="50"/>
+              </a:spcAft>
+              <a:buClr>
+                <a:srgbClr val="000359"/>
+              </a:buClr>
+              <a:buFont typeface="Pretendard"/>
+              <a:buChar char="•"/>
+            </a:pPr>
+            <a:r>
+              <a:rPr lang="ko-KR" sz="1000" spc="-50" dirty="0">
+                <a:solidFill>
+                  <a:srgbClr val="000359"/>
+                </a:solidFill>
+                <a:latin typeface="Pretendard"/>
+                <a:ea typeface="Pretendard"/>
+              </a:rPr>
+              <a:t>석면제거 등 안전일터 조성</a:t>
+            </a:r>
+          </a:p>
+          <a:p>
+            <a:pPr marL="118800" indent="-118800" algn="l">
+              <a:lnSpc>
+                <a:spcPct val="110000"/>
+              </a:lnSpc>
+              <a:spcBef>
+                <a:spcPts val="0"/>
+              </a:spcBef>
+              <a:spcAft>
+                <a:spcPts val="50"/>
+              </a:spcAft>
+              <a:buClr>
+                <a:srgbClr val="000359"/>
+              </a:buClr>
+              <a:buFont typeface="Pretendard"/>
+              <a:buChar char="•"/>
+            </a:pPr>
+            <a:r>
+              <a:rPr lang="ko-KR" sz="1000" spc="-50" dirty="0">
+                <a:solidFill>
+                  <a:srgbClr val="000359"/>
+                </a:solidFill>
+                <a:latin typeface="Pretendard"/>
+                <a:ea typeface="Pretendard"/>
+              </a:rPr>
+              <a:t>스트레스·정신건강 관리</a:t>
+            </a:r>
+          </a:p>
+        </p:txBody>
+      </p:sp>
+      <p:cxnSp>
+        <p:nvCxnSpPr>
+          <p:cNvPr id="24" name="Connector 23"/>
+          <p:cNvCxnSpPr/>
+          <p:nvPr/>
+        </p:nvCxnSpPr>
+        <p:spPr>
+          <a:xfrm>
+            <a:off x="5113043" y="1802348"/>
+            <a:ext cx="0" cy="1395172"/>
+          </a:xfrm>
+          <a:prstGeom prst="line">
+            <a:avLst/>
+          </a:prstGeom>
+          <a:ln w="9525">
+            <a:solidFill>
+              <a:srgbClr val="BDE0FF"/>
+            </a:solidFill>
+          </a:ln>
+        </p:spPr>
+      </p:cxnSp>
+      <p:sp>
+        <p:nvSpPr>
+          <p:cNvPr id="25" name="라벨 박스"/>
+          <p:cNvSpPr/>
+          <p:nvPr/>
+        </p:nvSpPr>
+        <p:spPr>
+          <a:xfrm>
+            <a:off x="723130" y="3301607"/>
+            <a:ext cx="6300000" cy="290348"/>
+          </a:xfrm>
+          <a:prstGeom prst="rect">
+            <a:avLst/>
+          </a:prstGeom>
+          <a:solidFill>
+            <a:srgbClr val="FFFFFF"/>
+          </a:solidFill>
+          <a:ln w="9525">
+            <a:solidFill>
+              <a:srgbClr val="008EFF"/>
+            </a:solidFill>
+          </a:ln>
+          <a:effectLst/>
+        </p:spPr>
+        <p:txBody>
+          <a:bodyPr rtlCol="0" anchor="ctr" lIns="0" rIns="0" tIns="0" bIns="0"/>
+          <a:lstStyle/>
+          <a:p>
+            <a:pPr algn="ctr"/>
+          </a:p>
+        </p:txBody>
+      </p:sp>
+      <p:sp>
+        <p:nvSpPr>
+          <p:cNvPr id="26" name="레일"/>
+          <p:cNvSpPr/>
+          <p:nvPr/>
+        </p:nvSpPr>
+        <p:spPr>
+          <a:xfrm>
+            <a:off x="734087" y="3312563"/>
+            <a:ext cx="591652" cy="268435"/>
+          </a:xfrm>
+          <a:prstGeom prst="rect">
+            <a:avLst/>
+          </a:prstGeom>
+          <a:pattFill prst="trellis">
+            <a:fgClr>
+              <a:srgbClr val="00BEC2"/>
+            </a:fgClr>
+            <a:bgClr>
+              <a:srgbClr val="00B0B4"/>
+            </a:bgClr>
+          </a:pattFill>
+          <a:ln>
+            <a:noFill/>
+          </a:ln>
+          <a:effectLst/>
+        </p:spPr>
+        <p:txBody>
+          <a:bodyPr rtlCol="0" anchor="ctr" lIns="10800" rIns="10800" tIns="0" bIns="0" wrap="square"/>
+          <a:lstStyle/>
+          <a:p>
+            <a:pPr marL="0" indent="0" algn="ctr">
+              <a:lnSpc>
+                <a:spcPct val="110000"/>
+              </a:lnSpc>
+              <a:spcBef>
+                <a:spcPts val="0"/>
+              </a:spcBef>
+              <a:spcAft>
+                <a:spcPts val="0"/>
+              </a:spcAft>
+              <a:buNone/>
+            </a:pPr>
+            <a:r>
+              <a:rPr lang="ko-KR" sz="1000" b="1" spc="-50" dirty="0">
+                <a:solidFill>
+                  <a:srgbClr val="FFFFFF"/>
+                </a:solidFill>
+                <a:latin typeface="Pretendard"/>
+                <a:ea typeface="Pretendard"/>
+              </a:rPr>
+              <a:t>추진방향</a:t>
+            </a:r>
+          </a:p>
+        </p:txBody>
+      </p:sp>
+      <p:sp>
+        <p:nvSpPr>
+          <p:cNvPr id="27" name="가운데 글"/>
+          <p:cNvSpPr txBox="1"/>
+          <p:nvPr/>
+        </p:nvSpPr>
+        <p:spPr>
+          <a:xfrm>
+            <a:off x="1358609" y="3318042"/>
+            <a:ext cx="1877217" cy="257478"/>
+          </a:xfrm>
+          <a:prstGeom prst="rect">
+            <a:avLst/>
+          </a:prstGeom>
+          <a:noFill/>
+        </p:spPr>
+        <p:txBody>
+          <a:bodyPr wrap="square" lIns="36000" tIns="10800" rIns="36000" bIns="10800" anchor="ctr">
+            <a:noAutofit/>
+          </a:bodyPr>
+          <a:lstStyle/>
+          <a:p>
+            <a:pPr marL="0" indent="0" algn="ctr">
+              <a:lnSpc>
+                <a:spcPct val="110000"/>
+              </a:lnSpc>
+              <a:spcBef>
+                <a:spcPts val="0"/>
+              </a:spcBef>
+              <a:spcAft>
+                <a:spcPts val="0"/>
+              </a:spcAft>
+              <a:buNone/>
+            </a:pPr>
+            <a:r>
+              <a:rPr lang="ko-KR" sz="1000" b="1" spc="-50" dirty="0">
+                <a:solidFill>
+                  <a:srgbClr val="000359"/>
+                </a:solidFill>
+                <a:latin typeface="Pretendard"/>
+                <a:ea typeface="Pretendard"/>
+              </a:rPr>
+              <a:t>교통직 처우개선</a:t>
+            </a:r>
+          </a:p>
+        </p:txBody>
+      </p:sp>
+      <p:sp>
+        <p:nvSpPr>
+          <p:cNvPr id="28" name="가운데 글"/>
+          <p:cNvSpPr txBox="1"/>
+          <p:nvPr/>
+        </p:nvSpPr>
+        <p:spPr>
+          <a:xfrm>
+            <a:off x="3235826" y="3318042"/>
+            <a:ext cx="1877217" cy="257478"/>
+          </a:xfrm>
+          <a:prstGeom prst="rect">
+            <a:avLst/>
+          </a:prstGeom>
+          <a:noFill/>
+        </p:spPr>
+        <p:txBody>
+          <a:bodyPr wrap="square" lIns="36000" tIns="10800" rIns="36000" bIns="10800" anchor="ctr">
+            <a:noAutofit/>
+          </a:bodyPr>
+          <a:lstStyle/>
+          <a:p>
+            <a:pPr marL="0" indent="0" algn="ctr">
+              <a:lnSpc>
+                <a:spcPct val="110000"/>
+              </a:lnSpc>
+              <a:spcBef>
+                <a:spcPts val="0"/>
+              </a:spcBef>
+              <a:spcAft>
+                <a:spcPts val="0"/>
+              </a:spcAft>
+              <a:buNone/>
+            </a:pPr>
+            <a:r>
+              <a:rPr lang="ko-KR" sz="1000" b="1" spc="-50" dirty="0">
+                <a:solidFill>
+                  <a:srgbClr val="000359"/>
+                </a:solidFill>
+                <a:latin typeface="Pretendard"/>
+                <a:ea typeface="Pretendard"/>
+              </a:rPr>
+              <a:t>실무직 처우개선</a:t>
+            </a:r>
+          </a:p>
+        </p:txBody>
+      </p:sp>
+      <p:cxnSp>
+        <p:nvCxnSpPr>
+          <p:cNvPr id="29" name="Connector 28"/>
+          <p:cNvCxnSpPr/>
+          <p:nvPr/>
+        </p:nvCxnSpPr>
+        <p:spPr>
+          <a:xfrm>
+            <a:off x="3235826" y="3356390"/>
+            <a:ext cx="0" cy="180782"/>
+          </a:xfrm>
+          <a:prstGeom prst="line">
+            <a:avLst/>
+          </a:prstGeom>
+          <a:ln w="6350">
+            <a:solidFill>
+              <a:srgbClr val="BDE0FF"/>
+            </a:solidFill>
+          </a:ln>
+        </p:spPr>
+      </p:cxnSp>
+      <p:sp>
+        <p:nvSpPr>
+          <p:cNvPr id="30" name="가운데 글"/>
+          <p:cNvSpPr txBox="1"/>
+          <p:nvPr/>
+        </p:nvSpPr>
+        <p:spPr>
+          <a:xfrm>
+            <a:off x="5113043" y="3318042"/>
+            <a:ext cx="1877217" cy="257478"/>
+          </a:xfrm>
+          <a:prstGeom prst="rect">
+            <a:avLst/>
+          </a:prstGeom>
+          <a:noFill/>
+        </p:spPr>
+        <p:txBody>
+          <a:bodyPr wrap="square" lIns="36000" tIns="10800" rIns="36000" bIns="10800" anchor="ctr">
+            <a:noAutofit/>
+          </a:bodyPr>
+          <a:lstStyle/>
+          <a:p>
+            <a:pPr marL="0" indent="0" algn="ctr">
+              <a:lnSpc>
+                <a:spcPct val="110000"/>
+              </a:lnSpc>
+              <a:spcBef>
+                <a:spcPts val="0"/>
+              </a:spcBef>
+              <a:spcAft>
+                <a:spcPts val="0"/>
+              </a:spcAft>
+              <a:buNone/>
+            </a:pPr>
+            <a:r>
+              <a:rPr lang="ko-KR" sz="1000" b="1" spc="-50" dirty="0">
+                <a:solidFill>
+                  <a:srgbClr val="000359"/>
+                </a:solidFill>
+                <a:latin typeface="Pretendard"/>
+                <a:ea typeface="Pretendard"/>
+              </a:rPr>
+              <a:t>복리후생 향상</a:t>
+            </a:r>
+          </a:p>
+        </p:txBody>
+      </p:sp>
+      <p:cxnSp>
+        <p:nvCxnSpPr>
+          <p:cNvPr id="31" name="Connector 30"/>
+          <p:cNvCxnSpPr/>
+          <p:nvPr/>
+        </p:nvCxnSpPr>
+        <p:spPr>
+          <a:xfrm>
+            <a:off x="5113043" y="3356390"/>
+            <a:ext cx="0" cy="180782"/>
+          </a:xfrm>
+          <a:prstGeom prst="line">
+            <a:avLst/>
+          </a:prstGeom>
+          <a:ln w="6350">
+            <a:solidFill>
+              <a:srgbClr val="BDE0FF"/>
+            </a:solidFill>
+          </a:ln>
+        </p:spPr>
+      </p:cxnSp>
+      <p:sp>
+        <p:nvSpPr>
+          <p:cNvPr id="32" name="라벨 박스"/>
+          <p:cNvSpPr/>
+          <p:nvPr/>
+        </p:nvSpPr>
+        <p:spPr>
+          <a:xfrm>
+            <a:off x="723130" y="3646737"/>
+            <a:ext cx="6300000" cy="643711"/>
+          </a:xfrm>
+          <a:prstGeom prst="rect">
+            <a:avLst/>
+          </a:prstGeom>
+          <a:solidFill>
+            <a:srgbClr val="FFFFFF"/>
+          </a:solidFill>
+          <a:ln w="9525">
+            <a:solidFill>
+              <a:srgbClr val="008EFF"/>
+            </a:solidFill>
+          </a:ln>
+          <a:effectLst/>
+        </p:spPr>
+        <p:txBody>
+          <a:bodyPr rtlCol="0" anchor="ctr" lIns="0" rIns="0" tIns="0" bIns="0"/>
+          <a:lstStyle/>
+          <a:p>
+            <a:pPr algn="ctr"/>
+          </a:p>
+        </p:txBody>
+      </p:sp>
+      <p:sp>
+        <p:nvSpPr>
+          <p:cNvPr id="33" name="레일"/>
+          <p:cNvSpPr/>
+          <p:nvPr/>
+        </p:nvSpPr>
+        <p:spPr>
+          <a:xfrm>
+            <a:off x="734087" y="3657694"/>
+            <a:ext cx="591652" cy="621798"/>
+          </a:xfrm>
+          <a:prstGeom prst="rect">
+            <a:avLst/>
+          </a:prstGeom>
+          <a:pattFill prst="trellis">
+            <a:fgClr>
+              <a:srgbClr val="00BEC2"/>
+            </a:fgClr>
+            <a:bgClr>
+              <a:srgbClr val="00B0B4"/>
+            </a:bgClr>
+          </a:pattFill>
+          <a:ln>
+            <a:noFill/>
+          </a:ln>
+          <a:effectLst/>
+        </p:spPr>
+        <p:txBody>
+          <a:bodyPr rtlCol="0" anchor="ctr" lIns="10800" rIns="10800" tIns="0" bIns="0" wrap="square"/>
+          <a:lstStyle/>
+          <a:p>
+            <a:pPr marL="0" indent="0" algn="ctr">
+              <a:lnSpc>
+                <a:spcPct val="110000"/>
+              </a:lnSpc>
+              <a:spcBef>
+                <a:spcPts val="0"/>
+              </a:spcBef>
+              <a:spcAft>
+                <a:spcPts val="0"/>
+              </a:spcAft>
+              <a:buNone/>
+            </a:pPr>
+            <a:r>
+              <a:rPr lang="ko-KR" sz="1000" b="1" spc="-50" dirty="0">
+                <a:solidFill>
+                  <a:srgbClr val="FFFFFF"/>
+                </a:solidFill>
+                <a:latin typeface="Pretendard"/>
+                <a:ea typeface="Pretendard"/>
+              </a:rPr>
+              <a:t>추진과제</a:t>
+            </a:r>
+          </a:p>
+        </p:txBody>
+      </p:sp>
+      <p:sp>
+        <p:nvSpPr>
+          <p:cNvPr id="34" name="칸 본문"/>
+          <p:cNvSpPr txBox="1"/>
+          <p:nvPr/>
+        </p:nvSpPr>
+        <p:spPr>
+          <a:xfrm>
+            <a:off x="1369565" y="3663172"/>
+            <a:ext cx="1855304" cy="610842"/>
+          </a:xfrm>
+          <a:prstGeom prst="rect">
+            <a:avLst/>
+          </a:prstGeom>
+          <a:noFill/>
+        </p:spPr>
+        <p:txBody>
+          <a:bodyPr wrap="square" lIns="50400" tIns="7200" rIns="21600" bIns="7200" anchor="ctr">
+            <a:noAutofit/>
+          </a:bodyPr>
+          <a:lstStyle/>
+          <a:p>
+            <a:pPr marL="118800" indent="-118800" algn="l">
+              <a:lnSpc>
+                <a:spcPct val="110000"/>
+              </a:lnSpc>
+              <a:spcBef>
+                <a:spcPts val="0"/>
+              </a:spcBef>
+              <a:spcAft>
+                <a:spcPts val="50"/>
+              </a:spcAft>
+              <a:buClr>
+                <a:srgbClr val="000359"/>
+              </a:buClr>
+              <a:buFont typeface="Pretendard"/>
+              <a:buChar char="•"/>
+            </a:pPr>
+            <a:r>
+              <a:rPr lang="ko-KR" sz="1000" spc="-50" dirty="0">
+                <a:solidFill>
+                  <a:srgbClr val="000359"/>
+                </a:solidFill>
+                <a:latin typeface="Pretendard"/>
+                <a:ea typeface="Pretendard"/>
+              </a:rPr>
+              <a:t>교통직 처우개선 단체교섭</a:t>
+            </a:r>
+          </a:p>
+          <a:p>
+            <a:pPr marL="118800" indent="-118800" algn="l">
+              <a:lnSpc>
+                <a:spcPct val="110000"/>
+              </a:lnSpc>
+              <a:spcBef>
+                <a:spcPts val="0"/>
+              </a:spcBef>
+              <a:spcAft>
+                <a:spcPts val="50"/>
+              </a:spcAft>
+              <a:buClr>
+                <a:srgbClr val="000359"/>
+              </a:buClr>
+              <a:buFont typeface="Pretendard"/>
+              <a:buChar char="•"/>
+            </a:pPr>
+            <a:r>
+              <a:rPr lang="ko-KR" sz="1000" spc="-50" dirty="0">
+                <a:solidFill>
+                  <a:srgbClr val="000359"/>
+                </a:solidFill>
+                <a:latin typeface="Pretendard"/>
+                <a:ea typeface="Pretendard"/>
+              </a:rPr>
+              <a:t>유관부처 협의</a:t>
+            </a:r>
+          </a:p>
+          <a:p>
+            <a:pPr marL="118800" indent="-118800" algn="l">
+              <a:lnSpc>
+                <a:spcPct val="110000"/>
+              </a:lnSpc>
+              <a:spcBef>
+                <a:spcPts val="0"/>
+              </a:spcBef>
+              <a:spcAft>
+                <a:spcPts val="50"/>
+              </a:spcAft>
+              <a:buClr>
+                <a:srgbClr val="000359"/>
+              </a:buClr>
+              <a:buFont typeface="Pretendard"/>
+              <a:buChar char="•"/>
+            </a:pPr>
+            <a:r>
+              <a:rPr lang="ko-KR" sz="1000" spc="-50" dirty="0">
+                <a:solidFill>
+                  <a:srgbClr val="000359"/>
+                </a:solidFill>
+                <a:latin typeface="Pretendard"/>
+                <a:ea typeface="Pretendard"/>
+              </a:rPr>
+              <a:t>처우개선 방안 도출·노사 합의</a:t>
+            </a:r>
+          </a:p>
+        </p:txBody>
+      </p:sp>
+      <p:sp>
+        <p:nvSpPr>
+          <p:cNvPr id="35" name="칸 본문"/>
+          <p:cNvSpPr txBox="1"/>
+          <p:nvPr/>
+        </p:nvSpPr>
+        <p:spPr>
+          <a:xfrm>
+            <a:off x="3246783" y="3663172"/>
+            <a:ext cx="1855304" cy="610842"/>
+          </a:xfrm>
+          <a:prstGeom prst="rect">
+            <a:avLst/>
+          </a:prstGeom>
+          <a:noFill/>
+        </p:spPr>
+        <p:txBody>
+          <a:bodyPr wrap="square" lIns="50400" tIns="7200" rIns="21600" bIns="7200" anchor="ctr">
+            <a:noAutofit/>
+          </a:bodyPr>
+          <a:lstStyle/>
+          <a:p>
+            <a:pPr marL="118800" indent="-118800" algn="l">
+              <a:lnSpc>
+                <a:spcPct val="110000"/>
+              </a:lnSpc>
+              <a:spcBef>
+                <a:spcPts val="0"/>
+              </a:spcBef>
+              <a:spcAft>
+                <a:spcPts val="50"/>
+              </a:spcAft>
+              <a:buClr>
+                <a:srgbClr val="000359"/>
+              </a:buClr>
+              <a:buFont typeface="Pretendard"/>
+              <a:buChar char="•"/>
+            </a:pPr>
+            <a:r>
+              <a:rPr lang="ko-KR" sz="1000" spc="-50" dirty="0">
+                <a:solidFill>
+                  <a:srgbClr val="000359"/>
+                </a:solidFill>
+                <a:latin typeface="Pretendard"/>
+                <a:ea typeface="Pretendard"/>
+              </a:rPr>
+              <a:t>근무체계 분석</a:t>
+            </a:r>
+          </a:p>
+          <a:p>
+            <a:pPr marL="118800" indent="-118800" algn="l">
+              <a:lnSpc>
+                <a:spcPct val="110000"/>
+              </a:lnSpc>
+              <a:spcBef>
+                <a:spcPts val="0"/>
+              </a:spcBef>
+              <a:spcAft>
+                <a:spcPts val="50"/>
+              </a:spcAft>
+              <a:buClr>
+                <a:srgbClr val="000359"/>
+              </a:buClr>
+              <a:buFont typeface="Pretendard"/>
+              <a:buChar char="•"/>
+            </a:pPr>
+            <a:r>
+              <a:rPr lang="ko-KR" sz="1000" spc="-50" dirty="0">
+                <a:solidFill>
+                  <a:srgbClr val="000359"/>
+                </a:solidFill>
+                <a:latin typeface="Pretendard"/>
+                <a:ea typeface="Pretendard"/>
+              </a:rPr>
+              <a:t>개선안·임금저하 방지대책</a:t>
+            </a:r>
+          </a:p>
+          <a:p>
+            <a:pPr marL="118800" indent="-118800" algn="l">
+              <a:lnSpc>
+                <a:spcPct val="110000"/>
+              </a:lnSpc>
+              <a:spcBef>
+                <a:spcPts val="0"/>
+              </a:spcBef>
+              <a:spcAft>
+                <a:spcPts val="50"/>
+              </a:spcAft>
+              <a:buClr>
+                <a:srgbClr val="000359"/>
+              </a:buClr>
+              <a:buFont typeface="Pretendard"/>
+              <a:buChar char="•"/>
+            </a:pPr>
+            <a:r>
+              <a:rPr lang="ko-KR" sz="1000" spc="-50" dirty="0">
+                <a:solidFill>
+                  <a:srgbClr val="000359"/>
+                </a:solidFill>
+                <a:latin typeface="Pretendard"/>
+                <a:ea typeface="Pretendard"/>
+              </a:rPr>
+              <a:t>처우개선 방안 노사합의</a:t>
+            </a:r>
+          </a:p>
+        </p:txBody>
+      </p:sp>
+      <p:cxnSp>
+        <p:nvCxnSpPr>
+          <p:cNvPr id="36" name="Connector 35"/>
+          <p:cNvCxnSpPr/>
+          <p:nvPr/>
+        </p:nvCxnSpPr>
+        <p:spPr>
+          <a:xfrm>
+            <a:off x="3235826" y="3696042"/>
+            <a:ext cx="0" cy="545102"/>
+          </a:xfrm>
+          <a:prstGeom prst="line">
+            <a:avLst/>
+          </a:prstGeom>
+          <a:ln w="9525">
+            <a:solidFill>
+              <a:srgbClr val="BDE0FF"/>
+            </a:solidFill>
+          </a:ln>
+        </p:spPr>
+      </p:cxnSp>
+      <p:sp>
+        <p:nvSpPr>
+          <p:cNvPr id="37" name="칸 본문"/>
+          <p:cNvSpPr txBox="1"/>
+          <p:nvPr/>
+        </p:nvSpPr>
+        <p:spPr>
+          <a:xfrm>
+            <a:off x="5124000" y="3663172"/>
+            <a:ext cx="1855304" cy="610842"/>
+          </a:xfrm>
+          <a:prstGeom prst="rect">
+            <a:avLst/>
+          </a:prstGeom>
+          <a:noFill/>
+        </p:spPr>
+        <p:txBody>
+          <a:bodyPr wrap="square" lIns="50400" tIns="7200" rIns="21600" bIns="7200" anchor="ctr">
+            <a:noAutofit/>
+          </a:bodyPr>
+          <a:lstStyle/>
+          <a:p>
+            <a:pPr marL="118800" indent="-118800" algn="l">
+              <a:lnSpc>
+                <a:spcPct val="110000"/>
+              </a:lnSpc>
+              <a:spcBef>
+                <a:spcPts val="0"/>
+              </a:spcBef>
+              <a:spcAft>
+                <a:spcPts val="50"/>
+              </a:spcAft>
+              <a:buClr>
+                <a:srgbClr val="000359"/>
+              </a:buClr>
+              <a:buFont typeface="Pretendard"/>
+              <a:buChar char="•"/>
+            </a:pPr>
+            <a:r>
+              <a:rPr lang="ko-KR" sz="1000" spc="-50" dirty="0">
+                <a:solidFill>
+                  <a:srgbClr val="000359"/>
+                </a:solidFill>
+                <a:latin typeface="Pretendard"/>
+                <a:ea typeface="Pretendard"/>
+              </a:rPr>
+              <a:t>직원니즈 기반 복리후생 확대</a:t>
+            </a:r>
+          </a:p>
+          <a:p>
+            <a:pPr marL="118800" indent="-118800" algn="l">
+              <a:lnSpc>
+                <a:spcPct val="110000"/>
+              </a:lnSpc>
+              <a:spcBef>
+                <a:spcPts val="0"/>
+              </a:spcBef>
+              <a:spcAft>
+                <a:spcPts val="50"/>
+              </a:spcAft>
+              <a:buClr>
+                <a:srgbClr val="000359"/>
+              </a:buClr>
+              <a:buFont typeface="Pretendard"/>
+              <a:buChar char="•"/>
+            </a:pPr>
+            <a:r>
+              <a:rPr lang="ko-KR" sz="1000" spc="-50" dirty="0">
+                <a:solidFill>
+                  <a:srgbClr val="000359"/>
+                </a:solidFill>
+                <a:latin typeface="Pretendard"/>
+                <a:ea typeface="Pretendard"/>
+              </a:rPr>
+              <a:t>가족친화경영 확대·제도 강화</a:t>
+            </a:r>
+          </a:p>
+          <a:p>
+            <a:pPr marL="118800" indent="-118800" algn="l">
+              <a:lnSpc>
+                <a:spcPct val="110000"/>
+              </a:lnSpc>
+              <a:spcBef>
+                <a:spcPts val="0"/>
+              </a:spcBef>
+              <a:spcAft>
+                <a:spcPts val="50"/>
+              </a:spcAft>
+              <a:buClr>
+                <a:srgbClr val="000359"/>
+              </a:buClr>
+              <a:buFont typeface="Pretendard"/>
+              <a:buChar char="•"/>
+            </a:pPr>
+            <a:r>
+              <a:rPr lang="ko-KR" sz="1000" spc="-50" dirty="0">
+                <a:solidFill>
+                  <a:srgbClr val="000359"/>
+                </a:solidFill>
+                <a:latin typeface="Pretendard"/>
+                <a:ea typeface="Pretendard"/>
+              </a:rPr>
+              <a:t>안전보건 지원 강화</a:t>
+            </a:r>
+          </a:p>
+        </p:txBody>
+      </p:sp>
+      <p:cxnSp>
+        <p:nvCxnSpPr>
+          <p:cNvPr id="38" name="Connector 37"/>
+          <p:cNvCxnSpPr/>
+          <p:nvPr/>
+        </p:nvCxnSpPr>
+        <p:spPr>
+          <a:xfrm>
+            <a:off x="5113043" y="3696042"/>
+            <a:ext cx="0" cy="545102"/>
+          </a:xfrm>
+          <a:prstGeom prst="line">
+            <a:avLst/>
+          </a:prstGeom>
+          <a:ln w="9525">
+            <a:solidFill>
+              <a:srgbClr val="BDE0FF"/>
+            </a:solidFill>
+          </a:ln>
+        </p:spPr>
+      </p:cxnSp>
+      <p:sp>
+        <p:nvSpPr>
+          <p:cNvPr id="39" name="형광 밑줄"/>
+          <p:cNvSpPr/>
+          <p:nvPr/>
+        </p:nvSpPr>
+        <p:spPr>
+          <a:xfrm>
+            <a:off x="723130" y="4564362"/>
+            <a:ext cx="3673078" cy="43826"/>
+          </a:xfrm>
+          <a:prstGeom prst="rect">
+            <a:avLst/>
+          </a:prstGeom>
+          <a:solidFill>
+            <a:srgbClr val="29FFBD"/>
+          </a:solidFill>
+          <a:ln>
+            <a:noFill/>
+          </a:ln>
+          <a:effectLst/>
+        </p:spPr>
+        <p:txBody>
+          <a:bodyPr rtlCol="0" anchor="ctr" lIns="0" rIns="0" tIns="0" bIns="0"/>
+          <a:lstStyle/>
+          <a:p>
+            <a:pPr algn="ctr"/>
+          </a:p>
+        </p:txBody>
+      </p:sp>
+      <p:sp>
+        <p:nvSpPr>
+          <p:cNvPr id="40" name="소제목"/>
+          <p:cNvSpPr txBox="1"/>
+          <p:nvPr/>
+        </p:nvSpPr>
+        <p:spPr>
+          <a:xfrm>
+            <a:off x="723130" y="4410970"/>
+            <a:ext cx="6300000" cy="241043"/>
+          </a:xfrm>
+          <a:prstGeom prst="rect">
+            <a:avLst/>
+          </a:prstGeom>
+          <a:noFill/>
+        </p:spPr>
+        <p:txBody>
+          <a:bodyPr wrap="square" lIns="0" tIns="0" rIns="0" bIns="0" anchor="ctr">
+            <a:noAutofit/>
+          </a:bodyPr>
+          <a:lstStyle/>
+          <a:p>
+            <a:pPr marL="0" indent="0" algn="l">
+              <a:lnSpc>
+                <a:spcPct val="110000"/>
+              </a:lnSpc>
+              <a:spcBef>
+                <a:spcPts val="0"/>
+              </a:spcBef>
+              <a:spcAft>
+                <a:spcPts val="0"/>
+              </a:spcAft>
+              <a:buNone/>
+            </a:pPr>
+            <a:r>
+              <a:rPr lang="ko-KR" sz="1200" b="1" spc="-60" dirty="0">
+                <a:solidFill>
+                  <a:srgbClr val="000359"/>
+                </a:solidFill>
+                <a:latin typeface="Pretendard"/>
+                <a:ea typeface="Pretendard"/>
+              </a:rPr>
+              <a:t>나. 열린 소통의 결실, 교통직 처우개선 단체교섭 노사합의 체결</a:t>
+            </a:r>
+          </a:p>
+        </p:txBody>
+      </p:sp>
+      <p:sp>
+        <p:nvSpPr>
+          <p:cNvPr id="41" name="태그칩"/>
+          <p:cNvSpPr/>
+          <p:nvPr/>
+        </p:nvSpPr>
+        <p:spPr>
+          <a:xfrm>
+            <a:off x="4494817" y="4443840"/>
+            <a:ext cx="327325" cy="175304"/>
+          </a:xfrm>
+          <a:prstGeom prst="rect">
+            <a:avLst/>
+          </a:prstGeom>
+          <a:solidFill>
+            <a:srgbClr val="0051BC"/>
+          </a:solidFill>
+          <a:ln>
+            <a:noFill/>
+          </a:ln>
+          <a:effectLst/>
+        </p:spPr>
+        <p:txBody>
+          <a:bodyPr rtlCol="0" anchor="ctr" lIns="10800" rIns="10800" tIns="0" bIns="0" wrap="square"/>
+          <a:lstStyle/>
+          <a:p>
+            <a:pPr marL="0" indent="0" algn="ctr">
+              <a:lnSpc>
+                <a:spcPct val="110000"/>
+              </a:lnSpc>
+              <a:spcBef>
+                <a:spcPts val="0"/>
+              </a:spcBef>
+              <a:spcAft>
+                <a:spcPts val="0"/>
+              </a:spcAft>
+              <a:buNone/>
+            </a:pPr>
+            <a:r>
+              <a:rPr lang="ko-KR" sz="1000" b="1" spc="-50" dirty="0">
+                <a:solidFill>
+                  <a:srgbClr val="FFFFFF"/>
+                </a:solidFill>
+                <a:latin typeface="Pretendard"/>
+                <a:ea typeface="Pretendard"/>
+              </a:rPr>
+              <a:t>B.P</a:t>
+            </a:r>
+          </a:p>
+        </p:txBody>
+      </p:sp>
+      <p:sp>
+        <p:nvSpPr>
+          <p:cNvPr id="42" name="표 외곽"/>
+          <p:cNvSpPr/>
+          <p:nvPr/>
+        </p:nvSpPr>
+        <p:spPr>
+          <a:xfrm>
+            <a:off x="723130" y="4695840"/>
+            <a:ext cx="5297478" cy="2245210"/>
+          </a:xfrm>
+          <a:prstGeom prst="rect">
+            <a:avLst/>
+          </a:prstGeom>
+          <a:solidFill>
+            <a:srgbClr val="FFFFFF"/>
+          </a:solidFill>
+          <a:ln w="9525">
+            <a:solidFill>
+              <a:srgbClr val="008EFF"/>
+            </a:solidFill>
+          </a:ln>
+          <a:effectLst/>
+        </p:spPr>
+        <p:txBody>
+          <a:bodyPr rtlCol="0" anchor="ctr" lIns="0" rIns="0" tIns="0" bIns="0"/>
+          <a:lstStyle/>
+          <a:p>
+            <a:pPr algn="ctr"/>
+          </a:p>
+        </p:txBody>
+      </p:sp>
+      <p:sp>
+        <p:nvSpPr>
+          <p:cNvPr id="43" name="레일"/>
+          <p:cNvSpPr/>
+          <p:nvPr/>
+        </p:nvSpPr>
+        <p:spPr>
+          <a:xfrm>
+            <a:off x="734087" y="4712275"/>
+            <a:ext cx="580696" cy="666532"/>
+          </a:xfrm>
+          <a:prstGeom prst="rect">
+            <a:avLst/>
+          </a:prstGeom>
+          <a:pattFill prst="trellis">
+            <a:fgClr>
+              <a:srgbClr val="0990FF"/>
+            </a:fgClr>
+            <a:bgClr>
+              <a:srgbClr val="0080EA"/>
+            </a:bgClr>
+          </a:pattFill>
+          <a:ln>
+            <a:noFill/>
+          </a:ln>
+          <a:effectLst/>
+        </p:spPr>
+        <p:txBody>
+          <a:bodyPr rtlCol="0" anchor="ctr" lIns="10800" rIns="10800" tIns="0" bIns="0" wrap="square"/>
+          <a:lstStyle/>
+          <a:p>
+            <a:pPr marL="0" indent="0" algn="ctr">
+              <a:lnSpc>
+                <a:spcPct val="110000"/>
+              </a:lnSpc>
+              <a:spcBef>
+                <a:spcPts val="0"/>
+              </a:spcBef>
+              <a:spcAft>
+                <a:spcPts val="0"/>
+              </a:spcAft>
+              <a:buNone/>
+            </a:pPr>
+            <a:r>
+              <a:rPr lang="ko-KR" sz="1000" b="1" spc="-50" dirty="0">
+                <a:solidFill>
+                  <a:srgbClr val="FFFFFF"/>
+                </a:solidFill>
+                <a:latin typeface="Pretendard"/>
+                <a:ea typeface="Pretendard"/>
+              </a:rPr>
+              <a:t>이해</a:t>
+            </a:r>
+          </a:p>
+          <a:p>
+            <a:pPr marL="0" indent="0" algn="ctr">
+              <a:lnSpc>
+                <a:spcPct val="110000"/>
+              </a:lnSpc>
+              <a:spcBef>
+                <a:spcPts val="0"/>
+              </a:spcBef>
+              <a:spcAft>
+                <a:spcPts val="0"/>
+              </a:spcAft>
+              <a:buNone/>
+            </a:pPr>
+            <a:r>
+              <a:rPr lang="ko-KR" sz="1000" b="1" spc="-50" dirty="0">
+                <a:solidFill>
+                  <a:srgbClr val="FFFFFF"/>
+                </a:solidFill>
+                <a:latin typeface="Pretendard"/>
+                <a:ea typeface="Pretendard"/>
+              </a:rPr>
+              <a:t>관계</a:t>
+            </a:r>
+          </a:p>
+        </p:txBody>
+      </p:sp>
+      <p:sp>
+        <p:nvSpPr>
+          <p:cNvPr id="44" name="머리칸"/>
+          <p:cNvSpPr/>
+          <p:nvPr/>
+        </p:nvSpPr>
+        <p:spPr>
+          <a:xfrm>
+            <a:off x="1347652" y="4734188"/>
+            <a:ext cx="2306348" cy="230087"/>
+          </a:xfrm>
+          <a:prstGeom prst="rect">
+            <a:avLst/>
+          </a:prstGeom>
+          <a:solidFill>
+            <a:srgbClr val="DEEEFF"/>
+          </a:solidFill>
+          <a:ln>
+            <a:noFill/>
+          </a:ln>
+          <a:effectLst/>
+        </p:spPr>
+        <p:txBody>
+          <a:bodyPr rtlCol="0" anchor="ctr" lIns="21600" rIns="21600" tIns="3600" bIns="3600" wrap="square"/>
+          <a:lstStyle/>
+          <a:p>
+            <a:pPr marL="0" indent="0" algn="ctr">
+              <a:lnSpc>
+                <a:spcPct val="110000"/>
+              </a:lnSpc>
+              <a:spcBef>
+                <a:spcPts val="0"/>
+              </a:spcBef>
+              <a:spcAft>
+                <a:spcPts val="0"/>
+              </a:spcAft>
+              <a:buNone/>
+            </a:pPr>
+            <a:r>
+              <a:rPr lang="ko-KR" sz="1000" b="1" spc="-50" dirty="0">
+                <a:solidFill>
+                  <a:srgbClr val="000359"/>
+                </a:solidFill>
+                <a:latin typeface="Pretendard"/>
+                <a:ea typeface="Pretendard"/>
+              </a:rPr>
+              <a:t>공 단</a:t>
+            </a:r>
+          </a:p>
+        </p:txBody>
+      </p:sp>
+      <p:sp>
+        <p:nvSpPr>
+          <p:cNvPr id="45" name="머리칸"/>
+          <p:cNvSpPr/>
+          <p:nvPr/>
+        </p:nvSpPr>
+        <p:spPr>
+          <a:xfrm>
+            <a:off x="3670435" y="4734188"/>
+            <a:ext cx="2306348" cy="230087"/>
+          </a:xfrm>
+          <a:prstGeom prst="rect">
+            <a:avLst/>
+          </a:prstGeom>
+          <a:solidFill>
+            <a:srgbClr val="DEEEFF"/>
+          </a:solidFill>
+          <a:ln>
+            <a:noFill/>
+          </a:ln>
+          <a:effectLst/>
+        </p:spPr>
+        <p:txBody>
+          <a:bodyPr rtlCol="0" anchor="ctr" lIns="21600" rIns="21600" tIns="3600" bIns="3600" wrap="square"/>
+          <a:lstStyle/>
+          <a:p>
+            <a:pPr marL="0" indent="0" algn="ctr">
+              <a:lnSpc>
+                <a:spcPct val="110000"/>
+              </a:lnSpc>
+              <a:spcBef>
+                <a:spcPts val="0"/>
+              </a:spcBef>
+              <a:spcAft>
+                <a:spcPts val="0"/>
+              </a:spcAft>
+              <a:buNone/>
+            </a:pPr>
+            <a:r>
+              <a:rPr lang="ko-KR" sz="1000" b="1" spc="-50" dirty="0">
+                <a:solidFill>
+                  <a:srgbClr val="000359"/>
+                </a:solidFill>
+                <a:latin typeface="Pretendard"/>
+                <a:ea typeface="Pretendard"/>
+              </a:rPr>
+              <a:t>노동조합</a:t>
+            </a:r>
+          </a:p>
+        </p:txBody>
+      </p:sp>
+      <p:sp>
+        <p:nvSpPr>
+          <p:cNvPr id="46" name="칸 본문"/>
+          <p:cNvSpPr txBox="1"/>
+          <p:nvPr/>
+        </p:nvSpPr>
+        <p:spPr>
+          <a:xfrm>
+            <a:off x="1358609" y="4975231"/>
+            <a:ext cx="2300870" cy="381663"/>
+          </a:xfrm>
+          <a:prstGeom prst="rect">
+            <a:avLst/>
+          </a:prstGeom>
+          <a:noFill/>
+        </p:spPr>
+        <p:txBody>
+          <a:bodyPr wrap="square" lIns="50400" tIns="7200" rIns="21600" bIns="7200" anchor="ctr">
+            <a:noAutofit/>
+          </a:bodyPr>
+          <a:lstStyle/>
+          <a:p>
+            <a:pPr marL="118800" indent="-118800" algn="l">
+              <a:lnSpc>
+                <a:spcPct val="110000"/>
+              </a:lnSpc>
+              <a:spcBef>
+                <a:spcPts val="0"/>
+              </a:spcBef>
+              <a:spcAft>
+                <a:spcPts val="50"/>
+              </a:spcAft>
+              <a:buClr>
+                <a:srgbClr val="000359"/>
+              </a:buClr>
+              <a:buFont typeface="Pretendard"/>
+              <a:buChar char="•"/>
+            </a:pPr>
+            <a:r>
+              <a:rPr lang="ko-KR" sz="1000" spc="-50" dirty="0">
+                <a:solidFill>
+                  <a:srgbClr val="000359"/>
+                </a:solidFill>
+                <a:latin typeface="Pretendard"/>
+                <a:ea typeface="Pretendard"/>
+              </a:rPr>
+              <a:t>재원 부족 등 교통직 처우개선을 위한 중장기적 검토와 추진 필요</a:t>
+            </a:r>
+          </a:p>
+        </p:txBody>
+      </p:sp>
+      <p:sp>
+        <p:nvSpPr>
+          <p:cNvPr id="47" name="칸 본문"/>
+          <p:cNvSpPr txBox="1"/>
+          <p:nvPr/>
+        </p:nvSpPr>
+        <p:spPr>
+          <a:xfrm>
+            <a:off x="3681391" y="4975231"/>
+            <a:ext cx="2300870" cy="381663"/>
+          </a:xfrm>
+          <a:prstGeom prst="rect">
+            <a:avLst/>
+          </a:prstGeom>
+          <a:noFill/>
+        </p:spPr>
+        <p:txBody>
+          <a:bodyPr wrap="square" lIns="50400" tIns="7200" rIns="21600" bIns="7200" anchor="ctr">
+            <a:noAutofit/>
+          </a:bodyPr>
+          <a:lstStyle/>
+          <a:p>
+            <a:pPr marL="118800" indent="-118800" algn="l">
+              <a:lnSpc>
+                <a:spcPct val="110000"/>
+              </a:lnSpc>
+              <a:spcBef>
+                <a:spcPts val="0"/>
+              </a:spcBef>
+              <a:spcAft>
+                <a:spcPts val="50"/>
+              </a:spcAft>
+              <a:buClr>
+                <a:srgbClr val="000359"/>
+              </a:buClr>
+              <a:buFont typeface="Pretendard"/>
+              <a:buChar char="•"/>
+            </a:pPr>
+            <a:r>
+              <a:rPr lang="ko-KR" sz="1000" spc="-50" dirty="0">
+                <a:solidFill>
+                  <a:srgbClr val="000359"/>
+                </a:solidFill>
+                <a:latin typeface="Pretendard"/>
+                <a:ea typeface="Pretendard"/>
+              </a:rPr>
+              <a:t>교통직과 일반직의 차별적 요소 해소를 위한 적극적·신속한 대응 필요</a:t>
+            </a:r>
+          </a:p>
+        </p:txBody>
+      </p:sp>
+      <p:cxnSp>
+        <p:nvCxnSpPr>
+          <p:cNvPr id="48" name="Connector 47"/>
+          <p:cNvCxnSpPr/>
+          <p:nvPr/>
+        </p:nvCxnSpPr>
+        <p:spPr>
+          <a:xfrm>
+            <a:off x="3670435" y="5008101"/>
+            <a:ext cx="0" cy="315923"/>
+          </a:xfrm>
+          <a:prstGeom prst="line">
+            <a:avLst/>
+          </a:prstGeom>
+          <a:ln w="9525">
+            <a:solidFill>
+              <a:srgbClr val="BDE0FF"/>
+            </a:solidFill>
+          </a:ln>
+        </p:spPr>
+      </p:cxnSp>
+      <p:sp>
+        <p:nvSpPr>
+          <p:cNvPr id="49" name="레일"/>
+          <p:cNvSpPr/>
+          <p:nvPr/>
+        </p:nvSpPr>
+        <p:spPr>
+          <a:xfrm>
+            <a:off x="734087" y="5395242"/>
+            <a:ext cx="580696" cy="666532"/>
+          </a:xfrm>
+          <a:prstGeom prst="rect">
+            <a:avLst/>
+          </a:prstGeom>
+          <a:pattFill prst="trellis">
+            <a:fgClr>
+              <a:srgbClr val="00BEC2"/>
+            </a:fgClr>
+            <a:bgClr>
+              <a:srgbClr val="00B0B4"/>
+            </a:bgClr>
+          </a:pattFill>
+          <a:ln>
+            <a:noFill/>
+          </a:ln>
+          <a:effectLst/>
+        </p:spPr>
+        <p:txBody>
+          <a:bodyPr rtlCol="0" anchor="ctr" lIns="10800" rIns="10800" tIns="0" bIns="0" wrap="square"/>
+          <a:lstStyle/>
+          <a:p>
+            <a:pPr marL="0" indent="0" algn="ctr">
+              <a:lnSpc>
+                <a:spcPct val="110000"/>
+              </a:lnSpc>
+              <a:spcBef>
+                <a:spcPts val="0"/>
+              </a:spcBef>
+              <a:spcAft>
+                <a:spcPts val="0"/>
+              </a:spcAft>
+              <a:buNone/>
+            </a:pPr>
+            <a:r>
+              <a:rPr lang="ko-KR" sz="1000" b="1" spc="-50" dirty="0">
+                <a:solidFill>
+                  <a:srgbClr val="FFFFFF"/>
+                </a:solidFill>
+                <a:latin typeface="Pretendard"/>
+                <a:ea typeface="Pretendard"/>
+              </a:rPr>
+              <a:t>교섭</a:t>
+            </a:r>
+          </a:p>
+          <a:p>
+            <a:pPr marL="0" indent="0" algn="ctr">
+              <a:lnSpc>
+                <a:spcPct val="110000"/>
+              </a:lnSpc>
+              <a:spcBef>
+                <a:spcPts val="0"/>
+              </a:spcBef>
+              <a:spcAft>
+                <a:spcPts val="0"/>
+              </a:spcAft>
+              <a:buNone/>
+            </a:pPr>
+            <a:r>
+              <a:rPr lang="ko-KR" sz="1000" b="1" spc="-50" dirty="0">
+                <a:solidFill>
+                  <a:srgbClr val="FFFFFF"/>
+                </a:solidFill>
+                <a:latin typeface="Pretendard"/>
+                <a:ea typeface="Pretendard"/>
+              </a:rPr>
+              <a:t>노력</a:t>
+            </a:r>
+          </a:p>
+        </p:txBody>
+      </p:sp>
+      <p:sp>
+        <p:nvSpPr>
+          <p:cNvPr id="50" name="레일 삼각형"/>
+          <p:cNvSpPr/>
+          <p:nvPr/>
+        </p:nvSpPr>
+        <p:spPr>
+          <a:xfrm>
+            <a:off x="734086" y="5395241"/>
+            <a:ext cx="580696" cy="131478"/>
+          </a:xfrm>
+          <a:custGeom>
+            <a:avLst/>
+            <a:gdLst/>
+            <a:ahLst/>
+            <a:cxnLst/>
+            <a:rect l="l" t="t" r="r" b="b"/>
+            <a:pathLst>
+              <a:path w="580696" h="131478">
+                <a:moveTo>
+                  <a:pt x="0" y="0"/>
+                </a:moveTo>
+                <a:lnTo>
+                  <a:pt x="580696" y="0"/>
+                </a:lnTo>
+                <a:lnTo>
+                  <a:pt x="290348" y="131478"/>
+                </a:lnTo>
+                <a:close/>
+              </a:path>
+            </a:pathLst>
+          </a:custGeom>
+          <a:solidFill>
+            <a:srgbClr val="0080EA"/>
+          </a:solidFill>
+          <a:ln>
+            <a:noFill/>
+          </a:ln>
+          <a:effectLst/>
+        </p:spPr>
+        <p:txBody>
+          <a:bodyPr rtlCol="0" anchor="ctr"/>
+          <a:lstStyle/>
+          <a:p>
+            <a:pPr algn="ctr"/>
+          </a:p>
+        </p:txBody>
+      </p:sp>
+      <p:sp>
+        <p:nvSpPr>
+          <p:cNvPr id="51" name="머리칸"/>
+          <p:cNvSpPr/>
+          <p:nvPr/>
+        </p:nvSpPr>
+        <p:spPr>
+          <a:xfrm>
+            <a:off x="1347652" y="5417155"/>
+            <a:ext cx="2306348" cy="230087"/>
+          </a:xfrm>
+          <a:prstGeom prst="rect">
+            <a:avLst/>
+          </a:prstGeom>
+          <a:solidFill>
+            <a:srgbClr val="DEEEFF"/>
+          </a:solidFill>
+          <a:ln>
+            <a:noFill/>
+          </a:ln>
+          <a:effectLst/>
+        </p:spPr>
+        <p:txBody>
+          <a:bodyPr rtlCol="0" anchor="ctr" lIns="21600" rIns="21600" tIns="3600" bIns="3600" wrap="square"/>
+          <a:lstStyle/>
+          <a:p>
+            <a:pPr marL="0" indent="0" algn="ctr">
+              <a:lnSpc>
+                <a:spcPct val="110000"/>
+              </a:lnSpc>
+              <a:spcBef>
+                <a:spcPts val="0"/>
+              </a:spcBef>
+              <a:spcAft>
+                <a:spcPts val="0"/>
+              </a:spcAft>
+              <a:buNone/>
+            </a:pPr>
+            <a:r>
+              <a:rPr lang="ko-KR" sz="1000" b="1" spc="-50" dirty="0">
+                <a:solidFill>
+                  <a:srgbClr val="000359"/>
+                </a:solidFill>
+                <a:latin typeface="Pretendard"/>
+                <a:ea typeface="Pretendard"/>
+              </a:rPr>
+              <a:t>공감과 이해</a:t>
+            </a:r>
+          </a:p>
+        </p:txBody>
+      </p:sp>
+      <p:sp>
+        <p:nvSpPr>
+          <p:cNvPr id="52" name="머리칸"/>
+          <p:cNvSpPr/>
+          <p:nvPr/>
+        </p:nvSpPr>
+        <p:spPr>
+          <a:xfrm>
+            <a:off x="3670435" y="5417155"/>
+            <a:ext cx="2306348" cy="230087"/>
+          </a:xfrm>
+          <a:prstGeom prst="rect">
+            <a:avLst/>
+          </a:prstGeom>
+          <a:solidFill>
+            <a:srgbClr val="DEEEFF"/>
+          </a:solidFill>
+          <a:ln>
+            <a:noFill/>
+          </a:ln>
+          <a:effectLst/>
+        </p:spPr>
+        <p:txBody>
+          <a:bodyPr rtlCol="0" anchor="ctr" lIns="21600" rIns="21600" tIns="3600" bIns="3600" wrap="square"/>
+          <a:lstStyle/>
+          <a:p>
+            <a:pPr marL="0" indent="0" algn="ctr">
+              <a:lnSpc>
+                <a:spcPct val="110000"/>
+              </a:lnSpc>
+              <a:spcBef>
+                <a:spcPts val="0"/>
+              </a:spcBef>
+              <a:spcAft>
+                <a:spcPts val="0"/>
+              </a:spcAft>
+              <a:buNone/>
+            </a:pPr>
+            <a:r>
+              <a:rPr lang="ko-KR" sz="1000" b="1" spc="-50" dirty="0">
+                <a:solidFill>
+                  <a:srgbClr val="000359"/>
+                </a:solidFill>
+                <a:latin typeface="Pretendard"/>
+                <a:ea typeface="Pretendard"/>
+              </a:rPr>
+              <a:t>소통과 설득</a:t>
+            </a:r>
+          </a:p>
+        </p:txBody>
+      </p:sp>
+      <p:sp>
+        <p:nvSpPr>
+          <p:cNvPr id="53" name="칸 본문"/>
+          <p:cNvSpPr txBox="1"/>
+          <p:nvPr/>
+        </p:nvSpPr>
+        <p:spPr>
+          <a:xfrm>
+            <a:off x="1358609" y="5658198"/>
+            <a:ext cx="2300870" cy="381663"/>
+          </a:xfrm>
+          <a:prstGeom prst="rect">
+            <a:avLst/>
+          </a:prstGeom>
+          <a:noFill/>
+        </p:spPr>
+        <p:txBody>
+          <a:bodyPr wrap="square" lIns="50400" tIns="7200" rIns="21600" bIns="7200" anchor="ctr">
+            <a:noAutofit/>
+          </a:bodyPr>
+          <a:lstStyle/>
+          <a:p>
+            <a:pPr marL="118800" indent="-118800" algn="l">
+              <a:lnSpc>
+                <a:spcPct val="110000"/>
+              </a:lnSpc>
+              <a:spcBef>
+                <a:spcPts val="0"/>
+              </a:spcBef>
+              <a:spcAft>
+                <a:spcPts val="50"/>
+              </a:spcAft>
+              <a:buClr>
+                <a:srgbClr val="000359"/>
+              </a:buClr>
+              <a:buFont typeface="Pretendard"/>
+              <a:buChar char="•"/>
+            </a:pPr>
+            <a:r>
+              <a:rPr lang="ko-KR" sz="1000" spc="-50" dirty="0">
+                <a:solidFill>
+                  <a:srgbClr val="000359"/>
+                </a:solidFill>
+                <a:latin typeface="Pretendard"/>
+                <a:ea typeface="Pretendard"/>
+              </a:rPr>
+              <a:t>실무추진단 운영(5회)으로 교통직 처우개선을 위한 노사 공감대 형성 노력</a:t>
+            </a:r>
+          </a:p>
+        </p:txBody>
+      </p:sp>
+      <p:sp>
+        <p:nvSpPr>
+          <p:cNvPr id="54" name="칸 본문"/>
+          <p:cNvSpPr txBox="1"/>
+          <p:nvPr/>
+        </p:nvSpPr>
+        <p:spPr>
+          <a:xfrm>
+            <a:off x="3681391" y="5658198"/>
+            <a:ext cx="2300870" cy="381663"/>
+          </a:xfrm>
+          <a:prstGeom prst="rect">
+            <a:avLst/>
+          </a:prstGeom>
+          <a:noFill/>
+        </p:spPr>
+        <p:txBody>
+          <a:bodyPr wrap="square" lIns="50400" tIns="7200" rIns="21600" bIns="7200" anchor="ctr">
+            <a:noAutofit/>
+          </a:bodyPr>
+          <a:lstStyle/>
+          <a:p>
+            <a:pPr marL="118800" indent="-118800" algn="l">
+              <a:lnSpc>
+                <a:spcPct val="110000"/>
+              </a:lnSpc>
+              <a:spcBef>
+                <a:spcPts val="0"/>
+              </a:spcBef>
+              <a:spcAft>
+                <a:spcPts val="50"/>
+              </a:spcAft>
+              <a:buClr>
+                <a:srgbClr val="000359"/>
+              </a:buClr>
+              <a:buFont typeface="Pretendard"/>
+              <a:buChar char="•"/>
+            </a:pPr>
+            <a:r>
+              <a:rPr lang="ko-KR" sz="1000" spc="-50" dirty="0">
+                <a:solidFill>
+                  <a:srgbClr val="000359"/>
+                </a:solidFill>
+                <a:latin typeface="Pretendard"/>
+                <a:ea typeface="Pretendard"/>
+              </a:rPr>
+              <a:t>유관부처 소통 및 설득(처우개선 예산 4.5억원 확보)</a:t>
+            </a:r>
+          </a:p>
+        </p:txBody>
+      </p:sp>
+      <p:cxnSp>
+        <p:nvCxnSpPr>
+          <p:cNvPr id="55" name="Connector 54"/>
+          <p:cNvCxnSpPr/>
+          <p:nvPr/>
+        </p:nvCxnSpPr>
+        <p:spPr>
+          <a:xfrm>
+            <a:off x="3670435" y="5691068"/>
+            <a:ext cx="0" cy="315923"/>
+          </a:xfrm>
+          <a:prstGeom prst="line">
+            <a:avLst/>
+          </a:prstGeom>
+          <a:ln w="9525">
+            <a:solidFill>
+              <a:srgbClr val="BDE0FF"/>
+            </a:solidFill>
+          </a:ln>
+        </p:spPr>
+      </p:cxnSp>
+      <p:sp>
+        <p:nvSpPr>
+          <p:cNvPr id="56" name="레일"/>
+          <p:cNvSpPr/>
+          <p:nvPr/>
+        </p:nvSpPr>
+        <p:spPr>
+          <a:xfrm>
+            <a:off x="734087" y="6078209"/>
+            <a:ext cx="580696" cy="846407"/>
+          </a:xfrm>
+          <a:prstGeom prst="rect">
+            <a:avLst/>
+          </a:prstGeom>
+          <a:pattFill prst="trellis">
+            <a:fgClr>
+              <a:srgbClr val="0A6BE6"/>
+            </a:fgClr>
+            <a:bgClr>
+              <a:srgbClr val="0051BC"/>
+            </a:bgClr>
+          </a:pattFill>
+          <a:ln>
+            <a:noFill/>
+          </a:ln>
+          <a:effectLst/>
+        </p:spPr>
+        <p:txBody>
+          <a:bodyPr rtlCol="0" anchor="ctr" lIns="10800" rIns="10800" tIns="0" bIns="0" wrap="square"/>
+          <a:lstStyle/>
+          <a:p>
+            <a:pPr marL="0" indent="0" algn="ctr">
+              <a:lnSpc>
+                <a:spcPct val="110000"/>
+              </a:lnSpc>
+              <a:spcBef>
+                <a:spcPts val="0"/>
+              </a:spcBef>
+              <a:spcAft>
+                <a:spcPts val="0"/>
+              </a:spcAft>
+              <a:buNone/>
+            </a:pPr>
+            <a:r>
+              <a:rPr lang="ko-KR" sz="1000" b="1" spc="-50" dirty="0">
+                <a:solidFill>
+                  <a:srgbClr val="FFFFFF"/>
+                </a:solidFill>
+                <a:latin typeface="Pretendard"/>
+                <a:ea typeface="Pretendard"/>
+              </a:rPr>
+              <a:t>교섭</a:t>
+            </a:r>
+          </a:p>
+          <a:p>
+            <a:pPr marL="0" indent="0" algn="ctr">
+              <a:lnSpc>
+                <a:spcPct val="110000"/>
+              </a:lnSpc>
+              <a:spcBef>
+                <a:spcPts val="0"/>
+              </a:spcBef>
+              <a:spcAft>
+                <a:spcPts val="0"/>
+              </a:spcAft>
+              <a:buNone/>
+            </a:pPr>
+            <a:r>
+              <a:rPr lang="ko-KR" sz="1000" b="1" spc="-50" dirty="0">
+                <a:solidFill>
+                  <a:srgbClr val="FFFFFF"/>
+                </a:solidFill>
+                <a:latin typeface="Pretendard"/>
+                <a:ea typeface="Pretendard"/>
+              </a:rPr>
+              <a:t>결과</a:t>
+            </a:r>
+          </a:p>
+        </p:txBody>
+      </p:sp>
+      <p:sp>
+        <p:nvSpPr>
+          <p:cNvPr id="57" name="레일 삼각형"/>
+          <p:cNvSpPr/>
+          <p:nvPr/>
+        </p:nvSpPr>
+        <p:spPr>
+          <a:xfrm>
+            <a:off x="734086" y="6078208"/>
+            <a:ext cx="580696" cy="131478"/>
+          </a:xfrm>
+          <a:custGeom>
+            <a:avLst/>
+            <a:gdLst/>
+            <a:ahLst/>
+            <a:cxnLst/>
+            <a:rect l="l" t="t" r="r" b="b"/>
+            <a:pathLst>
+              <a:path w="580696" h="131478">
+                <a:moveTo>
+                  <a:pt x="0" y="0"/>
+                </a:moveTo>
+                <a:lnTo>
+                  <a:pt x="580696" y="0"/>
+                </a:lnTo>
+                <a:lnTo>
+                  <a:pt x="290348" y="131478"/>
+                </a:lnTo>
+                <a:close/>
+              </a:path>
+            </a:pathLst>
+          </a:custGeom>
+          <a:solidFill>
+            <a:srgbClr val="00B0B4"/>
+          </a:solidFill>
+          <a:ln>
+            <a:noFill/>
+          </a:ln>
+          <a:effectLst/>
+        </p:spPr>
+        <p:txBody>
+          <a:bodyPr rtlCol="0" anchor="ctr"/>
+          <a:lstStyle/>
+          <a:p>
+            <a:pPr algn="ctr"/>
+          </a:p>
+        </p:txBody>
+      </p:sp>
+      <p:sp>
+        <p:nvSpPr>
+          <p:cNvPr id="58" name="배너"/>
+          <p:cNvSpPr/>
+          <p:nvPr/>
+        </p:nvSpPr>
+        <p:spPr>
+          <a:xfrm>
+            <a:off x="1347652" y="6100122"/>
+            <a:ext cx="4645565" cy="208174"/>
+          </a:xfrm>
+          <a:prstGeom prst="rect">
+            <a:avLst/>
+          </a:prstGeom>
+          <a:solidFill>
+            <a:srgbClr val="BDE0FF"/>
+          </a:solidFill>
+          <a:ln>
+            <a:noFill/>
+          </a:ln>
+          <a:effectLst/>
+        </p:spPr>
+        <p:txBody>
+          <a:bodyPr rtlCol="0" anchor="ctr" lIns="28800" rIns="28800" tIns="7200" bIns="7200" wrap="square"/>
+          <a:lstStyle/>
+          <a:p>
+            <a:pPr marL="0" indent="0" algn="ctr">
+              <a:lnSpc>
+                <a:spcPct val="110000"/>
+              </a:lnSpc>
+              <a:spcBef>
+                <a:spcPts val="0"/>
+              </a:spcBef>
+              <a:spcAft>
+                <a:spcPts val="0"/>
+              </a:spcAft>
+              <a:buNone/>
+            </a:pPr>
+            <a:r>
+              <a:rPr lang="ko-KR" sz="1000" b="1" spc="-50" dirty="0">
+                <a:solidFill>
+                  <a:srgbClr val="000359"/>
+                </a:solidFill>
+                <a:latin typeface="Pretendard"/>
+                <a:ea typeface="Pretendard"/>
+              </a:rPr>
+              <a:t>교통직 처우개선 수시단체교섭 노사합의서 체결('25.12월)</a:t>
+            </a:r>
+          </a:p>
+        </p:txBody>
+      </p:sp>
+      <p:sp>
+        <p:nvSpPr>
+          <p:cNvPr id="59" name="본문"/>
+          <p:cNvSpPr txBox="1"/>
+          <p:nvPr/>
+        </p:nvSpPr>
+        <p:spPr>
+          <a:xfrm>
+            <a:off x="1347652" y="6335687"/>
+            <a:ext cx="4645565" cy="567016"/>
+          </a:xfrm>
+          <a:prstGeom prst="rect">
+            <a:avLst/>
+          </a:prstGeom>
+          <a:noFill/>
+        </p:spPr>
+        <p:txBody>
+          <a:bodyPr wrap="square" lIns="50400" tIns="7200" rIns="21600" bIns="7200" anchor="ctr">
+            <a:noAutofit/>
+          </a:bodyPr>
+          <a:lstStyle/>
+          <a:p>
+            <a:pPr marL="118800" indent="-118800" algn="l">
+              <a:lnSpc>
+                <a:spcPct val="110000"/>
+              </a:lnSpc>
+              <a:spcBef>
+                <a:spcPts val="0"/>
+              </a:spcBef>
+              <a:spcAft>
+                <a:spcPts val="50"/>
+              </a:spcAft>
+              <a:buClr>
+                <a:srgbClr val="000359"/>
+              </a:buClr>
+              <a:buFont typeface="Pretendard"/>
+              <a:buChar char="•"/>
+            </a:pPr>
+            <a:r>
+              <a:rPr lang="ko-KR" sz="1000" spc="-50" dirty="0">
+                <a:solidFill>
+                  <a:srgbClr val="000359"/>
+                </a:solidFill>
+                <a:latin typeface="Pretendard"/>
+                <a:ea typeface="Pretendard"/>
+              </a:rPr>
+              <a:t>교통직 자체성과급 신설 및 지급 합의</a:t>
+            </a:r>
+          </a:p>
+          <a:p>
+            <a:pPr marL="118800" indent="-118800" algn="l">
+              <a:lnSpc>
+                <a:spcPct val="110000"/>
+              </a:lnSpc>
+              <a:spcBef>
+                <a:spcPts val="0"/>
+              </a:spcBef>
+              <a:spcAft>
+                <a:spcPts val="50"/>
+              </a:spcAft>
+              <a:buClr>
+                <a:srgbClr val="000359"/>
+              </a:buClr>
+              <a:buFont typeface="Pretendard"/>
+              <a:buChar char="•"/>
+            </a:pPr>
+            <a:r>
+              <a:rPr lang="ko-KR" sz="1000" spc="-50" dirty="0">
+                <a:solidFill>
+                  <a:srgbClr val="000359"/>
+                </a:solidFill>
+                <a:latin typeface="Pretendard"/>
+                <a:ea typeface="Pretendard"/>
+              </a:rPr>
+              <a:t>일반 경력직 채용 비율 상향 및 신입 채용 시 경력가점 변경</a:t>
+            </a:r>
+          </a:p>
+          <a:p>
+            <a:pPr marL="118800" indent="-118800" algn="l">
+              <a:lnSpc>
+                <a:spcPct val="110000"/>
+              </a:lnSpc>
+              <a:spcBef>
+                <a:spcPts val="0"/>
+              </a:spcBef>
+              <a:spcAft>
+                <a:spcPts val="50"/>
+              </a:spcAft>
+              <a:buClr>
+                <a:srgbClr val="000359"/>
+              </a:buClr>
+              <a:buFont typeface="Pretendard"/>
+              <a:buChar char="•"/>
+            </a:pPr>
+            <a:r>
+              <a:rPr lang="ko-KR" sz="1000" spc="-50" dirty="0">
+                <a:solidFill>
+                  <a:srgbClr val="000359"/>
+                </a:solidFill>
+                <a:latin typeface="Pretendard"/>
+                <a:ea typeface="Pretendard"/>
+              </a:rPr>
+              <a:t>일반직 정원 전환 추진을 위한 노사 공동 노력 지속 합의</a:t>
+            </a:r>
+          </a:p>
+        </p:txBody>
+      </p:sp>
+      <p:sp>
+        <p:nvSpPr>
+          <p:cNvPr id="60" name="사진 칸"/>
+          <p:cNvSpPr/>
+          <p:nvPr/>
+        </p:nvSpPr>
+        <p:spPr>
+          <a:xfrm>
+            <a:off x="6064435" y="4712275"/>
+            <a:ext cx="958696" cy="1349499"/>
+          </a:xfrm>
+          <a:prstGeom prst="rect">
+            <a:avLst/>
+          </a:prstGeom>
+          <a:solidFill>
+            <a:srgbClr val="DEEEFF"/>
+          </a:solidFill>
+          <a:ln w="9525">
+            <a:solidFill>
+              <a:srgbClr val="008EFF"/>
+            </a:solidFill>
+          </a:ln>
+          <a:effectLst/>
+        </p:spPr>
+        <p:txBody>
+          <a:bodyPr rtlCol="0" anchor="ctr" lIns="0" rIns="0" tIns="0" bIns="0" wrap="square"/>
+          <a:lstStyle/>
+          <a:p>
+            <a:pPr marL="0" indent="0" algn="ctr">
+              <a:lnSpc>
+                <a:spcPct val="110000"/>
+              </a:lnSpc>
+              <a:spcBef>
+                <a:spcPts val="0"/>
+              </a:spcBef>
+              <a:spcAft>
+                <a:spcPts val="0"/>
+              </a:spcAft>
+              <a:buNone/>
+            </a:pPr>
+            <a:r>
+              <a:rPr lang="ko-KR" sz="1000" spc="-50" dirty="0">
+                <a:solidFill>
+                  <a:srgbClr val="5D7280"/>
+                </a:solidFill>
+                <a:latin typeface="Pretendard"/>
+                <a:ea typeface="Pretendard"/>
+              </a:rPr>
+              <a:t>사진 (합의서)</a:t>
+            </a:r>
+          </a:p>
+        </p:txBody>
+      </p:sp>
+      <p:sp>
+        <p:nvSpPr>
+          <p:cNvPr id="61" name="사진 칸"/>
+          <p:cNvSpPr/>
+          <p:nvPr/>
+        </p:nvSpPr>
+        <p:spPr>
+          <a:xfrm>
+            <a:off x="6064435" y="6078209"/>
+            <a:ext cx="958696" cy="846407"/>
+          </a:xfrm>
+          <a:prstGeom prst="rect">
+            <a:avLst/>
+          </a:prstGeom>
+          <a:solidFill>
+            <a:srgbClr val="DEEEFF"/>
+          </a:solidFill>
+          <a:ln w="9525">
+            <a:solidFill>
+              <a:srgbClr val="008EFF"/>
+            </a:solidFill>
+          </a:ln>
+          <a:effectLst/>
+        </p:spPr>
+        <p:txBody>
+          <a:bodyPr rtlCol="0" anchor="ctr" lIns="0" rIns="0" tIns="0" bIns="0" wrap="square"/>
+          <a:lstStyle/>
+          <a:p>
+            <a:pPr marL="0" indent="0" algn="ctr">
+              <a:lnSpc>
+                <a:spcPct val="110000"/>
+              </a:lnSpc>
+              <a:spcBef>
+                <a:spcPts val="0"/>
+              </a:spcBef>
+              <a:spcAft>
+                <a:spcPts val="0"/>
+              </a:spcAft>
+              <a:buNone/>
+            </a:pPr>
+            <a:r>
+              <a:rPr lang="ko-KR" sz="1000" spc="-50" dirty="0">
+                <a:solidFill>
+                  <a:srgbClr val="5D7280"/>
+                </a:solidFill>
+                <a:latin typeface="Pretendard"/>
+                <a:ea typeface="Pretendard"/>
+              </a:rPr>
+              <a:t>사진 (체결식)</a:t>
+            </a:r>
+          </a:p>
+        </p:txBody>
+      </p:sp>
+      <p:sp>
+        <p:nvSpPr>
+          <p:cNvPr id="62" name="형광 밑줄"/>
+          <p:cNvSpPr/>
+          <p:nvPr/>
+        </p:nvSpPr>
+        <p:spPr>
+          <a:xfrm>
+            <a:off x="723130" y="7214963"/>
+            <a:ext cx="3812614" cy="43826"/>
+          </a:xfrm>
+          <a:prstGeom prst="rect">
+            <a:avLst/>
+          </a:prstGeom>
+          <a:solidFill>
+            <a:srgbClr val="29FFBD"/>
+          </a:solidFill>
+          <a:ln>
+            <a:noFill/>
+          </a:ln>
+          <a:effectLst/>
+        </p:spPr>
+        <p:txBody>
+          <a:bodyPr rtlCol="0" anchor="ctr" lIns="0" rIns="0" tIns="0" bIns="0"/>
+          <a:lstStyle/>
+          <a:p>
+            <a:pPr algn="ctr"/>
+          </a:p>
+        </p:txBody>
+      </p:sp>
+      <p:sp>
+        <p:nvSpPr>
+          <p:cNvPr id="63" name="소제목"/>
+          <p:cNvSpPr txBox="1"/>
+          <p:nvPr/>
+        </p:nvSpPr>
+        <p:spPr>
+          <a:xfrm>
+            <a:off x="723130" y="7061572"/>
+            <a:ext cx="6300000" cy="241043"/>
+          </a:xfrm>
+          <a:prstGeom prst="rect">
+            <a:avLst/>
+          </a:prstGeom>
+          <a:noFill/>
+        </p:spPr>
+        <p:txBody>
+          <a:bodyPr wrap="square" lIns="0" tIns="0" rIns="0" bIns="0" anchor="ctr">
+            <a:noAutofit/>
+          </a:bodyPr>
+          <a:lstStyle/>
+          <a:p>
+            <a:pPr marL="0" indent="0" algn="l">
+              <a:lnSpc>
+                <a:spcPct val="110000"/>
+              </a:lnSpc>
+              <a:spcBef>
+                <a:spcPts val="0"/>
+              </a:spcBef>
+              <a:spcAft>
+                <a:spcPts val="0"/>
+              </a:spcAft>
+              <a:buNone/>
+            </a:pPr>
+            <a:r>
+              <a:rPr lang="ko-KR" sz="1200" b="1" spc="-60" dirty="0">
+                <a:solidFill>
+                  <a:srgbClr val="000359"/>
+                </a:solidFill>
+                <a:latin typeface="Pretendard"/>
+                <a:ea typeface="Pretendard"/>
+              </a:rPr>
+              <a:t>다. 근로자의 안전을 위해! 시설관리 실무직렬 근무체계 개선 합의</a:t>
+            </a:r>
+          </a:p>
+        </p:txBody>
+      </p:sp>
+      <p:sp>
+        <p:nvSpPr>
+          <p:cNvPr id="64" name="태그칩"/>
+          <p:cNvSpPr/>
+          <p:nvPr/>
+        </p:nvSpPr>
+        <p:spPr>
+          <a:xfrm>
+            <a:off x="4634353" y="7094442"/>
+            <a:ext cx="351016" cy="175304"/>
+          </a:xfrm>
+          <a:prstGeom prst="rect">
+            <a:avLst/>
+          </a:prstGeom>
+          <a:solidFill>
+            <a:srgbClr val="0051BC"/>
+          </a:solidFill>
+          <a:ln>
+            <a:noFill/>
+          </a:ln>
+          <a:effectLst/>
+        </p:spPr>
+        <p:txBody>
+          <a:bodyPr rtlCol="0" anchor="ctr" lIns="10800" rIns="10800" tIns="0" bIns="0" wrap="square"/>
+          <a:lstStyle/>
+          <a:p>
+            <a:pPr marL="0" indent="0" algn="ctr">
+              <a:lnSpc>
+                <a:spcPct val="110000"/>
+              </a:lnSpc>
+              <a:spcBef>
+                <a:spcPts val="0"/>
+              </a:spcBef>
+              <a:spcAft>
+                <a:spcPts val="0"/>
+              </a:spcAft>
+              <a:buNone/>
+            </a:pPr>
+            <a:r>
+              <a:rPr lang="ko-KR" sz="1000" b="1" spc="-50" dirty="0">
+                <a:solidFill>
+                  <a:srgbClr val="FFFFFF"/>
+                </a:solidFill>
+                <a:latin typeface="Pretendard"/>
+                <a:ea typeface="Pretendard"/>
+              </a:rPr>
+              <a:t>신규</a:t>
+            </a:r>
+          </a:p>
+        </p:txBody>
+      </p:sp>
+      <p:sp>
+        <p:nvSpPr>
+          <p:cNvPr id="65" name="표 외곽"/>
+          <p:cNvSpPr/>
+          <p:nvPr/>
+        </p:nvSpPr>
+        <p:spPr>
+          <a:xfrm>
+            <a:off x="723130" y="7346442"/>
+            <a:ext cx="6300000" cy="1594205"/>
+          </a:xfrm>
+          <a:prstGeom prst="rect">
+            <a:avLst/>
+          </a:prstGeom>
+          <a:solidFill>
+            <a:srgbClr val="FFFFFF"/>
+          </a:solidFill>
+          <a:ln w="9525">
+            <a:solidFill>
+              <a:srgbClr val="008EFF"/>
+            </a:solidFill>
+          </a:ln>
+          <a:effectLst/>
+        </p:spPr>
+        <p:txBody>
+          <a:bodyPr rtlCol="0" anchor="ctr" lIns="0" rIns="0" tIns="0" bIns="0"/>
+          <a:lstStyle/>
+          <a:p>
+            <a:pPr algn="ctr"/>
+          </a:p>
+        </p:txBody>
+      </p:sp>
+      <p:sp>
+        <p:nvSpPr>
+          <p:cNvPr id="66" name="레일"/>
+          <p:cNvSpPr/>
+          <p:nvPr/>
+        </p:nvSpPr>
+        <p:spPr>
+          <a:xfrm>
+            <a:off x="734087" y="7362877"/>
+            <a:ext cx="580696" cy="262049"/>
+          </a:xfrm>
+          <a:prstGeom prst="rect">
+            <a:avLst/>
+          </a:prstGeom>
+          <a:pattFill prst="trellis">
+            <a:fgClr>
+              <a:srgbClr val="0990FF"/>
+            </a:fgClr>
+            <a:bgClr>
+              <a:srgbClr val="0080EA"/>
+            </a:bgClr>
+          </a:pattFill>
+          <a:ln>
+            <a:noFill/>
+          </a:ln>
+          <a:effectLst/>
+        </p:spPr>
+        <p:txBody>
+          <a:bodyPr rtlCol="0" anchor="ctr" lIns="10800" rIns="10800" tIns="0" bIns="0" wrap="square"/>
+          <a:lstStyle/>
+          <a:p>
+            <a:pPr marL="0" indent="0" algn="ctr">
+              <a:lnSpc>
+                <a:spcPct val="110000"/>
+              </a:lnSpc>
+              <a:spcBef>
+                <a:spcPts val="0"/>
+              </a:spcBef>
+              <a:spcAft>
+                <a:spcPts val="0"/>
+              </a:spcAft>
+              <a:buNone/>
+            </a:pPr>
+            <a:r>
+              <a:rPr lang="ko-KR" sz="1000" b="1" spc="-50" dirty="0">
+                <a:solidFill>
+                  <a:srgbClr val="FFFFFF"/>
+                </a:solidFill>
+                <a:latin typeface="Pretendard"/>
+                <a:ea typeface="Pretendard"/>
+              </a:rPr>
+              <a:t>현 황</a:t>
+            </a:r>
+          </a:p>
+        </p:txBody>
+      </p:sp>
+      <p:sp>
+        <p:nvSpPr>
+          <p:cNvPr id="67" name="본문"/>
+          <p:cNvSpPr txBox="1"/>
+          <p:nvPr/>
+        </p:nvSpPr>
+        <p:spPr>
+          <a:xfrm>
+            <a:off x="1347652" y="7384790"/>
+            <a:ext cx="5648087" cy="218223"/>
+          </a:xfrm>
+          <a:prstGeom prst="rect">
+            <a:avLst/>
+          </a:prstGeom>
+          <a:noFill/>
+        </p:spPr>
+        <p:txBody>
+          <a:bodyPr wrap="square" lIns="50400" tIns="7200" rIns="21600" bIns="7200" anchor="ctr">
+            <a:noAutofit/>
+          </a:bodyPr>
+          <a:lstStyle/>
+          <a:p>
+            <a:pPr marL="118800" indent="-118800" algn="l">
+              <a:lnSpc>
+                <a:spcPct val="110000"/>
+              </a:lnSpc>
+              <a:spcBef>
+                <a:spcPts val="0"/>
+              </a:spcBef>
+              <a:spcAft>
+                <a:spcPts val="50"/>
+              </a:spcAft>
+              <a:buClr>
+                <a:srgbClr val="000359"/>
+              </a:buClr>
+              <a:buFont typeface="Pretendard"/>
+              <a:buChar char="•"/>
+            </a:pPr>
+            <a:r>
+              <a:rPr lang="ko-KR" sz="1000" spc="-50" dirty="0">
+                <a:solidFill>
+                  <a:srgbClr val="000359"/>
+                </a:solidFill>
+                <a:latin typeface="Pretendard"/>
+                <a:ea typeface="Pretendard"/>
+              </a:rPr>
+              <a:t>감시단속적 근로 적용 제외 승인 근로형태 주간(8시간)-당직(19시간)-비번으로 월 251시간 근무</a:t>
+            </a:r>
+          </a:p>
+        </p:txBody>
+      </p:sp>
+      <p:sp>
+        <p:nvSpPr>
+          <p:cNvPr id="68" name="레일"/>
+          <p:cNvSpPr/>
+          <p:nvPr/>
+        </p:nvSpPr>
+        <p:spPr>
+          <a:xfrm>
+            <a:off x="734087" y="7641360"/>
+            <a:ext cx="580696" cy="262049"/>
+          </a:xfrm>
+          <a:prstGeom prst="rect">
+            <a:avLst/>
+          </a:prstGeom>
+          <a:pattFill prst="trellis">
+            <a:fgClr>
+              <a:srgbClr val="0990FF"/>
+            </a:fgClr>
+            <a:bgClr>
+              <a:srgbClr val="0080EA"/>
+            </a:bgClr>
+          </a:pattFill>
+          <a:ln>
+            <a:noFill/>
+          </a:ln>
+          <a:effectLst/>
+        </p:spPr>
+        <p:txBody>
+          <a:bodyPr rtlCol="0" anchor="ctr" lIns="10800" rIns="10800" tIns="0" bIns="0" wrap="square"/>
+          <a:lstStyle/>
+          <a:p>
+            <a:pPr marL="0" indent="0" algn="ctr">
+              <a:lnSpc>
+                <a:spcPct val="110000"/>
+              </a:lnSpc>
+              <a:spcBef>
+                <a:spcPts val="0"/>
+              </a:spcBef>
+              <a:spcAft>
+                <a:spcPts val="0"/>
+              </a:spcAft>
+              <a:buNone/>
+            </a:pPr>
+            <a:r>
+              <a:rPr lang="ko-KR" sz="1000" b="1" spc="-50" dirty="0">
+                <a:solidFill>
+                  <a:srgbClr val="FFFFFF"/>
+                </a:solidFill>
+                <a:latin typeface="Pretendard"/>
+                <a:ea typeface="Pretendard"/>
+              </a:rPr>
+              <a:t>문제점</a:t>
+            </a:r>
+          </a:p>
+        </p:txBody>
+      </p:sp>
+      <p:sp>
+        <p:nvSpPr>
+          <p:cNvPr id="69" name="본문"/>
+          <p:cNvSpPr txBox="1"/>
+          <p:nvPr/>
+        </p:nvSpPr>
+        <p:spPr>
+          <a:xfrm>
+            <a:off x="1347652" y="7663273"/>
+            <a:ext cx="5648087" cy="218223"/>
+          </a:xfrm>
+          <a:prstGeom prst="rect">
+            <a:avLst/>
+          </a:prstGeom>
+          <a:noFill/>
+        </p:spPr>
+        <p:txBody>
+          <a:bodyPr wrap="square" lIns="50400" tIns="7200" rIns="21600" bIns="7200" anchor="ctr">
+            <a:noAutofit/>
+          </a:bodyPr>
+          <a:lstStyle/>
+          <a:p>
+            <a:pPr marL="118800" indent="-118800" algn="l">
+              <a:lnSpc>
+                <a:spcPct val="110000"/>
+              </a:lnSpc>
+              <a:spcBef>
+                <a:spcPts val="0"/>
+              </a:spcBef>
+              <a:spcAft>
+                <a:spcPts val="50"/>
+              </a:spcAft>
+              <a:buClr>
+                <a:srgbClr val="000359"/>
+              </a:buClr>
+              <a:buFont typeface="Pretendard"/>
+              <a:buChar char="•"/>
+            </a:pPr>
+            <a:r>
+              <a:rPr lang="ko-KR" sz="1000" spc="-50" dirty="0">
+                <a:solidFill>
+                  <a:srgbClr val="000359"/>
+                </a:solidFill>
+                <a:latin typeface="Pretendard"/>
+                <a:ea typeface="Pretendard"/>
+              </a:rPr>
+              <a:t>장시간 근로에 따른 피로누적 등 건강권 저해와 잦은 이직에 따른 인력의 비효율적 운영</a:t>
+            </a:r>
+          </a:p>
+        </p:txBody>
+      </p:sp>
+      <p:sp>
+        <p:nvSpPr>
+          <p:cNvPr id="70" name="레일"/>
+          <p:cNvSpPr/>
+          <p:nvPr/>
+        </p:nvSpPr>
+        <p:spPr>
+          <a:xfrm>
+            <a:off x="734087" y="7919843"/>
+            <a:ext cx="580696" cy="1004369"/>
+          </a:xfrm>
+          <a:prstGeom prst="rect">
+            <a:avLst/>
+          </a:prstGeom>
+          <a:pattFill prst="trellis">
+            <a:fgClr>
+              <a:srgbClr val="0990FF"/>
+            </a:fgClr>
+            <a:bgClr>
+              <a:srgbClr val="0080EA"/>
+            </a:bgClr>
+          </a:pattFill>
+          <a:ln>
+            <a:noFill/>
+          </a:ln>
+          <a:effectLst/>
+        </p:spPr>
+        <p:txBody>
+          <a:bodyPr rtlCol="0" anchor="ctr" lIns="10800" rIns="10800" tIns="0" bIns="0" wrap="square"/>
+          <a:lstStyle/>
+          <a:p>
+            <a:pPr marL="0" indent="0" algn="ctr">
+              <a:lnSpc>
+                <a:spcPct val="110000"/>
+              </a:lnSpc>
+              <a:spcBef>
+                <a:spcPts val="0"/>
+              </a:spcBef>
+              <a:spcAft>
+                <a:spcPts val="0"/>
+              </a:spcAft>
+              <a:buNone/>
+            </a:pPr>
+            <a:r>
+              <a:rPr lang="ko-KR" sz="1000" b="1" spc="-50" dirty="0">
+                <a:solidFill>
+                  <a:srgbClr val="FFFFFF"/>
+                </a:solidFill>
+                <a:latin typeface="Pretendard"/>
+                <a:ea typeface="Pretendard"/>
+              </a:rPr>
+              <a:t>노사</a:t>
+            </a:r>
+          </a:p>
+          <a:p>
+            <a:pPr marL="0" indent="0" algn="ctr">
+              <a:lnSpc>
+                <a:spcPct val="110000"/>
+              </a:lnSpc>
+              <a:spcBef>
+                <a:spcPts val="0"/>
+              </a:spcBef>
+              <a:spcAft>
+                <a:spcPts val="0"/>
+              </a:spcAft>
+              <a:buNone/>
+            </a:pPr>
+            <a:r>
+              <a:rPr lang="ko-KR" sz="1000" b="1" spc="-50" dirty="0">
+                <a:solidFill>
+                  <a:srgbClr val="FFFFFF"/>
+                </a:solidFill>
+                <a:latin typeface="Pretendard"/>
+                <a:ea typeface="Pretendard"/>
+              </a:rPr>
+              <a:t>공동노력</a:t>
+            </a:r>
+          </a:p>
+        </p:txBody>
+      </p:sp>
+      <p:sp>
+        <p:nvSpPr>
+          <p:cNvPr id="71" name="머리칸"/>
+          <p:cNvSpPr/>
+          <p:nvPr/>
+        </p:nvSpPr>
+        <p:spPr>
+          <a:xfrm>
+            <a:off x="1347652" y="7941757"/>
+            <a:ext cx="1866261" cy="230087"/>
+          </a:xfrm>
+          <a:prstGeom prst="rect">
+            <a:avLst/>
+          </a:prstGeom>
+          <a:solidFill>
+            <a:srgbClr val="DEEEFF"/>
+          </a:solidFill>
+          <a:ln>
+            <a:noFill/>
+          </a:ln>
+          <a:effectLst/>
+        </p:spPr>
+        <p:txBody>
+          <a:bodyPr rtlCol="0" anchor="ctr" lIns="21600" rIns="21600" tIns="3600" bIns="3600" wrap="square"/>
+          <a:lstStyle/>
+          <a:p>
+            <a:pPr marL="0" indent="0" algn="ctr">
+              <a:lnSpc>
+                <a:spcPct val="110000"/>
+              </a:lnSpc>
+              <a:spcBef>
+                <a:spcPts val="0"/>
+              </a:spcBef>
+              <a:spcAft>
+                <a:spcPts val="0"/>
+              </a:spcAft>
+              <a:buNone/>
+            </a:pPr>
+            <a:r>
+              <a:rPr lang="ko-KR" sz="1000" b="1" spc="-50" dirty="0">
+                <a:solidFill>
+                  <a:srgbClr val="000359"/>
+                </a:solidFill>
+                <a:latin typeface="Pretendard"/>
+                <a:ea typeface="Pretendard"/>
+              </a:rPr>
+              <a:t>해당 근로자 소통</a:t>
+            </a:r>
+          </a:p>
+        </p:txBody>
+      </p:sp>
+      <p:sp>
+        <p:nvSpPr>
+          <p:cNvPr id="72" name="머리칸"/>
+          <p:cNvSpPr/>
+          <p:nvPr/>
+        </p:nvSpPr>
+        <p:spPr>
+          <a:xfrm>
+            <a:off x="3230348" y="7941757"/>
+            <a:ext cx="1866261" cy="230087"/>
+          </a:xfrm>
+          <a:prstGeom prst="rect">
+            <a:avLst/>
+          </a:prstGeom>
+          <a:solidFill>
+            <a:srgbClr val="DEEEFF"/>
+          </a:solidFill>
+          <a:ln>
+            <a:noFill/>
+          </a:ln>
+          <a:effectLst/>
+        </p:spPr>
+        <p:txBody>
+          <a:bodyPr rtlCol="0" anchor="ctr" lIns="21600" rIns="21600" tIns="3600" bIns="3600" wrap="square"/>
+          <a:lstStyle/>
+          <a:p>
+            <a:pPr marL="0" indent="0" algn="ctr">
+              <a:lnSpc>
+                <a:spcPct val="110000"/>
+              </a:lnSpc>
+              <a:spcBef>
+                <a:spcPts val="0"/>
+              </a:spcBef>
+              <a:spcAft>
+                <a:spcPts val="0"/>
+              </a:spcAft>
+              <a:buNone/>
+            </a:pPr>
+            <a:r>
+              <a:rPr lang="ko-KR" sz="1000" b="1" spc="-50" dirty="0">
+                <a:solidFill>
+                  <a:srgbClr val="000359"/>
+                </a:solidFill>
+                <a:latin typeface="Pretendard"/>
+                <a:ea typeface="Pretendard"/>
+              </a:rPr>
+              <a:t>근무체계 개편</a:t>
+            </a:r>
+          </a:p>
+        </p:txBody>
+      </p:sp>
+      <p:sp>
+        <p:nvSpPr>
+          <p:cNvPr id="73" name="머리칸"/>
+          <p:cNvSpPr/>
+          <p:nvPr/>
+        </p:nvSpPr>
+        <p:spPr>
+          <a:xfrm>
+            <a:off x="5113043" y="7941757"/>
+            <a:ext cx="1866261" cy="230087"/>
+          </a:xfrm>
+          <a:prstGeom prst="rect">
+            <a:avLst/>
+          </a:prstGeom>
+          <a:solidFill>
+            <a:srgbClr val="DEEEFF"/>
+          </a:solidFill>
+          <a:ln>
+            <a:noFill/>
+          </a:ln>
+          <a:effectLst/>
+        </p:spPr>
+        <p:txBody>
+          <a:bodyPr rtlCol="0" anchor="ctr" lIns="21600" rIns="21600" tIns="3600" bIns="3600" wrap="square"/>
+          <a:lstStyle/>
+          <a:p>
+            <a:pPr marL="0" indent="0" algn="ctr">
+              <a:lnSpc>
+                <a:spcPct val="110000"/>
+              </a:lnSpc>
+              <a:spcBef>
+                <a:spcPts val="0"/>
+              </a:spcBef>
+              <a:spcAft>
+                <a:spcPts val="0"/>
+              </a:spcAft>
+              <a:buNone/>
+            </a:pPr>
+            <a:r>
+              <a:rPr lang="ko-KR" sz="1000" b="1" spc="-50" dirty="0">
+                <a:solidFill>
+                  <a:srgbClr val="000359"/>
+                </a:solidFill>
+                <a:latin typeface="Pretendard"/>
+                <a:ea typeface="Pretendard"/>
+              </a:rPr>
+              <a:t>임금보전 대책 마련</a:t>
+            </a:r>
+          </a:p>
+        </p:txBody>
+      </p:sp>
+      <p:sp>
+        <p:nvSpPr>
+          <p:cNvPr id="74" name="칸 본문"/>
+          <p:cNvSpPr txBox="1"/>
+          <p:nvPr/>
+        </p:nvSpPr>
+        <p:spPr>
+          <a:xfrm>
+            <a:off x="1358609" y="8182800"/>
+            <a:ext cx="1860783" cy="719499"/>
+          </a:xfrm>
+          <a:prstGeom prst="rect">
+            <a:avLst/>
+          </a:prstGeom>
+          <a:noFill/>
+        </p:spPr>
+        <p:txBody>
+          <a:bodyPr wrap="square" lIns="50400" tIns="7200" rIns="21600" bIns="7200" anchor="ctr">
+            <a:noAutofit/>
+          </a:bodyPr>
+          <a:lstStyle/>
+          <a:p>
+            <a:pPr marL="118800" indent="-118800" algn="l">
+              <a:lnSpc>
+                <a:spcPct val="110000"/>
+              </a:lnSpc>
+              <a:spcBef>
+                <a:spcPts val="0"/>
+              </a:spcBef>
+              <a:spcAft>
+                <a:spcPts val="50"/>
+              </a:spcAft>
+              <a:buClr>
+                <a:srgbClr val="000359"/>
+              </a:buClr>
+              <a:buFont typeface="Pretendard"/>
+              <a:buChar char="•"/>
+            </a:pPr>
+            <a:r>
+              <a:rPr lang="ko-KR" sz="1000" spc="-50" dirty="0">
+                <a:solidFill>
+                  <a:srgbClr val="000359"/>
+                </a:solidFill>
+                <a:latin typeface="Pretendard"/>
+                <a:ea typeface="Pretendard"/>
+              </a:rPr>
+              <a:t>감시단속적 근로 적용 제외 승인 해제를 통한 근로조건 개선 설명</a:t>
+            </a:r>
+          </a:p>
+          <a:p>
+            <a:pPr marL="118800" indent="-118800" algn="l">
+              <a:lnSpc>
+                <a:spcPct val="110000"/>
+              </a:lnSpc>
+              <a:spcBef>
+                <a:spcPts val="0"/>
+              </a:spcBef>
+              <a:spcAft>
+                <a:spcPts val="50"/>
+              </a:spcAft>
+              <a:buClr>
+                <a:srgbClr val="000359"/>
+              </a:buClr>
+              <a:buFont typeface="Pretendard"/>
+              <a:buChar char="•"/>
+            </a:pPr>
+            <a:r>
+              <a:rPr lang="ko-KR" sz="1000" spc="-50" dirty="0">
+                <a:solidFill>
+                  <a:srgbClr val="000359"/>
+                </a:solidFill>
+                <a:latin typeface="Pretendard"/>
+                <a:ea typeface="Pretendard"/>
+              </a:rPr>
+              <a:t>임금저하 방지를 위한 노사 공동 노력 설득·소통</a:t>
+            </a:r>
+          </a:p>
+        </p:txBody>
+      </p:sp>
+      <p:sp>
+        <p:nvSpPr>
+          <p:cNvPr id="75" name="칸 본문"/>
+          <p:cNvSpPr txBox="1"/>
+          <p:nvPr/>
+        </p:nvSpPr>
+        <p:spPr>
+          <a:xfrm>
+            <a:off x="3241304" y="8182800"/>
+            <a:ext cx="1860783" cy="719499"/>
+          </a:xfrm>
+          <a:prstGeom prst="rect">
+            <a:avLst/>
+          </a:prstGeom>
+          <a:noFill/>
+        </p:spPr>
+        <p:txBody>
+          <a:bodyPr wrap="square" lIns="50400" tIns="7200" rIns="21600" bIns="7200" anchor="ctr">
+            <a:noAutofit/>
+          </a:bodyPr>
+          <a:lstStyle/>
+          <a:p>
+            <a:pPr marL="118800" indent="-118800" algn="l">
+              <a:lnSpc>
+                <a:spcPct val="110000"/>
+              </a:lnSpc>
+              <a:spcBef>
+                <a:spcPts val="0"/>
+              </a:spcBef>
+              <a:spcAft>
+                <a:spcPts val="50"/>
+              </a:spcAft>
+              <a:buClr>
+                <a:srgbClr val="000359"/>
+              </a:buClr>
+              <a:buFont typeface="Pretendard"/>
+              <a:buChar char="•"/>
+            </a:pPr>
+            <a:r>
+              <a:rPr lang="ko-KR" sz="1000" spc="-50" dirty="0">
+                <a:solidFill>
+                  <a:srgbClr val="000359"/>
+                </a:solidFill>
+                <a:latin typeface="Pretendard"/>
+                <a:ea typeface="Pretendard"/>
+              </a:rPr>
+              <a:t>승인 해제 후 일반 근로형태로 전환·개편</a:t>
+            </a:r>
+          </a:p>
+          <a:p>
+            <a:pPr marL="118800" indent="-118800" algn="l">
+              <a:lnSpc>
+                <a:spcPct val="110000"/>
+              </a:lnSpc>
+              <a:spcBef>
+                <a:spcPts val="0"/>
+              </a:spcBef>
+              <a:spcAft>
+                <a:spcPts val="50"/>
+              </a:spcAft>
+              <a:buClr>
+                <a:srgbClr val="000359"/>
+              </a:buClr>
+              <a:buFont typeface="Pretendard"/>
+              <a:buChar char="•"/>
+            </a:pPr>
+            <a:r>
+              <a:rPr lang="ko-KR" sz="1000" spc="-50" dirty="0">
+                <a:solidFill>
+                  <a:srgbClr val="000359"/>
+                </a:solidFill>
+                <a:latin typeface="Pretendard"/>
+                <a:ea typeface="Pretendard"/>
+              </a:rPr>
+              <a:t>월 172시간 근무(기존 251시간) → 주·야 교대</a:t>
+            </a:r>
+          </a:p>
+        </p:txBody>
+      </p:sp>
+      <p:cxnSp>
+        <p:nvCxnSpPr>
+          <p:cNvPr id="76" name="Connector 75"/>
+          <p:cNvCxnSpPr/>
+          <p:nvPr/>
+        </p:nvCxnSpPr>
+        <p:spPr>
+          <a:xfrm>
+            <a:off x="3230348" y="8215670"/>
+            <a:ext cx="0" cy="653760"/>
+          </a:xfrm>
+          <a:prstGeom prst="line">
+            <a:avLst/>
+          </a:prstGeom>
+          <a:ln w="9525">
+            <a:solidFill>
+              <a:srgbClr val="BDE0FF"/>
+            </a:solidFill>
+          </a:ln>
+        </p:spPr>
+      </p:cxnSp>
+      <p:sp>
+        <p:nvSpPr>
+          <p:cNvPr id="77" name="칸 본문"/>
+          <p:cNvSpPr txBox="1"/>
+          <p:nvPr/>
+        </p:nvSpPr>
+        <p:spPr>
+          <a:xfrm>
+            <a:off x="5124000" y="8182800"/>
+            <a:ext cx="1860783" cy="719499"/>
+          </a:xfrm>
+          <a:prstGeom prst="rect">
+            <a:avLst/>
+          </a:prstGeom>
+          <a:noFill/>
+        </p:spPr>
+        <p:txBody>
+          <a:bodyPr wrap="square" lIns="50400" tIns="7200" rIns="21600" bIns="7200" anchor="ctr">
+            <a:noAutofit/>
+          </a:bodyPr>
+          <a:lstStyle/>
+          <a:p>
+            <a:pPr marL="118800" indent="-118800" algn="l">
+              <a:lnSpc>
+                <a:spcPct val="110000"/>
+              </a:lnSpc>
+              <a:spcBef>
+                <a:spcPts val="0"/>
+              </a:spcBef>
+              <a:spcAft>
+                <a:spcPts val="50"/>
+              </a:spcAft>
+              <a:buClr>
+                <a:srgbClr val="000359"/>
+              </a:buClr>
+              <a:buFont typeface="Pretendard"/>
+              <a:buChar char="•"/>
+            </a:pPr>
+            <a:r>
+              <a:rPr lang="ko-KR" sz="1000" spc="-50" dirty="0">
+                <a:solidFill>
+                  <a:srgbClr val="000359"/>
+                </a:solidFill>
+                <a:latin typeface="Pretendard"/>
+                <a:ea typeface="Pretendard"/>
+              </a:rPr>
+              <a:t>근로시간 감소에 따른 임금보전 대책 검토 및 마련</a:t>
+            </a:r>
+          </a:p>
+          <a:p>
+            <a:pPr marL="118800" indent="-118800" algn="l">
+              <a:lnSpc>
+                <a:spcPct val="110000"/>
+              </a:lnSpc>
+              <a:spcBef>
+                <a:spcPts val="0"/>
+              </a:spcBef>
+              <a:spcAft>
+                <a:spcPts val="50"/>
+              </a:spcAft>
+              <a:buClr>
+                <a:srgbClr val="000359"/>
+              </a:buClr>
+              <a:buFont typeface="Pretendard"/>
+              <a:buChar char="•"/>
+            </a:pPr>
+            <a:r>
+              <a:rPr lang="ko-KR" sz="1000" spc="-50" dirty="0">
+                <a:solidFill>
+                  <a:srgbClr val="000359"/>
+                </a:solidFill>
+                <a:latin typeface="Pretendard"/>
+                <a:ea typeface="Pretendard"/>
+              </a:rPr>
+              <a:t>법령에 따른 휴일수당·연장근로수당 지급</a:t>
+            </a:r>
+          </a:p>
+        </p:txBody>
+      </p:sp>
+      <p:cxnSp>
+        <p:nvCxnSpPr>
+          <p:cNvPr id="78" name="Connector 77"/>
+          <p:cNvCxnSpPr/>
+          <p:nvPr/>
+        </p:nvCxnSpPr>
+        <p:spPr>
+          <a:xfrm>
+            <a:off x="5113043" y="8215670"/>
+            <a:ext cx="0" cy="653760"/>
+          </a:xfrm>
+          <a:prstGeom prst="line">
+            <a:avLst/>
+          </a:prstGeom>
+          <a:ln w="9525">
+            <a:solidFill>
+              <a:srgbClr val="BDE0FF"/>
+            </a:solidFill>
+          </a:ln>
+        </p:spPr>
+      </p:cxnSp>
+      <p:sp>
+        <p:nvSpPr>
+          <p:cNvPr id="79" name="핵심성과 박스"/>
+          <p:cNvSpPr/>
+          <p:nvPr/>
+        </p:nvSpPr>
+        <p:spPr>
+          <a:xfrm>
+            <a:off x="723130" y="9028299"/>
+            <a:ext cx="6300000" cy="491478"/>
+          </a:xfrm>
+          <a:prstGeom prst="rect">
+            <a:avLst/>
+          </a:prstGeom>
+          <a:solidFill>
+            <a:srgbClr val="E6FCF9"/>
+          </a:solidFill>
+          <a:ln w="19050">
+            <a:solidFill>
+              <a:srgbClr val="00BE83"/>
+            </a:solidFill>
+          </a:ln>
+          <a:effectLst/>
+        </p:spPr>
+        <p:txBody>
+          <a:bodyPr rtlCol="0" anchor="ctr" lIns="0" rIns="0" tIns="0" bIns="0"/>
+          <a:lstStyle/>
+          <a:p>
+            <a:pPr algn="ctr"/>
+          </a:p>
+        </p:txBody>
+      </p:sp>
+      <p:sp>
+        <p:nvSpPr>
+          <p:cNvPr id="80" name="핵심성과 라벨"/>
+          <p:cNvSpPr/>
+          <p:nvPr/>
+        </p:nvSpPr>
+        <p:spPr>
+          <a:xfrm>
+            <a:off x="756000" y="9066647"/>
+            <a:ext cx="657391" cy="414783"/>
+          </a:xfrm>
+          <a:prstGeom prst="homePlate">
+            <a:avLst>
+              <a:gd name="adj" fmla="val 28000"/>
+            </a:avLst>
+          </a:prstGeom>
+          <a:solidFill>
+            <a:srgbClr val="002060"/>
+          </a:solidFill>
+          <a:ln>
+            <a:noFill/>
+          </a:ln>
+          <a:effectLst/>
+        </p:spPr>
+        <p:txBody>
+          <a:bodyPr rtlCol="0" anchor="ctr" lIns="18000" rIns="79200" tIns="0" bIns="0" wrap="square"/>
+          <a:lstStyle/>
+          <a:p>
+            <a:pPr marL="0" indent="0" algn="ctr">
+              <a:lnSpc>
+                <a:spcPct val="110000"/>
+              </a:lnSpc>
+              <a:spcBef>
+                <a:spcPts val="0"/>
+              </a:spcBef>
+              <a:spcAft>
+                <a:spcPts val="0"/>
+              </a:spcAft>
+              <a:buNone/>
+            </a:pPr>
+            <a:r>
+              <a:rPr lang="ko-KR" sz="1100" b="1" spc="-55" dirty="0">
+                <a:solidFill>
+                  <a:srgbClr val="FFFFFF"/>
+                </a:solidFill>
+                <a:latin typeface="Pretendard"/>
+                <a:ea typeface="Pretendard"/>
+              </a:rPr>
+              <a:t>추진성과</a:t>
+            </a:r>
+          </a:p>
+        </p:txBody>
+      </p:sp>
+      <p:sp>
+        <p:nvSpPr>
+          <p:cNvPr id="81" name="핵심성과 문구"/>
+          <p:cNvSpPr txBox="1"/>
+          <p:nvPr/>
+        </p:nvSpPr>
+        <p:spPr>
+          <a:xfrm>
+            <a:off x="1501043" y="9044734"/>
+            <a:ext cx="5456348" cy="458609"/>
+          </a:xfrm>
+          <a:prstGeom prst="rect">
+            <a:avLst/>
+          </a:prstGeom>
+          <a:noFill/>
+        </p:spPr>
+        <p:txBody>
+          <a:bodyPr wrap="square" lIns="36000" tIns="10800" rIns="36000" bIns="10800" anchor="ctr">
+            <a:noAutofit/>
+          </a:bodyPr>
+          <a:lstStyle/>
+          <a:p>
+            <a:pPr marL="151200" indent="-151200" algn="l">
+              <a:lnSpc>
+                <a:spcPct val="110000"/>
+              </a:lnSpc>
+              <a:spcBef>
+                <a:spcPts val="0"/>
+              </a:spcBef>
+              <a:spcAft>
+                <a:spcPts val="0"/>
+              </a:spcAft>
+              <a:buClr>
+                <a:srgbClr val="000359"/>
+              </a:buClr>
+              <a:buFont typeface="Pretendard"/>
+              <a:buChar char="•"/>
+            </a:pPr>
+            <a:r>
+              <a:rPr lang="ko-KR" sz="1100" b="1" spc="-55" dirty="0">
+                <a:solidFill>
+                  <a:srgbClr val="000359"/>
+                </a:solidFill>
+                <a:latin typeface="Pretendard"/>
+                <a:ea typeface="Pretendard"/>
+              </a:rPr>
+              <a:t>노사합의 체결('25.12월) → 장시간 근무해소(△79시간)를 통한 건강권 확보와 임금보전까지 일거양득</a:t>
+            </a:r>
+          </a:p>
+        </p:txBody>
+      </p:sp>
+    </p:spTree>
+  </p:cSld>
+  <p:clrMapOvr>
+    <a:masterClrMapping/>
+  </p:clrMapOvr>
+</p:sld>
+</file>
+
+<file path=ppt/slides/slide11.xml><?xml version="1.0" encoding="utf-8"?>
+<p:sld xmlns:a="http://schemas.openxmlformats.org/drawingml/2006/main" xmlns:p="http://schemas.openxmlformats.org/presentationml/2006/main" xmlns:r="http://schemas.openxmlformats.org/officeDocument/2006/relationships">
+  <p:cSld>
+    <p:spTree>
+      <p:nvGrpSpPr>
+        <p:cNvPr id="1" name=""/>
+        <p:cNvGrpSpPr/>
+        <p:nvPr/>
+      </p:nvGrpSpPr>
+      <p:grpSpPr/>
+      <p:sp>
+        <p:nvSpPr>
+          <p:cNvPr id="2" name="Text Placeholder 1"/>
+          <p:cNvSpPr>
+            <a:spLocks noGrp="1"/>
+          </p:cNvSpPr>
+          <p:nvPr>
+            <p:ph type="body" idx="13" sz="quarter"/>
+          </p:nvPr>
+        </p:nvSpPr>
+        <p:spPr/>
+        <p:txBody>
+          <a:bodyPr/>
+          <a:lstStyle/>
+          <a:p>
+            <a:r>
+              <a:t>4</a:t>
+            </a:r>
+          </a:p>
+        </p:txBody>
+      </p:sp>
+      <p:sp>
+        <p:nvSpPr>
+          <p:cNvPr id="3" name="Text Placeholder 2"/>
+          <p:cNvSpPr>
+            <a:spLocks noGrp="1"/>
+          </p:cNvSpPr>
+          <p:nvPr>
+            <p:ph type="body" idx="14" sz="quarter"/>
+          </p:nvPr>
+        </p:nvSpPr>
+        <p:spPr/>
+        <p:txBody>
+          <a:bodyPr/>
+          <a:lstStyle/>
+          <a:p>
+            <a:r>
+              <a:t>Ⅰ. 경영관리 범주</a:t>
+            </a:r>
+          </a:p>
+        </p:txBody>
+      </p:sp>
+      <p:sp>
+        <p:nvSpPr>
+          <p:cNvPr id="4" name="Text Placeholder 3"/>
+          <p:cNvSpPr>
+            <a:spLocks noGrp="1"/>
+          </p:cNvSpPr>
+          <p:nvPr>
+            <p:ph type="body" idx="15" sz="quarter"/>
+          </p:nvPr>
+        </p:nvSpPr>
+        <p:spPr/>
+        <p:txBody>
+          <a:bodyPr/>
+          <a:lstStyle/>
+          <a:p>
+            <a:r>
+              <a:t>조직 운영 및 관리</a:t>
+            </a:r>
+          </a:p>
+        </p:txBody>
+      </p:sp>
+      <p:sp>
+        <p:nvSpPr>
+          <p:cNvPr id="5" name="Text Placeholder 4"/>
+          <p:cNvSpPr>
+            <a:spLocks noGrp="1"/>
+          </p:cNvSpPr>
+          <p:nvPr>
+            <p:ph type="body" idx="16" sz="quarter"/>
+          </p:nvPr>
+        </p:nvSpPr>
+        <p:spPr/>
+        <p:txBody>
+          <a:bodyPr/>
+          <a:lstStyle/>
+          <a:p>
+            <a:r>
+              <a:t>11</a:t>
+            </a:r>
+          </a:p>
+        </p:txBody>
+      </p:sp>
+      <p:sp>
+        <p:nvSpPr>
+          <p:cNvPr id="6" name="Text Placeholder 5"/>
+          <p:cNvSpPr>
+            <a:spLocks noGrp="1"/>
+          </p:cNvSpPr>
+          <p:nvPr>
+            <p:ph type="body" idx="17" sz="quarter"/>
+          </p:nvPr>
+        </p:nvSpPr>
+        <p:spPr/>
+        <p:txBody>
+          <a:bodyPr/>
+          <a:lstStyle/>
+          <a:p>
+            <a:r>
+              <a:t>2025년도 경영실적보고서</a:t>
+            </a:r>
+          </a:p>
+        </p:txBody>
+      </p:sp>
+      <p:sp>
+        <p:nvSpPr>
+          <p:cNvPr id="7" name="형광 밑줄"/>
+          <p:cNvSpPr/>
+          <p:nvPr/>
+        </p:nvSpPr>
+        <p:spPr>
+          <a:xfrm>
+            <a:off x="536870" y="920348"/>
+            <a:ext cx="3634156" cy="43826"/>
+          </a:xfrm>
+          <a:prstGeom prst="rect">
+            <a:avLst/>
+          </a:prstGeom>
+          <a:solidFill>
+            <a:srgbClr val="29FFBD"/>
+          </a:solidFill>
+          <a:ln>
+            <a:noFill/>
+          </a:ln>
+          <a:effectLst/>
+        </p:spPr>
+        <p:txBody>
+          <a:bodyPr rtlCol="0" anchor="ctr" lIns="0" rIns="0" tIns="0" bIns="0"/>
+          <a:lstStyle/>
+          <a:p>
+            <a:pPr algn="ctr"/>
+          </a:p>
+        </p:txBody>
+      </p:sp>
+      <p:sp>
+        <p:nvSpPr>
+          <p:cNvPr id="8" name="소제목"/>
+          <p:cNvSpPr txBox="1"/>
+          <p:nvPr/>
+        </p:nvSpPr>
+        <p:spPr>
+          <a:xfrm>
+            <a:off x="536870" y="766957"/>
+            <a:ext cx="6300000" cy="241043"/>
+          </a:xfrm>
+          <a:prstGeom prst="rect">
+            <a:avLst/>
+          </a:prstGeom>
+          <a:noFill/>
+        </p:spPr>
+        <p:txBody>
+          <a:bodyPr wrap="square" lIns="0" tIns="0" rIns="0" bIns="0" anchor="ctr">
+            <a:noAutofit/>
+          </a:bodyPr>
+          <a:lstStyle/>
+          <a:p>
+            <a:pPr marL="0" indent="0" algn="l">
+              <a:lnSpc>
+                <a:spcPct val="110000"/>
+              </a:lnSpc>
+              <a:spcBef>
+                <a:spcPts val="0"/>
+              </a:spcBef>
+              <a:spcAft>
+                <a:spcPts val="0"/>
+              </a:spcAft>
+              <a:buNone/>
+            </a:pPr>
+            <a:r>
+              <a:rPr lang="ko-KR" sz="1200" b="1" spc="-60" dirty="0">
+                <a:solidFill>
+                  <a:srgbClr val="000359"/>
+                </a:solidFill>
+                <a:latin typeface="Pretendard"/>
+                <a:ea typeface="Pretendard"/>
+              </a:rPr>
+              <a:t>라. 직원 만족도를 높이는 복리후생 향상과 근무환경 개선 노력</a:t>
+            </a:r>
+          </a:p>
+        </p:txBody>
+      </p:sp>
+      <p:sp>
+        <p:nvSpPr>
+          <p:cNvPr id="9" name="태그칩"/>
+          <p:cNvSpPr/>
+          <p:nvPr/>
+        </p:nvSpPr>
+        <p:spPr>
+          <a:xfrm>
+            <a:off x="4269635" y="799826"/>
+            <a:ext cx="351016" cy="175304"/>
+          </a:xfrm>
+          <a:prstGeom prst="rect">
+            <a:avLst/>
+          </a:prstGeom>
+          <a:solidFill>
+            <a:srgbClr val="0051BC"/>
+          </a:solidFill>
+          <a:ln>
+            <a:noFill/>
+          </a:ln>
+          <a:effectLst/>
+        </p:spPr>
+        <p:txBody>
+          <a:bodyPr rtlCol="0" anchor="ctr" lIns="10800" rIns="10800" tIns="0" bIns="0" wrap="square"/>
+          <a:lstStyle/>
+          <a:p>
+            <a:pPr marL="0" indent="0" algn="ctr">
+              <a:lnSpc>
+                <a:spcPct val="110000"/>
+              </a:lnSpc>
+              <a:spcBef>
+                <a:spcPts val="0"/>
+              </a:spcBef>
+              <a:spcAft>
+                <a:spcPts val="0"/>
+              </a:spcAft>
+              <a:buNone/>
+            </a:pPr>
+            <a:r>
+              <a:rPr lang="ko-KR" sz="1000" b="1" spc="-50" dirty="0">
+                <a:solidFill>
+                  <a:srgbClr val="FFFFFF"/>
+                </a:solidFill>
+                <a:latin typeface="Pretendard"/>
+                <a:ea typeface="Pretendard"/>
+              </a:rPr>
+              <a:t>강화</a:t>
+            </a:r>
+          </a:p>
+        </p:txBody>
+      </p:sp>
+      <p:sp>
+        <p:nvSpPr>
+          <p:cNvPr id="10" name="패널 외곽"/>
+          <p:cNvSpPr/>
+          <p:nvPr/>
+        </p:nvSpPr>
+        <p:spPr>
+          <a:xfrm>
+            <a:off x="536870" y="1062783"/>
+            <a:ext cx="2070783" cy="1223499"/>
+          </a:xfrm>
+          <a:prstGeom prst="rect">
+            <a:avLst/>
+          </a:prstGeom>
+          <a:solidFill>
+            <a:srgbClr val="FFFFFF"/>
+          </a:solidFill>
+          <a:ln w="12700">
+            <a:solidFill>
+              <a:srgbClr val="BDE0FF"/>
+            </a:solidFill>
+          </a:ln>
+          <a:effectLst/>
+        </p:spPr>
+        <p:txBody>
+          <a:bodyPr rtlCol="0" anchor="ctr" lIns="0" rIns="0" tIns="0" bIns="0"/>
+          <a:lstStyle/>
+          <a:p>
+            <a:pPr algn="ctr"/>
+          </a:p>
+        </p:txBody>
+      </p:sp>
+      <p:sp>
+        <p:nvSpPr>
+          <p:cNvPr id="11" name="패널 머리"/>
+          <p:cNvSpPr/>
+          <p:nvPr/>
+        </p:nvSpPr>
+        <p:spPr>
+          <a:xfrm>
+            <a:off x="536870" y="1062783"/>
+            <a:ext cx="2070783" cy="230087"/>
+          </a:xfrm>
+          <a:prstGeom prst="rect">
+            <a:avLst/>
+          </a:prstGeom>
+          <a:solidFill>
+            <a:srgbClr val="BDE0FF"/>
+          </a:solidFill>
+          <a:ln>
+            <a:noFill/>
+          </a:ln>
+          <a:effectLst/>
+        </p:spPr>
+        <p:txBody>
+          <a:bodyPr rtlCol="0" anchor="ctr" lIns="28800" rIns="28800" tIns="7200" bIns="7200" wrap="square"/>
+          <a:lstStyle/>
+          <a:p>
+            <a:pPr marL="0" indent="0" algn="ctr">
+              <a:lnSpc>
+                <a:spcPct val="110000"/>
+              </a:lnSpc>
+              <a:spcBef>
+                <a:spcPts val="0"/>
+              </a:spcBef>
+              <a:spcAft>
+                <a:spcPts val="0"/>
+              </a:spcAft>
+              <a:buNone/>
+            </a:pPr>
+            <a:r>
+              <a:rPr lang="ko-KR" sz="1000" b="1" spc="-50" dirty="0">
+                <a:solidFill>
+                  <a:srgbClr val="000359"/>
+                </a:solidFill>
+                <a:latin typeface="Pretendard"/>
+                <a:ea typeface="Pretendard"/>
+              </a:rPr>
+              <a:t>복리후생 향상</a:t>
+            </a:r>
+          </a:p>
+        </p:txBody>
+      </p:sp>
+      <p:sp>
+        <p:nvSpPr>
+          <p:cNvPr id="12" name="패널 본문"/>
+          <p:cNvSpPr txBox="1"/>
+          <p:nvPr/>
+        </p:nvSpPr>
+        <p:spPr>
+          <a:xfrm>
+            <a:off x="558783" y="1303826"/>
+            <a:ext cx="2026957" cy="719499"/>
+          </a:xfrm>
+          <a:prstGeom prst="rect">
+            <a:avLst/>
+          </a:prstGeom>
+          <a:noFill/>
+        </p:spPr>
+        <p:txBody>
+          <a:bodyPr wrap="square" lIns="50400" tIns="7200" rIns="21600" bIns="7200" anchor="ctr">
+            <a:noAutofit/>
+          </a:bodyPr>
+          <a:lstStyle/>
+          <a:p>
+            <a:pPr marL="118800" indent="-118800" algn="l">
+              <a:lnSpc>
+                <a:spcPct val="110000"/>
+              </a:lnSpc>
+              <a:spcBef>
+                <a:spcPts val="0"/>
+              </a:spcBef>
+              <a:spcAft>
+                <a:spcPts val="50"/>
+              </a:spcAft>
+              <a:buClr>
+                <a:srgbClr val="000359"/>
+              </a:buClr>
+              <a:buFont typeface="Pretendard"/>
+              <a:buChar char="•"/>
+            </a:pPr>
+            <a:r>
+              <a:rPr lang="ko-KR" sz="1000" spc="-50" dirty="0">
+                <a:solidFill>
+                  <a:srgbClr val="000359"/>
+                </a:solidFill>
+                <a:latin typeface="Pretendard"/>
+                <a:ea typeface="Pretendard"/>
+              </a:rPr>
+              <a:t>휴양소 운영 확대(502명 이용)</a:t>
+            </a:r>
+          </a:p>
+          <a:p>
+            <a:pPr marL="118800" indent="-118800" algn="l">
+              <a:lnSpc>
+                <a:spcPct val="110000"/>
+              </a:lnSpc>
+              <a:spcBef>
+                <a:spcPts val="0"/>
+              </a:spcBef>
+              <a:spcAft>
+                <a:spcPts val="50"/>
+              </a:spcAft>
+              <a:buClr>
+                <a:srgbClr val="000359"/>
+              </a:buClr>
+              <a:buFont typeface="Pretendard"/>
+              <a:buChar char="•"/>
+            </a:pPr>
+            <a:r>
+              <a:rPr lang="ko-KR" sz="1000" spc="-50" dirty="0">
+                <a:solidFill>
+                  <a:srgbClr val="000359"/>
+                </a:solidFill>
+                <a:latin typeface="Pretendard"/>
+                <a:ea typeface="Pretendard"/>
+              </a:rPr>
+              <a:t>전 사택 이동식 에어컨 보급 지원</a:t>
+            </a:r>
+          </a:p>
+          <a:p>
+            <a:pPr marL="118800" indent="-118800" algn="l">
+              <a:lnSpc>
+                <a:spcPct val="110000"/>
+              </a:lnSpc>
+              <a:spcBef>
+                <a:spcPts val="0"/>
+              </a:spcBef>
+              <a:spcAft>
+                <a:spcPts val="50"/>
+              </a:spcAft>
+              <a:buClr>
+                <a:srgbClr val="000359"/>
+              </a:buClr>
+              <a:buFont typeface="Pretendard"/>
+              <a:buChar char="•"/>
+            </a:pPr>
+            <a:r>
+              <a:rPr lang="ko-KR" sz="1000" spc="-50" dirty="0">
+                <a:solidFill>
+                  <a:srgbClr val="000359"/>
+                </a:solidFill>
+                <a:latin typeface="Pretendard"/>
+                <a:ea typeface="Pretendard"/>
+              </a:rPr>
+              <a:t>장례서비스 지원 확대(배우자상 포함)</a:t>
+            </a:r>
+          </a:p>
+        </p:txBody>
+      </p:sp>
+      <p:sp>
+        <p:nvSpPr>
+          <p:cNvPr id="13" name="요약 바"/>
+          <p:cNvSpPr/>
+          <p:nvPr/>
+        </p:nvSpPr>
+        <p:spPr>
+          <a:xfrm>
+            <a:off x="558783" y="2045238"/>
+            <a:ext cx="2026957" cy="219130"/>
+          </a:xfrm>
+          <a:prstGeom prst="rect">
+            <a:avLst/>
+          </a:prstGeom>
+          <a:solidFill>
+            <a:srgbClr val="DEEEFF"/>
+          </a:solidFill>
+          <a:ln>
+            <a:noFill/>
+          </a:ln>
+          <a:effectLst/>
+        </p:spPr>
+        <p:txBody>
+          <a:bodyPr rtlCol="0" anchor="ctr" lIns="28800" rIns="28800" tIns="7200" bIns="7200" wrap="square"/>
+          <a:lstStyle/>
+          <a:p>
+            <a:pPr marL="0" indent="0" algn="ctr">
+              <a:lnSpc>
+                <a:spcPct val="110000"/>
+              </a:lnSpc>
+              <a:spcBef>
+                <a:spcPts val="0"/>
+              </a:spcBef>
+              <a:spcAft>
+                <a:spcPts val="0"/>
+              </a:spcAft>
+              <a:buNone/>
+            </a:pPr>
+            <a:r>
+              <a:rPr lang="ko-KR" sz="1000" spc="-50" dirty="0">
+                <a:solidFill>
+                  <a:srgbClr val="000359"/>
+                </a:solidFill>
+                <a:latin typeface="Pretendard"/>
+                <a:ea typeface="Pretendard"/>
+              </a:rPr>
+              <a:t>복리후생만족도 92.1점</a:t>
+            </a:r>
+          </a:p>
+        </p:txBody>
+      </p:sp>
+      <p:sp>
+        <p:nvSpPr>
+          <p:cNvPr id="14" name="패널 외곽"/>
+          <p:cNvSpPr/>
+          <p:nvPr/>
+        </p:nvSpPr>
+        <p:spPr>
+          <a:xfrm>
+            <a:off x="2651478" y="1062783"/>
+            <a:ext cx="2070783" cy="1223499"/>
+          </a:xfrm>
+          <a:prstGeom prst="rect">
+            <a:avLst/>
+          </a:prstGeom>
+          <a:solidFill>
+            <a:srgbClr val="FFFFFF"/>
+          </a:solidFill>
+          <a:ln w="12700">
+            <a:solidFill>
+              <a:srgbClr val="BDE0FF"/>
+            </a:solidFill>
+          </a:ln>
+          <a:effectLst/>
+        </p:spPr>
+        <p:txBody>
+          <a:bodyPr rtlCol="0" anchor="ctr" lIns="0" rIns="0" tIns="0" bIns="0"/>
+          <a:lstStyle/>
+          <a:p>
+            <a:pPr algn="ctr"/>
+          </a:p>
+        </p:txBody>
+      </p:sp>
+      <p:sp>
+        <p:nvSpPr>
+          <p:cNvPr id="15" name="패널 머리"/>
+          <p:cNvSpPr/>
+          <p:nvPr/>
+        </p:nvSpPr>
+        <p:spPr>
+          <a:xfrm>
+            <a:off x="2651478" y="1062783"/>
+            <a:ext cx="2070783" cy="230087"/>
+          </a:xfrm>
+          <a:prstGeom prst="rect">
+            <a:avLst/>
+          </a:prstGeom>
+          <a:solidFill>
+            <a:srgbClr val="BDE0FF"/>
+          </a:solidFill>
+          <a:ln>
+            <a:noFill/>
+          </a:ln>
+          <a:effectLst/>
+        </p:spPr>
+        <p:txBody>
+          <a:bodyPr rtlCol="0" anchor="ctr" lIns="28800" rIns="28800" tIns="7200" bIns="7200" wrap="square"/>
+          <a:lstStyle/>
+          <a:p>
+            <a:pPr marL="0" indent="0" algn="ctr">
+              <a:lnSpc>
+                <a:spcPct val="110000"/>
+              </a:lnSpc>
+              <a:spcBef>
+                <a:spcPts val="0"/>
+              </a:spcBef>
+              <a:spcAft>
+                <a:spcPts val="0"/>
+              </a:spcAft>
+              <a:buNone/>
+            </a:pPr>
+            <a:r>
+              <a:rPr lang="ko-KR" sz="1000" b="1" spc="-50" dirty="0">
+                <a:solidFill>
+                  <a:srgbClr val="000359"/>
+                </a:solidFill>
+                <a:latin typeface="Pretendard"/>
+                <a:ea typeface="Pretendard"/>
+              </a:rPr>
+              <a:t>가족친화경영 확대</a:t>
+            </a:r>
+          </a:p>
+        </p:txBody>
+      </p:sp>
+      <p:sp>
+        <p:nvSpPr>
+          <p:cNvPr id="16" name="패널 본문"/>
+          <p:cNvSpPr txBox="1"/>
+          <p:nvPr/>
+        </p:nvSpPr>
+        <p:spPr>
+          <a:xfrm>
+            <a:off x="2673391" y="1303826"/>
+            <a:ext cx="2026957" cy="719499"/>
+          </a:xfrm>
+          <a:prstGeom prst="rect">
+            <a:avLst/>
+          </a:prstGeom>
+          <a:noFill/>
+        </p:spPr>
+        <p:txBody>
+          <a:bodyPr wrap="square" lIns="50400" tIns="7200" rIns="21600" bIns="7200" anchor="ctr">
+            <a:noAutofit/>
+          </a:bodyPr>
+          <a:lstStyle/>
+          <a:p>
+            <a:pPr marL="118800" indent="-118800" algn="l">
+              <a:lnSpc>
+                <a:spcPct val="110000"/>
+              </a:lnSpc>
+              <a:spcBef>
+                <a:spcPts val="0"/>
+              </a:spcBef>
+              <a:spcAft>
+                <a:spcPts val="50"/>
+              </a:spcAft>
+              <a:buClr>
+                <a:srgbClr val="000359"/>
+              </a:buClr>
+              <a:buFont typeface="Pretendard"/>
+              <a:buChar char="•"/>
+            </a:pPr>
+            <a:r>
+              <a:rPr lang="ko-KR" sz="1000" spc="-50" dirty="0">
+                <a:solidFill>
+                  <a:srgbClr val="000359"/>
+                </a:solidFill>
+                <a:latin typeface="Pretendard"/>
+                <a:ea typeface="Pretendard"/>
+              </a:rPr>
+              <a:t>출산축하금 신설(둘째 50, 셋째 100만)</a:t>
+            </a:r>
+          </a:p>
+          <a:p>
+            <a:pPr marL="118800" indent="-118800" algn="l">
+              <a:lnSpc>
+                <a:spcPct val="110000"/>
+              </a:lnSpc>
+              <a:spcBef>
+                <a:spcPts val="0"/>
+              </a:spcBef>
+              <a:spcAft>
+                <a:spcPts val="50"/>
+              </a:spcAft>
+              <a:buClr>
+                <a:srgbClr val="000359"/>
+              </a:buClr>
+              <a:buFont typeface="Pretendard"/>
+              <a:buChar char="•"/>
+            </a:pPr>
+            <a:r>
+              <a:rPr lang="ko-KR" sz="1000" spc="-50" dirty="0">
+                <a:solidFill>
+                  <a:srgbClr val="000359"/>
+                </a:solidFill>
+                <a:latin typeface="Pretendard"/>
+                <a:ea typeface="Pretendard"/>
+              </a:rPr>
+              <a:t>육아지원 3법·임신검진동행휴가 도입</a:t>
+            </a:r>
+          </a:p>
+          <a:p>
+            <a:pPr marL="118800" indent="-118800" algn="l">
+              <a:lnSpc>
+                <a:spcPct val="110000"/>
+              </a:lnSpc>
+              <a:spcBef>
+                <a:spcPts val="0"/>
+              </a:spcBef>
+              <a:spcAft>
+                <a:spcPts val="50"/>
+              </a:spcAft>
+              <a:buClr>
+                <a:srgbClr val="000359"/>
+              </a:buClr>
+              <a:buFont typeface="Pretendard"/>
+              <a:buChar char="•"/>
+            </a:pPr>
+            <a:r>
+              <a:rPr lang="ko-KR" sz="1000" spc="-50" dirty="0">
+                <a:solidFill>
+                  <a:srgbClr val="000359"/>
+                </a:solidFill>
+                <a:latin typeface="Pretendard"/>
+                <a:ea typeface="Pretendard"/>
+              </a:rPr>
+              <a:t>자녀초청행사, 가족 동반 퇴임식 개최</a:t>
+            </a:r>
+          </a:p>
+        </p:txBody>
+      </p:sp>
+      <p:sp>
+        <p:nvSpPr>
+          <p:cNvPr id="17" name="요약 바"/>
+          <p:cNvSpPr/>
+          <p:nvPr/>
+        </p:nvSpPr>
+        <p:spPr>
+          <a:xfrm>
+            <a:off x="2673391" y="2045238"/>
+            <a:ext cx="2026957" cy="219130"/>
+          </a:xfrm>
+          <a:prstGeom prst="rect">
+            <a:avLst/>
+          </a:prstGeom>
+          <a:solidFill>
+            <a:srgbClr val="DEEEFF"/>
+          </a:solidFill>
+          <a:ln>
+            <a:noFill/>
+          </a:ln>
+          <a:effectLst/>
+        </p:spPr>
+        <p:txBody>
+          <a:bodyPr rtlCol="0" anchor="ctr" lIns="28800" rIns="28800" tIns="7200" bIns="7200" wrap="square"/>
+          <a:lstStyle/>
+          <a:p>
+            <a:pPr marL="0" indent="0" algn="ctr">
+              <a:lnSpc>
+                <a:spcPct val="110000"/>
+              </a:lnSpc>
+              <a:spcBef>
+                <a:spcPts val="0"/>
+              </a:spcBef>
+              <a:spcAft>
+                <a:spcPts val="0"/>
+              </a:spcAft>
+              <a:buNone/>
+            </a:pPr>
+            <a:r>
+              <a:rPr lang="ko-KR" sz="1000" spc="-50" dirty="0">
+                <a:solidFill>
+                  <a:srgbClr val="000359"/>
+                </a:solidFill>
+                <a:latin typeface="Pretendard"/>
+                <a:ea typeface="Pretendard"/>
+              </a:rPr>
+              <a:t>가족친화 만족도 8.6점</a:t>
+            </a:r>
+          </a:p>
+        </p:txBody>
+      </p:sp>
+      <p:sp>
+        <p:nvSpPr>
+          <p:cNvPr id="18" name="패널 외곽"/>
+          <p:cNvSpPr/>
+          <p:nvPr/>
+        </p:nvSpPr>
+        <p:spPr>
+          <a:xfrm>
+            <a:off x="4766087" y="1062783"/>
+            <a:ext cx="2070783" cy="1223499"/>
+          </a:xfrm>
+          <a:prstGeom prst="rect">
+            <a:avLst/>
+          </a:prstGeom>
+          <a:solidFill>
+            <a:srgbClr val="FFFFFF"/>
+          </a:solidFill>
+          <a:ln w="12700">
+            <a:solidFill>
+              <a:srgbClr val="BDE0FF"/>
+            </a:solidFill>
+          </a:ln>
+          <a:effectLst/>
+        </p:spPr>
+        <p:txBody>
+          <a:bodyPr rtlCol="0" anchor="ctr" lIns="0" rIns="0" tIns="0" bIns="0"/>
+          <a:lstStyle/>
+          <a:p>
+            <a:pPr algn="ctr"/>
+          </a:p>
+        </p:txBody>
+      </p:sp>
+      <p:sp>
+        <p:nvSpPr>
+          <p:cNvPr id="19" name="패널 머리"/>
+          <p:cNvSpPr/>
+          <p:nvPr/>
+        </p:nvSpPr>
+        <p:spPr>
+          <a:xfrm>
+            <a:off x="4766087" y="1062783"/>
+            <a:ext cx="2070783" cy="230087"/>
+          </a:xfrm>
+          <a:prstGeom prst="rect">
+            <a:avLst/>
+          </a:prstGeom>
+          <a:solidFill>
+            <a:srgbClr val="BDE0FF"/>
+          </a:solidFill>
+          <a:ln>
+            <a:noFill/>
+          </a:ln>
+          <a:effectLst/>
+        </p:spPr>
+        <p:txBody>
+          <a:bodyPr rtlCol="0" anchor="ctr" lIns="28800" rIns="28800" tIns="7200" bIns="7200" wrap="square"/>
+          <a:lstStyle/>
+          <a:p>
+            <a:pPr marL="0" indent="0" algn="ctr">
+              <a:lnSpc>
+                <a:spcPct val="110000"/>
+              </a:lnSpc>
+              <a:spcBef>
+                <a:spcPts val="0"/>
+              </a:spcBef>
+              <a:spcAft>
+                <a:spcPts val="0"/>
+              </a:spcAft>
+              <a:buNone/>
+            </a:pPr>
+            <a:r>
+              <a:rPr lang="ko-KR" sz="1000" b="1" spc="-50" dirty="0">
+                <a:solidFill>
+                  <a:srgbClr val="000359"/>
+                </a:solidFill>
+                <a:latin typeface="Pretendard"/>
+                <a:ea typeface="Pretendard"/>
+              </a:rPr>
+              <a:t>안전일터 조성</a:t>
+            </a:r>
+          </a:p>
+        </p:txBody>
+      </p:sp>
+      <p:sp>
+        <p:nvSpPr>
+          <p:cNvPr id="20" name="패널 본문"/>
+          <p:cNvSpPr txBox="1"/>
+          <p:nvPr/>
+        </p:nvSpPr>
+        <p:spPr>
+          <a:xfrm>
+            <a:off x="4788000" y="1303826"/>
+            <a:ext cx="2026957" cy="719499"/>
+          </a:xfrm>
+          <a:prstGeom prst="rect">
+            <a:avLst/>
+          </a:prstGeom>
+          <a:noFill/>
+        </p:spPr>
+        <p:txBody>
+          <a:bodyPr wrap="square" lIns="50400" tIns="7200" rIns="21600" bIns="7200" anchor="ctr">
+            <a:noAutofit/>
+          </a:bodyPr>
+          <a:lstStyle/>
+          <a:p>
+            <a:pPr marL="118800" indent="-118800" algn="l">
+              <a:lnSpc>
+                <a:spcPct val="110000"/>
+              </a:lnSpc>
+              <a:spcBef>
+                <a:spcPts val="0"/>
+              </a:spcBef>
+              <a:spcAft>
+                <a:spcPts val="50"/>
+              </a:spcAft>
+              <a:buClr>
+                <a:srgbClr val="000359"/>
+              </a:buClr>
+              <a:buFont typeface="Pretendard"/>
+              <a:buChar char="•"/>
+            </a:pPr>
+            <a:r>
+              <a:rPr lang="ko-KR" sz="1000" spc="-50" dirty="0">
+                <a:solidFill>
+                  <a:srgbClr val="000359"/>
+                </a:solidFill>
+                <a:latin typeface="Pretendard"/>
+                <a:ea typeface="Pretendard"/>
+              </a:rPr>
+              <a:t>석면 잔존 사업장 제거 공사(8개소)</a:t>
+            </a:r>
+          </a:p>
+          <a:p>
+            <a:pPr marL="118800" indent="-118800" algn="l">
+              <a:lnSpc>
+                <a:spcPct val="110000"/>
+              </a:lnSpc>
+              <a:spcBef>
+                <a:spcPts val="0"/>
+              </a:spcBef>
+              <a:spcAft>
+                <a:spcPts val="50"/>
+              </a:spcAft>
+              <a:buClr>
+                <a:srgbClr val="000359"/>
+              </a:buClr>
+              <a:buFont typeface="Pretendard"/>
+              <a:buChar char="•"/>
+            </a:pPr>
+            <a:r>
+              <a:rPr lang="ko-KR" sz="1000" spc="-50" dirty="0">
+                <a:solidFill>
+                  <a:srgbClr val="000359"/>
+                </a:solidFill>
+                <a:latin typeface="Pretendard"/>
+                <a:ea typeface="Pretendard"/>
+              </a:rPr>
+              <a:t>40년↑ 청사 안전진단·컨설팅 실시</a:t>
+            </a:r>
+          </a:p>
+          <a:p>
+            <a:pPr marL="118800" indent="-118800" algn="l">
+              <a:lnSpc>
+                <a:spcPct val="110000"/>
+              </a:lnSpc>
+              <a:spcBef>
+                <a:spcPts val="0"/>
+              </a:spcBef>
+              <a:spcAft>
+                <a:spcPts val="50"/>
+              </a:spcAft>
+              <a:buClr>
+                <a:srgbClr val="000359"/>
+              </a:buClr>
+              <a:buFont typeface="Pretendard"/>
+              <a:buChar char="•"/>
+            </a:pPr>
+            <a:r>
+              <a:rPr lang="ko-KR" sz="1000" spc="-50" dirty="0">
+                <a:solidFill>
+                  <a:srgbClr val="000359"/>
+                </a:solidFill>
+                <a:latin typeface="Pretendard"/>
+                <a:ea typeface="Pretendard"/>
+              </a:rPr>
+              <a:t>직무스트레스 조사 및 사후관리 실시</a:t>
+            </a:r>
+          </a:p>
+        </p:txBody>
+      </p:sp>
+      <p:sp>
+        <p:nvSpPr>
+          <p:cNvPr id="21" name="요약 바"/>
+          <p:cNvSpPr/>
+          <p:nvPr/>
+        </p:nvSpPr>
+        <p:spPr>
+          <a:xfrm>
+            <a:off x="4788000" y="2045238"/>
+            <a:ext cx="2026957" cy="219130"/>
+          </a:xfrm>
+          <a:prstGeom prst="rect">
+            <a:avLst/>
+          </a:prstGeom>
+          <a:solidFill>
+            <a:srgbClr val="DEEEFF"/>
+          </a:solidFill>
+          <a:ln>
+            <a:noFill/>
+          </a:ln>
+          <a:effectLst/>
+        </p:spPr>
+        <p:txBody>
+          <a:bodyPr rtlCol="0" anchor="ctr" lIns="28800" rIns="28800" tIns="7200" bIns="7200" wrap="square"/>
+          <a:lstStyle/>
+          <a:p>
+            <a:pPr marL="0" indent="0" algn="ctr">
+              <a:lnSpc>
+                <a:spcPct val="110000"/>
+              </a:lnSpc>
+              <a:spcBef>
+                <a:spcPts val="0"/>
+              </a:spcBef>
+              <a:spcAft>
+                <a:spcPts val="0"/>
+              </a:spcAft>
+              <a:buNone/>
+            </a:pPr>
+            <a:r>
+              <a:rPr lang="ko-KR" sz="1000" spc="-50" dirty="0">
+                <a:solidFill>
+                  <a:srgbClr val="000359"/>
+                </a:solidFill>
+                <a:latin typeface="Pretendard"/>
+                <a:ea typeface="Pretendard"/>
+              </a:rPr>
+              <a:t>근로개선지수 91.6점</a:t>
+            </a:r>
+          </a:p>
+        </p:txBody>
+      </p:sp>
+      <p:sp>
+        <p:nvSpPr>
+          <p:cNvPr id="22" name="핵심성과 박스"/>
+          <p:cNvSpPr/>
+          <p:nvPr/>
+        </p:nvSpPr>
+        <p:spPr>
+          <a:xfrm>
+            <a:off x="536870" y="2373934"/>
+            <a:ext cx="6300000" cy="311478"/>
+          </a:xfrm>
+          <a:prstGeom prst="rect">
+            <a:avLst/>
+          </a:prstGeom>
+          <a:solidFill>
+            <a:srgbClr val="E6FCF9"/>
+          </a:solidFill>
+          <a:ln w="19050">
+            <a:solidFill>
+              <a:srgbClr val="00BE83"/>
+            </a:solidFill>
+          </a:ln>
+          <a:effectLst/>
+        </p:spPr>
+        <p:txBody>
+          <a:bodyPr rtlCol="0" anchor="ctr" lIns="0" rIns="0" tIns="0" bIns="0"/>
+          <a:lstStyle/>
+          <a:p>
+            <a:pPr algn="ctr"/>
+          </a:p>
+        </p:txBody>
+      </p:sp>
+      <p:sp>
+        <p:nvSpPr>
+          <p:cNvPr id="23" name="핵심성과 라벨"/>
+          <p:cNvSpPr/>
+          <p:nvPr/>
+        </p:nvSpPr>
+        <p:spPr>
+          <a:xfrm>
+            <a:off x="569739" y="2412282"/>
+            <a:ext cx="657391" cy="234783"/>
+          </a:xfrm>
+          <a:prstGeom prst="homePlate">
+            <a:avLst>
+              <a:gd name="adj" fmla="val 28000"/>
+            </a:avLst>
+          </a:prstGeom>
+          <a:solidFill>
+            <a:srgbClr val="002060"/>
+          </a:solidFill>
+          <a:ln>
+            <a:noFill/>
+          </a:ln>
+          <a:effectLst/>
+        </p:spPr>
+        <p:txBody>
+          <a:bodyPr rtlCol="0" anchor="ctr" lIns="18000" rIns="79200" tIns="0" bIns="0" wrap="square"/>
+          <a:lstStyle/>
+          <a:p>
+            <a:pPr marL="0" indent="0" algn="ctr">
+              <a:lnSpc>
+                <a:spcPct val="110000"/>
+              </a:lnSpc>
+              <a:spcBef>
+                <a:spcPts val="0"/>
+              </a:spcBef>
+              <a:spcAft>
+                <a:spcPts val="0"/>
+              </a:spcAft>
+              <a:buNone/>
+            </a:pPr>
+            <a:r>
+              <a:rPr lang="ko-KR" sz="1100" b="1" spc="-55" dirty="0">
+                <a:solidFill>
+                  <a:srgbClr val="FFFFFF"/>
+                </a:solidFill>
+                <a:latin typeface="Pretendard"/>
+                <a:ea typeface="Pretendard"/>
+              </a:rPr>
+              <a:t>핵심성과</a:t>
+            </a:r>
+          </a:p>
+        </p:txBody>
+      </p:sp>
+      <p:sp>
+        <p:nvSpPr>
+          <p:cNvPr id="24" name="핵심성과 문구"/>
+          <p:cNvSpPr txBox="1"/>
+          <p:nvPr/>
+        </p:nvSpPr>
+        <p:spPr>
+          <a:xfrm>
+            <a:off x="1314783" y="2390369"/>
+            <a:ext cx="5456348" cy="278609"/>
+          </a:xfrm>
+          <a:prstGeom prst="rect">
+            <a:avLst/>
+          </a:prstGeom>
+          <a:noFill/>
+        </p:spPr>
+        <p:txBody>
+          <a:bodyPr wrap="square" lIns="36000" tIns="10800" rIns="36000" bIns="10800" anchor="ctr">
+            <a:noAutofit/>
+          </a:bodyPr>
+          <a:lstStyle/>
+          <a:p>
+            <a:pPr marL="151200" indent="-151200" algn="l">
+              <a:lnSpc>
+                <a:spcPct val="110000"/>
+              </a:lnSpc>
+              <a:spcBef>
+                <a:spcPts val="0"/>
+              </a:spcBef>
+              <a:spcAft>
+                <a:spcPts val="0"/>
+              </a:spcAft>
+              <a:buClr>
+                <a:srgbClr val="000359"/>
+              </a:buClr>
+              <a:buFont typeface="Pretendard"/>
+              <a:buChar char="•"/>
+            </a:pPr>
+            <a:r>
+              <a:rPr lang="ko-KR" sz="1100" b="1" spc="-55" dirty="0">
+                <a:solidFill>
+                  <a:srgbClr val="000359"/>
+                </a:solidFill>
+                <a:latin typeface="Pretendard"/>
+                <a:ea typeface="Pretendard"/>
+              </a:rPr>
+              <a:t>근로개선지수 전년대비 1.5점 상승(90.1 → 91.6점), 복리후생 만족도 3년 연속 '우수' 등급 획득</a:t>
             </a:r>
           </a:p>
         </p:txBody>
@@ -8895,14 +14308,14 @@
       </p:sp>
       <p:sp>
         <p:nvSpPr>
-          <p:cNvPr id="19" name="레일 쐐기"/>
+          <p:cNvPr id="19" name="레일 삼각형"/>
           <p:cNvSpPr/>
           <p:nvPr/>
         </p:nvSpPr>
         <p:spPr>
           <a:xfrm>
             <a:off x="547826" y="1948445"/>
-            <a:ext cx="580695" cy="142435"/>
+            <a:ext cx="580695" cy="131478"/>
           </a:xfrm>
           <a:custGeom>
             <a:avLst/>
@@ -8911,7 +14324,7 @@
             <a:cxnLst/>
             <a:rect l="l" t="t" r="r" b="b"/>
             <a:pathLst>
-              <a:path w="580695" h="142435">
+              <a:path w="580695" h="131478">
                 <a:moveTo>
                   <a:pt x="0" y="0"/>
                 </a:moveTo>
@@ -8919,7 +14332,7 @@
                   <a:pt x="580695" y="0"/>
                 </a:lnTo>
                 <a:lnTo>
-                  <a:pt x="290347" y="142435"/>
+                  <a:pt x="290347" y="131478"/>
                 </a:lnTo>
                 <a:close/>
               </a:path>
@@ -9304,14 +14717,14 @@
       </p:sp>
       <p:sp>
         <p:nvSpPr>
-          <p:cNvPr id="26" name="레일 쐐기"/>
+          <p:cNvPr id="26" name="레일 삼각형"/>
           <p:cNvSpPr/>
           <p:nvPr/>
         </p:nvSpPr>
         <p:spPr>
           <a:xfrm>
             <a:off x="547826" y="2805808"/>
-            <a:ext cx="580695" cy="142435"/>
+            <a:ext cx="580695" cy="131478"/>
           </a:xfrm>
           <a:custGeom>
             <a:avLst/>
@@ -9320,7 +14733,7 @@
             <a:cxnLst/>
             <a:rect l="l" t="t" r="r" b="b"/>
             <a:pathLst>
-              <a:path w="580695" h="142435">
+              <a:path w="580695" h="131478">
                 <a:moveTo>
                   <a:pt x="0" y="0"/>
                 </a:moveTo>
@@ -9328,7 +14741,7 @@
                   <a:pt x="580695" y="0"/>
                 </a:lnTo>
                 <a:lnTo>
-                  <a:pt x="290347" y="142435"/>
+                  <a:pt x="290347" y="131478"/>
                 </a:lnTo>
                 <a:close/>
               </a:path>
@@ -9359,12 +14772,10 @@
         <p:spPr>
           <a:xfrm>
             <a:off x="1161391" y="2827722"/>
-            <a:ext cx="1081957" cy="230087"/>
-          </a:xfrm>
-          <a:prstGeom prst="homePlate">
-            <a:avLst>
-              <a:gd name="adj" fmla="val 30000"/>
-            </a:avLst>
+            <a:ext cx="1016217" cy="230087"/>
+          </a:xfrm>
+          <a:prstGeom prst="rect">
+            <a:avLst/>
           </a:prstGeom>
           <a:solidFill>
             <a:srgbClr val="DEEEFF"/>
@@ -9411,13 +14822,11 @@
         </p:nvSpPr>
         <p:spPr>
           <a:xfrm>
-            <a:off x="2111870" y="2827722"/>
-            <a:ext cx="1147696" cy="230087"/>
-          </a:xfrm>
-          <a:prstGeom prst="chevron">
-            <a:avLst>
-              <a:gd name="adj" fmla="val 30000"/>
-            </a:avLst>
+            <a:off x="2177609" y="2827722"/>
+            <a:ext cx="1016217" cy="230087"/>
+          </a:xfrm>
+          <a:prstGeom prst="rect">
+            <a:avLst/>
           </a:prstGeom>
           <a:solidFill>
             <a:srgbClr val="BDE0FF"/>
@@ -9464,13 +14873,11 @@
         </p:nvSpPr>
         <p:spPr>
           <a:xfrm>
-            <a:off x="3128087" y="2827722"/>
-            <a:ext cx="1147696" cy="230087"/>
-          </a:xfrm>
-          <a:prstGeom prst="chevron">
-            <a:avLst>
-              <a:gd name="adj" fmla="val 30000"/>
-            </a:avLst>
+            <a:off x="3193826" y="2827722"/>
+            <a:ext cx="1016217" cy="230087"/>
+          </a:xfrm>
+          <a:prstGeom prst="rect">
+            <a:avLst/>
           </a:prstGeom>
           <a:solidFill>
             <a:srgbClr val="30C2FF"/>
@@ -9517,13 +14924,11 @@
         </p:nvSpPr>
         <p:spPr>
           <a:xfrm>
-            <a:off x="4144304" y="2827722"/>
-            <a:ext cx="1081957" cy="230087"/>
-          </a:xfrm>
-          <a:prstGeom prst="chevron">
-            <a:avLst>
-              <a:gd name="adj" fmla="val 30000"/>
-            </a:avLst>
+            <a:off x="4210043" y="2827722"/>
+            <a:ext cx="1016217" cy="230087"/>
+          </a:xfrm>
+          <a:prstGeom prst="rect">
+            <a:avLst/>
           </a:prstGeom>
           <a:solidFill>
             <a:srgbClr val="0051BC"/>
@@ -9564,7 +14969,151 @@
       </p:sp>
       <p:sp>
         <p:nvSpPr>
-          <p:cNvPr id="31" name="칸 본문"/>
+          <p:cNvPr id="31" name="단계 삼각형"/>
+          <p:cNvSpPr/>
+          <p:nvPr/>
+        </p:nvSpPr>
+        <p:spPr>
+          <a:xfrm>
+            <a:off x="2177608" y="2827721"/>
+            <a:ext cx="109565" cy="230087"/>
+          </a:xfrm>
+          <a:custGeom>
+            <a:avLst/>
+            <a:gdLst/>
+            <a:ahLst/>
+            <a:cxnLst/>
+            <a:rect l="l" t="t" r="r" b="b"/>
+            <a:pathLst>
+              <a:path w="109565" h="230087">
+                <a:moveTo>
+                  <a:pt x="0" y="0"/>
+                </a:moveTo>
+                <a:lnTo>
+                  <a:pt x="109565" y="115044"/>
+                </a:lnTo>
+                <a:lnTo>
+                  <a:pt x="0" y="230087"/>
+                </a:lnTo>
+                <a:close/>
+              </a:path>
+            </a:pathLst>
+          </a:custGeom>
+          <a:solidFill>
+            <a:srgbClr val="DEEEFF"/>
+          </a:solidFill>
+          <a:ln>
+            <a:noFill/>
+          </a:ln>
+          <a:effectLst/>
+        </p:spPr>
+        <p:txBody>
+          <a:bodyPr rtlCol="0" anchor="ctr"/>
+          <a:lstStyle/>
+          <a:p>
+            <a:pPr algn="ctr"/>
+          </a:p>
+        </p:txBody>
+      </p:sp>
+      <p:sp>
+        <p:nvSpPr>
+          <p:cNvPr id="32" name="단계 삼각형"/>
+          <p:cNvSpPr/>
+          <p:nvPr/>
+        </p:nvSpPr>
+        <p:spPr>
+          <a:xfrm>
+            <a:off x="3193826" y="2827721"/>
+            <a:ext cx="109565" cy="230087"/>
+          </a:xfrm>
+          <a:custGeom>
+            <a:avLst/>
+            <a:gdLst/>
+            <a:ahLst/>
+            <a:cxnLst/>
+            <a:rect l="l" t="t" r="r" b="b"/>
+            <a:pathLst>
+              <a:path w="109565" h="230087">
+                <a:moveTo>
+                  <a:pt x="0" y="0"/>
+                </a:moveTo>
+                <a:lnTo>
+                  <a:pt x="109565" y="115044"/>
+                </a:lnTo>
+                <a:lnTo>
+                  <a:pt x="0" y="230087"/>
+                </a:lnTo>
+                <a:close/>
+              </a:path>
+            </a:pathLst>
+          </a:custGeom>
+          <a:solidFill>
+            <a:srgbClr val="BDE0FF"/>
+          </a:solidFill>
+          <a:ln>
+            <a:noFill/>
+          </a:ln>
+          <a:effectLst/>
+        </p:spPr>
+        <p:txBody>
+          <a:bodyPr rtlCol="0" anchor="ctr"/>
+          <a:lstStyle/>
+          <a:p>
+            <a:pPr algn="ctr"/>
+          </a:p>
+        </p:txBody>
+      </p:sp>
+      <p:sp>
+        <p:nvSpPr>
+          <p:cNvPr id="33" name="단계 삼각형"/>
+          <p:cNvSpPr/>
+          <p:nvPr/>
+        </p:nvSpPr>
+        <p:spPr>
+          <a:xfrm>
+            <a:off x="4210043" y="2827721"/>
+            <a:ext cx="109565" cy="230087"/>
+          </a:xfrm>
+          <a:custGeom>
+            <a:avLst/>
+            <a:gdLst/>
+            <a:ahLst/>
+            <a:cxnLst/>
+            <a:rect l="l" t="t" r="r" b="b"/>
+            <a:pathLst>
+              <a:path w="109565" h="230087">
+                <a:moveTo>
+                  <a:pt x="0" y="0"/>
+                </a:moveTo>
+                <a:lnTo>
+                  <a:pt x="109565" y="115044"/>
+                </a:lnTo>
+                <a:lnTo>
+                  <a:pt x="0" y="230087"/>
+                </a:lnTo>
+                <a:close/>
+              </a:path>
+            </a:pathLst>
+          </a:custGeom>
+          <a:solidFill>
+            <a:srgbClr val="30C2FF"/>
+          </a:solidFill>
+          <a:ln>
+            <a:noFill/>
+          </a:ln>
+          <a:effectLst/>
+        </p:spPr>
+        <p:txBody>
+          <a:bodyPr rtlCol="0" anchor="ctr"/>
+          <a:lstStyle/>
+          <a:p>
+            <a:pPr algn="ctr"/>
+          </a:p>
+        </p:txBody>
+      </p:sp>
+      <p:sp>
+        <p:nvSpPr>
+          <p:cNvPr id="34" name="칸 본문"/>
           <p:cNvSpPr txBox="1"/>
           <p:nvPr/>
         </p:nvSpPr>
@@ -9615,7 +15164,7 @@
       </p:sp>
       <p:sp>
         <p:nvSpPr>
-          <p:cNvPr id="32" name="칸 본문"/>
+          <p:cNvPr id="35" name="칸 본문"/>
           <p:cNvSpPr txBox="1"/>
           <p:nvPr/>
         </p:nvSpPr>
@@ -9666,7 +15215,7 @@
       </p:sp>
       <p:cxnSp>
         <p:nvCxnSpPr>
-          <p:cNvPr id="33" name="Connector 32"/>
+          <p:cNvPr id="36" name="Connector 35"/>
           <p:cNvCxnSpPr/>
           <p:nvPr/>
         </p:nvCxnSpPr>
@@ -9687,7 +15236,7 @@
       </p:cxnSp>
       <p:sp>
         <p:nvSpPr>
-          <p:cNvPr id="34" name="칸 본문"/>
+          <p:cNvPr id="37" name="칸 본문"/>
           <p:cNvSpPr txBox="1"/>
           <p:nvPr/>
         </p:nvSpPr>
@@ -9738,7 +15287,7 @@
       </p:sp>
       <p:cxnSp>
         <p:nvCxnSpPr>
-          <p:cNvPr id="35" name="Connector 34"/>
+          <p:cNvPr id="38" name="Connector 37"/>
           <p:cNvCxnSpPr/>
           <p:nvPr/>
         </p:nvCxnSpPr>
@@ -9759,7 +15308,7 @@
       </p:cxnSp>
       <p:sp>
         <p:nvSpPr>
-          <p:cNvPr id="36" name="칸 본문"/>
+          <p:cNvPr id="39" name="칸 본문"/>
           <p:cNvSpPr txBox="1"/>
           <p:nvPr/>
         </p:nvSpPr>
@@ -9810,7 +15359,7 @@
       </p:sp>
       <p:cxnSp>
         <p:nvCxnSpPr>
-          <p:cNvPr id="37" name="Connector 36"/>
+          <p:cNvPr id="40" name="Connector 39"/>
           <p:cNvCxnSpPr/>
           <p:nvPr/>
         </p:nvCxnSpPr>
@@ -9831,18 +15380,36 @@
       </p:cxnSp>
       <p:sp>
         <p:nvSpPr>
-          <p:cNvPr id="38" name="성과 화살표"/>
+          <p:cNvPr id="41" name="성과 화살표"/>
           <p:cNvSpPr/>
           <p:nvPr/>
         </p:nvSpPr>
         <p:spPr>
           <a:xfrm>
-            <a:off x="5275565" y="2450630"/>
-            <a:ext cx="153391" cy="241043"/>
-          </a:xfrm>
-          <a:prstGeom prst="rightArrow">
-            <a:avLst/>
-          </a:prstGeom>
+            <a:off x="5281043" y="2428716"/>
+            <a:ext cx="142435" cy="284870"/>
+          </a:xfrm>
+          <a:custGeom>
+            <a:avLst/>
+            <a:gdLst/>
+            <a:ahLst/>
+            <a:cxnLst/>
+            <a:rect l="l" t="t" r="r" b="b"/>
+            <a:pathLst>
+              <a:path w="142435" h="284870">
+                <a:moveTo>
+                  <a:pt x="0" y="0"/>
+                </a:moveTo>
+                <a:lnTo>
+                  <a:pt x="0" y="284870"/>
+                </a:lnTo>
+                <a:lnTo>
+                  <a:pt x="142435" y="142435"/>
+                </a:lnTo>
+                <a:close/>
+              </a:path>
+            </a:pathLst>
+          </a:custGeom>
           <a:solidFill>
             <a:srgbClr val="0051BC"/>
           </a:solidFill>
@@ -9852,7 +15419,7 @@
           <a:effectLst/>
         </p:spPr>
         <p:txBody>
-          <a:bodyPr rtlCol="0" anchor="ctr" lIns="0" rIns="0" tIns="0" bIns="0"/>
+          <a:bodyPr rtlCol="0" anchor="ctr"/>
           <a:lstStyle/>
           <a:p>
             <a:pPr algn="ctr"/>
@@ -9861,7 +15428,7 @@
       </p:sp>
       <p:sp>
         <p:nvSpPr>
-          <p:cNvPr id="39" name="성과 패널 머리"/>
+          <p:cNvPr id="42" name="성과 패널 머리"/>
           <p:cNvSpPr/>
           <p:nvPr/>
         </p:nvSpPr>
@@ -9912,7 +15479,7 @@
       </p:sp>
       <p:sp>
         <p:nvSpPr>
-          <p:cNvPr id="40" name="성과 패널"/>
+          <p:cNvPr id="43" name="성과 패널"/>
           <p:cNvSpPr/>
           <p:nvPr/>
         </p:nvSpPr>
@@ -9944,7 +15511,7 @@
       </p:sp>
       <p:sp>
         <p:nvSpPr>
-          <p:cNvPr id="41" name="성과 패널 본문"/>
+          <p:cNvPr id="44" name="성과 패널 본문"/>
           <p:cNvSpPr txBox="1"/>
           <p:nvPr/>
         </p:nvSpPr>
@@ -10051,7 +15618,7 @@
       </p:sp>
       <p:sp>
         <p:nvSpPr>
-          <p:cNvPr id="42" name="핵심성과 박스"/>
+          <p:cNvPr id="45" name="핵심성과 박스"/>
           <p:cNvSpPr/>
           <p:nvPr/>
         </p:nvSpPr>
@@ -10083,7 +15650,7 @@
       </p:sp>
       <p:sp>
         <p:nvSpPr>
-          <p:cNvPr id="43" name="핵심성과 라벨"/>
+          <p:cNvPr id="46" name="핵심성과 라벨"/>
           <p:cNvSpPr/>
           <p:nvPr/>
         </p:nvSpPr>
@@ -10136,7 +15703,7 @@
       </p:sp>
       <p:sp>
         <p:nvSpPr>
-          <p:cNvPr id="44" name="핵심성과 문구"/>
+          <p:cNvPr id="47" name="핵심성과 문구"/>
           <p:cNvSpPr txBox="1"/>
           <p:nvPr/>
         </p:nvSpPr>
@@ -10792,14 +16359,14 @@
       </p:sp>
       <p:sp>
         <p:nvSpPr>
-          <p:cNvPr id="15" name="레일 쐐기"/>
+          <p:cNvPr id="15" name="레일 삼각형"/>
           <p:cNvSpPr/>
           <p:nvPr/>
         </p:nvSpPr>
         <p:spPr>
           <a:xfrm>
             <a:off x="734086" y="1762184"/>
-            <a:ext cx="580696" cy="142435"/>
+            <a:ext cx="580696" cy="131478"/>
           </a:xfrm>
           <a:custGeom>
             <a:avLst/>
@@ -10808,7 +16375,7 @@
             <a:cxnLst/>
             <a:rect l="l" t="t" r="r" b="b"/>
             <a:pathLst>
-              <a:path w="580696" h="142435">
+              <a:path w="580696" h="131478">
                 <a:moveTo>
                   <a:pt x="0" y="0"/>
                 </a:moveTo>
@@ -10816,7 +16383,7 @@
                   <a:pt x="580696" y="0"/>
                 </a:lnTo>
                 <a:lnTo>
-                  <a:pt x="290348" y="142435"/>
+                  <a:pt x="290348" y="131478"/>
                 </a:lnTo>
                 <a:close/>
               </a:path>
@@ -11145,14 +16712,14 @@
       </p:sp>
       <p:sp>
         <p:nvSpPr>
-          <p:cNvPr id="22" name="레일 쐐기"/>
+          <p:cNvPr id="22" name="레일 삼각형"/>
           <p:cNvSpPr/>
           <p:nvPr/>
         </p:nvSpPr>
         <p:spPr>
           <a:xfrm>
             <a:off x="734086" y="2445151"/>
-            <a:ext cx="580696" cy="142435"/>
+            <a:ext cx="580696" cy="131478"/>
           </a:xfrm>
           <a:custGeom>
             <a:avLst/>
@@ -11161,7 +16728,7 @@
             <a:cxnLst/>
             <a:rect l="l" t="t" r="r" b="b"/>
             <a:pathLst>
-              <a:path w="580696" h="142435">
+              <a:path w="580696" h="131478">
                 <a:moveTo>
                   <a:pt x="0" y="0"/>
                 </a:moveTo>
@@ -11169,7 +16736,7 @@
                   <a:pt x="580696" y="0"/>
                 </a:lnTo>
                 <a:lnTo>
-                  <a:pt x="290348" y="142435"/>
+                  <a:pt x="290348" y="131478"/>
                 </a:lnTo>
                 <a:close/>
               </a:path>
@@ -11200,12 +16767,10 @@
         <p:spPr>
           <a:xfrm>
             <a:off x="1347652" y="2467064"/>
-            <a:ext cx="1477761" cy="230087"/>
-          </a:xfrm>
-          <a:prstGeom prst="homePlate">
-            <a:avLst>
-              <a:gd name="adj" fmla="val 30000"/>
-            </a:avLst>
+            <a:ext cx="1412022" cy="230087"/>
+          </a:xfrm>
+          <a:prstGeom prst="rect">
+            <a:avLst/>
           </a:prstGeom>
           <a:solidFill>
             <a:srgbClr val="DEEEFF"/>
@@ -11252,13 +16817,11 @@
         </p:nvSpPr>
         <p:spPr>
           <a:xfrm>
-            <a:off x="2693935" y="2467064"/>
-            <a:ext cx="1543500" cy="230087"/>
-          </a:xfrm>
-          <a:prstGeom prst="chevron">
-            <a:avLst>
-              <a:gd name="adj" fmla="val 30000"/>
-            </a:avLst>
+            <a:off x="2759674" y="2467064"/>
+            <a:ext cx="1412022" cy="230087"/>
+          </a:xfrm>
+          <a:prstGeom prst="rect">
+            <a:avLst/>
           </a:prstGeom>
           <a:solidFill>
             <a:srgbClr val="BDE0FF"/>
@@ -11305,13 +16868,11 @@
         </p:nvSpPr>
         <p:spPr>
           <a:xfrm>
-            <a:off x="4105957" y="2467064"/>
-            <a:ext cx="1543500" cy="230087"/>
-          </a:xfrm>
-          <a:prstGeom prst="chevron">
-            <a:avLst>
-              <a:gd name="adj" fmla="val 30000"/>
-            </a:avLst>
+            <a:off x="4171696" y="2467064"/>
+            <a:ext cx="1412022" cy="230087"/>
+          </a:xfrm>
+          <a:prstGeom prst="rect">
+            <a:avLst/>
           </a:prstGeom>
           <a:solidFill>
             <a:srgbClr val="30C2FF"/>
@@ -11358,13 +16919,11 @@
         </p:nvSpPr>
         <p:spPr>
           <a:xfrm>
-            <a:off x="5517978" y="2467064"/>
-            <a:ext cx="1477761" cy="230087"/>
-          </a:xfrm>
-          <a:prstGeom prst="chevron">
-            <a:avLst>
-              <a:gd name="adj" fmla="val 30000"/>
-            </a:avLst>
+            <a:off x="5583717" y="2467064"/>
+            <a:ext cx="1412022" cy="230087"/>
+          </a:xfrm>
+          <a:prstGeom prst="rect">
+            <a:avLst/>
           </a:prstGeom>
           <a:solidFill>
             <a:srgbClr val="0051BC"/>
@@ -11405,7 +16964,151 @@
       </p:sp>
       <p:sp>
         <p:nvSpPr>
-          <p:cNvPr id="27" name="칸 본문"/>
+          <p:cNvPr id="27" name="단계 삼각형"/>
+          <p:cNvSpPr/>
+          <p:nvPr/>
+        </p:nvSpPr>
+        <p:spPr>
+          <a:xfrm>
+            <a:off x="2759673" y="2467064"/>
+            <a:ext cx="109566" cy="230087"/>
+          </a:xfrm>
+          <a:custGeom>
+            <a:avLst/>
+            <a:gdLst/>
+            <a:ahLst/>
+            <a:cxnLst/>
+            <a:rect l="l" t="t" r="r" b="b"/>
+            <a:pathLst>
+              <a:path w="109566" h="230087">
+                <a:moveTo>
+                  <a:pt x="0" y="0"/>
+                </a:moveTo>
+                <a:lnTo>
+                  <a:pt x="109566" y="115043"/>
+                </a:lnTo>
+                <a:lnTo>
+                  <a:pt x="0" y="230087"/>
+                </a:lnTo>
+                <a:close/>
+              </a:path>
+            </a:pathLst>
+          </a:custGeom>
+          <a:solidFill>
+            <a:srgbClr val="DEEEFF"/>
+          </a:solidFill>
+          <a:ln>
+            <a:noFill/>
+          </a:ln>
+          <a:effectLst/>
+        </p:spPr>
+        <p:txBody>
+          <a:bodyPr rtlCol="0" anchor="ctr"/>
+          <a:lstStyle/>
+          <a:p>
+            <a:pPr algn="ctr"/>
+          </a:p>
+        </p:txBody>
+      </p:sp>
+      <p:sp>
+        <p:nvSpPr>
+          <p:cNvPr id="28" name="단계 삼각형"/>
+          <p:cNvSpPr/>
+          <p:nvPr/>
+        </p:nvSpPr>
+        <p:spPr>
+          <a:xfrm>
+            <a:off x="4171695" y="2467064"/>
+            <a:ext cx="109565" cy="230087"/>
+          </a:xfrm>
+          <a:custGeom>
+            <a:avLst/>
+            <a:gdLst/>
+            <a:ahLst/>
+            <a:cxnLst/>
+            <a:rect l="l" t="t" r="r" b="b"/>
+            <a:pathLst>
+              <a:path w="109565" h="230087">
+                <a:moveTo>
+                  <a:pt x="0" y="0"/>
+                </a:moveTo>
+                <a:lnTo>
+                  <a:pt x="109565" y="115043"/>
+                </a:lnTo>
+                <a:lnTo>
+                  <a:pt x="0" y="230087"/>
+                </a:lnTo>
+                <a:close/>
+              </a:path>
+            </a:pathLst>
+          </a:custGeom>
+          <a:solidFill>
+            <a:srgbClr val="BDE0FF"/>
+          </a:solidFill>
+          <a:ln>
+            <a:noFill/>
+          </a:ln>
+          <a:effectLst/>
+        </p:spPr>
+        <p:txBody>
+          <a:bodyPr rtlCol="0" anchor="ctr"/>
+          <a:lstStyle/>
+          <a:p>
+            <a:pPr algn="ctr"/>
+          </a:p>
+        </p:txBody>
+      </p:sp>
+      <p:sp>
+        <p:nvSpPr>
+          <p:cNvPr id="29" name="단계 삼각형"/>
+          <p:cNvSpPr/>
+          <p:nvPr/>
+        </p:nvSpPr>
+        <p:spPr>
+          <a:xfrm>
+            <a:off x="5583717" y="2467064"/>
+            <a:ext cx="109565" cy="230087"/>
+          </a:xfrm>
+          <a:custGeom>
+            <a:avLst/>
+            <a:gdLst/>
+            <a:ahLst/>
+            <a:cxnLst/>
+            <a:rect l="l" t="t" r="r" b="b"/>
+            <a:pathLst>
+              <a:path w="109565" h="230087">
+                <a:moveTo>
+                  <a:pt x="0" y="0"/>
+                </a:moveTo>
+                <a:lnTo>
+                  <a:pt x="109565" y="115043"/>
+                </a:lnTo>
+                <a:lnTo>
+                  <a:pt x="0" y="230087"/>
+                </a:lnTo>
+                <a:close/>
+              </a:path>
+            </a:pathLst>
+          </a:custGeom>
+          <a:solidFill>
+            <a:srgbClr val="30C2FF"/>
+          </a:solidFill>
+          <a:ln>
+            <a:noFill/>
+          </a:ln>
+          <a:effectLst/>
+        </p:spPr>
+        <p:txBody>
+          <a:bodyPr rtlCol="0" anchor="ctr"/>
+          <a:lstStyle/>
+          <a:p>
+            <a:pPr algn="ctr"/>
+          </a:p>
+        </p:txBody>
+      </p:sp>
+      <p:sp>
+        <p:nvSpPr>
+          <p:cNvPr id="30" name="칸 본문"/>
           <p:cNvSpPr txBox="1"/>
           <p:nvPr/>
         </p:nvSpPr>
@@ -11456,7 +17159,7 @@
       </p:sp>
       <p:sp>
         <p:nvSpPr>
-          <p:cNvPr id="28" name="칸 본문"/>
+          <p:cNvPr id="31" name="칸 본문"/>
           <p:cNvSpPr txBox="1"/>
           <p:nvPr/>
         </p:nvSpPr>
@@ -11507,7 +17210,7 @@
       </p:sp>
       <p:cxnSp>
         <p:nvCxnSpPr>
-          <p:cNvPr id="29" name="Connector 28"/>
+          <p:cNvPr id="32" name="Connector 31"/>
           <p:cNvCxnSpPr/>
           <p:nvPr/>
         </p:nvCxnSpPr>
@@ -11528,7 +17231,7 @@
       </p:cxnSp>
       <p:sp>
         <p:nvSpPr>
-          <p:cNvPr id="30" name="칸 본문"/>
+          <p:cNvPr id="33" name="칸 본문"/>
           <p:cNvSpPr txBox="1"/>
           <p:nvPr/>
         </p:nvSpPr>
@@ -11579,7 +17282,7 @@
       </p:sp>
       <p:cxnSp>
         <p:nvCxnSpPr>
-          <p:cNvPr id="31" name="Connector 30"/>
+          <p:cNvPr id="34" name="Connector 33"/>
           <p:cNvCxnSpPr/>
           <p:nvPr/>
         </p:nvCxnSpPr>
@@ -11600,7 +17303,7 @@
       </p:cxnSp>
       <p:sp>
         <p:nvSpPr>
-          <p:cNvPr id="32" name="칸 본문"/>
+          <p:cNvPr id="35" name="칸 본문"/>
           <p:cNvSpPr txBox="1"/>
           <p:nvPr/>
         </p:nvSpPr>
@@ -11651,7 +17354,7 @@
       </p:sp>
       <p:cxnSp>
         <p:nvCxnSpPr>
-          <p:cNvPr id="33" name="Connector 32"/>
+          <p:cNvPr id="36" name="Connector 35"/>
           <p:cNvCxnSpPr/>
           <p:nvPr/>
         </p:nvCxnSpPr>
@@ -11672,7 +17375,7 @@
       </p:cxnSp>
       <p:sp>
         <p:nvSpPr>
-          <p:cNvPr id="34" name="핵심성과 박스"/>
+          <p:cNvPr id="37" name="핵심성과 박스"/>
           <p:cNvSpPr/>
           <p:nvPr/>
         </p:nvSpPr>
@@ -11704,7 +17407,7 @@
       </p:sp>
       <p:sp>
         <p:nvSpPr>
-          <p:cNvPr id="35" name="핵심성과 라벨"/>
+          <p:cNvPr id="38" name="핵심성과 라벨"/>
           <p:cNvSpPr/>
           <p:nvPr/>
         </p:nvSpPr>
@@ -11757,7 +17460,7 @@
       </p:sp>
       <p:sp>
         <p:nvSpPr>
-          <p:cNvPr id="36" name="핵심성과 문구"/>
+          <p:cNvPr id="39" name="핵심성과 문구"/>
           <p:cNvSpPr txBox="1"/>
           <p:nvPr/>
         </p:nvSpPr>
@@ -14344,14 +20047,14 @@
       </p:sp>
       <p:sp>
         <p:nvSpPr>
-          <p:cNvPr id="24" name="레일 쐐기"/>
+          <p:cNvPr id="24" name="레일 삼각형"/>
           <p:cNvSpPr/>
           <p:nvPr/>
         </p:nvSpPr>
         <p:spPr>
           <a:xfrm>
             <a:off x="734086" y="2446966"/>
-            <a:ext cx="580696" cy="142435"/>
+            <a:ext cx="580696" cy="131479"/>
           </a:xfrm>
           <a:custGeom>
             <a:avLst/>
@@ -14360,7 +20063,7 @@
             <a:cxnLst/>
             <a:rect l="l" t="t" r="r" b="b"/>
             <a:pathLst>
-              <a:path w="580696" h="142435">
+              <a:path w="580696" h="131479">
                 <a:moveTo>
                   <a:pt x="0" y="0"/>
                 </a:moveTo>
@@ -14368,7 +20071,7 @@
                   <a:pt x="580696" y="0"/>
                 </a:lnTo>
                 <a:lnTo>
-                  <a:pt x="290348" y="142435"/>
+                  <a:pt x="290348" y="131479"/>
                 </a:lnTo>
                 <a:close/>
               </a:path>
@@ -14665,14 +20368,14 @@
       </p:sp>
       <p:sp>
         <p:nvSpPr>
-          <p:cNvPr id="31" name="레일 쐐기"/>
+          <p:cNvPr id="31" name="레일 삼각형"/>
           <p:cNvSpPr/>
           <p:nvPr/>
         </p:nvSpPr>
         <p:spPr>
           <a:xfrm>
             <a:off x="734086" y="3129933"/>
-            <a:ext cx="580696" cy="142435"/>
+            <a:ext cx="580696" cy="131479"/>
           </a:xfrm>
           <a:custGeom>
             <a:avLst/>
@@ -14681,7 +20384,7 @@
             <a:cxnLst/>
             <a:rect l="l" t="t" r="r" b="b"/>
             <a:pathLst>
-              <a:path w="580696" h="142435">
+              <a:path w="580696" h="131479">
                 <a:moveTo>
                   <a:pt x="0" y="0"/>
                 </a:moveTo>
@@ -14689,7 +20392,7 @@
                   <a:pt x="580696" y="0"/>
                 </a:lnTo>
                 <a:lnTo>
-                  <a:pt x="290348" y="142435"/>
+                  <a:pt x="290348" y="131479"/>
                 </a:lnTo>
                 <a:close/>
               </a:path>
@@ -14909,108 +20612,36 @@
       </p:sp>
       <p:sp>
         <p:nvSpPr>
-          <p:cNvPr id="36" name="연결 막대"/>
+          <p:cNvPr id="36" name="삼각 화살표"/>
           <p:cNvSpPr/>
           <p:nvPr/>
         </p:nvSpPr>
         <p:spPr>
           <a:xfrm>
-            <a:off x="1884522" y="3633934"/>
-            <a:ext cx="4601739" cy="32870"/>
-          </a:xfrm>
-          <a:prstGeom prst="rect">
-            <a:avLst/>
-          </a:prstGeom>
-          <a:solidFill>
-            <a:srgbClr val="BDE0FF"/>
-          </a:solidFill>
-          <a:ln>
-            <a:noFill/>
-          </a:ln>
-          <a:effectLst/>
-        </p:spPr>
-        <p:txBody>
-          <a:bodyPr rtlCol="0" anchor="ctr" lIns="0" rIns="0" tIns="0" bIns="0"/>
-          <a:lstStyle/>
-          <a:p>
-            <a:pPr algn="ctr"/>
-          </a:p>
-        </p:txBody>
-      </p:sp>
-      <p:sp>
-        <p:nvSpPr>
-          <p:cNvPr id="37" name="연결 끝"/>
-          <p:cNvSpPr/>
-          <p:nvPr/>
-        </p:nvSpPr>
-        <p:spPr>
-          <a:xfrm>
-            <a:off x="1884522" y="3633934"/>
-            <a:ext cx="27391" cy="76696"/>
-          </a:xfrm>
-          <a:prstGeom prst="rect">
-            <a:avLst/>
-          </a:prstGeom>
-          <a:solidFill>
-            <a:srgbClr val="BDE0FF"/>
-          </a:solidFill>
-          <a:ln>
-            <a:noFill/>
-          </a:ln>
-          <a:effectLst/>
-        </p:spPr>
-        <p:txBody>
-          <a:bodyPr rtlCol="0" anchor="ctr" lIns="0" rIns="0" tIns="0" bIns="0"/>
-          <a:lstStyle/>
-          <a:p>
-            <a:pPr algn="ctr"/>
-          </a:p>
-        </p:txBody>
-      </p:sp>
-      <p:sp>
-        <p:nvSpPr>
-          <p:cNvPr id="38" name="연결 끝"/>
-          <p:cNvSpPr/>
-          <p:nvPr/>
-        </p:nvSpPr>
-        <p:spPr>
-          <a:xfrm>
-            <a:off x="6458870" y="3633934"/>
-            <a:ext cx="27391" cy="76696"/>
-          </a:xfrm>
-          <a:prstGeom prst="rect">
-            <a:avLst/>
-          </a:prstGeom>
-          <a:solidFill>
-            <a:srgbClr val="BDE0FF"/>
-          </a:solidFill>
-          <a:ln>
-            <a:noFill/>
-          </a:ln>
-          <a:effectLst/>
-        </p:spPr>
-        <p:txBody>
-          <a:bodyPr rtlCol="0" anchor="ctr" lIns="0" rIns="0" tIns="0" bIns="0"/>
-          <a:lstStyle/>
-          <a:p>
-            <a:pPr algn="ctr"/>
-          </a:p>
-        </p:txBody>
-      </p:sp>
-      <p:sp>
-        <p:nvSpPr>
-          <p:cNvPr id="39" name="연결 화살표"/>
-          <p:cNvSpPr/>
-          <p:nvPr/>
-        </p:nvSpPr>
-        <p:spPr>
-          <a:xfrm>
-            <a:off x="4075826" y="3650369"/>
-            <a:ext cx="219130" cy="169826"/>
-          </a:xfrm>
-          <a:prstGeom prst="downArrow">
-            <a:avLst/>
-          </a:prstGeom>
+            <a:off x="4010086" y="3650368"/>
+            <a:ext cx="350609" cy="142435"/>
+          </a:xfrm>
+          <a:custGeom>
+            <a:avLst/>
+            <a:gdLst/>
+            <a:ahLst/>
+            <a:cxnLst/>
+            <a:rect l="l" t="t" r="r" b="b"/>
+            <a:pathLst>
+              <a:path w="350609" h="142435">
+                <a:moveTo>
+                  <a:pt x="0" y="0"/>
+                </a:moveTo>
+                <a:lnTo>
+                  <a:pt x="350609" y="0"/>
+                </a:lnTo>
+                <a:lnTo>
+                  <a:pt x="175305" y="142435"/>
+                </a:lnTo>
+                <a:close/>
+              </a:path>
+            </a:pathLst>
+          </a:custGeom>
           <a:solidFill>
             <a:srgbClr val="0051BC"/>
           </a:solidFill>
@@ -15020,7 +20651,7 @@
           <a:effectLst/>
         </p:spPr>
         <p:txBody>
-          <a:bodyPr rtlCol="0" anchor="ctr" lIns="0" rIns="0" tIns="0" bIns="0"/>
+          <a:bodyPr rtlCol="0" anchor="ctr"/>
           <a:lstStyle/>
           <a:p>
             <a:pPr algn="ctr"/>
@@ -15029,7 +20660,7 @@
       </p:sp>
       <p:sp>
         <p:nvSpPr>
-          <p:cNvPr id="40" name="패널 외곽"/>
+          <p:cNvPr id="37" name="패널 외곽"/>
           <p:cNvSpPr/>
           <p:nvPr/>
         </p:nvSpPr>
@@ -15061,7 +20692,7 @@
       </p:sp>
       <p:sp>
         <p:nvSpPr>
-          <p:cNvPr id="41" name="패널 머리"/>
+          <p:cNvPr id="38" name="패널 머리"/>
           <p:cNvSpPr/>
           <p:nvPr/>
         </p:nvSpPr>
@@ -15112,7 +20743,7 @@
       </p:sp>
       <p:sp>
         <p:nvSpPr>
-          <p:cNvPr id="42" name="레일"/>
+          <p:cNvPr id="39" name="레일"/>
           <p:cNvSpPr/>
           <p:nvPr/>
         </p:nvSpPr>
@@ -15147,7 +20778,7 @@
       </p:sp>
       <p:sp>
         <p:nvSpPr>
-          <p:cNvPr id="43" name="레일 태그"/>
+          <p:cNvPr id="40" name="레일 태그"/>
           <p:cNvSpPr/>
           <p:nvPr/>
         </p:nvSpPr>
@@ -15198,7 +20829,7 @@
       </p:sp>
       <p:sp>
         <p:nvSpPr>
-          <p:cNvPr id="44" name="레일 라벨"/>
+          <p:cNvPr id="41" name="레일 라벨"/>
           <p:cNvSpPr txBox="1"/>
           <p:nvPr/>
         </p:nvSpPr>
@@ -15269,7 +20900,7 @@
       </p:sp>
       <p:sp>
         <p:nvSpPr>
-          <p:cNvPr id="45" name="패널 본문"/>
+          <p:cNvPr id="42" name="패널 본문"/>
           <p:cNvSpPr txBox="1"/>
           <p:nvPr/>
         </p:nvSpPr>
@@ -15348,7 +20979,7 @@
       </p:sp>
       <p:cxnSp>
         <p:nvCxnSpPr>
-          <p:cNvPr id="46" name="Connector 45"/>
+          <p:cNvPr id="43" name="Connector 42"/>
           <p:cNvCxnSpPr/>
           <p:nvPr/>
         </p:nvCxnSpPr>
@@ -15369,7 +21000,7 @@
       </p:cxnSp>
       <p:sp>
         <p:nvSpPr>
-          <p:cNvPr id="47" name="레일"/>
+          <p:cNvPr id="44" name="레일"/>
           <p:cNvSpPr/>
           <p:nvPr/>
         </p:nvSpPr>
@@ -15404,7 +21035,7 @@
       </p:sp>
       <p:sp>
         <p:nvSpPr>
-          <p:cNvPr id="48" name="레일 태그"/>
+          <p:cNvPr id="45" name="레일 태그"/>
           <p:cNvSpPr/>
           <p:nvPr/>
         </p:nvSpPr>
@@ -15455,7 +21086,7 @@
       </p:sp>
       <p:sp>
         <p:nvSpPr>
-          <p:cNvPr id="49" name="레일 라벨"/>
+          <p:cNvPr id="46" name="레일 라벨"/>
           <p:cNvSpPr txBox="1"/>
           <p:nvPr/>
         </p:nvSpPr>
@@ -15526,7 +21157,7 @@
       </p:sp>
       <p:sp>
         <p:nvSpPr>
-          <p:cNvPr id="50" name="패널 본문"/>
+          <p:cNvPr id="47" name="패널 본문"/>
           <p:cNvSpPr txBox="1"/>
           <p:nvPr/>
         </p:nvSpPr>
@@ -15605,7 +21236,7 @@
       </p:sp>
       <p:cxnSp>
         <p:nvCxnSpPr>
-          <p:cNvPr id="51" name="Connector 50"/>
+          <p:cNvPr id="48" name="Connector 47"/>
           <p:cNvCxnSpPr/>
           <p:nvPr/>
         </p:nvCxnSpPr>
@@ -15626,7 +21257,7 @@
       </p:cxnSp>
       <p:sp>
         <p:nvSpPr>
-          <p:cNvPr id="52" name="레일"/>
+          <p:cNvPr id="49" name="레일"/>
           <p:cNvSpPr/>
           <p:nvPr/>
         </p:nvSpPr>
@@ -15661,7 +21292,7 @@
       </p:sp>
       <p:sp>
         <p:nvSpPr>
-          <p:cNvPr id="53" name="레일 태그"/>
+          <p:cNvPr id="50" name="레일 태그"/>
           <p:cNvSpPr/>
           <p:nvPr/>
         </p:nvSpPr>
@@ -15712,7 +21343,7 @@
       </p:sp>
       <p:sp>
         <p:nvSpPr>
-          <p:cNvPr id="54" name="레일 라벨"/>
+          <p:cNvPr id="51" name="레일 라벨"/>
           <p:cNvSpPr txBox="1"/>
           <p:nvPr/>
         </p:nvSpPr>
@@ -15783,7 +21414,7 @@
       </p:sp>
       <p:sp>
         <p:nvSpPr>
-          <p:cNvPr id="55" name="패널 본문"/>
+          <p:cNvPr id="52" name="패널 본문"/>
           <p:cNvSpPr txBox="1"/>
           <p:nvPr/>
         </p:nvSpPr>
@@ -15890,7 +21521,7 @@
       </p:sp>
       <p:sp>
         <p:nvSpPr>
-          <p:cNvPr id="56" name="패널 외곽"/>
+          <p:cNvPr id="53" name="패널 외곽"/>
           <p:cNvSpPr/>
           <p:nvPr/>
         </p:nvSpPr>
@@ -15922,7 +21553,7 @@
       </p:sp>
       <p:sp>
         <p:nvSpPr>
-          <p:cNvPr id="57" name="패널 머리"/>
+          <p:cNvPr id="54" name="패널 머리"/>
           <p:cNvSpPr/>
           <p:nvPr/>
         </p:nvSpPr>
@@ -15973,7 +21604,7 @@
       </p:sp>
       <p:sp>
         <p:nvSpPr>
-          <p:cNvPr id="58" name="레일"/>
+          <p:cNvPr id="55" name="레일"/>
           <p:cNvSpPr/>
           <p:nvPr/>
         </p:nvSpPr>
@@ -16008,7 +21639,7 @@
       </p:sp>
       <p:sp>
         <p:nvSpPr>
-          <p:cNvPr id="59" name="레일 태그"/>
+          <p:cNvPr id="56" name="레일 태그"/>
           <p:cNvSpPr/>
           <p:nvPr/>
         </p:nvSpPr>
@@ -16059,7 +21690,7 @@
       </p:sp>
       <p:sp>
         <p:nvSpPr>
-          <p:cNvPr id="60" name="레일 라벨"/>
+          <p:cNvPr id="57" name="레일 라벨"/>
           <p:cNvSpPr txBox="1"/>
           <p:nvPr/>
         </p:nvSpPr>
@@ -16130,7 +21761,7 @@
       </p:sp>
       <p:sp>
         <p:nvSpPr>
-          <p:cNvPr id="61" name="패널 본문"/>
+          <p:cNvPr id="58" name="패널 본문"/>
           <p:cNvSpPr txBox="1"/>
           <p:nvPr/>
         </p:nvSpPr>
@@ -16209,7 +21840,7 @@
       </p:sp>
       <p:cxnSp>
         <p:nvCxnSpPr>
-          <p:cNvPr id="62" name="Connector 61"/>
+          <p:cNvPr id="59" name="Connector 58"/>
           <p:cNvCxnSpPr/>
           <p:nvPr/>
         </p:nvCxnSpPr>
@@ -16230,7 +21861,7 @@
       </p:cxnSp>
       <p:sp>
         <p:nvSpPr>
-          <p:cNvPr id="63" name="레일"/>
+          <p:cNvPr id="60" name="레일"/>
           <p:cNvSpPr/>
           <p:nvPr/>
         </p:nvSpPr>
@@ -16265,7 +21896,7 @@
       </p:sp>
       <p:sp>
         <p:nvSpPr>
-          <p:cNvPr id="64" name="레일 태그"/>
+          <p:cNvPr id="61" name="레일 태그"/>
           <p:cNvSpPr/>
           <p:nvPr/>
         </p:nvSpPr>
@@ -16316,7 +21947,7 @@
       </p:sp>
       <p:sp>
         <p:nvSpPr>
-          <p:cNvPr id="65" name="레일 라벨"/>
+          <p:cNvPr id="62" name="레일 라벨"/>
           <p:cNvSpPr txBox="1"/>
           <p:nvPr/>
         </p:nvSpPr>
@@ -16387,7 +22018,7 @@
       </p:sp>
       <p:sp>
         <p:nvSpPr>
-          <p:cNvPr id="66" name="패널 본문"/>
+          <p:cNvPr id="63" name="패널 본문"/>
           <p:cNvSpPr txBox="1"/>
           <p:nvPr/>
         </p:nvSpPr>
@@ -16494,7 +22125,7 @@
       </p:sp>
       <p:cxnSp>
         <p:nvCxnSpPr>
-          <p:cNvPr id="67" name="Connector 66"/>
+          <p:cNvPr id="64" name="Connector 63"/>
           <p:cNvCxnSpPr/>
           <p:nvPr/>
         </p:nvCxnSpPr>
@@ -16515,7 +22146,7 @@
       </p:cxnSp>
       <p:sp>
         <p:nvSpPr>
-          <p:cNvPr id="68" name="레일"/>
+          <p:cNvPr id="65" name="레일"/>
           <p:cNvSpPr/>
           <p:nvPr/>
         </p:nvSpPr>
@@ -16550,7 +22181,7 @@
       </p:sp>
       <p:sp>
         <p:nvSpPr>
-          <p:cNvPr id="69" name="레일 태그"/>
+          <p:cNvPr id="66" name="레일 태그"/>
           <p:cNvSpPr/>
           <p:nvPr/>
         </p:nvSpPr>
@@ -16601,7 +22232,7 @@
       </p:sp>
       <p:sp>
         <p:nvSpPr>
-          <p:cNvPr id="70" name="레일 라벨"/>
+          <p:cNvPr id="67" name="레일 라벨"/>
           <p:cNvSpPr txBox="1"/>
           <p:nvPr/>
         </p:nvSpPr>
@@ -16672,7 +22303,7 @@
       </p:sp>
       <p:sp>
         <p:nvSpPr>
-          <p:cNvPr id="71" name="패널 본문"/>
+          <p:cNvPr id="68" name="패널 본문"/>
           <p:cNvSpPr txBox="1"/>
           <p:nvPr/>
         </p:nvSpPr>
@@ -16779,7 +22410,7 @@
       </p:sp>
       <p:sp>
         <p:nvSpPr>
-          <p:cNvPr id="72" name="형광 밑줄"/>
+          <p:cNvPr id="69" name="형광 밑줄"/>
           <p:cNvSpPr/>
           <p:nvPr/>
         </p:nvSpPr>
@@ -16809,7 +22440,7 @@
       </p:sp>
       <p:sp>
         <p:nvSpPr>
-          <p:cNvPr id="73" name="소제목"/>
+          <p:cNvPr id="70" name="소제목"/>
           <p:cNvSpPr txBox="1"/>
           <p:nvPr/>
         </p:nvSpPr>
@@ -16856,7 +22487,7 @@
       </p:sp>
       <p:sp>
         <p:nvSpPr>
-          <p:cNvPr id="74" name="태그칩"/>
+          <p:cNvPr id="71" name="태그칩"/>
           <p:cNvSpPr/>
           <p:nvPr/>
         </p:nvSpPr>
@@ -16907,7 +22538,7 @@
       </p:sp>
       <p:sp>
         <p:nvSpPr>
-          <p:cNvPr id="75" name="태그칩"/>
+          <p:cNvPr id="72" name="태그칩"/>
           <p:cNvSpPr/>
           <p:nvPr/>
         </p:nvSpPr>
@@ -16958,7 +22589,7 @@
       </p:sp>
       <p:sp>
         <p:nvSpPr>
-          <p:cNvPr id="76" name="라벨 박스"/>
+          <p:cNvPr id="73" name="라벨 박스"/>
           <p:cNvSpPr/>
           <p:nvPr/>
         </p:nvSpPr>
@@ -16990,7 +22621,7 @@
       </p:sp>
       <p:sp>
         <p:nvSpPr>
-          <p:cNvPr id="77" name="레일"/>
+          <p:cNvPr id="74" name="레일"/>
           <p:cNvSpPr/>
           <p:nvPr/>
         </p:nvSpPr>
@@ -17046,7 +22677,7 @@
       </p:sp>
       <p:sp>
         <p:nvSpPr>
-          <p:cNvPr id="78" name="본문"/>
+          <p:cNvPr id="75" name="본문"/>
           <p:cNvSpPr txBox="1"/>
           <p:nvPr/>
         </p:nvSpPr>
@@ -17097,7 +22728,7 @@
       </p:sp>
       <p:sp>
         <p:nvSpPr>
-          <p:cNvPr id="79" name="표 외곽"/>
+          <p:cNvPr id="76" name="표 외곽"/>
           <p:cNvSpPr/>
           <p:nvPr/>
         </p:nvSpPr>
@@ -17129,7 +22760,7 @@
       </p:sp>
       <p:sp>
         <p:nvSpPr>
-          <p:cNvPr id="80" name="레일"/>
+          <p:cNvPr id="77" name="레일"/>
           <p:cNvSpPr/>
           <p:nvPr/>
         </p:nvSpPr>
@@ -17209,7 +22840,7 @@
       </p:sp>
       <p:sp>
         <p:nvSpPr>
-          <p:cNvPr id="81" name="머리칸"/>
+          <p:cNvPr id="78" name="머리칸"/>
           <p:cNvSpPr/>
           <p:nvPr/>
         </p:nvSpPr>
@@ -17260,7 +22891,7 @@
       </p:sp>
       <p:sp>
         <p:nvSpPr>
-          <p:cNvPr id="82" name="머리칸"/>
+          <p:cNvPr id="79" name="머리칸"/>
           <p:cNvSpPr/>
           <p:nvPr/>
         </p:nvSpPr>
@@ -17311,7 +22942,7 @@
       </p:sp>
       <p:sp>
         <p:nvSpPr>
-          <p:cNvPr id="83" name="칸 본문"/>
+          <p:cNvPr id="80" name="칸 본문"/>
           <p:cNvSpPr txBox="1"/>
           <p:nvPr/>
         </p:nvSpPr>
@@ -17362,7 +22993,7 @@
       </p:sp>
       <p:sp>
         <p:nvSpPr>
-          <p:cNvPr id="84" name="칸 본문"/>
+          <p:cNvPr id="81" name="칸 본문"/>
           <p:cNvSpPr txBox="1"/>
           <p:nvPr/>
         </p:nvSpPr>
@@ -17413,7 +23044,7 @@
       </p:sp>
       <p:cxnSp>
         <p:nvCxnSpPr>
-          <p:cNvPr id="85" name="Connector 84"/>
+          <p:cNvPr id="82" name="Connector 81"/>
           <p:cNvCxnSpPr/>
           <p:nvPr/>
         </p:nvCxnSpPr>
@@ -17434,7 +23065,7 @@
       </p:cxnSp>
       <p:sp>
         <p:nvSpPr>
-          <p:cNvPr id="86" name="레일"/>
+          <p:cNvPr id="83" name="레일"/>
           <p:cNvSpPr/>
           <p:nvPr/>
         </p:nvSpPr>
@@ -17469,7 +23100,7 @@
       </p:sp>
       <p:sp>
         <p:nvSpPr>
-          <p:cNvPr id="87" name="레일 태그"/>
+          <p:cNvPr id="84" name="레일 태그"/>
           <p:cNvSpPr/>
           <p:nvPr/>
         </p:nvSpPr>
@@ -17520,7 +23151,7 @@
       </p:sp>
       <p:sp>
         <p:nvSpPr>
-          <p:cNvPr id="88" name="레일 라벨"/>
+          <p:cNvPr id="85" name="레일 라벨"/>
           <p:cNvSpPr txBox="1"/>
           <p:nvPr/>
         </p:nvSpPr>
@@ -17591,14 +23222,14 @@
       </p:sp>
       <p:sp>
         <p:nvSpPr>
-          <p:cNvPr id="89" name="레일 쐐기"/>
+          <p:cNvPr id="86" name="레일 삼각형"/>
           <p:cNvSpPr/>
           <p:nvPr/>
         </p:nvSpPr>
         <p:spPr>
           <a:xfrm>
             <a:off x="734086" y="7576497"/>
-            <a:ext cx="580696" cy="142435"/>
+            <a:ext cx="580696" cy="131478"/>
           </a:xfrm>
           <a:custGeom>
             <a:avLst/>
@@ -17607,7 +23238,7 @@
             <a:cxnLst/>
             <a:rect l="l" t="t" r="r" b="b"/>
             <a:pathLst>
-              <a:path w="580696" h="142435">
+              <a:path w="580696" h="131478">
                 <a:moveTo>
                   <a:pt x="0" y="0"/>
                 </a:moveTo>
@@ -17615,7 +23246,7 @@
                   <a:pt x="580696" y="0"/>
                 </a:lnTo>
                 <a:lnTo>
-                  <a:pt x="290348" y="142435"/>
+                  <a:pt x="290348" y="131478"/>
                 </a:lnTo>
                 <a:close/>
               </a:path>
@@ -17639,7 +23270,7 @@
       </p:sp>
       <p:sp>
         <p:nvSpPr>
-          <p:cNvPr id="90" name="머리칸"/>
+          <p:cNvPr id="87" name="머리칸"/>
           <p:cNvSpPr/>
           <p:nvPr/>
         </p:nvSpPr>
@@ -17690,7 +23321,7 @@
       </p:sp>
       <p:sp>
         <p:nvSpPr>
-          <p:cNvPr id="91" name="칸 본문"/>
+          <p:cNvPr id="88" name="칸 본문"/>
           <p:cNvSpPr txBox="1"/>
           <p:nvPr/>
         </p:nvSpPr>
@@ -17797,7 +23428,7 @@
       </p:sp>
       <p:sp>
         <p:nvSpPr>
-          <p:cNvPr id="92" name="사진 칸"/>
+          <p:cNvPr id="89" name="사진 칸"/>
           <p:cNvSpPr/>
           <p:nvPr/>
         </p:nvSpPr>
@@ -17850,7 +23481,7 @@
       </p:sp>
       <p:sp>
         <p:nvSpPr>
-          <p:cNvPr id="93" name="레일"/>
+          <p:cNvPr id="90" name="레일"/>
           <p:cNvSpPr/>
           <p:nvPr/>
         </p:nvSpPr>
@@ -17885,7 +23516,7 @@
       </p:sp>
       <p:sp>
         <p:nvSpPr>
-          <p:cNvPr id="94" name="레일 태그"/>
+          <p:cNvPr id="91" name="레일 태그"/>
           <p:cNvSpPr/>
           <p:nvPr/>
         </p:nvSpPr>
@@ -17936,7 +23567,7 @@
       </p:sp>
       <p:sp>
         <p:nvSpPr>
-          <p:cNvPr id="95" name="레일 라벨"/>
+          <p:cNvPr id="92" name="레일 라벨"/>
           <p:cNvSpPr txBox="1"/>
           <p:nvPr/>
         </p:nvSpPr>
@@ -18007,14 +23638,14 @@
       </p:sp>
       <p:sp>
         <p:nvSpPr>
-          <p:cNvPr id="96" name="레일 쐐기"/>
+          <p:cNvPr id="93" name="레일 삼각형"/>
           <p:cNvSpPr/>
           <p:nvPr/>
         </p:nvSpPr>
         <p:spPr>
           <a:xfrm>
             <a:off x="734086" y="8444817"/>
-            <a:ext cx="580696" cy="142435"/>
+            <a:ext cx="580696" cy="131478"/>
           </a:xfrm>
           <a:custGeom>
             <a:avLst/>
@@ -18023,7 +23654,7 @@
             <a:cxnLst/>
             <a:rect l="l" t="t" r="r" b="b"/>
             <a:pathLst>
-              <a:path w="580696" h="142435">
+              <a:path w="580696" h="131478">
                 <a:moveTo>
                   <a:pt x="0" y="0"/>
                 </a:moveTo>
@@ -18031,7 +23662,7 @@
                   <a:pt x="580696" y="0"/>
                 </a:lnTo>
                 <a:lnTo>
-                  <a:pt x="290348" y="142435"/>
+                  <a:pt x="290348" y="131478"/>
                 </a:lnTo>
                 <a:close/>
               </a:path>
@@ -18055,7 +23686,7 @@
       </p:sp>
       <p:sp>
         <p:nvSpPr>
-          <p:cNvPr id="97" name="배너"/>
+          <p:cNvPr id="94" name="배너"/>
           <p:cNvSpPr/>
           <p:nvPr/>
         </p:nvSpPr>
@@ -18106,7 +23737,7 @@
       </p:sp>
       <p:sp>
         <p:nvSpPr>
-          <p:cNvPr id="98" name="머리칸"/>
+          <p:cNvPr id="95" name="머리칸"/>
           <p:cNvSpPr/>
           <p:nvPr/>
         </p:nvSpPr>
@@ -18157,7 +23788,7 @@
       </p:sp>
       <p:sp>
         <p:nvSpPr>
-          <p:cNvPr id="99" name="머리칸"/>
+          <p:cNvPr id="96" name="머리칸"/>
           <p:cNvSpPr/>
           <p:nvPr/>
         </p:nvSpPr>
@@ -18208,7 +23839,7 @@
       </p:sp>
       <p:sp>
         <p:nvSpPr>
-          <p:cNvPr id="100" name="머리칸"/>
+          <p:cNvPr id="97" name="머리칸"/>
           <p:cNvSpPr/>
           <p:nvPr/>
         </p:nvSpPr>
@@ -18259,7 +23890,7 @@
       </p:sp>
       <p:sp>
         <p:nvSpPr>
-          <p:cNvPr id="101" name="칸 본문"/>
+          <p:cNvPr id="98" name="칸 본문"/>
           <p:cNvSpPr txBox="1"/>
           <p:nvPr/>
         </p:nvSpPr>
@@ -18366,7 +23997,7 @@
       </p:sp>
       <p:sp>
         <p:nvSpPr>
-          <p:cNvPr id="102" name="칸 본문"/>
+          <p:cNvPr id="99" name="칸 본문"/>
           <p:cNvSpPr txBox="1"/>
           <p:nvPr/>
         </p:nvSpPr>
@@ -18473,7 +24104,7 @@
       </p:sp>
       <p:cxnSp>
         <p:nvCxnSpPr>
-          <p:cNvPr id="103" name="Connector 102"/>
+          <p:cNvPr id="100" name="Connector 99"/>
           <p:cNvCxnSpPr/>
           <p:nvPr/>
         </p:nvCxnSpPr>
@@ -18494,7 +24125,7 @@
       </p:cxnSp>
       <p:sp>
         <p:nvSpPr>
-          <p:cNvPr id="104" name="칸 본문"/>
+          <p:cNvPr id="101" name="칸 본문"/>
           <p:cNvSpPr txBox="1"/>
           <p:nvPr/>
         </p:nvSpPr>
@@ -18573,7 +24204,7 @@
       </p:sp>
       <p:cxnSp>
         <p:nvCxnSpPr>
-          <p:cNvPr id="105" name="Connector 104"/>
+          <p:cNvPr id="102" name="Connector 101"/>
           <p:cNvCxnSpPr/>
           <p:nvPr/>
         </p:nvCxnSpPr>
@@ -20731,108 +26362,36 @@
       </p:cxnSp>
       <p:sp>
         <p:nvSpPr>
-          <p:cNvPr id="36" name="연결 막대"/>
+          <p:cNvPr id="36" name="삼각 화살표"/>
           <p:cNvSpPr/>
           <p:nvPr/>
         </p:nvSpPr>
         <p:spPr>
           <a:xfrm>
-            <a:off x="1884522" y="3670466"/>
-            <a:ext cx="4601739" cy="32870"/>
-          </a:xfrm>
-          <a:prstGeom prst="rect">
-            <a:avLst/>
-          </a:prstGeom>
-          <a:solidFill>
-            <a:srgbClr val="BDE0FF"/>
-          </a:solidFill>
-          <a:ln>
-            <a:noFill/>
-          </a:ln>
-          <a:effectLst/>
-        </p:spPr>
-        <p:txBody>
-          <a:bodyPr rtlCol="0" anchor="ctr" lIns="0" rIns="0" tIns="0" bIns="0"/>
-          <a:lstStyle/>
-          <a:p>
-            <a:pPr algn="ctr"/>
-          </a:p>
-        </p:txBody>
-      </p:sp>
-      <p:sp>
-        <p:nvSpPr>
-          <p:cNvPr id="37" name="연결 끝"/>
-          <p:cNvSpPr/>
-          <p:nvPr/>
-        </p:nvSpPr>
-        <p:spPr>
-          <a:xfrm>
-            <a:off x="1884522" y="3670466"/>
-            <a:ext cx="27391" cy="76696"/>
-          </a:xfrm>
-          <a:prstGeom prst="rect">
-            <a:avLst/>
-          </a:prstGeom>
-          <a:solidFill>
-            <a:srgbClr val="BDE0FF"/>
-          </a:solidFill>
-          <a:ln>
-            <a:noFill/>
-          </a:ln>
-          <a:effectLst/>
-        </p:spPr>
-        <p:txBody>
-          <a:bodyPr rtlCol="0" anchor="ctr" lIns="0" rIns="0" tIns="0" bIns="0"/>
-          <a:lstStyle/>
-          <a:p>
-            <a:pPr algn="ctr"/>
-          </a:p>
-        </p:txBody>
-      </p:sp>
-      <p:sp>
-        <p:nvSpPr>
-          <p:cNvPr id="38" name="연결 끝"/>
-          <p:cNvSpPr/>
-          <p:nvPr/>
-        </p:nvSpPr>
-        <p:spPr>
-          <a:xfrm>
-            <a:off x="6458870" y="3670466"/>
-            <a:ext cx="27391" cy="76696"/>
-          </a:xfrm>
-          <a:prstGeom prst="rect">
-            <a:avLst/>
-          </a:prstGeom>
-          <a:solidFill>
-            <a:srgbClr val="BDE0FF"/>
-          </a:solidFill>
-          <a:ln>
-            <a:noFill/>
-          </a:ln>
-          <a:effectLst/>
-        </p:spPr>
-        <p:txBody>
-          <a:bodyPr rtlCol="0" anchor="ctr" lIns="0" rIns="0" tIns="0" bIns="0"/>
-          <a:lstStyle/>
-          <a:p>
-            <a:pPr algn="ctr"/>
-          </a:p>
-        </p:txBody>
-      </p:sp>
-      <p:sp>
-        <p:nvSpPr>
-          <p:cNvPr id="39" name="연결 화살표"/>
-          <p:cNvSpPr/>
-          <p:nvPr/>
-        </p:nvSpPr>
-        <p:spPr>
-          <a:xfrm>
-            <a:off x="4075826" y="3686901"/>
-            <a:ext cx="219130" cy="169826"/>
-          </a:xfrm>
-          <a:prstGeom prst="downArrow">
-            <a:avLst/>
-          </a:prstGeom>
+            <a:off x="4010086" y="3686900"/>
+            <a:ext cx="350609" cy="142435"/>
+          </a:xfrm>
+          <a:custGeom>
+            <a:avLst/>
+            <a:gdLst/>
+            <a:ahLst/>
+            <a:cxnLst/>
+            <a:rect l="l" t="t" r="r" b="b"/>
+            <a:pathLst>
+              <a:path w="350609" h="142435">
+                <a:moveTo>
+                  <a:pt x="0" y="0"/>
+                </a:moveTo>
+                <a:lnTo>
+                  <a:pt x="350609" y="0"/>
+                </a:lnTo>
+                <a:lnTo>
+                  <a:pt x="175305" y="142435"/>
+                </a:lnTo>
+                <a:close/>
+              </a:path>
+            </a:pathLst>
+          </a:custGeom>
           <a:solidFill>
             <a:srgbClr val="0051BC"/>
           </a:solidFill>
@@ -20842,7 +26401,7 @@
           <a:effectLst/>
         </p:spPr>
         <p:txBody>
-          <a:bodyPr rtlCol="0" anchor="ctr" lIns="0" rIns="0" tIns="0" bIns="0"/>
+          <a:bodyPr rtlCol="0" anchor="ctr"/>
           <a:lstStyle/>
           <a:p>
             <a:pPr algn="ctr"/>
@@ -20851,7 +26410,7 @@
       </p:sp>
       <p:graphicFrame>
         <p:nvGraphicFramePr>
-          <p:cNvPr id="40" name="실적표"/>
+          <p:cNvPr id="37" name="실적표"/>
           <p:cNvGraphicFramePr>
             <a:graphicFrameLocks noGrp="1"/>
           </p:cNvGraphicFramePr>
@@ -22559,7 +28118,7 @@
       </p:graphicFrame>
       <p:sp>
         <p:nvSpPr>
-          <p:cNvPr id="41" name="형광 밑줄"/>
+          <p:cNvPr id="38" name="형광 밑줄"/>
           <p:cNvSpPr/>
           <p:nvPr/>
         </p:nvSpPr>
@@ -22589,7 +28148,7 @@
       </p:sp>
       <p:sp>
         <p:nvSpPr>
-          <p:cNvPr id="42" name="소제목"/>
+          <p:cNvPr id="39" name="소제목"/>
           <p:cNvSpPr txBox="1"/>
           <p:nvPr/>
         </p:nvSpPr>
@@ -22636,7 +28195,7 @@
       </p:sp>
       <p:sp>
         <p:nvSpPr>
-          <p:cNvPr id="43" name="태그칩"/>
+          <p:cNvPr id="40" name="태그칩"/>
           <p:cNvSpPr/>
           <p:nvPr/>
         </p:nvSpPr>
@@ -22687,7 +28246,7 @@
       </p:sp>
       <p:sp>
         <p:nvSpPr>
-          <p:cNvPr id="44" name="표 외곽"/>
+          <p:cNvPr id="41" name="표 외곽"/>
           <p:cNvSpPr/>
           <p:nvPr/>
         </p:nvSpPr>
@@ -22719,7 +28278,7 @@
       </p:sp>
       <p:sp>
         <p:nvSpPr>
-          <p:cNvPr id="45" name="레일"/>
+          <p:cNvPr id="42" name="레일"/>
           <p:cNvSpPr/>
           <p:nvPr/>
         </p:nvSpPr>
@@ -22799,7 +28358,7 @@
       </p:sp>
       <p:sp>
         <p:nvSpPr>
-          <p:cNvPr id="46" name="배너"/>
+          <p:cNvPr id="43" name="배너"/>
           <p:cNvSpPr/>
           <p:nvPr/>
         </p:nvSpPr>
@@ -22850,7 +28409,7 @@
       </p:sp>
       <p:sp>
         <p:nvSpPr>
-          <p:cNvPr id="47" name="머리칸"/>
+          <p:cNvPr id="44" name="머리칸"/>
           <p:cNvSpPr/>
           <p:nvPr/>
         </p:nvSpPr>
@@ -22901,7 +28460,7 @@
       </p:sp>
       <p:sp>
         <p:nvSpPr>
-          <p:cNvPr id="48" name="머리칸"/>
+          <p:cNvPr id="45" name="머리칸"/>
           <p:cNvSpPr/>
           <p:nvPr/>
         </p:nvSpPr>
@@ -22952,7 +28511,7 @@
       </p:sp>
       <p:sp>
         <p:nvSpPr>
-          <p:cNvPr id="49" name="머리칸"/>
+          <p:cNvPr id="46" name="머리칸"/>
           <p:cNvSpPr/>
           <p:nvPr/>
         </p:nvSpPr>
@@ -23003,7 +28562,7 @@
       </p:sp>
       <p:sp>
         <p:nvSpPr>
-          <p:cNvPr id="50" name="칸 본문"/>
+          <p:cNvPr id="47" name="칸 본문"/>
           <p:cNvSpPr txBox="1"/>
           <p:nvPr/>
         </p:nvSpPr>
@@ -23082,7 +28641,7 @@
       </p:sp>
       <p:sp>
         <p:nvSpPr>
-          <p:cNvPr id="51" name="칸 본문"/>
+          <p:cNvPr id="48" name="칸 본문"/>
           <p:cNvSpPr txBox="1"/>
           <p:nvPr/>
         </p:nvSpPr>
@@ -23161,7 +28720,7 @@
       </p:sp>
       <p:cxnSp>
         <p:nvCxnSpPr>
-          <p:cNvPr id="52" name="Connector 51"/>
+          <p:cNvPr id="49" name="Connector 48"/>
           <p:cNvCxnSpPr/>
           <p:nvPr/>
         </p:nvCxnSpPr>
@@ -23182,7 +28741,7 @@
       </p:cxnSp>
       <p:sp>
         <p:nvSpPr>
-          <p:cNvPr id="53" name="칸 본문"/>
+          <p:cNvPr id="50" name="칸 본문"/>
           <p:cNvSpPr txBox="1"/>
           <p:nvPr/>
         </p:nvSpPr>
@@ -23261,7 +28820,7 @@
       </p:sp>
       <p:cxnSp>
         <p:nvCxnSpPr>
-          <p:cNvPr id="54" name="Connector 53"/>
+          <p:cNvPr id="51" name="Connector 50"/>
           <p:cNvCxnSpPr/>
           <p:nvPr/>
         </p:nvCxnSpPr>
@@ -23282,7 +28841,7 @@
       </p:cxnSp>
       <p:sp>
         <p:nvSpPr>
-          <p:cNvPr id="55" name="태그"/>
+          <p:cNvPr id="52" name="태그"/>
           <p:cNvSpPr/>
           <p:nvPr/>
         </p:nvSpPr>
@@ -23333,7 +28892,7 @@
       </p:sp>
       <p:sp>
         <p:nvSpPr>
-          <p:cNvPr id="56" name="태그 설명"/>
+          <p:cNvPr id="53" name="태그 설명"/>
           <p:cNvSpPr txBox="1"/>
           <p:nvPr/>
         </p:nvSpPr>
@@ -23380,7 +28939,7 @@
       </p:sp>
       <p:sp>
         <p:nvSpPr>
-          <p:cNvPr id="57" name="레일"/>
+          <p:cNvPr id="54" name="레일"/>
           <p:cNvSpPr/>
           <p:nvPr/>
         </p:nvSpPr>
@@ -23460,14 +29019,14 @@
       </p:sp>
       <p:sp>
         <p:nvSpPr>
-          <p:cNvPr id="58" name="레일 쐐기"/>
+          <p:cNvPr id="55" name="레일 삼각형"/>
           <p:cNvSpPr/>
           <p:nvPr/>
         </p:nvSpPr>
         <p:spPr>
           <a:xfrm>
             <a:off x="734086" y="7733520"/>
-            <a:ext cx="580696" cy="142434"/>
+            <a:ext cx="580696" cy="131478"/>
           </a:xfrm>
           <a:custGeom>
             <a:avLst/>
@@ -23476,7 +29035,7 @@
             <a:cxnLst/>
             <a:rect l="l" t="t" r="r" b="b"/>
             <a:pathLst>
-              <a:path w="580696" h="142434">
+              <a:path w="580696" h="131478">
                 <a:moveTo>
                   <a:pt x="0" y="0"/>
                 </a:moveTo>
@@ -23484,7 +29043,7 @@
                   <a:pt x="580696" y="0"/>
                 </a:lnTo>
                 <a:lnTo>
-                  <a:pt x="290348" y="142434"/>
+                  <a:pt x="290348" y="131478"/>
                 </a:lnTo>
                 <a:close/>
               </a:path>
@@ -23508,7 +29067,7 @@
       </p:sp>
       <p:sp>
         <p:nvSpPr>
-          <p:cNvPr id="59" name="배너"/>
+          <p:cNvPr id="56" name="배너"/>
           <p:cNvSpPr/>
           <p:nvPr/>
         </p:nvSpPr>
@@ -23559,7 +29118,7 @@
       </p:sp>
       <p:sp>
         <p:nvSpPr>
-          <p:cNvPr id="60" name="머리칸"/>
+          <p:cNvPr id="57" name="머리칸"/>
           <p:cNvSpPr/>
           <p:nvPr/>
         </p:nvSpPr>
@@ -23610,7 +29169,7 @@
       </p:sp>
       <p:sp>
         <p:nvSpPr>
-          <p:cNvPr id="61" name="머리칸"/>
+          <p:cNvPr id="58" name="머리칸"/>
           <p:cNvSpPr/>
           <p:nvPr/>
         </p:nvSpPr>
@@ -23661,7 +29220,7 @@
       </p:sp>
       <p:sp>
         <p:nvSpPr>
-          <p:cNvPr id="62" name="칸 본문"/>
+          <p:cNvPr id="59" name="칸 본문"/>
           <p:cNvSpPr txBox="1"/>
           <p:nvPr/>
         </p:nvSpPr>
@@ -23740,7 +29299,7 @@
       </p:sp>
       <p:sp>
         <p:nvSpPr>
-          <p:cNvPr id="63" name="칸 본문"/>
+          <p:cNvPr id="60" name="칸 본문"/>
           <p:cNvSpPr txBox="1"/>
           <p:nvPr/>
         </p:nvSpPr>
@@ -23791,7 +29350,7 @@
       </p:sp>
       <p:cxnSp>
         <p:nvCxnSpPr>
-          <p:cNvPr id="64" name="Connector 63"/>
+          <p:cNvPr id="61" name="Connector 60"/>
           <p:cNvCxnSpPr/>
           <p:nvPr/>
         </p:nvCxnSpPr>
@@ -23812,7 +29371,7 @@
       </p:cxnSp>
       <p:sp>
         <p:nvSpPr>
-          <p:cNvPr id="65" name="태그"/>
+          <p:cNvPr id="62" name="태그"/>
           <p:cNvSpPr/>
           <p:nvPr/>
         </p:nvSpPr>
@@ -23863,7 +29422,7 @@
       </p:sp>
       <p:sp>
         <p:nvSpPr>
-          <p:cNvPr id="66" name="태그 설명"/>
+          <p:cNvPr id="63" name="태그 설명"/>
           <p:cNvSpPr txBox="1"/>
           <p:nvPr/>
         </p:nvSpPr>
@@ -23910,7 +29469,7 @@
       </p:sp>
       <p:sp>
         <p:nvSpPr>
-          <p:cNvPr id="67" name="핵심성과 박스"/>
+          <p:cNvPr id="64" name="핵심성과 박스"/>
           <p:cNvSpPr/>
           <p:nvPr/>
         </p:nvSpPr>
@@ -23942,7 +29501,7 @@
       </p:sp>
       <p:sp>
         <p:nvSpPr>
-          <p:cNvPr id="68" name="핵심성과 라벨"/>
+          <p:cNvPr id="65" name="핵심성과 라벨"/>
           <p:cNvSpPr/>
           <p:nvPr/>
         </p:nvSpPr>
@@ -23995,7 +29554,7 @@
       </p:sp>
       <p:sp>
         <p:nvSpPr>
-          <p:cNvPr id="69" name="핵심성과 문구"/>
+          <p:cNvPr id="66" name="핵심성과 문구"/>
           <p:cNvSpPr txBox="1"/>
           <p:nvPr/>
         </p:nvSpPr>
@@ -25202,108 +30761,36 @@
       </p:cxnSp>
       <p:sp>
         <p:nvSpPr>
-          <p:cNvPr id="30" name="연결 막대"/>
+          <p:cNvPr id="30" name="삼각 화살표"/>
           <p:cNvSpPr/>
           <p:nvPr/>
         </p:nvSpPr>
         <p:spPr>
           <a:xfrm>
-            <a:off x="1698261" y="2704445"/>
-            <a:ext cx="4601739" cy="32870"/>
-          </a:xfrm>
-          <a:prstGeom prst="rect">
-            <a:avLst/>
-          </a:prstGeom>
-          <a:solidFill>
-            <a:srgbClr val="BDE0FF"/>
-          </a:solidFill>
-          <a:ln>
-            <a:noFill/>
-          </a:ln>
-          <a:effectLst/>
-        </p:spPr>
-        <p:txBody>
-          <a:bodyPr rtlCol="0" anchor="ctr" lIns="0" rIns="0" tIns="0" bIns="0"/>
-          <a:lstStyle/>
-          <a:p>
-            <a:pPr algn="ctr"/>
-          </a:p>
-        </p:txBody>
-      </p:sp>
-      <p:sp>
-        <p:nvSpPr>
-          <p:cNvPr id="31" name="연결 끝"/>
-          <p:cNvSpPr/>
-          <p:nvPr/>
-        </p:nvSpPr>
-        <p:spPr>
-          <a:xfrm>
-            <a:off x="1698261" y="2704445"/>
-            <a:ext cx="27391" cy="76696"/>
-          </a:xfrm>
-          <a:prstGeom prst="rect">
-            <a:avLst/>
-          </a:prstGeom>
-          <a:solidFill>
-            <a:srgbClr val="BDE0FF"/>
-          </a:solidFill>
-          <a:ln>
-            <a:noFill/>
-          </a:ln>
-          <a:effectLst/>
-        </p:spPr>
-        <p:txBody>
-          <a:bodyPr rtlCol="0" anchor="ctr" lIns="0" rIns="0" tIns="0" bIns="0"/>
-          <a:lstStyle/>
-          <a:p>
-            <a:pPr algn="ctr"/>
-          </a:p>
-        </p:txBody>
-      </p:sp>
-      <p:sp>
-        <p:nvSpPr>
-          <p:cNvPr id="32" name="연결 끝"/>
-          <p:cNvSpPr/>
-          <p:nvPr/>
-        </p:nvSpPr>
-        <p:spPr>
-          <a:xfrm>
-            <a:off x="6272609" y="2704445"/>
-            <a:ext cx="27391" cy="76696"/>
-          </a:xfrm>
-          <a:prstGeom prst="rect">
-            <a:avLst/>
-          </a:prstGeom>
-          <a:solidFill>
-            <a:srgbClr val="BDE0FF"/>
-          </a:solidFill>
-          <a:ln>
-            <a:noFill/>
-          </a:ln>
-          <a:effectLst/>
-        </p:spPr>
-        <p:txBody>
-          <a:bodyPr rtlCol="0" anchor="ctr" lIns="0" rIns="0" tIns="0" bIns="0"/>
-          <a:lstStyle/>
-          <a:p>
-            <a:pPr algn="ctr"/>
-          </a:p>
-        </p:txBody>
-      </p:sp>
-      <p:sp>
-        <p:nvSpPr>
-          <p:cNvPr id="33" name="연결 화살표"/>
-          <p:cNvSpPr/>
-          <p:nvPr/>
-        </p:nvSpPr>
-        <p:spPr>
-          <a:xfrm>
-            <a:off x="3889565" y="2720880"/>
-            <a:ext cx="219130" cy="169826"/>
-          </a:xfrm>
-          <a:prstGeom prst="downArrow">
-            <a:avLst/>
-          </a:prstGeom>
+            <a:off x="3823826" y="2720880"/>
+            <a:ext cx="350608" cy="142434"/>
+          </a:xfrm>
+          <a:custGeom>
+            <a:avLst/>
+            <a:gdLst/>
+            <a:ahLst/>
+            <a:cxnLst/>
+            <a:rect l="l" t="t" r="r" b="b"/>
+            <a:pathLst>
+              <a:path w="350608" h="142434">
+                <a:moveTo>
+                  <a:pt x="0" y="0"/>
+                </a:moveTo>
+                <a:lnTo>
+                  <a:pt x="350608" y="0"/>
+                </a:lnTo>
+                <a:lnTo>
+                  <a:pt x="175304" y="142434"/>
+                </a:lnTo>
+                <a:close/>
+              </a:path>
+            </a:pathLst>
+          </a:custGeom>
           <a:solidFill>
             <a:srgbClr val="0051BC"/>
           </a:solidFill>
@@ -25313,7 +30800,7 @@
           <a:effectLst/>
         </p:spPr>
         <p:txBody>
-          <a:bodyPr rtlCol="0" anchor="ctr" lIns="0" rIns="0" tIns="0" bIns="0"/>
+          <a:bodyPr rtlCol="0" anchor="ctr"/>
           <a:lstStyle/>
           <a:p>
             <a:pPr algn="ctr"/>
@@ -25322,7 +30809,7 @@
       </p:sp>
       <p:sp>
         <p:nvSpPr>
-          <p:cNvPr id="34" name="표 외곽"/>
+          <p:cNvPr id="31" name="표 외곽"/>
           <p:cNvSpPr/>
           <p:nvPr/>
         </p:nvSpPr>
@@ -25354,7 +30841,7 @@
       </p:sp>
       <p:sp>
         <p:nvSpPr>
-          <p:cNvPr id="35" name="레일"/>
+          <p:cNvPr id="32" name="레일"/>
           <p:cNvSpPr/>
           <p:nvPr/>
         </p:nvSpPr>
@@ -25434,7 +30921,7 @@
       </p:sp>
       <p:sp>
         <p:nvSpPr>
-          <p:cNvPr id="36" name="머리칸"/>
+          <p:cNvPr id="33" name="머리칸"/>
           <p:cNvSpPr/>
           <p:nvPr/>
         </p:nvSpPr>
@@ -25485,7 +30972,7 @@
       </p:sp>
       <p:sp>
         <p:nvSpPr>
-          <p:cNvPr id="37" name="머리칸"/>
+          <p:cNvPr id="34" name="머리칸"/>
           <p:cNvSpPr/>
           <p:nvPr/>
         </p:nvSpPr>
@@ -25536,7 +31023,7 @@
       </p:sp>
       <p:sp>
         <p:nvSpPr>
-          <p:cNvPr id="38" name="칸 본문"/>
+          <p:cNvPr id="35" name="칸 본문"/>
           <p:cNvSpPr txBox="1"/>
           <p:nvPr/>
         </p:nvSpPr>
@@ -25615,7 +31102,7 @@
       </p:sp>
       <p:sp>
         <p:nvSpPr>
-          <p:cNvPr id="39" name="칸 본문"/>
+          <p:cNvPr id="36" name="칸 본문"/>
           <p:cNvSpPr txBox="1"/>
           <p:nvPr/>
         </p:nvSpPr>
@@ -25694,7 +31181,7 @@
       </p:sp>
       <p:cxnSp>
         <p:nvCxnSpPr>
-          <p:cNvPr id="40" name="Connector 39"/>
+          <p:cNvPr id="37" name="Connector 36"/>
           <p:cNvCxnSpPr/>
           <p:nvPr/>
         </p:nvCxnSpPr>
@@ -25715,7 +31202,7 @@
       </p:cxnSp>
       <p:sp>
         <p:nvSpPr>
-          <p:cNvPr id="41" name="레일"/>
+          <p:cNvPr id="38" name="레일"/>
           <p:cNvSpPr/>
           <p:nvPr/>
         </p:nvSpPr>
@@ -25795,14 +31282,14 @@
       </p:sp>
       <p:sp>
         <p:nvSpPr>
-          <p:cNvPr id="42" name="레일 쐐기"/>
+          <p:cNvPr id="39" name="레일 삼각형"/>
           <p:cNvSpPr/>
           <p:nvPr/>
         </p:nvSpPr>
         <p:spPr>
           <a:xfrm>
             <a:off x="547826" y="3644890"/>
-            <a:ext cx="580695" cy="142435"/>
+            <a:ext cx="580695" cy="131478"/>
           </a:xfrm>
           <a:custGeom>
             <a:avLst/>
@@ -25811,7 +31298,7 @@
             <a:cxnLst/>
             <a:rect l="l" t="t" r="r" b="b"/>
             <a:pathLst>
-              <a:path w="580695" h="142435">
+              <a:path w="580695" h="131478">
                 <a:moveTo>
                   <a:pt x="0" y="0"/>
                 </a:moveTo>
@@ -25819,7 +31306,7 @@
                   <a:pt x="580695" y="0"/>
                 </a:lnTo>
                 <a:lnTo>
-                  <a:pt x="290347" y="142435"/>
+                  <a:pt x="290347" y="131478"/>
                 </a:lnTo>
                 <a:close/>
               </a:path>
@@ -25843,19 +31330,17 @@
       </p:sp>
       <p:sp>
         <p:nvSpPr>
-          <p:cNvPr id="43" name="단계"/>
+          <p:cNvPr id="40" name="단계"/>
           <p:cNvSpPr/>
           <p:nvPr/>
         </p:nvSpPr>
         <p:spPr>
           <a:xfrm>
             <a:off x="1161391" y="3666803"/>
-            <a:ext cx="1477761" cy="230087"/>
-          </a:xfrm>
-          <a:prstGeom prst="homePlate">
-            <a:avLst>
-              <a:gd name="adj" fmla="val 30000"/>
-            </a:avLst>
+            <a:ext cx="1412022" cy="230087"/>
+          </a:xfrm>
+          <a:prstGeom prst="rect">
+            <a:avLst/>
           </a:prstGeom>
           <a:solidFill>
             <a:srgbClr val="DEEEFF"/>
@@ -25896,19 +31381,17 @@
       </p:sp>
       <p:sp>
         <p:nvSpPr>
-          <p:cNvPr id="44" name="단계"/>
+          <p:cNvPr id="41" name="단계"/>
           <p:cNvSpPr/>
           <p:nvPr/>
         </p:nvSpPr>
         <p:spPr>
           <a:xfrm>
-            <a:off x="2507674" y="3666803"/>
-            <a:ext cx="1543500" cy="230087"/>
-          </a:xfrm>
-          <a:prstGeom prst="chevron">
-            <a:avLst>
-              <a:gd name="adj" fmla="val 30000"/>
-            </a:avLst>
+            <a:off x="2573413" y="3666803"/>
+            <a:ext cx="1412022" cy="230087"/>
+          </a:xfrm>
+          <a:prstGeom prst="rect">
+            <a:avLst/>
           </a:prstGeom>
           <a:solidFill>
             <a:srgbClr val="BDE0FF"/>
@@ -25949,19 +31432,17 @@
       </p:sp>
       <p:sp>
         <p:nvSpPr>
-          <p:cNvPr id="45" name="단계"/>
+          <p:cNvPr id="42" name="단계"/>
           <p:cNvSpPr/>
           <p:nvPr/>
         </p:nvSpPr>
         <p:spPr>
           <a:xfrm>
-            <a:off x="3919696" y="3666803"/>
-            <a:ext cx="1543500" cy="230087"/>
-          </a:xfrm>
-          <a:prstGeom prst="chevron">
-            <a:avLst>
-              <a:gd name="adj" fmla="val 30000"/>
-            </a:avLst>
+            <a:off x="3985435" y="3666803"/>
+            <a:ext cx="1412022" cy="230087"/>
+          </a:xfrm>
+          <a:prstGeom prst="rect">
+            <a:avLst/>
           </a:prstGeom>
           <a:solidFill>
             <a:srgbClr val="30C2FF"/>
@@ -26002,19 +31483,17 @@
       </p:sp>
       <p:sp>
         <p:nvSpPr>
-          <p:cNvPr id="46" name="단계"/>
+          <p:cNvPr id="43" name="단계"/>
           <p:cNvSpPr/>
           <p:nvPr/>
         </p:nvSpPr>
         <p:spPr>
           <a:xfrm>
-            <a:off x="5331717" y="3666803"/>
-            <a:ext cx="1477761" cy="230087"/>
-          </a:xfrm>
-          <a:prstGeom prst="chevron">
-            <a:avLst>
-              <a:gd name="adj" fmla="val 30000"/>
-            </a:avLst>
+            <a:off x="5397457" y="3666803"/>
+            <a:ext cx="1412022" cy="230087"/>
+          </a:xfrm>
+          <a:prstGeom prst="rect">
+            <a:avLst/>
           </a:prstGeom>
           <a:solidFill>
             <a:srgbClr val="0051BC"/>
@@ -26050,6 +31529,150 @@
               </a:rPr>
               <a:t>본교섭 실시</a:t>
             </a:r>
+          </a:p>
+        </p:txBody>
+      </p:sp>
+      <p:sp>
+        <p:nvSpPr>
+          <p:cNvPr id="44" name="단계 삼각형"/>
+          <p:cNvSpPr/>
+          <p:nvPr/>
+        </p:nvSpPr>
+        <p:spPr>
+          <a:xfrm>
+            <a:off x="2573413" y="3666803"/>
+            <a:ext cx="109565" cy="230087"/>
+          </a:xfrm>
+          <a:custGeom>
+            <a:avLst/>
+            <a:gdLst/>
+            <a:ahLst/>
+            <a:cxnLst/>
+            <a:rect l="l" t="t" r="r" b="b"/>
+            <a:pathLst>
+              <a:path w="109565" h="230087">
+                <a:moveTo>
+                  <a:pt x="0" y="0"/>
+                </a:moveTo>
+                <a:lnTo>
+                  <a:pt x="109565" y="115043"/>
+                </a:lnTo>
+                <a:lnTo>
+                  <a:pt x="0" y="230087"/>
+                </a:lnTo>
+                <a:close/>
+              </a:path>
+            </a:pathLst>
+          </a:custGeom>
+          <a:solidFill>
+            <a:srgbClr val="DEEEFF"/>
+          </a:solidFill>
+          <a:ln>
+            <a:noFill/>
+          </a:ln>
+          <a:effectLst/>
+        </p:spPr>
+        <p:txBody>
+          <a:bodyPr rtlCol="0" anchor="ctr"/>
+          <a:lstStyle/>
+          <a:p>
+            <a:pPr algn="ctr"/>
+          </a:p>
+        </p:txBody>
+      </p:sp>
+      <p:sp>
+        <p:nvSpPr>
+          <p:cNvPr id="45" name="단계 삼각형"/>
+          <p:cNvSpPr/>
+          <p:nvPr/>
+        </p:nvSpPr>
+        <p:spPr>
+          <a:xfrm>
+            <a:off x="3985434" y="3666803"/>
+            <a:ext cx="109566" cy="230087"/>
+          </a:xfrm>
+          <a:custGeom>
+            <a:avLst/>
+            <a:gdLst/>
+            <a:ahLst/>
+            <a:cxnLst/>
+            <a:rect l="l" t="t" r="r" b="b"/>
+            <a:pathLst>
+              <a:path w="109566" h="230087">
+                <a:moveTo>
+                  <a:pt x="0" y="0"/>
+                </a:moveTo>
+                <a:lnTo>
+                  <a:pt x="109566" y="115043"/>
+                </a:lnTo>
+                <a:lnTo>
+                  <a:pt x="0" y="230087"/>
+                </a:lnTo>
+                <a:close/>
+              </a:path>
+            </a:pathLst>
+          </a:custGeom>
+          <a:solidFill>
+            <a:srgbClr val="BDE0FF"/>
+          </a:solidFill>
+          <a:ln>
+            <a:noFill/>
+          </a:ln>
+          <a:effectLst/>
+        </p:spPr>
+        <p:txBody>
+          <a:bodyPr rtlCol="0" anchor="ctr"/>
+          <a:lstStyle/>
+          <a:p>
+            <a:pPr algn="ctr"/>
+          </a:p>
+        </p:txBody>
+      </p:sp>
+      <p:sp>
+        <p:nvSpPr>
+          <p:cNvPr id="46" name="단계 삼각형"/>
+          <p:cNvSpPr/>
+          <p:nvPr/>
+        </p:nvSpPr>
+        <p:spPr>
+          <a:xfrm>
+            <a:off x="5397456" y="3666803"/>
+            <a:ext cx="109565" cy="230087"/>
+          </a:xfrm>
+          <a:custGeom>
+            <a:avLst/>
+            <a:gdLst/>
+            <a:ahLst/>
+            <a:cxnLst/>
+            <a:rect l="l" t="t" r="r" b="b"/>
+            <a:pathLst>
+              <a:path w="109565" h="230087">
+                <a:moveTo>
+                  <a:pt x="0" y="0"/>
+                </a:moveTo>
+                <a:lnTo>
+                  <a:pt x="109565" y="115043"/>
+                </a:lnTo>
+                <a:lnTo>
+                  <a:pt x="0" y="230087"/>
+                </a:lnTo>
+                <a:close/>
+              </a:path>
+            </a:pathLst>
+          </a:custGeom>
+          <a:solidFill>
+            <a:srgbClr val="30C2FF"/>
+          </a:solidFill>
+          <a:ln>
+            <a:noFill/>
+          </a:ln>
+          <a:effectLst/>
+        </p:spPr>
+        <p:txBody>
+          <a:bodyPr rtlCol="0" anchor="ctr"/>
+          <a:lstStyle/>
+          <a:p>
+            <a:pPr algn="ctr"/>
           </a:p>
         </p:txBody>
       </p:sp>
@@ -26486,14 +32109,14 @@
       </p:sp>
       <p:sp>
         <p:nvSpPr>
-          <p:cNvPr id="55" name="레일 쐐기"/>
+          <p:cNvPr id="55" name="레일 삼각형"/>
           <p:cNvSpPr/>
           <p:nvPr/>
         </p:nvSpPr>
         <p:spPr>
           <a:xfrm>
             <a:off x="547826" y="4676650"/>
-            <a:ext cx="580695" cy="142435"/>
+            <a:ext cx="580695" cy="131478"/>
           </a:xfrm>
           <a:custGeom>
             <a:avLst/>
@@ -26502,7 +32125,7 @@
             <a:cxnLst/>
             <a:rect l="l" t="t" r="r" b="b"/>
             <a:pathLst>
-              <a:path w="580695" h="142435">
+              <a:path w="580695" h="131478">
                 <a:moveTo>
                   <a:pt x="0" y="0"/>
                 </a:moveTo>
@@ -26510,7 +32133,7 @@
                   <a:pt x="580695" y="0"/>
                 </a:lnTo>
                 <a:lnTo>
-                  <a:pt x="290347" y="142435"/>
+                  <a:pt x="290347" y="131478"/>
                 </a:lnTo>
                 <a:close/>
               </a:path>
@@ -26695,20 +32318,20 @@
         </p:nvGraphicFramePr>
         <p:xfrm>
           <a:off x="1205217" y="5146873"/>
-          <a:ext cx="2758301" cy="416348"/>
+          <a:ext cx="2711739" cy="416348"/>
         </p:xfrm>
         <a:graphic>
           <a:graphicData uri="http://schemas.openxmlformats.org/drawingml/2006/table">
             <a:tbl>
               <a:tblPr/>
               <a:tblGrid>
-                <a:gridCol w="394043"/>
-                <a:gridCol w="394043"/>
-                <a:gridCol w="394043"/>
-                <a:gridCol w="394043"/>
-                <a:gridCol w="394043"/>
-                <a:gridCol w="394043"/>
-                <a:gridCol w="394043"/>
+                <a:gridCol w="394435"/>
+                <a:gridCol w="504000"/>
+                <a:gridCol w="361565"/>
+                <a:gridCol w="153391"/>
+                <a:gridCol w="416348"/>
+                <a:gridCol w="438261"/>
+                <a:gridCol w="443739"/>
               </a:tblGrid>
               <a:tr h="208174">
                 <a:tc>

--- a/korad-경영평가-ppt/KORAD_경영평가_레이아웃_카탈로그_A4세로.pptx
+++ b/korad-경영평가-ppt/KORAD_경영평가_레이아웃_카탈로그_A4세로.pptx
@@ -9568,1028 +9568,6 @@
           </a:p>
         </p:txBody>
       </p:sp>
-      <p:sp>
-        <p:nvSpPr>
-          <p:cNvPr id="62" name="형광 밑줄"/>
-          <p:cNvSpPr/>
-          <p:nvPr/>
-        </p:nvSpPr>
-        <p:spPr>
-          <a:xfrm>
-            <a:off x="723130" y="7214963"/>
-            <a:ext cx="3812614" cy="43826"/>
-          </a:xfrm>
-          <a:prstGeom prst="rect">
-            <a:avLst/>
-          </a:prstGeom>
-          <a:solidFill>
-            <a:srgbClr val="29FFBD"/>
-          </a:solidFill>
-          <a:ln>
-            <a:noFill/>
-          </a:ln>
-          <a:effectLst/>
-        </p:spPr>
-        <p:txBody>
-          <a:bodyPr rtlCol="0" anchor="ctr" lIns="0" rIns="0" tIns="0" bIns="0"/>
-          <a:lstStyle/>
-          <a:p>
-            <a:pPr algn="ctr"/>
-          </a:p>
-        </p:txBody>
-      </p:sp>
-      <p:sp>
-        <p:nvSpPr>
-          <p:cNvPr id="63" name="소제목"/>
-          <p:cNvSpPr txBox="1"/>
-          <p:nvPr/>
-        </p:nvSpPr>
-        <p:spPr>
-          <a:xfrm>
-            <a:off x="723130" y="7061572"/>
-            <a:ext cx="6300000" cy="241043"/>
-          </a:xfrm>
-          <a:prstGeom prst="rect">
-            <a:avLst/>
-          </a:prstGeom>
-          <a:noFill/>
-        </p:spPr>
-        <p:txBody>
-          <a:bodyPr wrap="square" lIns="0" tIns="0" rIns="0" bIns="0" anchor="ctr">
-            <a:noAutofit/>
-          </a:bodyPr>
-          <a:lstStyle/>
-          <a:p>
-            <a:pPr marL="0" indent="0" algn="l">
-              <a:lnSpc>
-                <a:spcPct val="110000"/>
-              </a:lnSpc>
-              <a:spcBef>
-                <a:spcPts val="0"/>
-              </a:spcBef>
-              <a:spcAft>
-                <a:spcPts val="0"/>
-              </a:spcAft>
-              <a:buNone/>
-            </a:pPr>
-            <a:r>
-              <a:rPr lang="ko-KR" sz="1200" b="1" spc="-60" dirty="0">
-                <a:solidFill>
-                  <a:srgbClr val="000359"/>
-                </a:solidFill>
-                <a:latin typeface="Pretendard"/>
-                <a:ea typeface="Pretendard"/>
-              </a:rPr>
-              <a:t>다. 근로자의 안전을 위해! 시설관리 실무직렬 근무체계 개선 합의</a:t>
-            </a:r>
-          </a:p>
-        </p:txBody>
-      </p:sp>
-      <p:sp>
-        <p:nvSpPr>
-          <p:cNvPr id="64" name="태그칩"/>
-          <p:cNvSpPr/>
-          <p:nvPr/>
-        </p:nvSpPr>
-        <p:spPr>
-          <a:xfrm>
-            <a:off x="4634353" y="7094442"/>
-            <a:ext cx="351016" cy="175304"/>
-          </a:xfrm>
-          <a:prstGeom prst="rect">
-            <a:avLst/>
-          </a:prstGeom>
-          <a:solidFill>
-            <a:srgbClr val="0051BC"/>
-          </a:solidFill>
-          <a:ln>
-            <a:noFill/>
-          </a:ln>
-          <a:effectLst/>
-        </p:spPr>
-        <p:txBody>
-          <a:bodyPr rtlCol="0" anchor="ctr" lIns="10800" rIns="10800" tIns="0" bIns="0" wrap="square"/>
-          <a:lstStyle/>
-          <a:p>
-            <a:pPr marL="0" indent="0" algn="ctr">
-              <a:lnSpc>
-                <a:spcPct val="110000"/>
-              </a:lnSpc>
-              <a:spcBef>
-                <a:spcPts val="0"/>
-              </a:spcBef>
-              <a:spcAft>
-                <a:spcPts val="0"/>
-              </a:spcAft>
-              <a:buNone/>
-            </a:pPr>
-            <a:r>
-              <a:rPr lang="ko-KR" sz="1000" b="1" spc="-50" dirty="0">
-                <a:solidFill>
-                  <a:srgbClr val="FFFFFF"/>
-                </a:solidFill>
-                <a:latin typeface="Pretendard"/>
-                <a:ea typeface="Pretendard"/>
-              </a:rPr>
-              <a:t>신규</a:t>
-            </a:r>
-          </a:p>
-        </p:txBody>
-      </p:sp>
-      <p:sp>
-        <p:nvSpPr>
-          <p:cNvPr id="65" name="표 외곽"/>
-          <p:cNvSpPr/>
-          <p:nvPr/>
-        </p:nvSpPr>
-        <p:spPr>
-          <a:xfrm>
-            <a:off x="723130" y="7346442"/>
-            <a:ext cx="6300000" cy="1594205"/>
-          </a:xfrm>
-          <a:prstGeom prst="rect">
-            <a:avLst/>
-          </a:prstGeom>
-          <a:solidFill>
-            <a:srgbClr val="FFFFFF"/>
-          </a:solidFill>
-          <a:ln w="9525">
-            <a:solidFill>
-              <a:srgbClr val="008EFF"/>
-            </a:solidFill>
-          </a:ln>
-          <a:effectLst/>
-        </p:spPr>
-        <p:txBody>
-          <a:bodyPr rtlCol="0" anchor="ctr" lIns="0" rIns="0" tIns="0" bIns="0"/>
-          <a:lstStyle/>
-          <a:p>
-            <a:pPr algn="ctr"/>
-          </a:p>
-        </p:txBody>
-      </p:sp>
-      <p:sp>
-        <p:nvSpPr>
-          <p:cNvPr id="66" name="레일"/>
-          <p:cNvSpPr/>
-          <p:nvPr/>
-        </p:nvSpPr>
-        <p:spPr>
-          <a:xfrm>
-            <a:off x="734087" y="7362877"/>
-            <a:ext cx="580696" cy="262049"/>
-          </a:xfrm>
-          <a:prstGeom prst="rect">
-            <a:avLst/>
-          </a:prstGeom>
-          <a:pattFill prst="trellis">
-            <a:fgClr>
-              <a:srgbClr val="0990FF"/>
-            </a:fgClr>
-            <a:bgClr>
-              <a:srgbClr val="0080EA"/>
-            </a:bgClr>
-          </a:pattFill>
-          <a:ln>
-            <a:noFill/>
-          </a:ln>
-          <a:effectLst/>
-        </p:spPr>
-        <p:txBody>
-          <a:bodyPr rtlCol="0" anchor="ctr" lIns="10800" rIns="10800" tIns="0" bIns="0" wrap="square"/>
-          <a:lstStyle/>
-          <a:p>
-            <a:pPr marL="0" indent="0" algn="ctr">
-              <a:lnSpc>
-                <a:spcPct val="110000"/>
-              </a:lnSpc>
-              <a:spcBef>
-                <a:spcPts val="0"/>
-              </a:spcBef>
-              <a:spcAft>
-                <a:spcPts val="0"/>
-              </a:spcAft>
-              <a:buNone/>
-            </a:pPr>
-            <a:r>
-              <a:rPr lang="ko-KR" sz="1000" b="1" spc="-50" dirty="0">
-                <a:solidFill>
-                  <a:srgbClr val="FFFFFF"/>
-                </a:solidFill>
-                <a:latin typeface="Pretendard"/>
-                <a:ea typeface="Pretendard"/>
-              </a:rPr>
-              <a:t>현 황</a:t>
-            </a:r>
-          </a:p>
-        </p:txBody>
-      </p:sp>
-      <p:sp>
-        <p:nvSpPr>
-          <p:cNvPr id="67" name="본문"/>
-          <p:cNvSpPr txBox="1"/>
-          <p:nvPr/>
-        </p:nvSpPr>
-        <p:spPr>
-          <a:xfrm>
-            <a:off x="1347652" y="7384790"/>
-            <a:ext cx="5648087" cy="218223"/>
-          </a:xfrm>
-          <a:prstGeom prst="rect">
-            <a:avLst/>
-          </a:prstGeom>
-          <a:noFill/>
-        </p:spPr>
-        <p:txBody>
-          <a:bodyPr wrap="square" lIns="50400" tIns="7200" rIns="21600" bIns="7200" anchor="ctr">
-            <a:noAutofit/>
-          </a:bodyPr>
-          <a:lstStyle/>
-          <a:p>
-            <a:pPr marL="118800" indent="-118800" algn="l">
-              <a:lnSpc>
-                <a:spcPct val="110000"/>
-              </a:lnSpc>
-              <a:spcBef>
-                <a:spcPts val="0"/>
-              </a:spcBef>
-              <a:spcAft>
-                <a:spcPts val="50"/>
-              </a:spcAft>
-              <a:buClr>
-                <a:srgbClr val="000359"/>
-              </a:buClr>
-              <a:buFont typeface="Pretendard"/>
-              <a:buChar char="•"/>
-            </a:pPr>
-            <a:r>
-              <a:rPr lang="ko-KR" sz="1000" spc="-50" dirty="0">
-                <a:solidFill>
-                  <a:srgbClr val="000359"/>
-                </a:solidFill>
-                <a:latin typeface="Pretendard"/>
-                <a:ea typeface="Pretendard"/>
-              </a:rPr>
-              <a:t>감시단속적 근로 적용 제외 승인 근로형태 주간(8시간)-당직(19시간)-비번으로 월 251시간 근무</a:t>
-            </a:r>
-          </a:p>
-        </p:txBody>
-      </p:sp>
-      <p:sp>
-        <p:nvSpPr>
-          <p:cNvPr id="68" name="레일"/>
-          <p:cNvSpPr/>
-          <p:nvPr/>
-        </p:nvSpPr>
-        <p:spPr>
-          <a:xfrm>
-            <a:off x="734087" y="7641360"/>
-            <a:ext cx="580696" cy="262049"/>
-          </a:xfrm>
-          <a:prstGeom prst="rect">
-            <a:avLst/>
-          </a:prstGeom>
-          <a:pattFill prst="trellis">
-            <a:fgClr>
-              <a:srgbClr val="0990FF"/>
-            </a:fgClr>
-            <a:bgClr>
-              <a:srgbClr val="0080EA"/>
-            </a:bgClr>
-          </a:pattFill>
-          <a:ln>
-            <a:noFill/>
-          </a:ln>
-          <a:effectLst/>
-        </p:spPr>
-        <p:txBody>
-          <a:bodyPr rtlCol="0" anchor="ctr" lIns="10800" rIns="10800" tIns="0" bIns="0" wrap="square"/>
-          <a:lstStyle/>
-          <a:p>
-            <a:pPr marL="0" indent="0" algn="ctr">
-              <a:lnSpc>
-                <a:spcPct val="110000"/>
-              </a:lnSpc>
-              <a:spcBef>
-                <a:spcPts val="0"/>
-              </a:spcBef>
-              <a:spcAft>
-                <a:spcPts val="0"/>
-              </a:spcAft>
-              <a:buNone/>
-            </a:pPr>
-            <a:r>
-              <a:rPr lang="ko-KR" sz="1000" b="1" spc="-50" dirty="0">
-                <a:solidFill>
-                  <a:srgbClr val="FFFFFF"/>
-                </a:solidFill>
-                <a:latin typeface="Pretendard"/>
-                <a:ea typeface="Pretendard"/>
-              </a:rPr>
-              <a:t>문제점</a:t>
-            </a:r>
-          </a:p>
-        </p:txBody>
-      </p:sp>
-      <p:sp>
-        <p:nvSpPr>
-          <p:cNvPr id="69" name="본문"/>
-          <p:cNvSpPr txBox="1"/>
-          <p:nvPr/>
-        </p:nvSpPr>
-        <p:spPr>
-          <a:xfrm>
-            <a:off x="1347652" y="7663273"/>
-            <a:ext cx="5648087" cy="218223"/>
-          </a:xfrm>
-          <a:prstGeom prst="rect">
-            <a:avLst/>
-          </a:prstGeom>
-          <a:noFill/>
-        </p:spPr>
-        <p:txBody>
-          <a:bodyPr wrap="square" lIns="50400" tIns="7200" rIns="21600" bIns="7200" anchor="ctr">
-            <a:noAutofit/>
-          </a:bodyPr>
-          <a:lstStyle/>
-          <a:p>
-            <a:pPr marL="118800" indent="-118800" algn="l">
-              <a:lnSpc>
-                <a:spcPct val="110000"/>
-              </a:lnSpc>
-              <a:spcBef>
-                <a:spcPts val="0"/>
-              </a:spcBef>
-              <a:spcAft>
-                <a:spcPts val="50"/>
-              </a:spcAft>
-              <a:buClr>
-                <a:srgbClr val="000359"/>
-              </a:buClr>
-              <a:buFont typeface="Pretendard"/>
-              <a:buChar char="•"/>
-            </a:pPr>
-            <a:r>
-              <a:rPr lang="ko-KR" sz="1000" spc="-50" dirty="0">
-                <a:solidFill>
-                  <a:srgbClr val="000359"/>
-                </a:solidFill>
-                <a:latin typeface="Pretendard"/>
-                <a:ea typeface="Pretendard"/>
-              </a:rPr>
-              <a:t>장시간 근로에 따른 피로누적 등 건강권 저해와 잦은 이직에 따른 인력의 비효율적 운영</a:t>
-            </a:r>
-          </a:p>
-        </p:txBody>
-      </p:sp>
-      <p:sp>
-        <p:nvSpPr>
-          <p:cNvPr id="70" name="레일"/>
-          <p:cNvSpPr/>
-          <p:nvPr/>
-        </p:nvSpPr>
-        <p:spPr>
-          <a:xfrm>
-            <a:off x="734087" y="7919843"/>
-            <a:ext cx="580696" cy="1004369"/>
-          </a:xfrm>
-          <a:prstGeom prst="rect">
-            <a:avLst/>
-          </a:prstGeom>
-          <a:pattFill prst="trellis">
-            <a:fgClr>
-              <a:srgbClr val="0990FF"/>
-            </a:fgClr>
-            <a:bgClr>
-              <a:srgbClr val="0080EA"/>
-            </a:bgClr>
-          </a:pattFill>
-          <a:ln>
-            <a:noFill/>
-          </a:ln>
-          <a:effectLst/>
-        </p:spPr>
-        <p:txBody>
-          <a:bodyPr rtlCol="0" anchor="ctr" lIns="10800" rIns="10800" tIns="0" bIns="0" wrap="square"/>
-          <a:lstStyle/>
-          <a:p>
-            <a:pPr marL="0" indent="0" algn="ctr">
-              <a:lnSpc>
-                <a:spcPct val="110000"/>
-              </a:lnSpc>
-              <a:spcBef>
-                <a:spcPts val="0"/>
-              </a:spcBef>
-              <a:spcAft>
-                <a:spcPts val="0"/>
-              </a:spcAft>
-              <a:buNone/>
-            </a:pPr>
-            <a:r>
-              <a:rPr lang="ko-KR" sz="1000" b="1" spc="-50" dirty="0">
-                <a:solidFill>
-                  <a:srgbClr val="FFFFFF"/>
-                </a:solidFill>
-                <a:latin typeface="Pretendard"/>
-                <a:ea typeface="Pretendard"/>
-              </a:rPr>
-              <a:t>노사</a:t>
-            </a:r>
-          </a:p>
-          <a:p>
-            <a:pPr marL="0" indent="0" algn="ctr">
-              <a:lnSpc>
-                <a:spcPct val="110000"/>
-              </a:lnSpc>
-              <a:spcBef>
-                <a:spcPts val="0"/>
-              </a:spcBef>
-              <a:spcAft>
-                <a:spcPts val="0"/>
-              </a:spcAft>
-              <a:buNone/>
-            </a:pPr>
-            <a:r>
-              <a:rPr lang="ko-KR" sz="1000" b="1" spc="-50" dirty="0">
-                <a:solidFill>
-                  <a:srgbClr val="FFFFFF"/>
-                </a:solidFill>
-                <a:latin typeface="Pretendard"/>
-                <a:ea typeface="Pretendard"/>
-              </a:rPr>
-              <a:t>공동노력</a:t>
-            </a:r>
-          </a:p>
-        </p:txBody>
-      </p:sp>
-      <p:sp>
-        <p:nvSpPr>
-          <p:cNvPr id="71" name="머리칸"/>
-          <p:cNvSpPr/>
-          <p:nvPr/>
-        </p:nvSpPr>
-        <p:spPr>
-          <a:xfrm>
-            <a:off x="1347652" y="7941757"/>
-            <a:ext cx="1866261" cy="230087"/>
-          </a:xfrm>
-          <a:prstGeom prst="rect">
-            <a:avLst/>
-          </a:prstGeom>
-          <a:solidFill>
-            <a:srgbClr val="DEEEFF"/>
-          </a:solidFill>
-          <a:ln>
-            <a:noFill/>
-          </a:ln>
-          <a:effectLst/>
-        </p:spPr>
-        <p:txBody>
-          <a:bodyPr rtlCol="0" anchor="ctr" lIns="21600" rIns="21600" tIns="3600" bIns="3600" wrap="square"/>
-          <a:lstStyle/>
-          <a:p>
-            <a:pPr marL="0" indent="0" algn="ctr">
-              <a:lnSpc>
-                <a:spcPct val="110000"/>
-              </a:lnSpc>
-              <a:spcBef>
-                <a:spcPts val="0"/>
-              </a:spcBef>
-              <a:spcAft>
-                <a:spcPts val="0"/>
-              </a:spcAft>
-              <a:buNone/>
-            </a:pPr>
-            <a:r>
-              <a:rPr lang="ko-KR" sz="1000" b="1" spc="-50" dirty="0">
-                <a:solidFill>
-                  <a:srgbClr val="000359"/>
-                </a:solidFill>
-                <a:latin typeface="Pretendard"/>
-                <a:ea typeface="Pretendard"/>
-              </a:rPr>
-              <a:t>해당 근로자 소통</a:t>
-            </a:r>
-          </a:p>
-        </p:txBody>
-      </p:sp>
-      <p:sp>
-        <p:nvSpPr>
-          <p:cNvPr id="72" name="머리칸"/>
-          <p:cNvSpPr/>
-          <p:nvPr/>
-        </p:nvSpPr>
-        <p:spPr>
-          <a:xfrm>
-            <a:off x="3230348" y="7941757"/>
-            <a:ext cx="1866261" cy="230087"/>
-          </a:xfrm>
-          <a:prstGeom prst="rect">
-            <a:avLst/>
-          </a:prstGeom>
-          <a:solidFill>
-            <a:srgbClr val="DEEEFF"/>
-          </a:solidFill>
-          <a:ln>
-            <a:noFill/>
-          </a:ln>
-          <a:effectLst/>
-        </p:spPr>
-        <p:txBody>
-          <a:bodyPr rtlCol="0" anchor="ctr" lIns="21600" rIns="21600" tIns="3600" bIns="3600" wrap="square"/>
-          <a:lstStyle/>
-          <a:p>
-            <a:pPr marL="0" indent="0" algn="ctr">
-              <a:lnSpc>
-                <a:spcPct val="110000"/>
-              </a:lnSpc>
-              <a:spcBef>
-                <a:spcPts val="0"/>
-              </a:spcBef>
-              <a:spcAft>
-                <a:spcPts val="0"/>
-              </a:spcAft>
-              <a:buNone/>
-            </a:pPr>
-            <a:r>
-              <a:rPr lang="ko-KR" sz="1000" b="1" spc="-50" dirty="0">
-                <a:solidFill>
-                  <a:srgbClr val="000359"/>
-                </a:solidFill>
-                <a:latin typeface="Pretendard"/>
-                <a:ea typeface="Pretendard"/>
-              </a:rPr>
-              <a:t>근무체계 개편</a:t>
-            </a:r>
-          </a:p>
-        </p:txBody>
-      </p:sp>
-      <p:sp>
-        <p:nvSpPr>
-          <p:cNvPr id="73" name="머리칸"/>
-          <p:cNvSpPr/>
-          <p:nvPr/>
-        </p:nvSpPr>
-        <p:spPr>
-          <a:xfrm>
-            <a:off x="5113043" y="7941757"/>
-            <a:ext cx="1866261" cy="230087"/>
-          </a:xfrm>
-          <a:prstGeom prst="rect">
-            <a:avLst/>
-          </a:prstGeom>
-          <a:solidFill>
-            <a:srgbClr val="DEEEFF"/>
-          </a:solidFill>
-          <a:ln>
-            <a:noFill/>
-          </a:ln>
-          <a:effectLst/>
-        </p:spPr>
-        <p:txBody>
-          <a:bodyPr rtlCol="0" anchor="ctr" lIns="21600" rIns="21600" tIns="3600" bIns="3600" wrap="square"/>
-          <a:lstStyle/>
-          <a:p>
-            <a:pPr marL="0" indent="0" algn="ctr">
-              <a:lnSpc>
-                <a:spcPct val="110000"/>
-              </a:lnSpc>
-              <a:spcBef>
-                <a:spcPts val="0"/>
-              </a:spcBef>
-              <a:spcAft>
-                <a:spcPts val="0"/>
-              </a:spcAft>
-              <a:buNone/>
-            </a:pPr>
-            <a:r>
-              <a:rPr lang="ko-KR" sz="1000" b="1" spc="-50" dirty="0">
-                <a:solidFill>
-                  <a:srgbClr val="000359"/>
-                </a:solidFill>
-                <a:latin typeface="Pretendard"/>
-                <a:ea typeface="Pretendard"/>
-              </a:rPr>
-              <a:t>임금보전 대책 마련</a:t>
-            </a:r>
-          </a:p>
-        </p:txBody>
-      </p:sp>
-      <p:sp>
-        <p:nvSpPr>
-          <p:cNvPr id="74" name="칸 본문"/>
-          <p:cNvSpPr txBox="1"/>
-          <p:nvPr/>
-        </p:nvSpPr>
-        <p:spPr>
-          <a:xfrm>
-            <a:off x="1358609" y="8182800"/>
-            <a:ext cx="1860783" cy="719499"/>
-          </a:xfrm>
-          <a:prstGeom prst="rect">
-            <a:avLst/>
-          </a:prstGeom>
-          <a:noFill/>
-        </p:spPr>
-        <p:txBody>
-          <a:bodyPr wrap="square" lIns="50400" tIns="7200" rIns="21600" bIns="7200" anchor="ctr">
-            <a:noAutofit/>
-          </a:bodyPr>
-          <a:lstStyle/>
-          <a:p>
-            <a:pPr marL="118800" indent="-118800" algn="l">
-              <a:lnSpc>
-                <a:spcPct val="110000"/>
-              </a:lnSpc>
-              <a:spcBef>
-                <a:spcPts val="0"/>
-              </a:spcBef>
-              <a:spcAft>
-                <a:spcPts val="50"/>
-              </a:spcAft>
-              <a:buClr>
-                <a:srgbClr val="000359"/>
-              </a:buClr>
-              <a:buFont typeface="Pretendard"/>
-              <a:buChar char="•"/>
-            </a:pPr>
-            <a:r>
-              <a:rPr lang="ko-KR" sz="1000" spc="-50" dirty="0">
-                <a:solidFill>
-                  <a:srgbClr val="000359"/>
-                </a:solidFill>
-                <a:latin typeface="Pretendard"/>
-                <a:ea typeface="Pretendard"/>
-              </a:rPr>
-              <a:t>감시단속적 근로 적용 제외 승인 해제를 통한 근로조건 개선 설명</a:t>
-            </a:r>
-          </a:p>
-          <a:p>
-            <a:pPr marL="118800" indent="-118800" algn="l">
-              <a:lnSpc>
-                <a:spcPct val="110000"/>
-              </a:lnSpc>
-              <a:spcBef>
-                <a:spcPts val="0"/>
-              </a:spcBef>
-              <a:spcAft>
-                <a:spcPts val="50"/>
-              </a:spcAft>
-              <a:buClr>
-                <a:srgbClr val="000359"/>
-              </a:buClr>
-              <a:buFont typeface="Pretendard"/>
-              <a:buChar char="•"/>
-            </a:pPr>
-            <a:r>
-              <a:rPr lang="ko-KR" sz="1000" spc="-50" dirty="0">
-                <a:solidFill>
-                  <a:srgbClr val="000359"/>
-                </a:solidFill>
-                <a:latin typeface="Pretendard"/>
-                <a:ea typeface="Pretendard"/>
-              </a:rPr>
-              <a:t>임금저하 방지를 위한 노사 공동 노력 설득·소통</a:t>
-            </a:r>
-          </a:p>
-        </p:txBody>
-      </p:sp>
-      <p:sp>
-        <p:nvSpPr>
-          <p:cNvPr id="75" name="칸 본문"/>
-          <p:cNvSpPr txBox="1"/>
-          <p:nvPr/>
-        </p:nvSpPr>
-        <p:spPr>
-          <a:xfrm>
-            <a:off x="3241304" y="8182800"/>
-            <a:ext cx="1860783" cy="719499"/>
-          </a:xfrm>
-          <a:prstGeom prst="rect">
-            <a:avLst/>
-          </a:prstGeom>
-          <a:noFill/>
-        </p:spPr>
-        <p:txBody>
-          <a:bodyPr wrap="square" lIns="50400" tIns="7200" rIns="21600" bIns="7200" anchor="ctr">
-            <a:noAutofit/>
-          </a:bodyPr>
-          <a:lstStyle/>
-          <a:p>
-            <a:pPr marL="118800" indent="-118800" algn="l">
-              <a:lnSpc>
-                <a:spcPct val="110000"/>
-              </a:lnSpc>
-              <a:spcBef>
-                <a:spcPts val="0"/>
-              </a:spcBef>
-              <a:spcAft>
-                <a:spcPts val="50"/>
-              </a:spcAft>
-              <a:buClr>
-                <a:srgbClr val="000359"/>
-              </a:buClr>
-              <a:buFont typeface="Pretendard"/>
-              <a:buChar char="•"/>
-            </a:pPr>
-            <a:r>
-              <a:rPr lang="ko-KR" sz="1000" spc="-50" dirty="0">
-                <a:solidFill>
-                  <a:srgbClr val="000359"/>
-                </a:solidFill>
-                <a:latin typeface="Pretendard"/>
-                <a:ea typeface="Pretendard"/>
-              </a:rPr>
-              <a:t>승인 해제 후 일반 근로형태로 전환·개편</a:t>
-            </a:r>
-          </a:p>
-          <a:p>
-            <a:pPr marL="118800" indent="-118800" algn="l">
-              <a:lnSpc>
-                <a:spcPct val="110000"/>
-              </a:lnSpc>
-              <a:spcBef>
-                <a:spcPts val="0"/>
-              </a:spcBef>
-              <a:spcAft>
-                <a:spcPts val="50"/>
-              </a:spcAft>
-              <a:buClr>
-                <a:srgbClr val="000359"/>
-              </a:buClr>
-              <a:buFont typeface="Pretendard"/>
-              <a:buChar char="•"/>
-            </a:pPr>
-            <a:r>
-              <a:rPr lang="ko-KR" sz="1000" spc="-50" dirty="0">
-                <a:solidFill>
-                  <a:srgbClr val="000359"/>
-                </a:solidFill>
-                <a:latin typeface="Pretendard"/>
-                <a:ea typeface="Pretendard"/>
-              </a:rPr>
-              <a:t>월 172시간 근무(기존 251시간) → 주·야 교대</a:t>
-            </a:r>
-          </a:p>
-        </p:txBody>
-      </p:sp>
-      <p:cxnSp>
-        <p:nvCxnSpPr>
-          <p:cNvPr id="76" name="Connector 75"/>
-          <p:cNvCxnSpPr/>
-          <p:nvPr/>
-        </p:nvCxnSpPr>
-        <p:spPr>
-          <a:xfrm>
-            <a:off x="3230348" y="8215670"/>
-            <a:ext cx="0" cy="653760"/>
-          </a:xfrm>
-          <a:prstGeom prst="line">
-            <a:avLst/>
-          </a:prstGeom>
-          <a:ln w="9525">
-            <a:solidFill>
-              <a:srgbClr val="BDE0FF"/>
-            </a:solidFill>
-          </a:ln>
-        </p:spPr>
-      </p:cxnSp>
-      <p:sp>
-        <p:nvSpPr>
-          <p:cNvPr id="77" name="칸 본문"/>
-          <p:cNvSpPr txBox="1"/>
-          <p:nvPr/>
-        </p:nvSpPr>
-        <p:spPr>
-          <a:xfrm>
-            <a:off x="5124000" y="8182800"/>
-            <a:ext cx="1860783" cy="719499"/>
-          </a:xfrm>
-          <a:prstGeom prst="rect">
-            <a:avLst/>
-          </a:prstGeom>
-          <a:noFill/>
-        </p:spPr>
-        <p:txBody>
-          <a:bodyPr wrap="square" lIns="50400" tIns="7200" rIns="21600" bIns="7200" anchor="ctr">
-            <a:noAutofit/>
-          </a:bodyPr>
-          <a:lstStyle/>
-          <a:p>
-            <a:pPr marL="118800" indent="-118800" algn="l">
-              <a:lnSpc>
-                <a:spcPct val="110000"/>
-              </a:lnSpc>
-              <a:spcBef>
-                <a:spcPts val="0"/>
-              </a:spcBef>
-              <a:spcAft>
-                <a:spcPts val="50"/>
-              </a:spcAft>
-              <a:buClr>
-                <a:srgbClr val="000359"/>
-              </a:buClr>
-              <a:buFont typeface="Pretendard"/>
-              <a:buChar char="•"/>
-            </a:pPr>
-            <a:r>
-              <a:rPr lang="ko-KR" sz="1000" spc="-50" dirty="0">
-                <a:solidFill>
-                  <a:srgbClr val="000359"/>
-                </a:solidFill>
-                <a:latin typeface="Pretendard"/>
-                <a:ea typeface="Pretendard"/>
-              </a:rPr>
-              <a:t>근로시간 감소에 따른 임금보전 대책 검토 및 마련</a:t>
-            </a:r>
-          </a:p>
-          <a:p>
-            <a:pPr marL="118800" indent="-118800" algn="l">
-              <a:lnSpc>
-                <a:spcPct val="110000"/>
-              </a:lnSpc>
-              <a:spcBef>
-                <a:spcPts val="0"/>
-              </a:spcBef>
-              <a:spcAft>
-                <a:spcPts val="50"/>
-              </a:spcAft>
-              <a:buClr>
-                <a:srgbClr val="000359"/>
-              </a:buClr>
-              <a:buFont typeface="Pretendard"/>
-              <a:buChar char="•"/>
-            </a:pPr>
-            <a:r>
-              <a:rPr lang="ko-KR" sz="1000" spc="-50" dirty="0">
-                <a:solidFill>
-                  <a:srgbClr val="000359"/>
-                </a:solidFill>
-                <a:latin typeface="Pretendard"/>
-                <a:ea typeface="Pretendard"/>
-              </a:rPr>
-              <a:t>법령에 따른 휴일수당·연장근로수당 지급</a:t>
-            </a:r>
-          </a:p>
-        </p:txBody>
-      </p:sp>
-      <p:cxnSp>
-        <p:nvCxnSpPr>
-          <p:cNvPr id="78" name="Connector 77"/>
-          <p:cNvCxnSpPr/>
-          <p:nvPr/>
-        </p:nvCxnSpPr>
-        <p:spPr>
-          <a:xfrm>
-            <a:off x="5113043" y="8215670"/>
-            <a:ext cx="0" cy="653760"/>
-          </a:xfrm>
-          <a:prstGeom prst="line">
-            <a:avLst/>
-          </a:prstGeom>
-          <a:ln w="9525">
-            <a:solidFill>
-              <a:srgbClr val="BDE0FF"/>
-            </a:solidFill>
-          </a:ln>
-        </p:spPr>
-      </p:cxnSp>
-      <p:sp>
-        <p:nvSpPr>
-          <p:cNvPr id="79" name="핵심성과 박스"/>
-          <p:cNvSpPr/>
-          <p:nvPr/>
-        </p:nvSpPr>
-        <p:spPr>
-          <a:xfrm>
-            <a:off x="723130" y="9028299"/>
-            <a:ext cx="6300000" cy="491478"/>
-          </a:xfrm>
-          <a:prstGeom prst="rect">
-            <a:avLst/>
-          </a:prstGeom>
-          <a:solidFill>
-            <a:srgbClr val="E6FCF9"/>
-          </a:solidFill>
-          <a:ln w="19050">
-            <a:solidFill>
-              <a:srgbClr val="00BE83"/>
-            </a:solidFill>
-          </a:ln>
-          <a:effectLst/>
-        </p:spPr>
-        <p:txBody>
-          <a:bodyPr rtlCol="0" anchor="ctr" lIns="0" rIns="0" tIns="0" bIns="0"/>
-          <a:lstStyle/>
-          <a:p>
-            <a:pPr algn="ctr"/>
-          </a:p>
-        </p:txBody>
-      </p:sp>
-      <p:sp>
-        <p:nvSpPr>
-          <p:cNvPr id="80" name="핵심성과 라벨"/>
-          <p:cNvSpPr/>
-          <p:nvPr/>
-        </p:nvSpPr>
-        <p:spPr>
-          <a:xfrm>
-            <a:off x="756000" y="9066647"/>
-            <a:ext cx="657391" cy="414783"/>
-          </a:xfrm>
-          <a:prstGeom prst="homePlate">
-            <a:avLst>
-              <a:gd name="adj" fmla="val 28000"/>
-            </a:avLst>
-          </a:prstGeom>
-          <a:solidFill>
-            <a:srgbClr val="002060"/>
-          </a:solidFill>
-          <a:ln>
-            <a:noFill/>
-          </a:ln>
-          <a:effectLst/>
-        </p:spPr>
-        <p:txBody>
-          <a:bodyPr rtlCol="0" anchor="ctr" lIns="18000" rIns="79200" tIns="0" bIns="0" wrap="square"/>
-          <a:lstStyle/>
-          <a:p>
-            <a:pPr marL="0" indent="0" algn="ctr">
-              <a:lnSpc>
-                <a:spcPct val="110000"/>
-              </a:lnSpc>
-              <a:spcBef>
-                <a:spcPts val="0"/>
-              </a:spcBef>
-              <a:spcAft>
-                <a:spcPts val="0"/>
-              </a:spcAft>
-              <a:buNone/>
-            </a:pPr>
-            <a:r>
-              <a:rPr lang="ko-KR" sz="1100" b="1" spc="-55" dirty="0">
-                <a:solidFill>
-                  <a:srgbClr val="FFFFFF"/>
-                </a:solidFill>
-                <a:latin typeface="Pretendard"/>
-                <a:ea typeface="Pretendard"/>
-              </a:rPr>
-              <a:t>추진성과</a:t>
-            </a:r>
-          </a:p>
-        </p:txBody>
-      </p:sp>
-      <p:sp>
-        <p:nvSpPr>
-          <p:cNvPr id="81" name="핵심성과 문구"/>
-          <p:cNvSpPr txBox="1"/>
-          <p:nvPr/>
-        </p:nvSpPr>
-        <p:spPr>
-          <a:xfrm>
-            <a:off x="1501043" y="9044734"/>
-            <a:ext cx="5456348" cy="458609"/>
-          </a:xfrm>
-          <a:prstGeom prst="rect">
-            <a:avLst/>
-          </a:prstGeom>
-          <a:noFill/>
-        </p:spPr>
-        <p:txBody>
-          <a:bodyPr wrap="square" lIns="36000" tIns="10800" rIns="36000" bIns="10800" anchor="ctr">
-            <a:noAutofit/>
-          </a:bodyPr>
-          <a:lstStyle/>
-          <a:p>
-            <a:pPr marL="151200" indent="-151200" algn="l">
-              <a:lnSpc>
-                <a:spcPct val="110000"/>
-              </a:lnSpc>
-              <a:spcBef>
-                <a:spcPts val="0"/>
-              </a:spcBef>
-              <a:spcAft>
-                <a:spcPts val="0"/>
-              </a:spcAft>
-              <a:buClr>
-                <a:srgbClr val="000359"/>
-              </a:buClr>
-              <a:buFont typeface="Pretendard"/>
-              <a:buChar char="•"/>
-            </a:pPr>
-            <a:r>
-              <a:rPr lang="ko-KR" sz="1100" b="1" spc="-55" dirty="0">
-                <a:solidFill>
-                  <a:srgbClr val="000359"/>
-                </a:solidFill>
-                <a:latin typeface="Pretendard"/>
-                <a:ea typeface="Pretendard"/>
-              </a:rPr>
-              <a:t>노사합의 체결('25.12월) → 장시간 근무해소(△79시간)를 통한 건강권 확보와 임금보전까지 일거양득</a:t>
-            </a:r>
-          </a:p>
-        </p:txBody>
-      </p:sp>
     </p:spTree>
   </p:cSld>
   <p:clrMapOvr>
@@ -10722,7 +9700,7 @@
         <p:spPr>
           <a:xfrm>
             <a:off x="536870" y="920348"/>
-            <a:ext cx="3634156" cy="43826"/>
+            <a:ext cx="3812614" cy="43826"/>
           </a:xfrm>
           <a:prstGeom prst="rect">
             <a:avLst/>
@@ -10785,7 +9763,7 @@
                 <a:latin typeface="Pretendard"/>
                 <a:ea typeface="Pretendard"/>
               </a:rPr>
-              <a:t>라. 직원 만족도를 높이는 복리후생 향상과 근무환경 개선 노력</a:t>
+              <a:t>다. 근로자의 안전을 위해! 시설관리 실무직렬 근무체계 개선 합의</a:t>
             </a:r>
           </a:p>
         </p:txBody>
@@ -10798,7 +9776,7 @@
         </p:nvSpPr>
         <p:spPr>
           <a:xfrm>
-            <a:off x="4269635" y="799826"/>
+            <a:off x="4448092" y="799826"/>
             <a:ext cx="351016" cy="175304"/>
           </a:xfrm>
           <a:prstGeom prst="rect">
@@ -10836,6 +9814,1028 @@
                 <a:latin typeface="Pretendard"/>
                 <a:ea typeface="Pretendard"/>
               </a:rPr>
+              <a:t>신규</a:t>
+            </a:r>
+          </a:p>
+        </p:txBody>
+      </p:sp>
+      <p:sp>
+        <p:nvSpPr>
+          <p:cNvPr id="10" name="표 외곽"/>
+          <p:cNvSpPr/>
+          <p:nvPr/>
+        </p:nvSpPr>
+        <p:spPr>
+          <a:xfrm>
+            <a:off x="536870" y="1051826"/>
+            <a:ext cx="6300000" cy="1594205"/>
+          </a:xfrm>
+          <a:prstGeom prst="rect">
+            <a:avLst/>
+          </a:prstGeom>
+          <a:solidFill>
+            <a:srgbClr val="FFFFFF"/>
+          </a:solidFill>
+          <a:ln w="9525">
+            <a:solidFill>
+              <a:srgbClr val="008EFF"/>
+            </a:solidFill>
+          </a:ln>
+          <a:effectLst/>
+        </p:spPr>
+        <p:txBody>
+          <a:bodyPr rtlCol="0" anchor="ctr" lIns="0" rIns="0" tIns="0" bIns="0"/>
+          <a:lstStyle/>
+          <a:p>
+            <a:pPr algn="ctr"/>
+          </a:p>
+        </p:txBody>
+      </p:sp>
+      <p:sp>
+        <p:nvSpPr>
+          <p:cNvPr id="11" name="레일"/>
+          <p:cNvSpPr/>
+          <p:nvPr/>
+        </p:nvSpPr>
+        <p:spPr>
+          <a:xfrm>
+            <a:off x="547826" y="1068261"/>
+            <a:ext cx="580696" cy="262049"/>
+          </a:xfrm>
+          <a:prstGeom prst="rect">
+            <a:avLst/>
+          </a:prstGeom>
+          <a:pattFill prst="trellis">
+            <a:fgClr>
+              <a:srgbClr val="0990FF"/>
+            </a:fgClr>
+            <a:bgClr>
+              <a:srgbClr val="0080EA"/>
+            </a:bgClr>
+          </a:pattFill>
+          <a:ln>
+            <a:noFill/>
+          </a:ln>
+          <a:effectLst/>
+        </p:spPr>
+        <p:txBody>
+          <a:bodyPr rtlCol="0" anchor="ctr" lIns="10800" rIns="10800" tIns="0" bIns="0" wrap="square"/>
+          <a:lstStyle/>
+          <a:p>
+            <a:pPr marL="0" indent="0" algn="ctr">
+              <a:lnSpc>
+                <a:spcPct val="110000"/>
+              </a:lnSpc>
+              <a:spcBef>
+                <a:spcPts val="0"/>
+              </a:spcBef>
+              <a:spcAft>
+                <a:spcPts val="0"/>
+              </a:spcAft>
+              <a:buNone/>
+            </a:pPr>
+            <a:r>
+              <a:rPr lang="ko-KR" sz="1000" b="1" spc="-50" dirty="0">
+                <a:solidFill>
+                  <a:srgbClr val="FFFFFF"/>
+                </a:solidFill>
+                <a:latin typeface="Pretendard"/>
+                <a:ea typeface="Pretendard"/>
+              </a:rPr>
+              <a:t>현 황</a:t>
+            </a:r>
+          </a:p>
+        </p:txBody>
+      </p:sp>
+      <p:sp>
+        <p:nvSpPr>
+          <p:cNvPr id="12" name="본문"/>
+          <p:cNvSpPr txBox="1"/>
+          <p:nvPr/>
+        </p:nvSpPr>
+        <p:spPr>
+          <a:xfrm>
+            <a:off x="1161391" y="1090174"/>
+            <a:ext cx="5648087" cy="218223"/>
+          </a:xfrm>
+          <a:prstGeom prst="rect">
+            <a:avLst/>
+          </a:prstGeom>
+          <a:noFill/>
+        </p:spPr>
+        <p:txBody>
+          <a:bodyPr wrap="square" lIns="50400" tIns="7200" rIns="21600" bIns="7200" anchor="ctr">
+            <a:noAutofit/>
+          </a:bodyPr>
+          <a:lstStyle/>
+          <a:p>
+            <a:pPr marL="118800" indent="-118800" algn="l">
+              <a:lnSpc>
+                <a:spcPct val="110000"/>
+              </a:lnSpc>
+              <a:spcBef>
+                <a:spcPts val="0"/>
+              </a:spcBef>
+              <a:spcAft>
+                <a:spcPts val="50"/>
+              </a:spcAft>
+              <a:buClr>
+                <a:srgbClr val="000359"/>
+              </a:buClr>
+              <a:buFont typeface="Pretendard"/>
+              <a:buChar char="•"/>
+            </a:pPr>
+            <a:r>
+              <a:rPr lang="ko-KR" sz="1000" spc="-50" dirty="0">
+                <a:solidFill>
+                  <a:srgbClr val="000359"/>
+                </a:solidFill>
+                <a:latin typeface="Pretendard"/>
+                <a:ea typeface="Pretendard"/>
+              </a:rPr>
+              <a:t>감시단속적 근로 적용 제외 승인 근로형태 주간(8시간)-당직(19시간)-비번으로 월 251시간 근무</a:t>
+            </a:r>
+          </a:p>
+        </p:txBody>
+      </p:sp>
+      <p:sp>
+        <p:nvSpPr>
+          <p:cNvPr id="13" name="레일"/>
+          <p:cNvSpPr/>
+          <p:nvPr/>
+        </p:nvSpPr>
+        <p:spPr>
+          <a:xfrm>
+            <a:off x="547826" y="1346744"/>
+            <a:ext cx="580696" cy="262049"/>
+          </a:xfrm>
+          <a:prstGeom prst="rect">
+            <a:avLst/>
+          </a:prstGeom>
+          <a:pattFill prst="trellis">
+            <a:fgClr>
+              <a:srgbClr val="0990FF"/>
+            </a:fgClr>
+            <a:bgClr>
+              <a:srgbClr val="0080EA"/>
+            </a:bgClr>
+          </a:pattFill>
+          <a:ln>
+            <a:noFill/>
+          </a:ln>
+          <a:effectLst/>
+        </p:spPr>
+        <p:txBody>
+          <a:bodyPr rtlCol="0" anchor="ctr" lIns="10800" rIns="10800" tIns="0" bIns="0" wrap="square"/>
+          <a:lstStyle/>
+          <a:p>
+            <a:pPr marL="0" indent="0" algn="ctr">
+              <a:lnSpc>
+                <a:spcPct val="110000"/>
+              </a:lnSpc>
+              <a:spcBef>
+                <a:spcPts val="0"/>
+              </a:spcBef>
+              <a:spcAft>
+                <a:spcPts val="0"/>
+              </a:spcAft>
+              <a:buNone/>
+            </a:pPr>
+            <a:r>
+              <a:rPr lang="ko-KR" sz="1000" b="1" spc="-50" dirty="0">
+                <a:solidFill>
+                  <a:srgbClr val="FFFFFF"/>
+                </a:solidFill>
+                <a:latin typeface="Pretendard"/>
+                <a:ea typeface="Pretendard"/>
+              </a:rPr>
+              <a:t>문제점</a:t>
+            </a:r>
+          </a:p>
+        </p:txBody>
+      </p:sp>
+      <p:sp>
+        <p:nvSpPr>
+          <p:cNvPr id="14" name="본문"/>
+          <p:cNvSpPr txBox="1"/>
+          <p:nvPr/>
+        </p:nvSpPr>
+        <p:spPr>
+          <a:xfrm>
+            <a:off x="1161391" y="1368657"/>
+            <a:ext cx="5648087" cy="218223"/>
+          </a:xfrm>
+          <a:prstGeom prst="rect">
+            <a:avLst/>
+          </a:prstGeom>
+          <a:noFill/>
+        </p:spPr>
+        <p:txBody>
+          <a:bodyPr wrap="square" lIns="50400" tIns="7200" rIns="21600" bIns="7200" anchor="ctr">
+            <a:noAutofit/>
+          </a:bodyPr>
+          <a:lstStyle/>
+          <a:p>
+            <a:pPr marL="118800" indent="-118800" algn="l">
+              <a:lnSpc>
+                <a:spcPct val="110000"/>
+              </a:lnSpc>
+              <a:spcBef>
+                <a:spcPts val="0"/>
+              </a:spcBef>
+              <a:spcAft>
+                <a:spcPts val="50"/>
+              </a:spcAft>
+              <a:buClr>
+                <a:srgbClr val="000359"/>
+              </a:buClr>
+              <a:buFont typeface="Pretendard"/>
+              <a:buChar char="•"/>
+            </a:pPr>
+            <a:r>
+              <a:rPr lang="ko-KR" sz="1000" spc="-50" dirty="0">
+                <a:solidFill>
+                  <a:srgbClr val="000359"/>
+                </a:solidFill>
+                <a:latin typeface="Pretendard"/>
+                <a:ea typeface="Pretendard"/>
+              </a:rPr>
+              <a:t>장시간 근로에 따른 피로누적 등 건강권 저해와 잦은 이직에 따른 인력의 비효율적 운영</a:t>
+            </a:r>
+          </a:p>
+        </p:txBody>
+      </p:sp>
+      <p:sp>
+        <p:nvSpPr>
+          <p:cNvPr id="15" name="레일"/>
+          <p:cNvSpPr/>
+          <p:nvPr/>
+        </p:nvSpPr>
+        <p:spPr>
+          <a:xfrm>
+            <a:off x="547826" y="1625228"/>
+            <a:ext cx="580696" cy="1004369"/>
+          </a:xfrm>
+          <a:prstGeom prst="rect">
+            <a:avLst/>
+          </a:prstGeom>
+          <a:pattFill prst="trellis">
+            <a:fgClr>
+              <a:srgbClr val="0990FF"/>
+            </a:fgClr>
+            <a:bgClr>
+              <a:srgbClr val="0080EA"/>
+            </a:bgClr>
+          </a:pattFill>
+          <a:ln>
+            <a:noFill/>
+          </a:ln>
+          <a:effectLst/>
+        </p:spPr>
+        <p:txBody>
+          <a:bodyPr rtlCol="0" anchor="ctr" lIns="10800" rIns="10800" tIns="0" bIns="0" wrap="square"/>
+          <a:lstStyle/>
+          <a:p>
+            <a:pPr marL="0" indent="0" algn="ctr">
+              <a:lnSpc>
+                <a:spcPct val="110000"/>
+              </a:lnSpc>
+              <a:spcBef>
+                <a:spcPts val="0"/>
+              </a:spcBef>
+              <a:spcAft>
+                <a:spcPts val="0"/>
+              </a:spcAft>
+              <a:buNone/>
+            </a:pPr>
+            <a:r>
+              <a:rPr lang="ko-KR" sz="1000" b="1" spc="-50" dirty="0">
+                <a:solidFill>
+                  <a:srgbClr val="FFFFFF"/>
+                </a:solidFill>
+                <a:latin typeface="Pretendard"/>
+                <a:ea typeface="Pretendard"/>
+              </a:rPr>
+              <a:t>노사</a:t>
+            </a:r>
+          </a:p>
+          <a:p>
+            <a:pPr marL="0" indent="0" algn="ctr">
+              <a:lnSpc>
+                <a:spcPct val="110000"/>
+              </a:lnSpc>
+              <a:spcBef>
+                <a:spcPts val="0"/>
+              </a:spcBef>
+              <a:spcAft>
+                <a:spcPts val="0"/>
+              </a:spcAft>
+              <a:buNone/>
+            </a:pPr>
+            <a:r>
+              <a:rPr lang="ko-KR" sz="1000" b="1" spc="-50" dirty="0">
+                <a:solidFill>
+                  <a:srgbClr val="FFFFFF"/>
+                </a:solidFill>
+                <a:latin typeface="Pretendard"/>
+                <a:ea typeface="Pretendard"/>
+              </a:rPr>
+              <a:t>공동노력</a:t>
+            </a:r>
+          </a:p>
+        </p:txBody>
+      </p:sp>
+      <p:sp>
+        <p:nvSpPr>
+          <p:cNvPr id="16" name="머리칸"/>
+          <p:cNvSpPr/>
+          <p:nvPr/>
+        </p:nvSpPr>
+        <p:spPr>
+          <a:xfrm>
+            <a:off x="1161391" y="1647141"/>
+            <a:ext cx="1866261" cy="230087"/>
+          </a:xfrm>
+          <a:prstGeom prst="rect">
+            <a:avLst/>
+          </a:prstGeom>
+          <a:solidFill>
+            <a:srgbClr val="DEEEFF"/>
+          </a:solidFill>
+          <a:ln>
+            <a:noFill/>
+          </a:ln>
+          <a:effectLst/>
+        </p:spPr>
+        <p:txBody>
+          <a:bodyPr rtlCol="0" anchor="ctr" lIns="21600" rIns="21600" tIns="3600" bIns="3600" wrap="square"/>
+          <a:lstStyle/>
+          <a:p>
+            <a:pPr marL="0" indent="0" algn="ctr">
+              <a:lnSpc>
+                <a:spcPct val="110000"/>
+              </a:lnSpc>
+              <a:spcBef>
+                <a:spcPts val="0"/>
+              </a:spcBef>
+              <a:spcAft>
+                <a:spcPts val="0"/>
+              </a:spcAft>
+              <a:buNone/>
+            </a:pPr>
+            <a:r>
+              <a:rPr lang="ko-KR" sz="1000" b="1" spc="-50" dirty="0">
+                <a:solidFill>
+                  <a:srgbClr val="000359"/>
+                </a:solidFill>
+                <a:latin typeface="Pretendard"/>
+                <a:ea typeface="Pretendard"/>
+              </a:rPr>
+              <a:t>해당 근로자 소통</a:t>
+            </a:r>
+          </a:p>
+        </p:txBody>
+      </p:sp>
+      <p:sp>
+        <p:nvSpPr>
+          <p:cNvPr id="17" name="머리칸"/>
+          <p:cNvSpPr/>
+          <p:nvPr/>
+        </p:nvSpPr>
+        <p:spPr>
+          <a:xfrm>
+            <a:off x="3044087" y="1647141"/>
+            <a:ext cx="1866261" cy="230087"/>
+          </a:xfrm>
+          <a:prstGeom prst="rect">
+            <a:avLst/>
+          </a:prstGeom>
+          <a:solidFill>
+            <a:srgbClr val="DEEEFF"/>
+          </a:solidFill>
+          <a:ln>
+            <a:noFill/>
+          </a:ln>
+          <a:effectLst/>
+        </p:spPr>
+        <p:txBody>
+          <a:bodyPr rtlCol="0" anchor="ctr" lIns="21600" rIns="21600" tIns="3600" bIns="3600" wrap="square"/>
+          <a:lstStyle/>
+          <a:p>
+            <a:pPr marL="0" indent="0" algn="ctr">
+              <a:lnSpc>
+                <a:spcPct val="110000"/>
+              </a:lnSpc>
+              <a:spcBef>
+                <a:spcPts val="0"/>
+              </a:spcBef>
+              <a:spcAft>
+                <a:spcPts val="0"/>
+              </a:spcAft>
+              <a:buNone/>
+            </a:pPr>
+            <a:r>
+              <a:rPr lang="ko-KR" sz="1000" b="1" spc="-50" dirty="0">
+                <a:solidFill>
+                  <a:srgbClr val="000359"/>
+                </a:solidFill>
+                <a:latin typeface="Pretendard"/>
+                <a:ea typeface="Pretendard"/>
+              </a:rPr>
+              <a:t>근무체계 개편</a:t>
+            </a:r>
+          </a:p>
+        </p:txBody>
+      </p:sp>
+      <p:sp>
+        <p:nvSpPr>
+          <p:cNvPr id="18" name="머리칸"/>
+          <p:cNvSpPr/>
+          <p:nvPr/>
+        </p:nvSpPr>
+        <p:spPr>
+          <a:xfrm>
+            <a:off x="4926783" y="1647141"/>
+            <a:ext cx="1866261" cy="230087"/>
+          </a:xfrm>
+          <a:prstGeom prst="rect">
+            <a:avLst/>
+          </a:prstGeom>
+          <a:solidFill>
+            <a:srgbClr val="DEEEFF"/>
+          </a:solidFill>
+          <a:ln>
+            <a:noFill/>
+          </a:ln>
+          <a:effectLst/>
+        </p:spPr>
+        <p:txBody>
+          <a:bodyPr rtlCol="0" anchor="ctr" lIns="21600" rIns="21600" tIns="3600" bIns="3600" wrap="square"/>
+          <a:lstStyle/>
+          <a:p>
+            <a:pPr marL="0" indent="0" algn="ctr">
+              <a:lnSpc>
+                <a:spcPct val="110000"/>
+              </a:lnSpc>
+              <a:spcBef>
+                <a:spcPts val="0"/>
+              </a:spcBef>
+              <a:spcAft>
+                <a:spcPts val="0"/>
+              </a:spcAft>
+              <a:buNone/>
+            </a:pPr>
+            <a:r>
+              <a:rPr lang="ko-KR" sz="1000" b="1" spc="-50" dirty="0">
+                <a:solidFill>
+                  <a:srgbClr val="000359"/>
+                </a:solidFill>
+                <a:latin typeface="Pretendard"/>
+                <a:ea typeface="Pretendard"/>
+              </a:rPr>
+              <a:t>임금보전 대책 마련</a:t>
+            </a:r>
+          </a:p>
+        </p:txBody>
+      </p:sp>
+      <p:sp>
+        <p:nvSpPr>
+          <p:cNvPr id="19" name="칸 본문"/>
+          <p:cNvSpPr txBox="1"/>
+          <p:nvPr/>
+        </p:nvSpPr>
+        <p:spPr>
+          <a:xfrm>
+            <a:off x="1172348" y="1888184"/>
+            <a:ext cx="1860783" cy="719499"/>
+          </a:xfrm>
+          <a:prstGeom prst="rect">
+            <a:avLst/>
+          </a:prstGeom>
+          <a:noFill/>
+        </p:spPr>
+        <p:txBody>
+          <a:bodyPr wrap="square" lIns="50400" tIns="7200" rIns="21600" bIns="7200" anchor="ctr">
+            <a:noAutofit/>
+          </a:bodyPr>
+          <a:lstStyle/>
+          <a:p>
+            <a:pPr marL="118800" indent="-118800" algn="l">
+              <a:lnSpc>
+                <a:spcPct val="110000"/>
+              </a:lnSpc>
+              <a:spcBef>
+                <a:spcPts val="0"/>
+              </a:spcBef>
+              <a:spcAft>
+                <a:spcPts val="50"/>
+              </a:spcAft>
+              <a:buClr>
+                <a:srgbClr val="000359"/>
+              </a:buClr>
+              <a:buFont typeface="Pretendard"/>
+              <a:buChar char="•"/>
+            </a:pPr>
+            <a:r>
+              <a:rPr lang="ko-KR" sz="1000" spc="-50" dirty="0">
+                <a:solidFill>
+                  <a:srgbClr val="000359"/>
+                </a:solidFill>
+                <a:latin typeface="Pretendard"/>
+                <a:ea typeface="Pretendard"/>
+              </a:rPr>
+              <a:t>감시단속적 근로 적용 제외 승인 해제를 통한 근로조건 개선 설명</a:t>
+            </a:r>
+          </a:p>
+          <a:p>
+            <a:pPr marL="118800" indent="-118800" algn="l">
+              <a:lnSpc>
+                <a:spcPct val="110000"/>
+              </a:lnSpc>
+              <a:spcBef>
+                <a:spcPts val="0"/>
+              </a:spcBef>
+              <a:spcAft>
+                <a:spcPts val="50"/>
+              </a:spcAft>
+              <a:buClr>
+                <a:srgbClr val="000359"/>
+              </a:buClr>
+              <a:buFont typeface="Pretendard"/>
+              <a:buChar char="•"/>
+            </a:pPr>
+            <a:r>
+              <a:rPr lang="ko-KR" sz="1000" spc="-50" dirty="0">
+                <a:solidFill>
+                  <a:srgbClr val="000359"/>
+                </a:solidFill>
+                <a:latin typeface="Pretendard"/>
+                <a:ea typeface="Pretendard"/>
+              </a:rPr>
+              <a:t>임금저하 방지를 위한 노사 공동 노력 설득·소통</a:t>
+            </a:r>
+          </a:p>
+        </p:txBody>
+      </p:sp>
+      <p:sp>
+        <p:nvSpPr>
+          <p:cNvPr id="20" name="칸 본문"/>
+          <p:cNvSpPr txBox="1"/>
+          <p:nvPr/>
+        </p:nvSpPr>
+        <p:spPr>
+          <a:xfrm>
+            <a:off x="3055043" y="1888184"/>
+            <a:ext cx="1860783" cy="719499"/>
+          </a:xfrm>
+          <a:prstGeom prst="rect">
+            <a:avLst/>
+          </a:prstGeom>
+          <a:noFill/>
+        </p:spPr>
+        <p:txBody>
+          <a:bodyPr wrap="square" lIns="50400" tIns="7200" rIns="21600" bIns="7200" anchor="ctr">
+            <a:noAutofit/>
+          </a:bodyPr>
+          <a:lstStyle/>
+          <a:p>
+            <a:pPr marL="118800" indent="-118800" algn="l">
+              <a:lnSpc>
+                <a:spcPct val="110000"/>
+              </a:lnSpc>
+              <a:spcBef>
+                <a:spcPts val="0"/>
+              </a:spcBef>
+              <a:spcAft>
+                <a:spcPts val="50"/>
+              </a:spcAft>
+              <a:buClr>
+                <a:srgbClr val="000359"/>
+              </a:buClr>
+              <a:buFont typeface="Pretendard"/>
+              <a:buChar char="•"/>
+            </a:pPr>
+            <a:r>
+              <a:rPr lang="ko-KR" sz="1000" spc="-50" dirty="0">
+                <a:solidFill>
+                  <a:srgbClr val="000359"/>
+                </a:solidFill>
+                <a:latin typeface="Pretendard"/>
+                <a:ea typeface="Pretendard"/>
+              </a:rPr>
+              <a:t>승인 해제 후 일반 근로형태로 전환·개편</a:t>
+            </a:r>
+          </a:p>
+          <a:p>
+            <a:pPr marL="118800" indent="-118800" algn="l">
+              <a:lnSpc>
+                <a:spcPct val="110000"/>
+              </a:lnSpc>
+              <a:spcBef>
+                <a:spcPts val="0"/>
+              </a:spcBef>
+              <a:spcAft>
+                <a:spcPts val="50"/>
+              </a:spcAft>
+              <a:buClr>
+                <a:srgbClr val="000359"/>
+              </a:buClr>
+              <a:buFont typeface="Pretendard"/>
+              <a:buChar char="•"/>
+            </a:pPr>
+            <a:r>
+              <a:rPr lang="ko-KR" sz="1000" spc="-50" dirty="0">
+                <a:solidFill>
+                  <a:srgbClr val="000359"/>
+                </a:solidFill>
+                <a:latin typeface="Pretendard"/>
+                <a:ea typeface="Pretendard"/>
+              </a:rPr>
+              <a:t>월 172시간 근무(기존 251시간) → 주·야 교대</a:t>
+            </a:r>
+          </a:p>
+        </p:txBody>
+      </p:sp>
+      <p:cxnSp>
+        <p:nvCxnSpPr>
+          <p:cNvPr id="21" name="Connector 20"/>
+          <p:cNvCxnSpPr/>
+          <p:nvPr/>
+        </p:nvCxnSpPr>
+        <p:spPr>
+          <a:xfrm>
+            <a:off x="3044087" y="1921054"/>
+            <a:ext cx="0" cy="653760"/>
+          </a:xfrm>
+          <a:prstGeom prst="line">
+            <a:avLst/>
+          </a:prstGeom>
+          <a:ln w="9525">
+            <a:solidFill>
+              <a:srgbClr val="BDE0FF"/>
+            </a:solidFill>
+          </a:ln>
+        </p:spPr>
+      </p:cxnSp>
+      <p:sp>
+        <p:nvSpPr>
+          <p:cNvPr id="22" name="칸 본문"/>
+          <p:cNvSpPr txBox="1"/>
+          <p:nvPr/>
+        </p:nvSpPr>
+        <p:spPr>
+          <a:xfrm>
+            <a:off x="4937739" y="1888184"/>
+            <a:ext cx="1860783" cy="719499"/>
+          </a:xfrm>
+          <a:prstGeom prst="rect">
+            <a:avLst/>
+          </a:prstGeom>
+          <a:noFill/>
+        </p:spPr>
+        <p:txBody>
+          <a:bodyPr wrap="square" lIns="50400" tIns="7200" rIns="21600" bIns="7200" anchor="ctr">
+            <a:noAutofit/>
+          </a:bodyPr>
+          <a:lstStyle/>
+          <a:p>
+            <a:pPr marL="118800" indent="-118800" algn="l">
+              <a:lnSpc>
+                <a:spcPct val="110000"/>
+              </a:lnSpc>
+              <a:spcBef>
+                <a:spcPts val="0"/>
+              </a:spcBef>
+              <a:spcAft>
+                <a:spcPts val="50"/>
+              </a:spcAft>
+              <a:buClr>
+                <a:srgbClr val="000359"/>
+              </a:buClr>
+              <a:buFont typeface="Pretendard"/>
+              <a:buChar char="•"/>
+            </a:pPr>
+            <a:r>
+              <a:rPr lang="ko-KR" sz="1000" spc="-50" dirty="0">
+                <a:solidFill>
+                  <a:srgbClr val="000359"/>
+                </a:solidFill>
+                <a:latin typeface="Pretendard"/>
+                <a:ea typeface="Pretendard"/>
+              </a:rPr>
+              <a:t>근로시간 감소에 따른 임금보전 대책 검토 및 마련</a:t>
+            </a:r>
+          </a:p>
+          <a:p>
+            <a:pPr marL="118800" indent="-118800" algn="l">
+              <a:lnSpc>
+                <a:spcPct val="110000"/>
+              </a:lnSpc>
+              <a:spcBef>
+                <a:spcPts val="0"/>
+              </a:spcBef>
+              <a:spcAft>
+                <a:spcPts val="50"/>
+              </a:spcAft>
+              <a:buClr>
+                <a:srgbClr val="000359"/>
+              </a:buClr>
+              <a:buFont typeface="Pretendard"/>
+              <a:buChar char="•"/>
+            </a:pPr>
+            <a:r>
+              <a:rPr lang="ko-KR" sz="1000" spc="-50" dirty="0">
+                <a:solidFill>
+                  <a:srgbClr val="000359"/>
+                </a:solidFill>
+                <a:latin typeface="Pretendard"/>
+                <a:ea typeface="Pretendard"/>
+              </a:rPr>
+              <a:t>법령에 따른 휴일수당·연장근로수당 지급</a:t>
+            </a:r>
+          </a:p>
+        </p:txBody>
+      </p:sp>
+      <p:cxnSp>
+        <p:nvCxnSpPr>
+          <p:cNvPr id="23" name="Connector 22"/>
+          <p:cNvCxnSpPr/>
+          <p:nvPr/>
+        </p:nvCxnSpPr>
+        <p:spPr>
+          <a:xfrm>
+            <a:off x="4926783" y="1921054"/>
+            <a:ext cx="0" cy="653760"/>
+          </a:xfrm>
+          <a:prstGeom prst="line">
+            <a:avLst/>
+          </a:prstGeom>
+          <a:ln w="9525">
+            <a:solidFill>
+              <a:srgbClr val="BDE0FF"/>
+            </a:solidFill>
+          </a:ln>
+        </p:spPr>
+      </p:cxnSp>
+      <p:sp>
+        <p:nvSpPr>
+          <p:cNvPr id="24" name="핵심성과 박스"/>
+          <p:cNvSpPr/>
+          <p:nvPr/>
+        </p:nvSpPr>
+        <p:spPr>
+          <a:xfrm>
+            <a:off x="536870" y="2733683"/>
+            <a:ext cx="6300000" cy="491478"/>
+          </a:xfrm>
+          <a:prstGeom prst="rect">
+            <a:avLst/>
+          </a:prstGeom>
+          <a:solidFill>
+            <a:srgbClr val="E6FCF9"/>
+          </a:solidFill>
+          <a:ln w="19050">
+            <a:solidFill>
+              <a:srgbClr val="00BE83"/>
+            </a:solidFill>
+          </a:ln>
+          <a:effectLst/>
+        </p:spPr>
+        <p:txBody>
+          <a:bodyPr rtlCol="0" anchor="ctr" lIns="0" rIns="0" tIns="0" bIns="0"/>
+          <a:lstStyle/>
+          <a:p>
+            <a:pPr algn="ctr"/>
+          </a:p>
+        </p:txBody>
+      </p:sp>
+      <p:sp>
+        <p:nvSpPr>
+          <p:cNvPr id="25" name="핵심성과 라벨"/>
+          <p:cNvSpPr/>
+          <p:nvPr/>
+        </p:nvSpPr>
+        <p:spPr>
+          <a:xfrm>
+            <a:off x="569739" y="2772031"/>
+            <a:ext cx="657391" cy="414783"/>
+          </a:xfrm>
+          <a:prstGeom prst="homePlate">
+            <a:avLst>
+              <a:gd name="adj" fmla="val 28000"/>
+            </a:avLst>
+          </a:prstGeom>
+          <a:solidFill>
+            <a:srgbClr val="002060"/>
+          </a:solidFill>
+          <a:ln>
+            <a:noFill/>
+          </a:ln>
+          <a:effectLst/>
+        </p:spPr>
+        <p:txBody>
+          <a:bodyPr rtlCol="0" anchor="ctr" lIns="18000" rIns="79200" tIns="0" bIns="0" wrap="square"/>
+          <a:lstStyle/>
+          <a:p>
+            <a:pPr marL="0" indent="0" algn="ctr">
+              <a:lnSpc>
+                <a:spcPct val="110000"/>
+              </a:lnSpc>
+              <a:spcBef>
+                <a:spcPts val="0"/>
+              </a:spcBef>
+              <a:spcAft>
+                <a:spcPts val="0"/>
+              </a:spcAft>
+              <a:buNone/>
+            </a:pPr>
+            <a:r>
+              <a:rPr lang="ko-KR" sz="1100" b="1" spc="-55" dirty="0">
+                <a:solidFill>
+                  <a:srgbClr val="FFFFFF"/>
+                </a:solidFill>
+                <a:latin typeface="Pretendard"/>
+                <a:ea typeface="Pretendard"/>
+              </a:rPr>
+              <a:t>추진성과</a:t>
+            </a:r>
+          </a:p>
+        </p:txBody>
+      </p:sp>
+      <p:sp>
+        <p:nvSpPr>
+          <p:cNvPr id="26" name="핵심성과 문구"/>
+          <p:cNvSpPr txBox="1"/>
+          <p:nvPr/>
+        </p:nvSpPr>
+        <p:spPr>
+          <a:xfrm>
+            <a:off x="1314783" y="2750118"/>
+            <a:ext cx="5456348" cy="458609"/>
+          </a:xfrm>
+          <a:prstGeom prst="rect">
+            <a:avLst/>
+          </a:prstGeom>
+          <a:noFill/>
+        </p:spPr>
+        <p:txBody>
+          <a:bodyPr wrap="square" lIns="36000" tIns="10800" rIns="36000" bIns="10800" anchor="ctr">
+            <a:noAutofit/>
+          </a:bodyPr>
+          <a:lstStyle/>
+          <a:p>
+            <a:pPr marL="151200" indent="-151200" algn="l">
+              <a:lnSpc>
+                <a:spcPct val="110000"/>
+              </a:lnSpc>
+              <a:spcBef>
+                <a:spcPts val="0"/>
+              </a:spcBef>
+              <a:spcAft>
+                <a:spcPts val="0"/>
+              </a:spcAft>
+              <a:buClr>
+                <a:srgbClr val="000359"/>
+              </a:buClr>
+              <a:buFont typeface="Pretendard"/>
+              <a:buChar char="•"/>
+            </a:pPr>
+            <a:r>
+              <a:rPr lang="ko-KR" sz="1100" b="1" spc="-55" dirty="0">
+                <a:solidFill>
+                  <a:srgbClr val="000359"/>
+                </a:solidFill>
+                <a:latin typeface="Pretendard"/>
+                <a:ea typeface="Pretendard"/>
+              </a:rPr>
+              <a:t>노사합의 체결('25.12월) → 장시간 근무해소(△79시간)를 통한 건강권 확보와 임금보전까지 일거양득</a:t>
+            </a:r>
+          </a:p>
+        </p:txBody>
+      </p:sp>
+      <p:sp>
+        <p:nvSpPr>
+          <p:cNvPr id="27" name="형광 밑줄"/>
+          <p:cNvSpPr/>
+          <p:nvPr/>
+        </p:nvSpPr>
+        <p:spPr>
+          <a:xfrm>
+            <a:off x="536870" y="3499075"/>
+            <a:ext cx="3634156" cy="43826"/>
+          </a:xfrm>
+          <a:prstGeom prst="rect">
+            <a:avLst/>
+          </a:prstGeom>
+          <a:solidFill>
+            <a:srgbClr val="29FFBD"/>
+          </a:solidFill>
+          <a:ln>
+            <a:noFill/>
+          </a:ln>
+          <a:effectLst/>
+        </p:spPr>
+        <p:txBody>
+          <a:bodyPr rtlCol="0" anchor="ctr" lIns="0" rIns="0" tIns="0" bIns="0"/>
+          <a:lstStyle/>
+          <a:p>
+            <a:pPr algn="ctr"/>
+          </a:p>
+        </p:txBody>
+      </p:sp>
+      <p:sp>
+        <p:nvSpPr>
+          <p:cNvPr id="28" name="소제목"/>
+          <p:cNvSpPr txBox="1"/>
+          <p:nvPr/>
+        </p:nvSpPr>
+        <p:spPr>
+          <a:xfrm>
+            <a:off x="536870" y="3345683"/>
+            <a:ext cx="6300000" cy="241043"/>
+          </a:xfrm>
+          <a:prstGeom prst="rect">
+            <a:avLst/>
+          </a:prstGeom>
+          <a:noFill/>
+        </p:spPr>
+        <p:txBody>
+          <a:bodyPr wrap="square" lIns="0" tIns="0" rIns="0" bIns="0" anchor="ctr">
+            <a:noAutofit/>
+          </a:bodyPr>
+          <a:lstStyle/>
+          <a:p>
+            <a:pPr marL="0" indent="0" algn="l">
+              <a:lnSpc>
+                <a:spcPct val="110000"/>
+              </a:lnSpc>
+              <a:spcBef>
+                <a:spcPts val="0"/>
+              </a:spcBef>
+              <a:spcAft>
+                <a:spcPts val="0"/>
+              </a:spcAft>
+              <a:buNone/>
+            </a:pPr>
+            <a:r>
+              <a:rPr lang="ko-KR" sz="1200" b="1" spc="-60" dirty="0">
+                <a:solidFill>
+                  <a:srgbClr val="000359"/>
+                </a:solidFill>
+                <a:latin typeface="Pretendard"/>
+                <a:ea typeface="Pretendard"/>
+              </a:rPr>
+              <a:t>라. 직원 만족도를 높이는 복리후생 향상과 근무환경 개선 노력</a:t>
+            </a:r>
+          </a:p>
+        </p:txBody>
+      </p:sp>
+      <p:sp>
+        <p:nvSpPr>
+          <p:cNvPr id="29" name="태그칩"/>
+          <p:cNvSpPr/>
+          <p:nvPr/>
+        </p:nvSpPr>
+        <p:spPr>
+          <a:xfrm>
+            <a:off x="4269635" y="3378553"/>
+            <a:ext cx="351016" cy="175304"/>
+          </a:xfrm>
+          <a:prstGeom prst="rect">
+            <a:avLst/>
+          </a:prstGeom>
+          <a:solidFill>
+            <a:srgbClr val="0051BC"/>
+          </a:solidFill>
+          <a:ln>
+            <a:noFill/>
+          </a:ln>
+          <a:effectLst/>
+        </p:spPr>
+        <p:txBody>
+          <a:bodyPr rtlCol="0" anchor="ctr" lIns="10800" rIns="10800" tIns="0" bIns="0" wrap="square"/>
+          <a:lstStyle/>
+          <a:p>
+            <a:pPr marL="0" indent="0" algn="ctr">
+              <a:lnSpc>
+                <a:spcPct val="110000"/>
+              </a:lnSpc>
+              <a:spcBef>
+                <a:spcPts val="0"/>
+              </a:spcBef>
+              <a:spcAft>
+                <a:spcPts val="0"/>
+              </a:spcAft>
+              <a:buNone/>
+            </a:pPr>
+            <a:r>
+              <a:rPr lang="ko-KR" sz="1000" b="1" spc="-50" dirty="0">
+                <a:solidFill>
+                  <a:srgbClr val="FFFFFF"/>
+                </a:solidFill>
+                <a:latin typeface="Pretendard"/>
+                <a:ea typeface="Pretendard"/>
+              </a:rPr>
               <a:t>강화</a:t>
             </a:r>
           </a:p>
@@ -10843,13 +10843,13 @@
       </p:sp>
       <p:sp>
         <p:nvSpPr>
-          <p:cNvPr id="10" name="패널 외곽"/>
+          <p:cNvPr id="30" name="패널 외곽"/>
           <p:cNvSpPr/>
           <p:nvPr/>
         </p:nvSpPr>
         <p:spPr>
           <a:xfrm>
-            <a:off x="536870" y="1062783"/>
+            <a:off x="536870" y="3641510"/>
             <a:ext cx="2070783" cy="1223499"/>
           </a:xfrm>
           <a:prstGeom prst="rect">
@@ -10875,13 +10875,13 @@
       </p:sp>
       <p:sp>
         <p:nvSpPr>
-          <p:cNvPr id="11" name="패널 머리"/>
+          <p:cNvPr id="31" name="패널 머리"/>
           <p:cNvSpPr/>
           <p:nvPr/>
         </p:nvSpPr>
         <p:spPr>
           <a:xfrm>
-            <a:off x="536870" y="1062783"/>
+            <a:off x="536870" y="3641510"/>
             <a:ext cx="2070783" cy="230087"/>
           </a:xfrm>
           <a:prstGeom prst="rect">
@@ -10926,13 +10926,13 @@
       </p:sp>
       <p:sp>
         <p:nvSpPr>
-          <p:cNvPr id="12" name="패널 본문"/>
+          <p:cNvPr id="32" name="패널 본문"/>
           <p:cNvSpPr txBox="1"/>
           <p:nvPr/>
         </p:nvSpPr>
         <p:spPr>
           <a:xfrm>
-            <a:off x="558783" y="1303826"/>
+            <a:off x="558783" y="3882553"/>
             <a:ext cx="2026957" cy="719499"/>
           </a:xfrm>
           <a:prstGeom prst="rect">
@@ -11033,13 +11033,13 @@
       </p:sp>
       <p:sp>
         <p:nvSpPr>
-          <p:cNvPr id="13" name="요약 바"/>
+          <p:cNvPr id="33" name="요약 바"/>
           <p:cNvSpPr/>
           <p:nvPr/>
         </p:nvSpPr>
         <p:spPr>
           <a:xfrm>
-            <a:off x="558783" y="2045238"/>
+            <a:off x="558783" y="4623965"/>
             <a:ext cx="2026957" cy="219130"/>
           </a:xfrm>
           <a:prstGeom prst="rect">
@@ -11084,13 +11084,13 @@
       </p:sp>
       <p:sp>
         <p:nvSpPr>
-          <p:cNvPr id="14" name="패널 외곽"/>
+          <p:cNvPr id="34" name="패널 외곽"/>
           <p:cNvSpPr/>
           <p:nvPr/>
         </p:nvSpPr>
         <p:spPr>
           <a:xfrm>
-            <a:off x="2651478" y="1062783"/>
+            <a:off x="2651478" y="3641510"/>
             <a:ext cx="2070783" cy="1223499"/>
           </a:xfrm>
           <a:prstGeom prst="rect">
@@ -11116,13 +11116,13 @@
       </p:sp>
       <p:sp>
         <p:nvSpPr>
-          <p:cNvPr id="15" name="패널 머리"/>
+          <p:cNvPr id="35" name="패널 머리"/>
           <p:cNvSpPr/>
           <p:nvPr/>
         </p:nvSpPr>
         <p:spPr>
           <a:xfrm>
-            <a:off x="2651478" y="1062783"/>
+            <a:off x="2651478" y="3641510"/>
             <a:ext cx="2070783" cy="230087"/>
           </a:xfrm>
           <a:prstGeom prst="rect">
@@ -11167,13 +11167,13 @@
       </p:sp>
       <p:sp>
         <p:nvSpPr>
-          <p:cNvPr id="16" name="패널 본문"/>
+          <p:cNvPr id="36" name="패널 본문"/>
           <p:cNvSpPr txBox="1"/>
           <p:nvPr/>
         </p:nvSpPr>
         <p:spPr>
           <a:xfrm>
-            <a:off x="2673391" y="1303826"/>
+            <a:off x="2673391" y="3882553"/>
             <a:ext cx="2026957" cy="719499"/>
           </a:xfrm>
           <a:prstGeom prst="rect">
@@ -11274,13 +11274,13 @@
       </p:sp>
       <p:sp>
         <p:nvSpPr>
-          <p:cNvPr id="17" name="요약 바"/>
+          <p:cNvPr id="37" name="요약 바"/>
           <p:cNvSpPr/>
           <p:nvPr/>
         </p:nvSpPr>
         <p:spPr>
           <a:xfrm>
-            <a:off x="2673391" y="2045238"/>
+            <a:off x="2673391" y="4623965"/>
             <a:ext cx="2026957" cy="219130"/>
           </a:xfrm>
           <a:prstGeom prst="rect">
@@ -11325,13 +11325,13 @@
       </p:sp>
       <p:sp>
         <p:nvSpPr>
-          <p:cNvPr id="18" name="패널 외곽"/>
+          <p:cNvPr id="38" name="패널 외곽"/>
           <p:cNvSpPr/>
           <p:nvPr/>
         </p:nvSpPr>
         <p:spPr>
           <a:xfrm>
-            <a:off x="4766087" y="1062783"/>
+            <a:off x="4766087" y="3641510"/>
             <a:ext cx="2070783" cy="1223499"/>
           </a:xfrm>
           <a:prstGeom prst="rect">
@@ -11357,13 +11357,13 @@
       </p:sp>
       <p:sp>
         <p:nvSpPr>
-          <p:cNvPr id="19" name="패널 머리"/>
+          <p:cNvPr id="39" name="패널 머리"/>
           <p:cNvSpPr/>
           <p:nvPr/>
         </p:nvSpPr>
         <p:spPr>
           <a:xfrm>
-            <a:off x="4766087" y="1062783"/>
+            <a:off x="4766087" y="3641510"/>
             <a:ext cx="2070783" cy="230087"/>
           </a:xfrm>
           <a:prstGeom prst="rect">
@@ -11408,13 +11408,13 @@
       </p:sp>
       <p:sp>
         <p:nvSpPr>
-          <p:cNvPr id="20" name="패널 본문"/>
+          <p:cNvPr id="40" name="패널 본문"/>
           <p:cNvSpPr txBox="1"/>
           <p:nvPr/>
         </p:nvSpPr>
         <p:spPr>
           <a:xfrm>
-            <a:off x="4788000" y="1303826"/>
+            <a:off x="4788000" y="3882553"/>
             <a:ext cx="2026957" cy="719499"/>
           </a:xfrm>
           <a:prstGeom prst="rect">
@@ -11515,13 +11515,13 @@
       </p:sp>
       <p:sp>
         <p:nvSpPr>
-          <p:cNvPr id="21" name="요약 바"/>
+          <p:cNvPr id="41" name="요약 바"/>
           <p:cNvSpPr/>
           <p:nvPr/>
         </p:nvSpPr>
         <p:spPr>
           <a:xfrm>
-            <a:off x="4788000" y="2045238"/>
+            <a:off x="4788000" y="4623965"/>
             <a:ext cx="2026957" cy="219130"/>
           </a:xfrm>
           <a:prstGeom prst="rect">
@@ -11566,13 +11566,13 @@
       </p:sp>
       <p:sp>
         <p:nvSpPr>
-          <p:cNvPr id="22" name="핵심성과 박스"/>
+          <p:cNvPr id="42" name="핵심성과 박스"/>
           <p:cNvSpPr/>
           <p:nvPr/>
         </p:nvSpPr>
         <p:spPr>
           <a:xfrm>
-            <a:off x="536870" y="2373934"/>
+            <a:off x="536870" y="4952661"/>
             <a:ext cx="6300000" cy="311478"/>
           </a:xfrm>
           <a:prstGeom prst="rect">
@@ -11598,13 +11598,13 @@
       </p:sp>
       <p:sp>
         <p:nvSpPr>
-          <p:cNvPr id="23" name="핵심성과 라벨"/>
+          <p:cNvPr id="43" name="핵심성과 라벨"/>
           <p:cNvSpPr/>
           <p:nvPr/>
         </p:nvSpPr>
         <p:spPr>
           <a:xfrm>
-            <a:off x="569739" y="2412282"/>
+            <a:off x="569739" y="4991009"/>
             <a:ext cx="657391" cy="234783"/>
           </a:xfrm>
           <a:prstGeom prst="homePlate">
@@ -11651,13 +11651,13 @@
       </p:sp>
       <p:sp>
         <p:nvSpPr>
-          <p:cNvPr id="24" name="핵심성과 문구"/>
+          <p:cNvPr id="44" name="핵심성과 문구"/>
           <p:cNvSpPr txBox="1"/>
           <p:nvPr/>
         </p:nvSpPr>
         <p:spPr>
           <a:xfrm>
-            <a:off x="1314783" y="2390369"/>
+            <a:off x="1314783" y="4969096"/>
             <a:ext cx="5456348" cy="278609"/>
           </a:xfrm>
           <a:prstGeom prst="rect">
@@ -22408,1821 +22408,6 @@
           </a:p>
         </p:txBody>
       </p:sp>
-      <p:sp>
-        <p:nvSpPr>
-          <p:cNvPr id="69" name="형광 밑줄"/>
-          <p:cNvSpPr/>
-          <p:nvPr/>
-        </p:nvSpPr>
-        <p:spPr>
-          <a:xfrm>
-            <a:off x="723130" y="6400487"/>
-            <a:ext cx="2719989" cy="43826"/>
-          </a:xfrm>
-          <a:prstGeom prst="rect">
-            <a:avLst/>
-          </a:prstGeom>
-          <a:solidFill>
-            <a:srgbClr val="29FFBD"/>
-          </a:solidFill>
-          <a:ln>
-            <a:noFill/>
-          </a:ln>
-          <a:effectLst/>
-        </p:spPr>
-        <p:txBody>
-          <a:bodyPr rtlCol="0" anchor="ctr" lIns="0" rIns="0" tIns="0" bIns="0"/>
-          <a:lstStyle/>
-          <a:p>
-            <a:pPr algn="ctr"/>
-          </a:p>
-        </p:txBody>
-      </p:sp>
-      <p:sp>
-        <p:nvSpPr>
-          <p:cNvPr id="70" name="소제목"/>
-          <p:cNvSpPr txBox="1"/>
-          <p:nvPr/>
-        </p:nvSpPr>
-        <p:spPr>
-          <a:xfrm>
-            <a:off x="723130" y="6247096"/>
-            <a:ext cx="6300000" cy="241043"/>
-          </a:xfrm>
-          <a:prstGeom prst="rect">
-            <a:avLst/>
-          </a:prstGeom>
-          <a:noFill/>
-        </p:spPr>
-        <p:txBody>
-          <a:bodyPr wrap="square" lIns="0" tIns="0" rIns="0" bIns="0" anchor="ctr">
-            <a:noAutofit/>
-          </a:bodyPr>
-          <a:lstStyle/>
-          <a:p>
-            <a:pPr marL="0" indent="0" algn="l">
-              <a:lnSpc>
-                <a:spcPct val="110000"/>
-              </a:lnSpc>
-              <a:spcBef>
-                <a:spcPts val="0"/>
-              </a:spcBef>
-              <a:spcAft>
-                <a:spcPts val="0"/>
-              </a:spcAft>
-              <a:buNone/>
-            </a:pPr>
-            <a:r>
-              <a:rPr lang="ko-KR" sz="1200" b="1" spc="-60" dirty="0">
-                <a:solidFill>
-                  <a:srgbClr val="000359"/>
-                </a:solidFill>
-                <a:latin typeface="Pretendard"/>
-                <a:ea typeface="Pretendard"/>
-              </a:rPr>
-              <a:t>나. 노사 상생협력 선포 및 상생의 달 지정·운영</a:t>
-            </a:r>
-          </a:p>
-        </p:txBody>
-      </p:sp>
-      <p:sp>
-        <p:nvSpPr>
-          <p:cNvPr id="71" name="태그칩"/>
-          <p:cNvSpPr/>
-          <p:nvPr/>
-        </p:nvSpPr>
-        <p:spPr>
-          <a:xfrm>
-            <a:off x="3541728" y="6279965"/>
-            <a:ext cx="327325" cy="175304"/>
-          </a:xfrm>
-          <a:prstGeom prst="rect">
-            <a:avLst/>
-          </a:prstGeom>
-          <a:solidFill>
-            <a:srgbClr val="0051BC"/>
-          </a:solidFill>
-          <a:ln>
-            <a:noFill/>
-          </a:ln>
-          <a:effectLst/>
-        </p:spPr>
-        <p:txBody>
-          <a:bodyPr rtlCol="0" anchor="ctr" lIns="10800" rIns="10800" tIns="0" bIns="0" wrap="square"/>
-          <a:lstStyle/>
-          <a:p>
-            <a:pPr marL="0" indent="0" algn="ctr">
-              <a:lnSpc>
-                <a:spcPct val="110000"/>
-              </a:lnSpc>
-              <a:spcBef>
-                <a:spcPts val="0"/>
-              </a:spcBef>
-              <a:spcAft>
-                <a:spcPts val="0"/>
-              </a:spcAft>
-              <a:buNone/>
-            </a:pPr>
-            <a:r>
-              <a:rPr lang="ko-KR" sz="1000" b="1" spc="-50" dirty="0">
-                <a:solidFill>
-                  <a:srgbClr val="FFFFFF"/>
-                </a:solidFill>
-                <a:latin typeface="Pretendard"/>
-                <a:ea typeface="Pretendard"/>
-              </a:rPr>
-              <a:t>B.P</a:t>
-            </a:r>
-          </a:p>
-        </p:txBody>
-      </p:sp>
-      <p:sp>
-        <p:nvSpPr>
-          <p:cNvPr id="72" name="태그칩"/>
-          <p:cNvSpPr/>
-          <p:nvPr/>
-        </p:nvSpPr>
-        <p:spPr>
-          <a:xfrm>
-            <a:off x="3912879" y="6279965"/>
-            <a:ext cx="351016" cy="175304"/>
-          </a:xfrm>
-          <a:prstGeom prst="rect">
-            <a:avLst/>
-          </a:prstGeom>
-          <a:solidFill>
-            <a:srgbClr val="0051BC"/>
-          </a:solidFill>
-          <a:ln>
-            <a:noFill/>
-          </a:ln>
-          <a:effectLst/>
-        </p:spPr>
-        <p:txBody>
-          <a:bodyPr rtlCol="0" anchor="ctr" lIns="10800" rIns="10800" tIns="0" bIns="0" wrap="square"/>
-          <a:lstStyle/>
-          <a:p>
-            <a:pPr marL="0" indent="0" algn="ctr">
-              <a:lnSpc>
-                <a:spcPct val="110000"/>
-              </a:lnSpc>
-              <a:spcBef>
-                <a:spcPts val="0"/>
-              </a:spcBef>
-              <a:spcAft>
-                <a:spcPts val="0"/>
-              </a:spcAft>
-              <a:buNone/>
-            </a:pPr>
-            <a:r>
-              <a:rPr lang="ko-KR" sz="1000" b="1" spc="-50" dirty="0">
-                <a:solidFill>
-                  <a:srgbClr val="FFFFFF"/>
-                </a:solidFill>
-                <a:latin typeface="Pretendard"/>
-                <a:ea typeface="Pretendard"/>
-              </a:rPr>
-              <a:t>신규</a:t>
-            </a:r>
-          </a:p>
-        </p:txBody>
-      </p:sp>
-      <p:sp>
-        <p:nvSpPr>
-          <p:cNvPr id="73" name="라벨 박스"/>
-          <p:cNvSpPr/>
-          <p:nvPr/>
-        </p:nvSpPr>
-        <p:spPr>
-          <a:xfrm>
-            <a:off x="723130" y="6542922"/>
-            <a:ext cx="6300000" cy="290348"/>
-          </a:xfrm>
-          <a:prstGeom prst="rect">
-            <a:avLst/>
-          </a:prstGeom>
-          <a:solidFill>
-            <a:srgbClr val="FFFFFF"/>
-          </a:solidFill>
-          <a:ln w="9525">
-            <a:solidFill>
-              <a:srgbClr val="008EFF"/>
-            </a:solidFill>
-          </a:ln>
-          <a:effectLst/>
-        </p:spPr>
-        <p:txBody>
-          <a:bodyPr rtlCol="0" anchor="ctr" lIns="0" rIns="0" tIns="0" bIns="0"/>
-          <a:lstStyle/>
-          <a:p>
-            <a:pPr algn="ctr"/>
-          </a:p>
-        </p:txBody>
-      </p:sp>
-      <p:sp>
-        <p:nvSpPr>
-          <p:cNvPr id="74" name="레일"/>
-          <p:cNvSpPr/>
-          <p:nvPr/>
-        </p:nvSpPr>
-        <p:spPr>
-          <a:xfrm>
-            <a:off x="734087" y="6553878"/>
-            <a:ext cx="591652" cy="268435"/>
-          </a:xfrm>
-          <a:prstGeom prst="rect">
-            <a:avLst/>
-          </a:prstGeom>
-          <a:pattFill prst="trellis">
-            <a:fgClr>
-              <a:srgbClr val="00BEC2"/>
-            </a:fgClr>
-            <a:bgClr>
-              <a:srgbClr val="00B0B4"/>
-            </a:bgClr>
-          </a:pattFill>
-          <a:ln>
-            <a:noFill/>
-          </a:ln>
-          <a:effectLst/>
-        </p:spPr>
-        <p:txBody>
-          <a:bodyPr rtlCol="0" anchor="ctr" lIns="10800" rIns="10800" tIns="0" bIns="0" wrap="square"/>
-          <a:lstStyle/>
-          <a:p>
-            <a:pPr marL="0" indent="0" algn="ctr">
-              <a:lnSpc>
-                <a:spcPct val="110000"/>
-              </a:lnSpc>
-              <a:spcBef>
-                <a:spcPts val="0"/>
-              </a:spcBef>
-              <a:spcAft>
-                <a:spcPts val="0"/>
-              </a:spcAft>
-              <a:buNone/>
-            </a:pPr>
-            <a:r>
-              <a:rPr lang="ko-KR" sz="1000" b="1" spc="-50" dirty="0">
-                <a:solidFill>
-                  <a:srgbClr val="FFFFFF"/>
-                </a:solidFill>
-                <a:latin typeface="Pretendard"/>
-                <a:ea typeface="Pretendard"/>
-              </a:rPr>
-              <a:t>추진배경</a:t>
-            </a:r>
-          </a:p>
-        </p:txBody>
-      </p:sp>
-      <p:sp>
-        <p:nvSpPr>
-          <p:cNvPr id="75" name="본문"/>
-          <p:cNvSpPr txBox="1"/>
-          <p:nvPr/>
-        </p:nvSpPr>
-        <p:spPr>
-          <a:xfrm>
-            <a:off x="1358609" y="6559357"/>
-            <a:ext cx="5631652" cy="257478"/>
-          </a:xfrm>
-          <a:prstGeom prst="rect">
-            <a:avLst/>
-          </a:prstGeom>
-          <a:noFill/>
-        </p:spPr>
-        <p:txBody>
-          <a:bodyPr wrap="square" lIns="36000" tIns="10800" rIns="36000" bIns="10800" anchor="ctr">
-            <a:noAutofit/>
-          </a:bodyPr>
-          <a:lstStyle/>
-          <a:p>
-            <a:pPr marL="118800" indent="-118800" algn="l">
-              <a:lnSpc>
-                <a:spcPct val="110000"/>
-              </a:lnSpc>
-              <a:spcBef>
-                <a:spcPts val="0"/>
-              </a:spcBef>
-              <a:spcAft>
-                <a:spcPts val="50"/>
-              </a:spcAft>
-              <a:buClr>
-                <a:srgbClr val="000359"/>
-              </a:buClr>
-              <a:buFont typeface="Pretendard"/>
-              <a:buChar char="•"/>
-            </a:pPr>
-            <a:r>
-              <a:rPr lang="ko-KR" sz="1000" spc="-50" dirty="0">
-                <a:solidFill>
-                  <a:srgbClr val="000359"/>
-                </a:solidFill>
-                <a:latin typeface="Pretendard"/>
-                <a:ea typeface="Pretendard"/>
-              </a:rPr>
-              <a:t>열린 소통·긍정 조직문화를 기반으로 상생 협력적 노사관계 문화 확산, 파트너십 강화 추진</a:t>
-            </a:r>
-          </a:p>
-        </p:txBody>
-      </p:sp>
-      <p:sp>
-        <p:nvSpPr>
-          <p:cNvPr id="76" name="표 외곽"/>
-          <p:cNvSpPr/>
-          <p:nvPr/>
-        </p:nvSpPr>
-        <p:spPr>
-          <a:xfrm>
-            <a:off x="723130" y="6877096"/>
-            <a:ext cx="6300000" cy="2671607"/>
-          </a:xfrm>
-          <a:prstGeom prst="rect">
-            <a:avLst/>
-          </a:prstGeom>
-          <a:solidFill>
-            <a:srgbClr val="FFFFFF"/>
-          </a:solidFill>
-          <a:ln w="9525">
-            <a:solidFill>
-              <a:srgbClr val="008EFF"/>
-            </a:solidFill>
-          </a:ln>
-          <a:effectLst/>
-        </p:spPr>
-        <p:txBody>
-          <a:bodyPr rtlCol="0" anchor="ctr" lIns="0" rIns="0" tIns="0" bIns="0"/>
-          <a:lstStyle/>
-          <a:p>
-            <a:pPr algn="ctr"/>
-          </a:p>
-        </p:txBody>
-      </p:sp>
-      <p:sp>
-        <p:nvSpPr>
-          <p:cNvPr id="77" name="레일"/>
-          <p:cNvSpPr/>
-          <p:nvPr/>
-        </p:nvSpPr>
-        <p:spPr>
-          <a:xfrm>
-            <a:off x="734087" y="6893530"/>
-            <a:ext cx="580696" cy="666532"/>
-          </a:xfrm>
-          <a:prstGeom prst="rect">
-            <a:avLst/>
-          </a:prstGeom>
-          <a:pattFill prst="trellis">
-            <a:fgClr>
-              <a:srgbClr val="0990FF"/>
-            </a:fgClr>
-            <a:bgClr>
-              <a:srgbClr val="0080EA"/>
-            </a:bgClr>
-          </a:pattFill>
-          <a:ln>
-            <a:noFill/>
-          </a:ln>
-          <a:effectLst/>
-        </p:spPr>
-        <p:txBody>
-          <a:bodyPr rtlCol="0" anchor="ctr" lIns="10800" rIns="10800" tIns="0" bIns="0" wrap="square"/>
-          <a:lstStyle/>
-          <a:p>
-            <a:pPr marL="0" indent="0" algn="ctr">
-              <a:lnSpc>
-                <a:spcPct val="110000"/>
-              </a:lnSpc>
-              <a:spcBef>
-                <a:spcPts val="0"/>
-              </a:spcBef>
-              <a:spcAft>
-                <a:spcPts val="0"/>
-              </a:spcAft>
-              <a:buNone/>
-            </a:pPr>
-            <a:r>
-              <a:rPr lang="ko-KR" sz="1000" b="1" spc="-50" dirty="0">
-                <a:solidFill>
-                  <a:srgbClr val="FFFFFF"/>
-                </a:solidFill>
-                <a:latin typeface="Pretendard"/>
-                <a:ea typeface="Pretendard"/>
-              </a:rPr>
-              <a:t>공감대</a:t>
-            </a:r>
-          </a:p>
-          <a:p>
-            <a:pPr marL="0" indent="0" algn="ctr">
-              <a:lnSpc>
-                <a:spcPct val="110000"/>
-              </a:lnSpc>
-              <a:spcBef>
-                <a:spcPts val="0"/>
-              </a:spcBef>
-              <a:spcAft>
-                <a:spcPts val="0"/>
-              </a:spcAft>
-              <a:buNone/>
-            </a:pPr>
-            <a:r>
-              <a:rPr lang="ko-KR" sz="1000" b="1" spc="-50" dirty="0">
-                <a:solidFill>
-                  <a:srgbClr val="FFFFFF"/>
-                </a:solidFill>
-                <a:latin typeface="Pretendard"/>
-                <a:ea typeface="Pretendard"/>
-              </a:rPr>
-              <a:t>형성</a:t>
-            </a:r>
-          </a:p>
-        </p:txBody>
-      </p:sp>
-      <p:sp>
-        <p:nvSpPr>
-          <p:cNvPr id="78" name="머리칸"/>
-          <p:cNvSpPr/>
-          <p:nvPr/>
-        </p:nvSpPr>
-        <p:spPr>
-          <a:xfrm>
-            <a:off x="1347652" y="6915443"/>
-            <a:ext cx="2807609" cy="230087"/>
-          </a:xfrm>
-          <a:prstGeom prst="rect">
-            <a:avLst/>
-          </a:prstGeom>
-          <a:solidFill>
-            <a:srgbClr val="DEEEFF"/>
-          </a:solidFill>
-          <a:ln>
-            <a:noFill/>
-          </a:ln>
-          <a:effectLst/>
-        </p:spPr>
-        <p:txBody>
-          <a:bodyPr rtlCol="0" anchor="ctr" lIns="21600" rIns="21600" tIns="3600" bIns="3600" wrap="square"/>
-          <a:lstStyle/>
-          <a:p>
-            <a:pPr marL="0" indent="0" algn="ctr">
-              <a:lnSpc>
-                <a:spcPct val="110000"/>
-              </a:lnSpc>
-              <a:spcBef>
-                <a:spcPts val="0"/>
-              </a:spcBef>
-              <a:spcAft>
-                <a:spcPts val="0"/>
-              </a:spcAft>
-              <a:buNone/>
-            </a:pPr>
-            <a:r>
-              <a:rPr lang="ko-KR" sz="1000" b="1" spc="-50" dirty="0">
-                <a:solidFill>
-                  <a:srgbClr val="000359"/>
-                </a:solidFill>
-                <a:latin typeface="Pretendard"/>
-                <a:ea typeface="Pretendard"/>
-              </a:rPr>
-              <a:t>공 단</a:t>
-            </a:r>
-          </a:p>
-        </p:txBody>
-      </p:sp>
-      <p:sp>
-        <p:nvSpPr>
-          <p:cNvPr id="79" name="머리칸"/>
-          <p:cNvSpPr/>
-          <p:nvPr/>
-        </p:nvSpPr>
-        <p:spPr>
-          <a:xfrm>
-            <a:off x="4171696" y="6915443"/>
-            <a:ext cx="2807609" cy="230087"/>
-          </a:xfrm>
-          <a:prstGeom prst="rect">
-            <a:avLst/>
-          </a:prstGeom>
-          <a:solidFill>
-            <a:srgbClr val="DEEEFF"/>
-          </a:solidFill>
-          <a:ln>
-            <a:noFill/>
-          </a:ln>
-          <a:effectLst/>
-        </p:spPr>
-        <p:txBody>
-          <a:bodyPr rtlCol="0" anchor="ctr" lIns="21600" rIns="21600" tIns="3600" bIns="3600" wrap="square"/>
-          <a:lstStyle/>
-          <a:p>
-            <a:pPr marL="0" indent="0" algn="ctr">
-              <a:lnSpc>
-                <a:spcPct val="110000"/>
-              </a:lnSpc>
-              <a:spcBef>
-                <a:spcPts val="0"/>
-              </a:spcBef>
-              <a:spcAft>
-                <a:spcPts val="0"/>
-              </a:spcAft>
-              <a:buNone/>
-            </a:pPr>
-            <a:r>
-              <a:rPr lang="ko-KR" sz="1000" b="1" spc="-50" dirty="0">
-                <a:solidFill>
-                  <a:srgbClr val="000359"/>
-                </a:solidFill>
-                <a:latin typeface="Pretendard"/>
-                <a:ea typeface="Pretendard"/>
-              </a:rPr>
-              <a:t>노동조합</a:t>
-            </a:r>
-          </a:p>
-        </p:txBody>
-      </p:sp>
-      <p:sp>
-        <p:nvSpPr>
-          <p:cNvPr id="80" name="칸 본문"/>
-          <p:cNvSpPr txBox="1"/>
-          <p:nvPr/>
-        </p:nvSpPr>
-        <p:spPr>
-          <a:xfrm>
-            <a:off x="1358609" y="7156487"/>
-            <a:ext cx="2802130" cy="381663"/>
-          </a:xfrm>
-          <a:prstGeom prst="rect">
-            <a:avLst/>
-          </a:prstGeom>
-          <a:noFill/>
-        </p:spPr>
-        <p:txBody>
-          <a:bodyPr wrap="square" lIns="50400" tIns="7200" rIns="21600" bIns="7200" anchor="ctr">
-            <a:noAutofit/>
-          </a:bodyPr>
-          <a:lstStyle/>
-          <a:p>
-            <a:pPr marL="118800" indent="-118800" algn="l">
-              <a:lnSpc>
-                <a:spcPct val="110000"/>
-              </a:lnSpc>
-              <a:spcBef>
-                <a:spcPts val="0"/>
-              </a:spcBef>
-              <a:spcAft>
-                <a:spcPts val="50"/>
-              </a:spcAft>
-              <a:buClr>
-                <a:srgbClr val="000359"/>
-              </a:buClr>
-              <a:buFont typeface="Pretendard"/>
-              <a:buChar char="•"/>
-            </a:pPr>
-            <a:r>
-              <a:rPr lang="ko-KR" sz="1000" spc="-50" dirty="0">
-                <a:solidFill>
-                  <a:srgbClr val="000359"/>
-                </a:solidFill>
-                <a:latin typeface="Pretendard"/>
-                <a:ea typeface="Pretendard"/>
-              </a:rPr>
-              <a:t>공단 발전을 위해서는 노동조합을 동반자로 인식하고 협력 증대 필수적</a:t>
-            </a:r>
-          </a:p>
-        </p:txBody>
-      </p:sp>
-      <p:sp>
-        <p:nvSpPr>
-          <p:cNvPr id="81" name="칸 본문"/>
-          <p:cNvSpPr txBox="1"/>
-          <p:nvPr/>
-        </p:nvSpPr>
-        <p:spPr>
-          <a:xfrm>
-            <a:off x="4182652" y="7156487"/>
-            <a:ext cx="2802130" cy="381663"/>
-          </a:xfrm>
-          <a:prstGeom prst="rect">
-            <a:avLst/>
-          </a:prstGeom>
-          <a:noFill/>
-        </p:spPr>
-        <p:txBody>
-          <a:bodyPr wrap="square" lIns="50400" tIns="7200" rIns="21600" bIns="7200" anchor="ctr">
-            <a:noAutofit/>
-          </a:bodyPr>
-          <a:lstStyle/>
-          <a:p>
-            <a:pPr marL="118800" indent="-118800" algn="l">
-              <a:lnSpc>
-                <a:spcPct val="110000"/>
-              </a:lnSpc>
-              <a:spcBef>
-                <a:spcPts val="0"/>
-              </a:spcBef>
-              <a:spcAft>
-                <a:spcPts val="50"/>
-              </a:spcAft>
-              <a:buClr>
-                <a:srgbClr val="000359"/>
-              </a:buClr>
-              <a:buFont typeface="Pretendard"/>
-              <a:buChar char="•"/>
-            </a:pPr>
-            <a:r>
-              <a:rPr lang="ko-KR" sz="1000" spc="-50" dirty="0">
-                <a:solidFill>
-                  <a:srgbClr val="000359"/>
-                </a:solidFill>
-                <a:latin typeface="Pretendard"/>
-                <a:ea typeface="Pretendard"/>
-              </a:rPr>
-              <a:t>근로조건 개선을 위해서는 공단과의 파트너십 강화 필요</a:t>
-            </a:r>
-          </a:p>
-        </p:txBody>
-      </p:sp>
-      <p:cxnSp>
-        <p:nvCxnSpPr>
-          <p:cNvPr id="82" name="Connector 81"/>
-          <p:cNvCxnSpPr/>
-          <p:nvPr/>
-        </p:nvCxnSpPr>
-        <p:spPr>
-          <a:xfrm>
-            <a:off x="4171696" y="7189357"/>
-            <a:ext cx="0" cy="315923"/>
-          </a:xfrm>
-          <a:prstGeom prst="line">
-            <a:avLst/>
-          </a:prstGeom>
-          <a:ln w="9525">
-            <a:solidFill>
-              <a:srgbClr val="BDE0FF"/>
-            </a:solidFill>
-          </a:ln>
-        </p:spPr>
-      </p:cxnSp>
-      <p:sp>
-        <p:nvSpPr>
-          <p:cNvPr id="83" name="레일"/>
-          <p:cNvSpPr/>
-          <p:nvPr/>
-        </p:nvSpPr>
-        <p:spPr>
-          <a:xfrm>
-            <a:off x="734087" y="7576497"/>
-            <a:ext cx="580696" cy="851885"/>
-          </a:xfrm>
-          <a:prstGeom prst="rect">
-            <a:avLst/>
-          </a:prstGeom>
-          <a:pattFill prst="trellis">
-            <a:fgClr>
-              <a:srgbClr val="00BEC2"/>
-            </a:fgClr>
-            <a:bgClr>
-              <a:srgbClr val="00B0B4"/>
-            </a:bgClr>
-          </a:pattFill>
-          <a:ln>
-            <a:noFill/>
-          </a:ln>
-          <a:effectLst/>
-        </p:spPr>
-        <p:txBody>
-          <a:bodyPr rtlCol="0" anchor="ctr" lIns="0" rIns="0" tIns="0" bIns="0"/>
-          <a:lstStyle/>
-          <a:p>
-            <a:pPr algn="ctr"/>
-          </a:p>
-        </p:txBody>
-      </p:sp>
-      <p:sp>
-        <p:nvSpPr>
-          <p:cNvPr id="84" name="레일 태그"/>
-          <p:cNvSpPr/>
-          <p:nvPr/>
-        </p:nvSpPr>
-        <p:spPr>
-          <a:xfrm>
-            <a:off x="854405" y="7740845"/>
-            <a:ext cx="340059" cy="186261"/>
-          </a:xfrm>
-          <a:prstGeom prst="rect">
-            <a:avLst/>
-          </a:prstGeom>
-          <a:solidFill>
-            <a:srgbClr val="FFFFFF"/>
-          </a:solidFill>
-          <a:ln>
-            <a:noFill/>
-          </a:ln>
-          <a:effectLst/>
-        </p:spPr>
-        <p:txBody>
-          <a:bodyPr rtlCol="0" anchor="ctr" lIns="7200" rIns="7200" tIns="0" bIns="0" wrap="square"/>
-          <a:lstStyle/>
-          <a:p>
-            <a:pPr marL="0" indent="0" algn="ctr">
-              <a:lnSpc>
-                <a:spcPct val="110000"/>
-              </a:lnSpc>
-              <a:spcBef>
-                <a:spcPts val="0"/>
-              </a:spcBef>
-              <a:spcAft>
-                <a:spcPts val="0"/>
-              </a:spcAft>
-              <a:buNone/>
-            </a:pPr>
-            <a:r>
-              <a:rPr lang="ko-KR" sz="1000" b="1" spc="-50" dirty="0">
-                <a:solidFill>
-                  <a:srgbClr val="000359"/>
-                </a:solidFill>
-                <a:latin typeface="Pretendard"/>
-                <a:ea typeface="Pretendard"/>
-              </a:rPr>
-              <a:t>결실</a:t>
-            </a:r>
-          </a:p>
-        </p:txBody>
-      </p:sp>
-      <p:sp>
-        <p:nvSpPr>
-          <p:cNvPr id="85" name="레일 라벨"/>
-          <p:cNvSpPr txBox="1"/>
-          <p:nvPr/>
-        </p:nvSpPr>
-        <p:spPr>
-          <a:xfrm>
-            <a:off x="734087" y="7927106"/>
-            <a:ext cx="580696" cy="479363"/>
-          </a:xfrm>
-          <a:prstGeom prst="rect">
-            <a:avLst/>
-          </a:prstGeom>
-          <a:noFill/>
-        </p:spPr>
-        <p:txBody>
-          <a:bodyPr wrap="square" lIns="10800" tIns="0" rIns="10800" bIns="0" anchor="ctr">
-            <a:noAutofit/>
-          </a:bodyPr>
-          <a:lstStyle/>
-          <a:p>
-            <a:pPr marL="0" indent="0" algn="ctr">
-              <a:lnSpc>
-                <a:spcPct val="110000"/>
-              </a:lnSpc>
-              <a:spcBef>
-                <a:spcPts val="0"/>
-              </a:spcBef>
-              <a:spcAft>
-                <a:spcPts val="0"/>
-              </a:spcAft>
-              <a:buNone/>
-            </a:pPr>
-            <a:r>
-              <a:rPr lang="ko-KR" sz="1000" b="1" spc="-50" dirty="0">
-                <a:solidFill>
-                  <a:srgbClr val="FFFFFF"/>
-                </a:solidFill>
-                <a:latin typeface="Pretendard"/>
-                <a:ea typeface="Pretendard"/>
-              </a:rPr>
-              <a:t>상생협력</a:t>
-            </a:r>
-          </a:p>
-          <a:p>
-            <a:pPr marL="0" indent="0" algn="ctr">
-              <a:lnSpc>
-                <a:spcPct val="110000"/>
-              </a:lnSpc>
-              <a:spcBef>
-                <a:spcPts val="0"/>
-              </a:spcBef>
-              <a:spcAft>
-                <a:spcPts val="0"/>
-              </a:spcAft>
-              <a:buNone/>
-            </a:pPr>
-            <a:r>
-              <a:rPr lang="ko-KR" sz="1000" b="1" spc="-50" dirty="0">
-                <a:solidFill>
-                  <a:srgbClr val="FFFFFF"/>
-                </a:solidFill>
-                <a:latin typeface="Pretendard"/>
-                <a:ea typeface="Pretendard"/>
-              </a:rPr>
-              <a:t>선언</a:t>
-            </a:r>
-          </a:p>
-        </p:txBody>
-      </p:sp>
-      <p:sp>
-        <p:nvSpPr>
-          <p:cNvPr id="86" name="레일 삼각형"/>
-          <p:cNvSpPr/>
-          <p:nvPr/>
-        </p:nvSpPr>
-        <p:spPr>
-          <a:xfrm>
-            <a:off x="734086" y="7576497"/>
-            <a:ext cx="580696" cy="131478"/>
-          </a:xfrm>
-          <a:custGeom>
-            <a:avLst/>
-            <a:gdLst/>
-            <a:ahLst/>
-            <a:cxnLst/>
-            <a:rect l="l" t="t" r="r" b="b"/>
-            <a:pathLst>
-              <a:path w="580696" h="131478">
-                <a:moveTo>
-                  <a:pt x="0" y="0"/>
-                </a:moveTo>
-                <a:lnTo>
-                  <a:pt x="580696" y="0"/>
-                </a:lnTo>
-                <a:lnTo>
-                  <a:pt x="290348" y="131478"/>
-                </a:lnTo>
-                <a:close/>
-              </a:path>
-            </a:pathLst>
-          </a:custGeom>
-          <a:solidFill>
-            <a:srgbClr val="0080EA"/>
-          </a:solidFill>
-          <a:ln>
-            <a:noFill/>
-          </a:ln>
-          <a:effectLst/>
-        </p:spPr>
-        <p:txBody>
-          <a:bodyPr rtlCol="0" anchor="ctr"/>
-          <a:lstStyle/>
-          <a:p>
-            <a:pPr algn="ctr"/>
-          </a:p>
-        </p:txBody>
-      </p:sp>
-      <p:sp>
-        <p:nvSpPr>
-          <p:cNvPr id="87" name="머리칸"/>
-          <p:cNvSpPr/>
-          <p:nvPr/>
-        </p:nvSpPr>
-        <p:spPr>
-          <a:xfrm>
-            <a:off x="1347652" y="7598410"/>
-            <a:ext cx="4519565" cy="230087"/>
-          </a:xfrm>
-          <a:prstGeom prst="rect">
-            <a:avLst/>
-          </a:prstGeom>
-          <a:solidFill>
-            <a:srgbClr val="DEEEFF"/>
-          </a:solidFill>
-          <a:ln>
-            <a:noFill/>
-          </a:ln>
-          <a:effectLst/>
-        </p:spPr>
-        <p:txBody>
-          <a:bodyPr rtlCol="0" anchor="ctr" lIns="21600" rIns="21600" tIns="3600" bIns="3600" wrap="square"/>
-          <a:lstStyle/>
-          <a:p>
-            <a:pPr marL="0" indent="0" algn="ctr">
-              <a:lnSpc>
-                <a:spcPct val="110000"/>
-              </a:lnSpc>
-              <a:spcBef>
-                <a:spcPts val="0"/>
-              </a:spcBef>
-              <a:spcAft>
-                <a:spcPts val="0"/>
-              </a:spcAft>
-              <a:buNone/>
-            </a:pPr>
-            <a:r>
-              <a:rPr lang="ko-KR" sz="1000" b="1" spc="-50" dirty="0">
-                <a:solidFill>
-                  <a:srgbClr val="000359"/>
-                </a:solidFill>
-                <a:latin typeface="Pretendard"/>
-                <a:ea typeface="Pretendard"/>
-              </a:rPr>
-              <a:t>노사 상생 협력 선언문('25.2월)</a:t>
-            </a:r>
-          </a:p>
-        </p:txBody>
-      </p:sp>
-      <p:sp>
-        <p:nvSpPr>
-          <p:cNvPr id="88" name="칸 본문"/>
-          <p:cNvSpPr txBox="1"/>
-          <p:nvPr/>
-        </p:nvSpPr>
-        <p:spPr>
-          <a:xfrm>
-            <a:off x="1358609" y="7839454"/>
-            <a:ext cx="4514087" cy="567016"/>
-          </a:xfrm>
-          <a:prstGeom prst="rect">
-            <a:avLst/>
-          </a:prstGeom>
-          <a:noFill/>
-        </p:spPr>
-        <p:txBody>
-          <a:bodyPr wrap="square" lIns="50400" tIns="7200" rIns="21600" bIns="7200" anchor="ctr">
-            <a:noAutofit/>
-          </a:bodyPr>
-          <a:lstStyle/>
-          <a:p>
-            <a:pPr marL="118800" indent="-118800" algn="l">
-              <a:lnSpc>
-                <a:spcPct val="110000"/>
-              </a:lnSpc>
-              <a:spcBef>
-                <a:spcPts val="0"/>
-              </a:spcBef>
-              <a:spcAft>
-                <a:spcPts val="50"/>
-              </a:spcAft>
-              <a:buClr>
-                <a:srgbClr val="000359"/>
-              </a:buClr>
-              <a:buFont typeface="Pretendard"/>
-              <a:buChar char="•"/>
-            </a:pPr>
-            <a:r>
-              <a:rPr lang="ko-KR" sz="1000" spc="-50" dirty="0">
-                <a:solidFill>
-                  <a:srgbClr val="000359"/>
-                </a:solidFill>
-                <a:latin typeface="Pretendard"/>
-                <a:ea typeface="Pretendard"/>
-              </a:rPr>
-              <a:t>노사 상생 협력 선포식 개최 및 공동 선언 실시</a:t>
-            </a:r>
-          </a:p>
-          <a:p>
-            <a:pPr marL="118800" indent="-118800" algn="l">
-              <a:lnSpc>
-                <a:spcPct val="110000"/>
-              </a:lnSpc>
-              <a:spcBef>
-                <a:spcPts val="0"/>
-              </a:spcBef>
-              <a:spcAft>
-                <a:spcPts val="50"/>
-              </a:spcAft>
-              <a:buClr>
-                <a:srgbClr val="000359"/>
-              </a:buClr>
-              <a:buFont typeface="Pretendard"/>
-              <a:buChar char="•"/>
-            </a:pPr>
-            <a:r>
-              <a:rPr lang="ko-KR" sz="1000" spc="-50" dirty="0">
-                <a:solidFill>
-                  <a:srgbClr val="000359"/>
-                </a:solidFill>
-                <a:latin typeface="Pretendard"/>
-                <a:ea typeface="Pretendard"/>
-              </a:rPr>
-              <a:t>경영진·노조집행부 전원 참여, 사내방송 생중계</a:t>
-            </a:r>
-          </a:p>
-          <a:p>
-            <a:pPr marL="118800" indent="-118800" algn="l">
-              <a:lnSpc>
-                <a:spcPct val="110000"/>
-              </a:lnSpc>
-              <a:spcBef>
-                <a:spcPts val="0"/>
-              </a:spcBef>
-              <a:spcAft>
-                <a:spcPts val="50"/>
-              </a:spcAft>
-              <a:buClr>
-                <a:srgbClr val="000359"/>
-              </a:buClr>
-              <a:buFont typeface="Pretendard"/>
-              <a:buChar char="•"/>
-            </a:pPr>
-            <a:r>
-              <a:rPr lang="ko-KR" sz="1000" spc="-50" dirty="0">
-                <a:solidFill>
-                  <a:srgbClr val="000359"/>
-                </a:solidFill>
-                <a:latin typeface="Pretendard"/>
-                <a:ea typeface="Pretendard"/>
-              </a:rPr>
-              <a:t>안전일터 조성·발전적 노사관계 정착 합의·선언</a:t>
-            </a:r>
-          </a:p>
-        </p:txBody>
-      </p:sp>
-      <p:sp>
-        <p:nvSpPr>
-          <p:cNvPr id="89" name="사진 칸"/>
-          <p:cNvSpPr/>
-          <p:nvPr/>
-        </p:nvSpPr>
-        <p:spPr>
-          <a:xfrm>
-            <a:off x="5916522" y="7603889"/>
-            <a:ext cx="1079217" cy="797103"/>
-          </a:xfrm>
-          <a:prstGeom prst="rect">
-            <a:avLst/>
-          </a:prstGeom>
-          <a:solidFill>
-            <a:srgbClr val="DEEEFF"/>
-          </a:solidFill>
-          <a:ln w="9525">
-            <a:solidFill>
-              <a:srgbClr val="008EFF"/>
-            </a:solidFill>
-          </a:ln>
-          <a:effectLst/>
-        </p:spPr>
-        <p:txBody>
-          <a:bodyPr rtlCol="0" anchor="ctr" lIns="0" rIns="0" tIns="0" bIns="0" wrap="square"/>
-          <a:lstStyle/>
-          <a:p>
-            <a:pPr marL="0" indent="0" algn="ctr">
-              <a:lnSpc>
-                <a:spcPct val="110000"/>
-              </a:lnSpc>
-              <a:spcBef>
-                <a:spcPts val="0"/>
-              </a:spcBef>
-              <a:spcAft>
-                <a:spcPts val="0"/>
-              </a:spcAft>
-              <a:buNone/>
-            </a:pPr>
-            <a:r>
-              <a:rPr lang="ko-KR" sz="1000" spc="-50" dirty="0">
-                <a:solidFill>
-                  <a:srgbClr val="5D7280"/>
-                </a:solidFill>
-                <a:latin typeface="Pretendard"/>
-                <a:ea typeface="Pretendard"/>
-              </a:rPr>
-              <a:t>사진 (선포식)</a:t>
-            </a:r>
-          </a:p>
-        </p:txBody>
-      </p:sp>
-      <p:sp>
-        <p:nvSpPr>
-          <p:cNvPr id="90" name="레일"/>
-          <p:cNvSpPr/>
-          <p:nvPr/>
-        </p:nvSpPr>
-        <p:spPr>
-          <a:xfrm>
-            <a:off x="734087" y="8444817"/>
-            <a:ext cx="580696" cy="1087450"/>
-          </a:xfrm>
-          <a:prstGeom prst="rect">
-            <a:avLst/>
-          </a:prstGeom>
-          <a:pattFill prst="trellis">
-            <a:fgClr>
-              <a:srgbClr val="0A6BE6"/>
-            </a:fgClr>
-            <a:bgClr>
-              <a:srgbClr val="0051BC"/>
-            </a:bgClr>
-          </a:pattFill>
-          <a:ln>
-            <a:noFill/>
-          </a:ln>
-          <a:effectLst/>
-        </p:spPr>
-        <p:txBody>
-          <a:bodyPr rtlCol="0" anchor="ctr" lIns="0" rIns="0" tIns="0" bIns="0"/>
-          <a:lstStyle/>
-          <a:p>
-            <a:pPr algn="ctr"/>
-          </a:p>
-        </p:txBody>
-      </p:sp>
-      <p:sp>
-        <p:nvSpPr>
-          <p:cNvPr id="91" name="레일 태그"/>
-          <p:cNvSpPr/>
-          <p:nvPr/>
-        </p:nvSpPr>
-        <p:spPr>
-          <a:xfrm>
-            <a:off x="854405" y="8609165"/>
-            <a:ext cx="340059" cy="186261"/>
-          </a:xfrm>
-          <a:prstGeom prst="rect">
-            <a:avLst/>
-          </a:prstGeom>
-          <a:solidFill>
-            <a:srgbClr val="FFFFFF"/>
-          </a:solidFill>
-          <a:ln>
-            <a:noFill/>
-          </a:ln>
-          <a:effectLst/>
-        </p:spPr>
-        <p:txBody>
-          <a:bodyPr rtlCol="0" anchor="ctr" lIns="7200" rIns="7200" tIns="0" bIns="0" wrap="square"/>
-          <a:lstStyle/>
-          <a:p>
-            <a:pPr marL="0" indent="0" algn="ctr">
-              <a:lnSpc>
-                <a:spcPct val="110000"/>
-              </a:lnSpc>
-              <a:spcBef>
-                <a:spcPts val="0"/>
-              </a:spcBef>
-              <a:spcAft>
-                <a:spcPts val="0"/>
-              </a:spcAft>
-              <a:buNone/>
-            </a:pPr>
-            <a:r>
-              <a:rPr lang="ko-KR" sz="1000" b="1" spc="-50" dirty="0">
-                <a:solidFill>
-                  <a:srgbClr val="000359"/>
-                </a:solidFill>
-                <a:latin typeface="Pretendard"/>
-                <a:ea typeface="Pretendard"/>
-              </a:rPr>
-              <a:t>확산</a:t>
-            </a:r>
-          </a:p>
-        </p:txBody>
-      </p:sp>
-      <p:sp>
-        <p:nvSpPr>
-          <p:cNvPr id="92" name="레일 라벨"/>
-          <p:cNvSpPr txBox="1"/>
-          <p:nvPr/>
-        </p:nvSpPr>
-        <p:spPr>
-          <a:xfrm>
-            <a:off x="734087" y="8795426"/>
-            <a:ext cx="580696" cy="714929"/>
-          </a:xfrm>
-          <a:prstGeom prst="rect">
-            <a:avLst/>
-          </a:prstGeom>
-          <a:noFill/>
-        </p:spPr>
-        <p:txBody>
-          <a:bodyPr wrap="square" lIns="10800" tIns="0" rIns="10800" bIns="0" anchor="ctr">
-            <a:noAutofit/>
-          </a:bodyPr>
-          <a:lstStyle/>
-          <a:p>
-            <a:pPr marL="0" indent="0" algn="ctr">
-              <a:lnSpc>
-                <a:spcPct val="110000"/>
-              </a:lnSpc>
-              <a:spcBef>
-                <a:spcPts val="0"/>
-              </a:spcBef>
-              <a:spcAft>
-                <a:spcPts val="0"/>
-              </a:spcAft>
-              <a:buNone/>
-            </a:pPr>
-            <a:r>
-              <a:rPr lang="ko-KR" sz="1000" b="1" spc="-50" dirty="0">
-                <a:solidFill>
-                  <a:srgbClr val="FFFFFF"/>
-                </a:solidFill>
-                <a:latin typeface="Pretendard"/>
-                <a:ea typeface="Pretendard"/>
-              </a:rPr>
-              <a:t>상생의 달</a:t>
-            </a:r>
-          </a:p>
-          <a:p>
-            <a:pPr marL="0" indent="0" algn="ctr">
-              <a:lnSpc>
-                <a:spcPct val="110000"/>
-              </a:lnSpc>
-              <a:spcBef>
-                <a:spcPts val="0"/>
-              </a:spcBef>
-              <a:spcAft>
-                <a:spcPts val="0"/>
-              </a:spcAft>
-              <a:buNone/>
-            </a:pPr>
-            <a:r>
-              <a:rPr lang="ko-KR" sz="1000" b="1" spc="-50" dirty="0">
-                <a:solidFill>
-                  <a:srgbClr val="FFFFFF"/>
-                </a:solidFill>
-                <a:latin typeface="Pretendard"/>
-                <a:ea typeface="Pretendard"/>
-              </a:rPr>
-              <a:t>운영</a:t>
-            </a:r>
-          </a:p>
-        </p:txBody>
-      </p:sp>
-      <p:sp>
-        <p:nvSpPr>
-          <p:cNvPr id="93" name="레일 삼각형"/>
-          <p:cNvSpPr/>
-          <p:nvPr/>
-        </p:nvSpPr>
-        <p:spPr>
-          <a:xfrm>
-            <a:off x="734086" y="8444817"/>
-            <a:ext cx="580696" cy="131478"/>
-          </a:xfrm>
-          <a:custGeom>
-            <a:avLst/>
-            <a:gdLst/>
-            <a:ahLst/>
-            <a:cxnLst/>
-            <a:rect l="l" t="t" r="r" b="b"/>
-            <a:pathLst>
-              <a:path w="580696" h="131478">
-                <a:moveTo>
-                  <a:pt x="0" y="0"/>
-                </a:moveTo>
-                <a:lnTo>
-                  <a:pt x="580696" y="0"/>
-                </a:lnTo>
-                <a:lnTo>
-                  <a:pt x="290348" y="131478"/>
-                </a:lnTo>
-                <a:close/>
-              </a:path>
-            </a:pathLst>
-          </a:custGeom>
-          <a:solidFill>
-            <a:srgbClr val="00B0B4"/>
-          </a:solidFill>
-          <a:ln>
-            <a:noFill/>
-          </a:ln>
-          <a:effectLst/>
-        </p:spPr>
-        <p:txBody>
-          <a:bodyPr rtlCol="0" anchor="ctr"/>
-          <a:lstStyle/>
-          <a:p>
-            <a:pPr algn="ctr"/>
-          </a:p>
-        </p:txBody>
-      </p:sp>
-      <p:sp>
-        <p:nvSpPr>
-          <p:cNvPr id="94" name="배너"/>
-          <p:cNvSpPr/>
-          <p:nvPr/>
-        </p:nvSpPr>
-        <p:spPr>
-          <a:xfrm>
-            <a:off x="1347652" y="8466730"/>
-            <a:ext cx="5648087" cy="208174"/>
-          </a:xfrm>
-          <a:prstGeom prst="rect">
-            <a:avLst/>
-          </a:prstGeom>
-          <a:solidFill>
-            <a:srgbClr val="BDE0FF"/>
-          </a:solidFill>
-          <a:ln>
-            <a:noFill/>
-          </a:ln>
-          <a:effectLst/>
-        </p:spPr>
-        <p:txBody>
-          <a:bodyPr rtlCol="0" anchor="ctr" lIns="28800" rIns="28800" tIns="7200" bIns="7200" wrap="square"/>
-          <a:lstStyle/>
-          <a:p>
-            <a:pPr marL="0" indent="0" algn="ctr">
-              <a:lnSpc>
-                <a:spcPct val="110000"/>
-              </a:lnSpc>
-              <a:spcBef>
-                <a:spcPts val="0"/>
-              </a:spcBef>
-              <a:spcAft>
-                <a:spcPts val="0"/>
-              </a:spcAft>
-              <a:buNone/>
-            </a:pPr>
-            <a:r>
-              <a:rPr lang="ko-KR" sz="1000" b="1" spc="-50" dirty="0">
-                <a:solidFill>
-                  <a:srgbClr val="000359"/>
-                </a:solidFill>
-                <a:latin typeface="Pretendard"/>
-                <a:ea typeface="Pretendard"/>
-              </a:rPr>
-              <a:t>매년 11월, 노사 상생의 달 지정 및 운영(공공기관 중 최초)</a:t>
-            </a:r>
-          </a:p>
-        </p:txBody>
-      </p:sp>
-      <p:sp>
-        <p:nvSpPr>
-          <p:cNvPr id="95" name="머리칸"/>
-          <p:cNvSpPr/>
-          <p:nvPr/>
-        </p:nvSpPr>
-        <p:spPr>
-          <a:xfrm>
-            <a:off x="1347652" y="8702296"/>
-            <a:ext cx="1866261" cy="230087"/>
-          </a:xfrm>
-          <a:prstGeom prst="rect">
-            <a:avLst/>
-          </a:prstGeom>
-          <a:solidFill>
-            <a:srgbClr val="DEEEFF"/>
-          </a:solidFill>
-          <a:ln>
-            <a:noFill/>
-          </a:ln>
-          <a:effectLst/>
-        </p:spPr>
-        <p:txBody>
-          <a:bodyPr rtlCol="0" anchor="ctr" lIns="21600" rIns="21600" tIns="3600" bIns="3600" wrap="square"/>
-          <a:lstStyle/>
-          <a:p>
-            <a:pPr marL="0" indent="0" algn="ctr">
-              <a:lnSpc>
-                <a:spcPct val="110000"/>
-              </a:lnSpc>
-              <a:spcBef>
-                <a:spcPts val="0"/>
-              </a:spcBef>
-              <a:spcAft>
-                <a:spcPts val="0"/>
-              </a:spcAft>
-              <a:buNone/>
-            </a:pPr>
-            <a:r>
-              <a:rPr lang="ko-KR" sz="1000" b="1" spc="-50" dirty="0">
-                <a:solidFill>
-                  <a:srgbClr val="000359"/>
-                </a:solidFill>
-                <a:latin typeface="Pretendard"/>
-                <a:ea typeface="Pretendard"/>
-              </a:rPr>
-              <a:t>노사 화합 어울림 한마당</a:t>
-            </a:r>
-          </a:p>
-        </p:txBody>
-      </p:sp>
-      <p:sp>
-        <p:nvSpPr>
-          <p:cNvPr id="96" name="머리칸"/>
-          <p:cNvSpPr/>
-          <p:nvPr/>
-        </p:nvSpPr>
-        <p:spPr>
-          <a:xfrm>
-            <a:off x="3230348" y="8702296"/>
-            <a:ext cx="1866261" cy="230087"/>
-          </a:xfrm>
-          <a:prstGeom prst="rect">
-            <a:avLst/>
-          </a:prstGeom>
-          <a:solidFill>
-            <a:srgbClr val="DEEEFF"/>
-          </a:solidFill>
-          <a:ln>
-            <a:noFill/>
-          </a:ln>
-          <a:effectLst/>
-        </p:spPr>
-        <p:txBody>
-          <a:bodyPr rtlCol="0" anchor="ctr" lIns="21600" rIns="21600" tIns="3600" bIns="3600" wrap="square"/>
-          <a:lstStyle/>
-          <a:p>
-            <a:pPr marL="0" indent="0" algn="ctr">
-              <a:lnSpc>
-                <a:spcPct val="110000"/>
-              </a:lnSpc>
-              <a:spcBef>
-                <a:spcPts val="0"/>
-              </a:spcBef>
-              <a:spcAft>
-                <a:spcPts val="0"/>
-              </a:spcAft>
-              <a:buNone/>
-            </a:pPr>
-            <a:r>
-              <a:rPr lang="ko-KR" sz="1000" b="1" spc="-50" dirty="0">
-                <a:solidFill>
-                  <a:srgbClr val="000359"/>
-                </a:solidFill>
-                <a:latin typeface="Pretendard"/>
-                <a:ea typeface="Pretendard"/>
-              </a:rPr>
-              <a:t>노사 상생 표어 공모·선정</a:t>
-            </a:r>
-          </a:p>
-        </p:txBody>
-      </p:sp>
-      <p:sp>
-        <p:nvSpPr>
-          <p:cNvPr id="97" name="머리칸"/>
-          <p:cNvSpPr/>
-          <p:nvPr/>
-        </p:nvSpPr>
-        <p:spPr>
-          <a:xfrm>
-            <a:off x="5113043" y="8702296"/>
-            <a:ext cx="1866261" cy="230087"/>
-          </a:xfrm>
-          <a:prstGeom prst="rect">
-            <a:avLst/>
-          </a:prstGeom>
-          <a:solidFill>
-            <a:srgbClr val="DEEEFF"/>
-          </a:solidFill>
-          <a:ln>
-            <a:noFill/>
-          </a:ln>
-          <a:effectLst/>
-        </p:spPr>
-        <p:txBody>
-          <a:bodyPr rtlCol="0" anchor="ctr" lIns="21600" rIns="21600" tIns="3600" bIns="3600" wrap="square"/>
-          <a:lstStyle/>
-          <a:p>
-            <a:pPr marL="0" indent="0" algn="ctr">
-              <a:lnSpc>
-                <a:spcPct val="110000"/>
-              </a:lnSpc>
-              <a:spcBef>
-                <a:spcPts val="0"/>
-              </a:spcBef>
-              <a:spcAft>
-                <a:spcPts val="0"/>
-              </a:spcAft>
-              <a:buNone/>
-            </a:pPr>
-            <a:r>
-              <a:rPr lang="ko-KR" sz="1000" b="1" spc="-50" dirty="0">
-                <a:solidFill>
-                  <a:srgbClr val="000359"/>
-                </a:solidFill>
-                <a:latin typeface="Pretendard"/>
-                <a:ea typeface="Pretendard"/>
-              </a:rPr>
-              <a:t>분임협의회 BEST AWARD</a:t>
-            </a:r>
-          </a:p>
-        </p:txBody>
-      </p:sp>
-      <p:sp>
-        <p:nvSpPr>
-          <p:cNvPr id="98" name="칸 본문"/>
-          <p:cNvSpPr txBox="1"/>
-          <p:nvPr/>
-        </p:nvSpPr>
-        <p:spPr>
-          <a:xfrm>
-            <a:off x="1358609" y="8943339"/>
-            <a:ext cx="1860783" cy="567016"/>
-          </a:xfrm>
-          <a:prstGeom prst="rect">
-            <a:avLst/>
-          </a:prstGeom>
-          <a:noFill/>
-        </p:spPr>
-        <p:txBody>
-          <a:bodyPr wrap="square" lIns="50400" tIns="7200" rIns="21600" bIns="7200" anchor="ctr">
-            <a:noAutofit/>
-          </a:bodyPr>
-          <a:lstStyle/>
-          <a:p>
-            <a:pPr marL="118800" indent="-118800" algn="l">
-              <a:lnSpc>
-                <a:spcPct val="110000"/>
-              </a:lnSpc>
-              <a:spcBef>
-                <a:spcPts val="0"/>
-              </a:spcBef>
-              <a:spcAft>
-                <a:spcPts val="50"/>
-              </a:spcAft>
-              <a:buClr>
-                <a:srgbClr val="000359"/>
-              </a:buClr>
-              <a:buFont typeface="Pretendard"/>
-              <a:buChar char="•"/>
-            </a:pPr>
-            <a:r>
-              <a:rPr lang="ko-KR" sz="1000" spc="-50" dirty="0">
-                <a:solidFill>
-                  <a:srgbClr val="000359"/>
-                </a:solidFill>
-                <a:latin typeface="Pretendard"/>
-                <a:ea typeface="Pretendard"/>
-              </a:rPr>
-              <a:t>경영진·노조 156명 참석</a:t>
-            </a:r>
-          </a:p>
-          <a:p>
-            <a:pPr marL="118800" indent="-118800" algn="l">
-              <a:lnSpc>
-                <a:spcPct val="110000"/>
-              </a:lnSpc>
-              <a:spcBef>
-                <a:spcPts val="0"/>
-              </a:spcBef>
-              <a:spcAft>
-                <a:spcPts val="50"/>
-              </a:spcAft>
-              <a:buClr>
-                <a:srgbClr val="000359"/>
-              </a:buClr>
-              <a:buFont typeface="Pretendard"/>
-              <a:buChar char="•"/>
-            </a:pPr>
-            <a:r>
-              <a:rPr lang="ko-KR" sz="1000" spc="-50" dirty="0">
-                <a:solidFill>
-                  <a:srgbClr val="000359"/>
-                </a:solidFill>
-                <a:latin typeface="Pretendard"/>
-                <a:ea typeface="Pretendard"/>
-              </a:rPr>
-              <a:t>화합과 소통의 장 마련</a:t>
-            </a:r>
-          </a:p>
-          <a:p>
-            <a:pPr marL="118800" indent="-118800" algn="l">
-              <a:lnSpc>
-                <a:spcPct val="110000"/>
-              </a:lnSpc>
-              <a:spcBef>
-                <a:spcPts val="0"/>
-              </a:spcBef>
-              <a:spcAft>
-                <a:spcPts val="50"/>
-              </a:spcAft>
-              <a:buClr>
-                <a:srgbClr val="000359"/>
-              </a:buClr>
-              <a:buFont typeface="Pretendard"/>
-              <a:buChar char="•"/>
-            </a:pPr>
-            <a:r>
-              <a:rPr lang="ko-KR" sz="1000" spc="-50" dirty="0">
-                <a:solidFill>
-                  <a:srgbClr val="000359"/>
-                </a:solidFill>
-                <a:latin typeface="Pretendard"/>
-                <a:ea typeface="Pretendard"/>
-              </a:rPr>
-              <a:t>노사관계 특강 교육 운영</a:t>
-            </a:r>
-          </a:p>
-        </p:txBody>
-      </p:sp>
-      <p:sp>
-        <p:nvSpPr>
-          <p:cNvPr id="99" name="칸 본문"/>
-          <p:cNvSpPr txBox="1"/>
-          <p:nvPr/>
-        </p:nvSpPr>
-        <p:spPr>
-          <a:xfrm>
-            <a:off x="3241304" y="8943339"/>
-            <a:ext cx="1860783" cy="567016"/>
-          </a:xfrm>
-          <a:prstGeom prst="rect">
-            <a:avLst/>
-          </a:prstGeom>
-          <a:noFill/>
-        </p:spPr>
-        <p:txBody>
-          <a:bodyPr wrap="square" lIns="50400" tIns="7200" rIns="21600" bIns="7200" anchor="ctr">
-            <a:noAutofit/>
-          </a:bodyPr>
-          <a:lstStyle/>
-          <a:p>
-            <a:pPr marL="118800" indent="-118800" algn="l">
-              <a:lnSpc>
-                <a:spcPct val="110000"/>
-              </a:lnSpc>
-              <a:spcBef>
-                <a:spcPts val="0"/>
-              </a:spcBef>
-              <a:spcAft>
-                <a:spcPts val="50"/>
-              </a:spcAft>
-              <a:buClr>
-                <a:srgbClr val="000359"/>
-              </a:buClr>
-              <a:buFont typeface="Pretendard"/>
-              <a:buChar char="•"/>
-            </a:pPr>
-            <a:r>
-              <a:rPr lang="ko-KR" sz="1000" spc="-50" dirty="0">
-                <a:solidFill>
-                  <a:srgbClr val="000359"/>
-                </a:solidFill>
-                <a:latin typeface="Pretendard"/>
-                <a:ea typeface="Pretendard"/>
-              </a:rPr>
-              <a:t>화합·상생 표어 공모</a:t>
-            </a:r>
-          </a:p>
-          <a:p>
-            <a:pPr marL="118800" indent="-118800" algn="l">
-              <a:lnSpc>
-                <a:spcPct val="110000"/>
-              </a:lnSpc>
-              <a:spcBef>
-                <a:spcPts val="0"/>
-              </a:spcBef>
-              <a:spcAft>
-                <a:spcPts val="50"/>
-              </a:spcAft>
-              <a:buClr>
-                <a:srgbClr val="000359"/>
-              </a:buClr>
-              <a:buFont typeface="Pretendard"/>
-              <a:buChar char="•"/>
-            </a:pPr>
-            <a:r>
-              <a:rPr lang="ko-KR" sz="1000" spc="-50" dirty="0">
-                <a:solidFill>
-                  <a:srgbClr val="000359"/>
-                </a:solidFill>
-                <a:latin typeface="Pretendard"/>
-                <a:ea typeface="Pretendard"/>
-              </a:rPr>
-              <a:t>61개 공모·우수작 3개</a:t>
-            </a:r>
-          </a:p>
-          <a:p>
-            <a:pPr marL="118800" indent="-118800" algn="l">
-              <a:lnSpc>
-                <a:spcPct val="110000"/>
-              </a:lnSpc>
-              <a:spcBef>
-                <a:spcPts val="0"/>
-              </a:spcBef>
-              <a:spcAft>
-                <a:spcPts val="50"/>
-              </a:spcAft>
-              <a:buClr>
-                <a:srgbClr val="000359"/>
-              </a:buClr>
-              <a:buFont typeface="Pretendard"/>
-              <a:buChar char="•"/>
-            </a:pPr>
-            <a:r>
-              <a:rPr lang="ko-KR" sz="1000" spc="-50" dirty="0">
-                <a:solidFill>
-                  <a:srgbClr val="000359"/>
-                </a:solidFill>
-                <a:latin typeface="Pretendard"/>
-                <a:ea typeface="Pretendard"/>
-              </a:rPr>
-              <a:t>꼬리말·행사 슬로건 활용</a:t>
-            </a:r>
-          </a:p>
-        </p:txBody>
-      </p:sp>
-      <p:cxnSp>
-        <p:nvCxnSpPr>
-          <p:cNvPr id="100" name="Connector 99"/>
-          <p:cNvCxnSpPr/>
-          <p:nvPr/>
-        </p:nvCxnSpPr>
-        <p:spPr>
-          <a:xfrm>
-            <a:off x="3230348" y="8976209"/>
-            <a:ext cx="0" cy="501276"/>
-          </a:xfrm>
-          <a:prstGeom prst="line">
-            <a:avLst/>
-          </a:prstGeom>
-          <a:ln w="9525">
-            <a:solidFill>
-              <a:srgbClr val="BDE0FF"/>
-            </a:solidFill>
-          </a:ln>
-        </p:spPr>
-      </p:cxnSp>
-      <p:sp>
-        <p:nvSpPr>
-          <p:cNvPr id="101" name="칸 본문"/>
-          <p:cNvSpPr txBox="1"/>
-          <p:nvPr/>
-        </p:nvSpPr>
-        <p:spPr>
-          <a:xfrm>
-            <a:off x="5124000" y="8943339"/>
-            <a:ext cx="1860783" cy="567016"/>
-          </a:xfrm>
-          <a:prstGeom prst="rect">
-            <a:avLst/>
-          </a:prstGeom>
-          <a:noFill/>
-        </p:spPr>
-        <p:txBody>
-          <a:bodyPr wrap="square" lIns="50400" tIns="7200" rIns="21600" bIns="7200" anchor="ctr">
-            <a:noAutofit/>
-          </a:bodyPr>
-          <a:lstStyle/>
-          <a:p>
-            <a:pPr marL="118800" indent="-118800" algn="l">
-              <a:lnSpc>
-                <a:spcPct val="110000"/>
-              </a:lnSpc>
-              <a:spcBef>
-                <a:spcPts val="0"/>
-              </a:spcBef>
-              <a:spcAft>
-                <a:spcPts val="50"/>
-              </a:spcAft>
-              <a:buClr>
-                <a:srgbClr val="000359"/>
-              </a:buClr>
-              <a:buFont typeface="Pretendard"/>
-              <a:buChar char="•"/>
-            </a:pPr>
-            <a:r>
-              <a:rPr lang="ko-KR" sz="1000" spc="-50" dirty="0">
-                <a:solidFill>
-                  <a:srgbClr val="000359"/>
-                </a:solidFill>
-                <a:latin typeface="Pretendard"/>
-                <a:ea typeface="Pretendard"/>
-              </a:rPr>
-              <a:t>실적평가 우수조직 시상(4개)</a:t>
-            </a:r>
-          </a:p>
-          <a:p>
-            <a:pPr marL="118800" indent="-118800" algn="l">
-              <a:lnSpc>
-                <a:spcPct val="110000"/>
-              </a:lnSpc>
-              <a:spcBef>
-                <a:spcPts val="0"/>
-              </a:spcBef>
-              <a:spcAft>
-                <a:spcPts val="50"/>
-              </a:spcAft>
-              <a:buClr>
-                <a:srgbClr val="000359"/>
-              </a:buClr>
-              <a:buFont typeface="Pretendard"/>
-              <a:buChar char="•"/>
-            </a:pPr>
-            <a:r>
-              <a:rPr lang="ko-KR" sz="1000" spc="-50" dirty="0">
-                <a:solidFill>
-                  <a:srgbClr val="000359"/>
-                </a:solidFill>
-                <a:latin typeface="Pretendard"/>
-                <a:ea typeface="Pretendard"/>
-              </a:rPr>
-              <a:t>이사장 표창·부상품 제공</a:t>
-            </a:r>
-          </a:p>
-        </p:txBody>
-      </p:sp>
-      <p:cxnSp>
-        <p:nvCxnSpPr>
-          <p:cNvPr id="102" name="Connector 101"/>
-          <p:cNvCxnSpPr/>
-          <p:nvPr/>
-        </p:nvCxnSpPr>
-        <p:spPr>
-          <a:xfrm>
-            <a:off x="5113043" y="8976209"/>
-            <a:ext cx="0" cy="501276"/>
-          </a:xfrm>
-          <a:prstGeom prst="line">
-            <a:avLst/>
-          </a:prstGeom>
-          <a:ln w="9525">
-            <a:solidFill>
-              <a:srgbClr val="BDE0FF"/>
-            </a:solidFill>
-          </a:ln>
-        </p:spPr>
-      </p:cxnSp>
     </p:spTree>
   </p:cSld>
   <p:clrMapOvr>
@@ -24348,13 +22533,1828 @@
       </p:sp>
       <p:sp>
         <p:nvSpPr>
-          <p:cNvPr id="7" name="표 외곽"/>
+          <p:cNvPr id="7" name="형광 밑줄"/>
           <p:cNvSpPr/>
           <p:nvPr/>
         </p:nvSpPr>
         <p:spPr>
           <a:xfrm>
+            <a:off x="536870" y="920348"/>
+            <a:ext cx="2719989" cy="43826"/>
+          </a:xfrm>
+          <a:prstGeom prst="rect">
+            <a:avLst/>
+          </a:prstGeom>
+          <a:solidFill>
+            <a:srgbClr val="29FFBD"/>
+          </a:solidFill>
+          <a:ln>
+            <a:noFill/>
+          </a:ln>
+          <a:effectLst/>
+        </p:spPr>
+        <p:txBody>
+          <a:bodyPr rtlCol="0" anchor="ctr" lIns="0" rIns="0" tIns="0" bIns="0"/>
+          <a:lstStyle/>
+          <a:p>
+            <a:pPr algn="ctr"/>
+          </a:p>
+        </p:txBody>
+      </p:sp>
+      <p:sp>
+        <p:nvSpPr>
+          <p:cNvPr id="8" name="소제목"/>
+          <p:cNvSpPr txBox="1"/>
+          <p:nvPr/>
+        </p:nvSpPr>
+        <p:spPr>
+          <a:xfrm>
             <a:off x="536870" y="766957"/>
+            <a:ext cx="6300000" cy="241043"/>
+          </a:xfrm>
+          <a:prstGeom prst="rect">
+            <a:avLst/>
+          </a:prstGeom>
+          <a:noFill/>
+        </p:spPr>
+        <p:txBody>
+          <a:bodyPr wrap="square" lIns="0" tIns="0" rIns="0" bIns="0" anchor="ctr">
+            <a:noAutofit/>
+          </a:bodyPr>
+          <a:lstStyle/>
+          <a:p>
+            <a:pPr marL="0" indent="0" algn="l">
+              <a:lnSpc>
+                <a:spcPct val="110000"/>
+              </a:lnSpc>
+              <a:spcBef>
+                <a:spcPts val="0"/>
+              </a:spcBef>
+              <a:spcAft>
+                <a:spcPts val="0"/>
+              </a:spcAft>
+              <a:buNone/>
+            </a:pPr>
+            <a:r>
+              <a:rPr lang="ko-KR" sz="1200" b="1" spc="-60" dirty="0">
+                <a:solidFill>
+                  <a:srgbClr val="000359"/>
+                </a:solidFill>
+                <a:latin typeface="Pretendard"/>
+                <a:ea typeface="Pretendard"/>
+              </a:rPr>
+              <a:t>나. 노사 상생협력 선포 및 상생의 달 지정·운영</a:t>
+            </a:r>
+          </a:p>
+        </p:txBody>
+      </p:sp>
+      <p:sp>
+        <p:nvSpPr>
+          <p:cNvPr id="9" name="태그칩"/>
+          <p:cNvSpPr/>
+          <p:nvPr/>
+        </p:nvSpPr>
+        <p:spPr>
+          <a:xfrm>
+            <a:off x="3355467" y="799826"/>
+            <a:ext cx="327325" cy="175304"/>
+          </a:xfrm>
+          <a:prstGeom prst="rect">
+            <a:avLst/>
+          </a:prstGeom>
+          <a:solidFill>
+            <a:srgbClr val="0051BC"/>
+          </a:solidFill>
+          <a:ln>
+            <a:noFill/>
+          </a:ln>
+          <a:effectLst/>
+        </p:spPr>
+        <p:txBody>
+          <a:bodyPr rtlCol="0" anchor="ctr" lIns="10800" rIns="10800" tIns="0" bIns="0" wrap="square"/>
+          <a:lstStyle/>
+          <a:p>
+            <a:pPr marL="0" indent="0" algn="ctr">
+              <a:lnSpc>
+                <a:spcPct val="110000"/>
+              </a:lnSpc>
+              <a:spcBef>
+                <a:spcPts val="0"/>
+              </a:spcBef>
+              <a:spcAft>
+                <a:spcPts val="0"/>
+              </a:spcAft>
+              <a:buNone/>
+            </a:pPr>
+            <a:r>
+              <a:rPr lang="ko-KR" sz="1000" b="1" spc="-50" dirty="0">
+                <a:solidFill>
+                  <a:srgbClr val="FFFFFF"/>
+                </a:solidFill>
+                <a:latin typeface="Pretendard"/>
+                <a:ea typeface="Pretendard"/>
+              </a:rPr>
+              <a:t>B.P</a:t>
+            </a:r>
+          </a:p>
+        </p:txBody>
+      </p:sp>
+      <p:sp>
+        <p:nvSpPr>
+          <p:cNvPr id="10" name="태그칩"/>
+          <p:cNvSpPr/>
+          <p:nvPr/>
+        </p:nvSpPr>
+        <p:spPr>
+          <a:xfrm>
+            <a:off x="3726618" y="799826"/>
+            <a:ext cx="351016" cy="175304"/>
+          </a:xfrm>
+          <a:prstGeom prst="rect">
+            <a:avLst/>
+          </a:prstGeom>
+          <a:solidFill>
+            <a:srgbClr val="0051BC"/>
+          </a:solidFill>
+          <a:ln>
+            <a:noFill/>
+          </a:ln>
+          <a:effectLst/>
+        </p:spPr>
+        <p:txBody>
+          <a:bodyPr rtlCol="0" anchor="ctr" lIns="10800" rIns="10800" tIns="0" bIns="0" wrap="square"/>
+          <a:lstStyle/>
+          <a:p>
+            <a:pPr marL="0" indent="0" algn="ctr">
+              <a:lnSpc>
+                <a:spcPct val="110000"/>
+              </a:lnSpc>
+              <a:spcBef>
+                <a:spcPts val="0"/>
+              </a:spcBef>
+              <a:spcAft>
+                <a:spcPts val="0"/>
+              </a:spcAft>
+              <a:buNone/>
+            </a:pPr>
+            <a:r>
+              <a:rPr lang="ko-KR" sz="1000" b="1" spc="-50" dirty="0">
+                <a:solidFill>
+                  <a:srgbClr val="FFFFFF"/>
+                </a:solidFill>
+                <a:latin typeface="Pretendard"/>
+                <a:ea typeface="Pretendard"/>
+              </a:rPr>
+              <a:t>신규</a:t>
+            </a:r>
+          </a:p>
+        </p:txBody>
+      </p:sp>
+      <p:sp>
+        <p:nvSpPr>
+          <p:cNvPr id="11" name="라벨 박스"/>
+          <p:cNvSpPr/>
+          <p:nvPr/>
+        </p:nvSpPr>
+        <p:spPr>
+          <a:xfrm>
+            <a:off x="536870" y="1062783"/>
+            <a:ext cx="6300000" cy="290348"/>
+          </a:xfrm>
+          <a:prstGeom prst="rect">
+            <a:avLst/>
+          </a:prstGeom>
+          <a:solidFill>
+            <a:srgbClr val="FFFFFF"/>
+          </a:solidFill>
+          <a:ln w="9525">
+            <a:solidFill>
+              <a:srgbClr val="008EFF"/>
+            </a:solidFill>
+          </a:ln>
+          <a:effectLst/>
+        </p:spPr>
+        <p:txBody>
+          <a:bodyPr rtlCol="0" anchor="ctr" lIns="0" rIns="0" tIns="0" bIns="0"/>
+          <a:lstStyle/>
+          <a:p>
+            <a:pPr algn="ctr"/>
+          </a:p>
+        </p:txBody>
+      </p:sp>
+      <p:sp>
+        <p:nvSpPr>
+          <p:cNvPr id="12" name="레일"/>
+          <p:cNvSpPr/>
+          <p:nvPr/>
+        </p:nvSpPr>
+        <p:spPr>
+          <a:xfrm>
+            <a:off x="547826" y="1073739"/>
+            <a:ext cx="591652" cy="268435"/>
+          </a:xfrm>
+          <a:prstGeom prst="rect">
+            <a:avLst/>
+          </a:prstGeom>
+          <a:pattFill prst="trellis">
+            <a:fgClr>
+              <a:srgbClr val="00BEC2"/>
+            </a:fgClr>
+            <a:bgClr>
+              <a:srgbClr val="00B0B4"/>
+            </a:bgClr>
+          </a:pattFill>
+          <a:ln>
+            <a:noFill/>
+          </a:ln>
+          <a:effectLst/>
+        </p:spPr>
+        <p:txBody>
+          <a:bodyPr rtlCol="0" anchor="ctr" lIns="10800" rIns="10800" tIns="0" bIns="0" wrap="square"/>
+          <a:lstStyle/>
+          <a:p>
+            <a:pPr marL="0" indent="0" algn="ctr">
+              <a:lnSpc>
+                <a:spcPct val="110000"/>
+              </a:lnSpc>
+              <a:spcBef>
+                <a:spcPts val="0"/>
+              </a:spcBef>
+              <a:spcAft>
+                <a:spcPts val="0"/>
+              </a:spcAft>
+              <a:buNone/>
+            </a:pPr>
+            <a:r>
+              <a:rPr lang="ko-KR" sz="1000" b="1" spc="-50" dirty="0">
+                <a:solidFill>
+                  <a:srgbClr val="FFFFFF"/>
+                </a:solidFill>
+                <a:latin typeface="Pretendard"/>
+                <a:ea typeface="Pretendard"/>
+              </a:rPr>
+              <a:t>추진배경</a:t>
+            </a:r>
+          </a:p>
+        </p:txBody>
+      </p:sp>
+      <p:sp>
+        <p:nvSpPr>
+          <p:cNvPr id="13" name="본문"/>
+          <p:cNvSpPr txBox="1"/>
+          <p:nvPr/>
+        </p:nvSpPr>
+        <p:spPr>
+          <a:xfrm>
+            <a:off x="1172348" y="1079217"/>
+            <a:ext cx="5631652" cy="257478"/>
+          </a:xfrm>
+          <a:prstGeom prst="rect">
+            <a:avLst/>
+          </a:prstGeom>
+          <a:noFill/>
+        </p:spPr>
+        <p:txBody>
+          <a:bodyPr wrap="square" lIns="36000" tIns="10800" rIns="36000" bIns="10800" anchor="ctr">
+            <a:noAutofit/>
+          </a:bodyPr>
+          <a:lstStyle/>
+          <a:p>
+            <a:pPr marL="118800" indent="-118800" algn="l">
+              <a:lnSpc>
+                <a:spcPct val="110000"/>
+              </a:lnSpc>
+              <a:spcBef>
+                <a:spcPts val="0"/>
+              </a:spcBef>
+              <a:spcAft>
+                <a:spcPts val="50"/>
+              </a:spcAft>
+              <a:buClr>
+                <a:srgbClr val="000359"/>
+              </a:buClr>
+              <a:buFont typeface="Pretendard"/>
+              <a:buChar char="•"/>
+            </a:pPr>
+            <a:r>
+              <a:rPr lang="ko-KR" sz="1000" spc="-50" dirty="0">
+                <a:solidFill>
+                  <a:srgbClr val="000359"/>
+                </a:solidFill>
+                <a:latin typeface="Pretendard"/>
+                <a:ea typeface="Pretendard"/>
+              </a:rPr>
+              <a:t>열린 소통·긍정 조직문화를 기반으로 상생 협력적 노사관계 문화 확산, 파트너십 강화 추진</a:t>
+            </a:r>
+          </a:p>
+        </p:txBody>
+      </p:sp>
+      <p:sp>
+        <p:nvSpPr>
+          <p:cNvPr id="14" name="표 외곽"/>
+          <p:cNvSpPr/>
+          <p:nvPr/>
+        </p:nvSpPr>
+        <p:spPr>
+          <a:xfrm>
+            <a:off x="536870" y="1396957"/>
+            <a:ext cx="6300000" cy="2671607"/>
+          </a:xfrm>
+          <a:prstGeom prst="rect">
+            <a:avLst/>
+          </a:prstGeom>
+          <a:solidFill>
+            <a:srgbClr val="FFFFFF"/>
+          </a:solidFill>
+          <a:ln w="9525">
+            <a:solidFill>
+              <a:srgbClr val="008EFF"/>
+            </a:solidFill>
+          </a:ln>
+          <a:effectLst/>
+        </p:spPr>
+        <p:txBody>
+          <a:bodyPr rtlCol="0" anchor="ctr" lIns="0" rIns="0" tIns="0" bIns="0"/>
+          <a:lstStyle/>
+          <a:p>
+            <a:pPr algn="ctr"/>
+          </a:p>
+        </p:txBody>
+      </p:sp>
+      <p:sp>
+        <p:nvSpPr>
+          <p:cNvPr id="15" name="레일"/>
+          <p:cNvSpPr/>
+          <p:nvPr/>
+        </p:nvSpPr>
+        <p:spPr>
+          <a:xfrm>
+            <a:off x="547826" y="1413391"/>
+            <a:ext cx="580696" cy="666532"/>
+          </a:xfrm>
+          <a:prstGeom prst="rect">
+            <a:avLst/>
+          </a:prstGeom>
+          <a:pattFill prst="trellis">
+            <a:fgClr>
+              <a:srgbClr val="0990FF"/>
+            </a:fgClr>
+            <a:bgClr>
+              <a:srgbClr val="0080EA"/>
+            </a:bgClr>
+          </a:pattFill>
+          <a:ln>
+            <a:noFill/>
+          </a:ln>
+          <a:effectLst/>
+        </p:spPr>
+        <p:txBody>
+          <a:bodyPr rtlCol="0" anchor="ctr" lIns="10800" rIns="10800" tIns="0" bIns="0" wrap="square"/>
+          <a:lstStyle/>
+          <a:p>
+            <a:pPr marL="0" indent="0" algn="ctr">
+              <a:lnSpc>
+                <a:spcPct val="110000"/>
+              </a:lnSpc>
+              <a:spcBef>
+                <a:spcPts val="0"/>
+              </a:spcBef>
+              <a:spcAft>
+                <a:spcPts val="0"/>
+              </a:spcAft>
+              <a:buNone/>
+            </a:pPr>
+            <a:r>
+              <a:rPr lang="ko-KR" sz="1000" b="1" spc="-50" dirty="0">
+                <a:solidFill>
+                  <a:srgbClr val="FFFFFF"/>
+                </a:solidFill>
+                <a:latin typeface="Pretendard"/>
+                <a:ea typeface="Pretendard"/>
+              </a:rPr>
+              <a:t>공감대</a:t>
+            </a:r>
+          </a:p>
+          <a:p>
+            <a:pPr marL="0" indent="0" algn="ctr">
+              <a:lnSpc>
+                <a:spcPct val="110000"/>
+              </a:lnSpc>
+              <a:spcBef>
+                <a:spcPts val="0"/>
+              </a:spcBef>
+              <a:spcAft>
+                <a:spcPts val="0"/>
+              </a:spcAft>
+              <a:buNone/>
+            </a:pPr>
+            <a:r>
+              <a:rPr lang="ko-KR" sz="1000" b="1" spc="-50" dirty="0">
+                <a:solidFill>
+                  <a:srgbClr val="FFFFFF"/>
+                </a:solidFill>
+                <a:latin typeface="Pretendard"/>
+                <a:ea typeface="Pretendard"/>
+              </a:rPr>
+              <a:t>형성</a:t>
+            </a:r>
+          </a:p>
+        </p:txBody>
+      </p:sp>
+      <p:sp>
+        <p:nvSpPr>
+          <p:cNvPr id="16" name="머리칸"/>
+          <p:cNvSpPr/>
+          <p:nvPr/>
+        </p:nvSpPr>
+        <p:spPr>
+          <a:xfrm>
+            <a:off x="1161391" y="1435304"/>
+            <a:ext cx="2807609" cy="230087"/>
+          </a:xfrm>
+          <a:prstGeom prst="rect">
+            <a:avLst/>
+          </a:prstGeom>
+          <a:solidFill>
+            <a:srgbClr val="DEEEFF"/>
+          </a:solidFill>
+          <a:ln>
+            <a:noFill/>
+          </a:ln>
+          <a:effectLst/>
+        </p:spPr>
+        <p:txBody>
+          <a:bodyPr rtlCol="0" anchor="ctr" lIns="21600" rIns="21600" tIns="3600" bIns="3600" wrap="square"/>
+          <a:lstStyle/>
+          <a:p>
+            <a:pPr marL="0" indent="0" algn="ctr">
+              <a:lnSpc>
+                <a:spcPct val="110000"/>
+              </a:lnSpc>
+              <a:spcBef>
+                <a:spcPts val="0"/>
+              </a:spcBef>
+              <a:spcAft>
+                <a:spcPts val="0"/>
+              </a:spcAft>
+              <a:buNone/>
+            </a:pPr>
+            <a:r>
+              <a:rPr lang="ko-KR" sz="1000" b="1" spc="-50" dirty="0">
+                <a:solidFill>
+                  <a:srgbClr val="000359"/>
+                </a:solidFill>
+                <a:latin typeface="Pretendard"/>
+                <a:ea typeface="Pretendard"/>
+              </a:rPr>
+              <a:t>공 단</a:t>
+            </a:r>
+          </a:p>
+        </p:txBody>
+      </p:sp>
+      <p:sp>
+        <p:nvSpPr>
+          <p:cNvPr id="17" name="머리칸"/>
+          <p:cNvSpPr/>
+          <p:nvPr/>
+        </p:nvSpPr>
+        <p:spPr>
+          <a:xfrm>
+            <a:off x="3985435" y="1435304"/>
+            <a:ext cx="2807609" cy="230087"/>
+          </a:xfrm>
+          <a:prstGeom prst="rect">
+            <a:avLst/>
+          </a:prstGeom>
+          <a:solidFill>
+            <a:srgbClr val="DEEEFF"/>
+          </a:solidFill>
+          <a:ln>
+            <a:noFill/>
+          </a:ln>
+          <a:effectLst/>
+        </p:spPr>
+        <p:txBody>
+          <a:bodyPr rtlCol="0" anchor="ctr" lIns="21600" rIns="21600" tIns="3600" bIns="3600" wrap="square"/>
+          <a:lstStyle/>
+          <a:p>
+            <a:pPr marL="0" indent="0" algn="ctr">
+              <a:lnSpc>
+                <a:spcPct val="110000"/>
+              </a:lnSpc>
+              <a:spcBef>
+                <a:spcPts val="0"/>
+              </a:spcBef>
+              <a:spcAft>
+                <a:spcPts val="0"/>
+              </a:spcAft>
+              <a:buNone/>
+            </a:pPr>
+            <a:r>
+              <a:rPr lang="ko-KR" sz="1000" b="1" spc="-50" dirty="0">
+                <a:solidFill>
+                  <a:srgbClr val="000359"/>
+                </a:solidFill>
+                <a:latin typeface="Pretendard"/>
+                <a:ea typeface="Pretendard"/>
+              </a:rPr>
+              <a:t>노동조합</a:t>
+            </a:r>
+          </a:p>
+        </p:txBody>
+      </p:sp>
+      <p:sp>
+        <p:nvSpPr>
+          <p:cNvPr id="18" name="칸 본문"/>
+          <p:cNvSpPr txBox="1"/>
+          <p:nvPr/>
+        </p:nvSpPr>
+        <p:spPr>
+          <a:xfrm>
+            <a:off x="1172348" y="1676348"/>
+            <a:ext cx="2802130" cy="381663"/>
+          </a:xfrm>
+          <a:prstGeom prst="rect">
+            <a:avLst/>
+          </a:prstGeom>
+          <a:noFill/>
+        </p:spPr>
+        <p:txBody>
+          <a:bodyPr wrap="square" lIns="50400" tIns="7200" rIns="21600" bIns="7200" anchor="ctr">
+            <a:noAutofit/>
+          </a:bodyPr>
+          <a:lstStyle/>
+          <a:p>
+            <a:pPr marL="118800" indent="-118800" algn="l">
+              <a:lnSpc>
+                <a:spcPct val="110000"/>
+              </a:lnSpc>
+              <a:spcBef>
+                <a:spcPts val="0"/>
+              </a:spcBef>
+              <a:spcAft>
+                <a:spcPts val="50"/>
+              </a:spcAft>
+              <a:buClr>
+                <a:srgbClr val="000359"/>
+              </a:buClr>
+              <a:buFont typeface="Pretendard"/>
+              <a:buChar char="•"/>
+            </a:pPr>
+            <a:r>
+              <a:rPr lang="ko-KR" sz="1000" spc="-50" dirty="0">
+                <a:solidFill>
+                  <a:srgbClr val="000359"/>
+                </a:solidFill>
+                <a:latin typeface="Pretendard"/>
+                <a:ea typeface="Pretendard"/>
+              </a:rPr>
+              <a:t>공단 발전을 위해서는 노동조합을 동반자로 인식하고 협력 증대 필수적</a:t>
+            </a:r>
+          </a:p>
+        </p:txBody>
+      </p:sp>
+      <p:sp>
+        <p:nvSpPr>
+          <p:cNvPr id="19" name="칸 본문"/>
+          <p:cNvSpPr txBox="1"/>
+          <p:nvPr/>
+        </p:nvSpPr>
+        <p:spPr>
+          <a:xfrm>
+            <a:off x="3996391" y="1676348"/>
+            <a:ext cx="2802130" cy="381663"/>
+          </a:xfrm>
+          <a:prstGeom prst="rect">
+            <a:avLst/>
+          </a:prstGeom>
+          <a:noFill/>
+        </p:spPr>
+        <p:txBody>
+          <a:bodyPr wrap="square" lIns="50400" tIns="7200" rIns="21600" bIns="7200" anchor="ctr">
+            <a:noAutofit/>
+          </a:bodyPr>
+          <a:lstStyle/>
+          <a:p>
+            <a:pPr marL="118800" indent="-118800" algn="l">
+              <a:lnSpc>
+                <a:spcPct val="110000"/>
+              </a:lnSpc>
+              <a:spcBef>
+                <a:spcPts val="0"/>
+              </a:spcBef>
+              <a:spcAft>
+                <a:spcPts val="50"/>
+              </a:spcAft>
+              <a:buClr>
+                <a:srgbClr val="000359"/>
+              </a:buClr>
+              <a:buFont typeface="Pretendard"/>
+              <a:buChar char="•"/>
+            </a:pPr>
+            <a:r>
+              <a:rPr lang="ko-KR" sz="1000" spc="-50" dirty="0">
+                <a:solidFill>
+                  <a:srgbClr val="000359"/>
+                </a:solidFill>
+                <a:latin typeface="Pretendard"/>
+                <a:ea typeface="Pretendard"/>
+              </a:rPr>
+              <a:t>근로조건 개선을 위해서는 공단과의 파트너십 강화 필요</a:t>
+            </a:r>
+          </a:p>
+        </p:txBody>
+      </p:sp>
+      <p:cxnSp>
+        <p:nvCxnSpPr>
+          <p:cNvPr id="20" name="Connector 19"/>
+          <p:cNvCxnSpPr/>
+          <p:nvPr/>
+        </p:nvCxnSpPr>
+        <p:spPr>
+          <a:xfrm>
+            <a:off x="3985435" y="1709217"/>
+            <a:ext cx="0" cy="315924"/>
+          </a:xfrm>
+          <a:prstGeom prst="line">
+            <a:avLst/>
+          </a:prstGeom>
+          <a:ln w="9525">
+            <a:solidFill>
+              <a:srgbClr val="BDE0FF"/>
+            </a:solidFill>
+          </a:ln>
+        </p:spPr>
+      </p:cxnSp>
+      <p:sp>
+        <p:nvSpPr>
+          <p:cNvPr id="21" name="레일"/>
+          <p:cNvSpPr/>
+          <p:nvPr/>
+        </p:nvSpPr>
+        <p:spPr>
+          <a:xfrm>
+            <a:off x="547826" y="2096358"/>
+            <a:ext cx="580696" cy="851885"/>
+          </a:xfrm>
+          <a:prstGeom prst="rect">
+            <a:avLst/>
+          </a:prstGeom>
+          <a:pattFill prst="trellis">
+            <a:fgClr>
+              <a:srgbClr val="00BEC2"/>
+            </a:fgClr>
+            <a:bgClr>
+              <a:srgbClr val="00B0B4"/>
+            </a:bgClr>
+          </a:pattFill>
+          <a:ln>
+            <a:noFill/>
+          </a:ln>
+          <a:effectLst/>
+        </p:spPr>
+        <p:txBody>
+          <a:bodyPr rtlCol="0" anchor="ctr" lIns="0" rIns="0" tIns="0" bIns="0"/>
+          <a:lstStyle/>
+          <a:p>
+            <a:pPr algn="ctr"/>
+          </a:p>
+        </p:txBody>
+      </p:sp>
+      <p:sp>
+        <p:nvSpPr>
+          <p:cNvPr id="22" name="레일 태그"/>
+          <p:cNvSpPr/>
+          <p:nvPr/>
+        </p:nvSpPr>
+        <p:spPr>
+          <a:xfrm>
+            <a:off x="668144" y="2260706"/>
+            <a:ext cx="340059" cy="186261"/>
+          </a:xfrm>
+          <a:prstGeom prst="rect">
+            <a:avLst/>
+          </a:prstGeom>
+          <a:solidFill>
+            <a:srgbClr val="FFFFFF"/>
+          </a:solidFill>
+          <a:ln>
+            <a:noFill/>
+          </a:ln>
+          <a:effectLst/>
+        </p:spPr>
+        <p:txBody>
+          <a:bodyPr rtlCol="0" anchor="ctr" lIns="7200" rIns="7200" tIns="0" bIns="0" wrap="square"/>
+          <a:lstStyle/>
+          <a:p>
+            <a:pPr marL="0" indent="0" algn="ctr">
+              <a:lnSpc>
+                <a:spcPct val="110000"/>
+              </a:lnSpc>
+              <a:spcBef>
+                <a:spcPts val="0"/>
+              </a:spcBef>
+              <a:spcAft>
+                <a:spcPts val="0"/>
+              </a:spcAft>
+              <a:buNone/>
+            </a:pPr>
+            <a:r>
+              <a:rPr lang="ko-KR" sz="1000" b="1" spc="-50" dirty="0">
+                <a:solidFill>
+                  <a:srgbClr val="000359"/>
+                </a:solidFill>
+                <a:latin typeface="Pretendard"/>
+                <a:ea typeface="Pretendard"/>
+              </a:rPr>
+              <a:t>결실</a:t>
+            </a:r>
+          </a:p>
+        </p:txBody>
+      </p:sp>
+      <p:sp>
+        <p:nvSpPr>
+          <p:cNvPr id="23" name="레일 라벨"/>
+          <p:cNvSpPr txBox="1"/>
+          <p:nvPr/>
+        </p:nvSpPr>
+        <p:spPr>
+          <a:xfrm>
+            <a:off x="547826" y="2446967"/>
+            <a:ext cx="580696" cy="479363"/>
+          </a:xfrm>
+          <a:prstGeom prst="rect">
+            <a:avLst/>
+          </a:prstGeom>
+          <a:noFill/>
+        </p:spPr>
+        <p:txBody>
+          <a:bodyPr wrap="square" lIns="10800" tIns="0" rIns="10800" bIns="0" anchor="ctr">
+            <a:noAutofit/>
+          </a:bodyPr>
+          <a:lstStyle/>
+          <a:p>
+            <a:pPr marL="0" indent="0" algn="ctr">
+              <a:lnSpc>
+                <a:spcPct val="110000"/>
+              </a:lnSpc>
+              <a:spcBef>
+                <a:spcPts val="0"/>
+              </a:spcBef>
+              <a:spcAft>
+                <a:spcPts val="0"/>
+              </a:spcAft>
+              <a:buNone/>
+            </a:pPr>
+            <a:r>
+              <a:rPr lang="ko-KR" sz="1000" b="1" spc="-50" dirty="0">
+                <a:solidFill>
+                  <a:srgbClr val="FFFFFF"/>
+                </a:solidFill>
+                <a:latin typeface="Pretendard"/>
+                <a:ea typeface="Pretendard"/>
+              </a:rPr>
+              <a:t>상생협력</a:t>
+            </a:r>
+          </a:p>
+          <a:p>
+            <a:pPr marL="0" indent="0" algn="ctr">
+              <a:lnSpc>
+                <a:spcPct val="110000"/>
+              </a:lnSpc>
+              <a:spcBef>
+                <a:spcPts val="0"/>
+              </a:spcBef>
+              <a:spcAft>
+                <a:spcPts val="0"/>
+              </a:spcAft>
+              <a:buNone/>
+            </a:pPr>
+            <a:r>
+              <a:rPr lang="ko-KR" sz="1000" b="1" spc="-50" dirty="0">
+                <a:solidFill>
+                  <a:srgbClr val="FFFFFF"/>
+                </a:solidFill>
+                <a:latin typeface="Pretendard"/>
+                <a:ea typeface="Pretendard"/>
+              </a:rPr>
+              <a:t>선언</a:t>
+            </a:r>
+          </a:p>
+        </p:txBody>
+      </p:sp>
+      <p:sp>
+        <p:nvSpPr>
+          <p:cNvPr id="24" name="레일 삼각형"/>
+          <p:cNvSpPr/>
+          <p:nvPr/>
+        </p:nvSpPr>
+        <p:spPr>
+          <a:xfrm>
+            <a:off x="547826" y="2096358"/>
+            <a:ext cx="580695" cy="131478"/>
+          </a:xfrm>
+          <a:custGeom>
+            <a:avLst/>
+            <a:gdLst/>
+            <a:ahLst/>
+            <a:cxnLst/>
+            <a:rect l="l" t="t" r="r" b="b"/>
+            <a:pathLst>
+              <a:path w="580695" h="131478">
+                <a:moveTo>
+                  <a:pt x="0" y="0"/>
+                </a:moveTo>
+                <a:lnTo>
+                  <a:pt x="580695" y="0"/>
+                </a:lnTo>
+                <a:lnTo>
+                  <a:pt x="290347" y="131478"/>
+                </a:lnTo>
+                <a:close/>
+              </a:path>
+            </a:pathLst>
+          </a:custGeom>
+          <a:solidFill>
+            <a:srgbClr val="0080EA"/>
+          </a:solidFill>
+          <a:ln>
+            <a:noFill/>
+          </a:ln>
+          <a:effectLst/>
+        </p:spPr>
+        <p:txBody>
+          <a:bodyPr rtlCol="0" anchor="ctr"/>
+          <a:lstStyle/>
+          <a:p>
+            <a:pPr algn="ctr"/>
+          </a:p>
+        </p:txBody>
+      </p:sp>
+      <p:sp>
+        <p:nvSpPr>
+          <p:cNvPr id="25" name="머리칸"/>
+          <p:cNvSpPr/>
+          <p:nvPr/>
+        </p:nvSpPr>
+        <p:spPr>
+          <a:xfrm>
+            <a:off x="1161391" y="2118271"/>
+            <a:ext cx="4519565" cy="230087"/>
+          </a:xfrm>
+          <a:prstGeom prst="rect">
+            <a:avLst/>
+          </a:prstGeom>
+          <a:solidFill>
+            <a:srgbClr val="DEEEFF"/>
+          </a:solidFill>
+          <a:ln>
+            <a:noFill/>
+          </a:ln>
+          <a:effectLst/>
+        </p:spPr>
+        <p:txBody>
+          <a:bodyPr rtlCol="0" anchor="ctr" lIns="21600" rIns="21600" tIns="3600" bIns="3600" wrap="square"/>
+          <a:lstStyle/>
+          <a:p>
+            <a:pPr marL="0" indent="0" algn="ctr">
+              <a:lnSpc>
+                <a:spcPct val="110000"/>
+              </a:lnSpc>
+              <a:spcBef>
+                <a:spcPts val="0"/>
+              </a:spcBef>
+              <a:spcAft>
+                <a:spcPts val="0"/>
+              </a:spcAft>
+              <a:buNone/>
+            </a:pPr>
+            <a:r>
+              <a:rPr lang="ko-KR" sz="1000" b="1" spc="-50" dirty="0">
+                <a:solidFill>
+                  <a:srgbClr val="000359"/>
+                </a:solidFill>
+                <a:latin typeface="Pretendard"/>
+                <a:ea typeface="Pretendard"/>
+              </a:rPr>
+              <a:t>노사 상생 협력 선언문('25.2월)</a:t>
+            </a:r>
+          </a:p>
+        </p:txBody>
+      </p:sp>
+      <p:sp>
+        <p:nvSpPr>
+          <p:cNvPr id="26" name="칸 본문"/>
+          <p:cNvSpPr txBox="1"/>
+          <p:nvPr/>
+        </p:nvSpPr>
+        <p:spPr>
+          <a:xfrm>
+            <a:off x="1172348" y="2359315"/>
+            <a:ext cx="4514087" cy="567016"/>
+          </a:xfrm>
+          <a:prstGeom prst="rect">
+            <a:avLst/>
+          </a:prstGeom>
+          <a:noFill/>
+        </p:spPr>
+        <p:txBody>
+          <a:bodyPr wrap="square" lIns="50400" tIns="7200" rIns="21600" bIns="7200" anchor="ctr">
+            <a:noAutofit/>
+          </a:bodyPr>
+          <a:lstStyle/>
+          <a:p>
+            <a:pPr marL="118800" indent="-118800" algn="l">
+              <a:lnSpc>
+                <a:spcPct val="110000"/>
+              </a:lnSpc>
+              <a:spcBef>
+                <a:spcPts val="0"/>
+              </a:spcBef>
+              <a:spcAft>
+                <a:spcPts val="50"/>
+              </a:spcAft>
+              <a:buClr>
+                <a:srgbClr val="000359"/>
+              </a:buClr>
+              <a:buFont typeface="Pretendard"/>
+              <a:buChar char="•"/>
+            </a:pPr>
+            <a:r>
+              <a:rPr lang="ko-KR" sz="1000" spc="-50" dirty="0">
+                <a:solidFill>
+                  <a:srgbClr val="000359"/>
+                </a:solidFill>
+                <a:latin typeface="Pretendard"/>
+                <a:ea typeface="Pretendard"/>
+              </a:rPr>
+              <a:t>노사 상생 협력 선포식 개최 및 공동 선언 실시</a:t>
+            </a:r>
+          </a:p>
+          <a:p>
+            <a:pPr marL="118800" indent="-118800" algn="l">
+              <a:lnSpc>
+                <a:spcPct val="110000"/>
+              </a:lnSpc>
+              <a:spcBef>
+                <a:spcPts val="0"/>
+              </a:spcBef>
+              <a:spcAft>
+                <a:spcPts val="50"/>
+              </a:spcAft>
+              <a:buClr>
+                <a:srgbClr val="000359"/>
+              </a:buClr>
+              <a:buFont typeface="Pretendard"/>
+              <a:buChar char="•"/>
+            </a:pPr>
+            <a:r>
+              <a:rPr lang="ko-KR" sz="1000" spc="-50" dirty="0">
+                <a:solidFill>
+                  <a:srgbClr val="000359"/>
+                </a:solidFill>
+                <a:latin typeface="Pretendard"/>
+                <a:ea typeface="Pretendard"/>
+              </a:rPr>
+              <a:t>경영진·노조집행부 전원 참여, 사내방송 생중계</a:t>
+            </a:r>
+          </a:p>
+          <a:p>
+            <a:pPr marL="118800" indent="-118800" algn="l">
+              <a:lnSpc>
+                <a:spcPct val="110000"/>
+              </a:lnSpc>
+              <a:spcBef>
+                <a:spcPts val="0"/>
+              </a:spcBef>
+              <a:spcAft>
+                <a:spcPts val="50"/>
+              </a:spcAft>
+              <a:buClr>
+                <a:srgbClr val="000359"/>
+              </a:buClr>
+              <a:buFont typeface="Pretendard"/>
+              <a:buChar char="•"/>
+            </a:pPr>
+            <a:r>
+              <a:rPr lang="ko-KR" sz="1000" spc="-50" dirty="0">
+                <a:solidFill>
+                  <a:srgbClr val="000359"/>
+                </a:solidFill>
+                <a:latin typeface="Pretendard"/>
+                <a:ea typeface="Pretendard"/>
+              </a:rPr>
+              <a:t>안전일터 조성·발전적 노사관계 정착 합의·선언</a:t>
+            </a:r>
+          </a:p>
+        </p:txBody>
+      </p:sp>
+      <p:sp>
+        <p:nvSpPr>
+          <p:cNvPr id="27" name="사진 칸"/>
+          <p:cNvSpPr/>
+          <p:nvPr/>
+        </p:nvSpPr>
+        <p:spPr>
+          <a:xfrm>
+            <a:off x="5730261" y="2123750"/>
+            <a:ext cx="1079217" cy="797103"/>
+          </a:xfrm>
+          <a:prstGeom prst="rect">
+            <a:avLst/>
+          </a:prstGeom>
+          <a:solidFill>
+            <a:srgbClr val="DEEEFF"/>
+          </a:solidFill>
+          <a:ln w="9525">
+            <a:solidFill>
+              <a:srgbClr val="008EFF"/>
+            </a:solidFill>
+          </a:ln>
+          <a:effectLst/>
+        </p:spPr>
+        <p:txBody>
+          <a:bodyPr rtlCol="0" anchor="ctr" lIns="0" rIns="0" tIns="0" bIns="0" wrap="square"/>
+          <a:lstStyle/>
+          <a:p>
+            <a:pPr marL="0" indent="0" algn="ctr">
+              <a:lnSpc>
+                <a:spcPct val="110000"/>
+              </a:lnSpc>
+              <a:spcBef>
+                <a:spcPts val="0"/>
+              </a:spcBef>
+              <a:spcAft>
+                <a:spcPts val="0"/>
+              </a:spcAft>
+              <a:buNone/>
+            </a:pPr>
+            <a:r>
+              <a:rPr lang="ko-KR" sz="1000" spc="-50" dirty="0">
+                <a:solidFill>
+                  <a:srgbClr val="5D7280"/>
+                </a:solidFill>
+                <a:latin typeface="Pretendard"/>
+                <a:ea typeface="Pretendard"/>
+              </a:rPr>
+              <a:t>사진 (선포식)</a:t>
+            </a:r>
+          </a:p>
+        </p:txBody>
+      </p:sp>
+      <p:sp>
+        <p:nvSpPr>
+          <p:cNvPr id="28" name="레일"/>
+          <p:cNvSpPr/>
+          <p:nvPr/>
+        </p:nvSpPr>
+        <p:spPr>
+          <a:xfrm>
+            <a:off x="547826" y="2964678"/>
+            <a:ext cx="580696" cy="1087450"/>
+          </a:xfrm>
+          <a:prstGeom prst="rect">
+            <a:avLst/>
+          </a:prstGeom>
+          <a:pattFill prst="trellis">
+            <a:fgClr>
+              <a:srgbClr val="0A6BE6"/>
+            </a:fgClr>
+            <a:bgClr>
+              <a:srgbClr val="0051BC"/>
+            </a:bgClr>
+          </a:pattFill>
+          <a:ln>
+            <a:noFill/>
+          </a:ln>
+          <a:effectLst/>
+        </p:spPr>
+        <p:txBody>
+          <a:bodyPr rtlCol="0" anchor="ctr" lIns="0" rIns="0" tIns="0" bIns="0"/>
+          <a:lstStyle/>
+          <a:p>
+            <a:pPr algn="ctr"/>
+          </a:p>
+        </p:txBody>
+      </p:sp>
+      <p:sp>
+        <p:nvSpPr>
+          <p:cNvPr id="29" name="레일 태그"/>
+          <p:cNvSpPr/>
+          <p:nvPr/>
+        </p:nvSpPr>
+        <p:spPr>
+          <a:xfrm>
+            <a:off x="668144" y="3129026"/>
+            <a:ext cx="340059" cy="186261"/>
+          </a:xfrm>
+          <a:prstGeom prst="rect">
+            <a:avLst/>
+          </a:prstGeom>
+          <a:solidFill>
+            <a:srgbClr val="FFFFFF"/>
+          </a:solidFill>
+          <a:ln>
+            <a:noFill/>
+          </a:ln>
+          <a:effectLst/>
+        </p:spPr>
+        <p:txBody>
+          <a:bodyPr rtlCol="0" anchor="ctr" lIns="7200" rIns="7200" tIns="0" bIns="0" wrap="square"/>
+          <a:lstStyle/>
+          <a:p>
+            <a:pPr marL="0" indent="0" algn="ctr">
+              <a:lnSpc>
+                <a:spcPct val="110000"/>
+              </a:lnSpc>
+              <a:spcBef>
+                <a:spcPts val="0"/>
+              </a:spcBef>
+              <a:spcAft>
+                <a:spcPts val="0"/>
+              </a:spcAft>
+              <a:buNone/>
+            </a:pPr>
+            <a:r>
+              <a:rPr lang="ko-KR" sz="1000" b="1" spc="-50" dirty="0">
+                <a:solidFill>
+                  <a:srgbClr val="000359"/>
+                </a:solidFill>
+                <a:latin typeface="Pretendard"/>
+                <a:ea typeface="Pretendard"/>
+              </a:rPr>
+              <a:t>확산</a:t>
+            </a:r>
+          </a:p>
+        </p:txBody>
+      </p:sp>
+      <p:sp>
+        <p:nvSpPr>
+          <p:cNvPr id="30" name="레일 라벨"/>
+          <p:cNvSpPr txBox="1"/>
+          <p:nvPr/>
+        </p:nvSpPr>
+        <p:spPr>
+          <a:xfrm>
+            <a:off x="547826" y="3315287"/>
+            <a:ext cx="580696" cy="714929"/>
+          </a:xfrm>
+          <a:prstGeom prst="rect">
+            <a:avLst/>
+          </a:prstGeom>
+          <a:noFill/>
+        </p:spPr>
+        <p:txBody>
+          <a:bodyPr wrap="square" lIns="10800" tIns="0" rIns="10800" bIns="0" anchor="ctr">
+            <a:noAutofit/>
+          </a:bodyPr>
+          <a:lstStyle/>
+          <a:p>
+            <a:pPr marL="0" indent="0" algn="ctr">
+              <a:lnSpc>
+                <a:spcPct val="110000"/>
+              </a:lnSpc>
+              <a:spcBef>
+                <a:spcPts val="0"/>
+              </a:spcBef>
+              <a:spcAft>
+                <a:spcPts val="0"/>
+              </a:spcAft>
+              <a:buNone/>
+            </a:pPr>
+            <a:r>
+              <a:rPr lang="ko-KR" sz="1000" b="1" spc="-50" dirty="0">
+                <a:solidFill>
+                  <a:srgbClr val="FFFFFF"/>
+                </a:solidFill>
+                <a:latin typeface="Pretendard"/>
+                <a:ea typeface="Pretendard"/>
+              </a:rPr>
+              <a:t>상생의 달</a:t>
+            </a:r>
+          </a:p>
+          <a:p>
+            <a:pPr marL="0" indent="0" algn="ctr">
+              <a:lnSpc>
+                <a:spcPct val="110000"/>
+              </a:lnSpc>
+              <a:spcBef>
+                <a:spcPts val="0"/>
+              </a:spcBef>
+              <a:spcAft>
+                <a:spcPts val="0"/>
+              </a:spcAft>
+              <a:buNone/>
+            </a:pPr>
+            <a:r>
+              <a:rPr lang="ko-KR" sz="1000" b="1" spc="-50" dirty="0">
+                <a:solidFill>
+                  <a:srgbClr val="FFFFFF"/>
+                </a:solidFill>
+                <a:latin typeface="Pretendard"/>
+                <a:ea typeface="Pretendard"/>
+              </a:rPr>
+              <a:t>운영</a:t>
+            </a:r>
+          </a:p>
+        </p:txBody>
+      </p:sp>
+      <p:sp>
+        <p:nvSpPr>
+          <p:cNvPr id="31" name="레일 삼각형"/>
+          <p:cNvSpPr/>
+          <p:nvPr/>
+        </p:nvSpPr>
+        <p:spPr>
+          <a:xfrm>
+            <a:off x="547826" y="2964678"/>
+            <a:ext cx="580695" cy="131478"/>
+          </a:xfrm>
+          <a:custGeom>
+            <a:avLst/>
+            <a:gdLst/>
+            <a:ahLst/>
+            <a:cxnLst/>
+            <a:rect l="l" t="t" r="r" b="b"/>
+            <a:pathLst>
+              <a:path w="580695" h="131478">
+                <a:moveTo>
+                  <a:pt x="0" y="0"/>
+                </a:moveTo>
+                <a:lnTo>
+                  <a:pt x="580695" y="0"/>
+                </a:lnTo>
+                <a:lnTo>
+                  <a:pt x="290347" y="131478"/>
+                </a:lnTo>
+                <a:close/>
+              </a:path>
+            </a:pathLst>
+          </a:custGeom>
+          <a:solidFill>
+            <a:srgbClr val="00B0B4"/>
+          </a:solidFill>
+          <a:ln>
+            <a:noFill/>
+          </a:ln>
+          <a:effectLst/>
+        </p:spPr>
+        <p:txBody>
+          <a:bodyPr rtlCol="0" anchor="ctr"/>
+          <a:lstStyle/>
+          <a:p>
+            <a:pPr algn="ctr"/>
+          </a:p>
+        </p:txBody>
+      </p:sp>
+      <p:sp>
+        <p:nvSpPr>
+          <p:cNvPr id="32" name="배너"/>
+          <p:cNvSpPr/>
+          <p:nvPr/>
+        </p:nvSpPr>
+        <p:spPr>
+          <a:xfrm>
+            <a:off x="1161391" y="2986591"/>
+            <a:ext cx="5648087" cy="208174"/>
+          </a:xfrm>
+          <a:prstGeom prst="rect">
+            <a:avLst/>
+          </a:prstGeom>
+          <a:solidFill>
+            <a:srgbClr val="BDE0FF"/>
+          </a:solidFill>
+          <a:ln>
+            <a:noFill/>
+          </a:ln>
+          <a:effectLst/>
+        </p:spPr>
+        <p:txBody>
+          <a:bodyPr rtlCol="0" anchor="ctr" lIns="28800" rIns="28800" tIns="7200" bIns="7200" wrap="square"/>
+          <a:lstStyle/>
+          <a:p>
+            <a:pPr marL="0" indent="0" algn="ctr">
+              <a:lnSpc>
+                <a:spcPct val="110000"/>
+              </a:lnSpc>
+              <a:spcBef>
+                <a:spcPts val="0"/>
+              </a:spcBef>
+              <a:spcAft>
+                <a:spcPts val="0"/>
+              </a:spcAft>
+              <a:buNone/>
+            </a:pPr>
+            <a:r>
+              <a:rPr lang="ko-KR" sz="1000" b="1" spc="-50" dirty="0">
+                <a:solidFill>
+                  <a:srgbClr val="000359"/>
+                </a:solidFill>
+                <a:latin typeface="Pretendard"/>
+                <a:ea typeface="Pretendard"/>
+              </a:rPr>
+              <a:t>매년 11월, 노사 상생의 달 지정 및 운영(공공기관 중 최초)</a:t>
+            </a:r>
+          </a:p>
+        </p:txBody>
+      </p:sp>
+      <p:sp>
+        <p:nvSpPr>
+          <p:cNvPr id="33" name="머리칸"/>
+          <p:cNvSpPr/>
+          <p:nvPr/>
+        </p:nvSpPr>
+        <p:spPr>
+          <a:xfrm>
+            <a:off x="1161391" y="3222157"/>
+            <a:ext cx="1866261" cy="230087"/>
+          </a:xfrm>
+          <a:prstGeom prst="rect">
+            <a:avLst/>
+          </a:prstGeom>
+          <a:solidFill>
+            <a:srgbClr val="DEEEFF"/>
+          </a:solidFill>
+          <a:ln>
+            <a:noFill/>
+          </a:ln>
+          <a:effectLst/>
+        </p:spPr>
+        <p:txBody>
+          <a:bodyPr rtlCol="0" anchor="ctr" lIns="21600" rIns="21600" tIns="3600" bIns="3600" wrap="square"/>
+          <a:lstStyle/>
+          <a:p>
+            <a:pPr marL="0" indent="0" algn="ctr">
+              <a:lnSpc>
+                <a:spcPct val="110000"/>
+              </a:lnSpc>
+              <a:spcBef>
+                <a:spcPts val="0"/>
+              </a:spcBef>
+              <a:spcAft>
+                <a:spcPts val="0"/>
+              </a:spcAft>
+              <a:buNone/>
+            </a:pPr>
+            <a:r>
+              <a:rPr lang="ko-KR" sz="1000" b="1" spc="-50" dirty="0">
+                <a:solidFill>
+                  <a:srgbClr val="000359"/>
+                </a:solidFill>
+                <a:latin typeface="Pretendard"/>
+                <a:ea typeface="Pretendard"/>
+              </a:rPr>
+              <a:t>노사 화합 어울림 한마당</a:t>
+            </a:r>
+          </a:p>
+        </p:txBody>
+      </p:sp>
+      <p:sp>
+        <p:nvSpPr>
+          <p:cNvPr id="34" name="머리칸"/>
+          <p:cNvSpPr/>
+          <p:nvPr/>
+        </p:nvSpPr>
+        <p:spPr>
+          <a:xfrm>
+            <a:off x="3044087" y="3222157"/>
+            <a:ext cx="1866261" cy="230087"/>
+          </a:xfrm>
+          <a:prstGeom prst="rect">
+            <a:avLst/>
+          </a:prstGeom>
+          <a:solidFill>
+            <a:srgbClr val="DEEEFF"/>
+          </a:solidFill>
+          <a:ln>
+            <a:noFill/>
+          </a:ln>
+          <a:effectLst/>
+        </p:spPr>
+        <p:txBody>
+          <a:bodyPr rtlCol="0" anchor="ctr" lIns="21600" rIns="21600" tIns="3600" bIns="3600" wrap="square"/>
+          <a:lstStyle/>
+          <a:p>
+            <a:pPr marL="0" indent="0" algn="ctr">
+              <a:lnSpc>
+                <a:spcPct val="110000"/>
+              </a:lnSpc>
+              <a:spcBef>
+                <a:spcPts val="0"/>
+              </a:spcBef>
+              <a:spcAft>
+                <a:spcPts val="0"/>
+              </a:spcAft>
+              <a:buNone/>
+            </a:pPr>
+            <a:r>
+              <a:rPr lang="ko-KR" sz="1000" b="1" spc="-50" dirty="0">
+                <a:solidFill>
+                  <a:srgbClr val="000359"/>
+                </a:solidFill>
+                <a:latin typeface="Pretendard"/>
+                <a:ea typeface="Pretendard"/>
+              </a:rPr>
+              <a:t>노사 상생 표어 공모·선정</a:t>
+            </a:r>
+          </a:p>
+        </p:txBody>
+      </p:sp>
+      <p:sp>
+        <p:nvSpPr>
+          <p:cNvPr id="35" name="머리칸"/>
+          <p:cNvSpPr/>
+          <p:nvPr/>
+        </p:nvSpPr>
+        <p:spPr>
+          <a:xfrm>
+            <a:off x="4926783" y="3222157"/>
+            <a:ext cx="1866261" cy="230087"/>
+          </a:xfrm>
+          <a:prstGeom prst="rect">
+            <a:avLst/>
+          </a:prstGeom>
+          <a:solidFill>
+            <a:srgbClr val="DEEEFF"/>
+          </a:solidFill>
+          <a:ln>
+            <a:noFill/>
+          </a:ln>
+          <a:effectLst/>
+        </p:spPr>
+        <p:txBody>
+          <a:bodyPr rtlCol="0" anchor="ctr" lIns="21600" rIns="21600" tIns="3600" bIns="3600" wrap="square"/>
+          <a:lstStyle/>
+          <a:p>
+            <a:pPr marL="0" indent="0" algn="ctr">
+              <a:lnSpc>
+                <a:spcPct val="110000"/>
+              </a:lnSpc>
+              <a:spcBef>
+                <a:spcPts val="0"/>
+              </a:spcBef>
+              <a:spcAft>
+                <a:spcPts val="0"/>
+              </a:spcAft>
+              <a:buNone/>
+            </a:pPr>
+            <a:r>
+              <a:rPr lang="ko-KR" sz="1000" b="1" spc="-50" dirty="0">
+                <a:solidFill>
+                  <a:srgbClr val="000359"/>
+                </a:solidFill>
+                <a:latin typeface="Pretendard"/>
+                <a:ea typeface="Pretendard"/>
+              </a:rPr>
+              <a:t>분임협의회 BEST AWARD</a:t>
+            </a:r>
+          </a:p>
+        </p:txBody>
+      </p:sp>
+      <p:sp>
+        <p:nvSpPr>
+          <p:cNvPr id="36" name="칸 본문"/>
+          <p:cNvSpPr txBox="1"/>
+          <p:nvPr/>
+        </p:nvSpPr>
+        <p:spPr>
+          <a:xfrm>
+            <a:off x="1172348" y="3463200"/>
+            <a:ext cx="1860783" cy="567016"/>
+          </a:xfrm>
+          <a:prstGeom prst="rect">
+            <a:avLst/>
+          </a:prstGeom>
+          <a:noFill/>
+        </p:spPr>
+        <p:txBody>
+          <a:bodyPr wrap="square" lIns="50400" tIns="7200" rIns="21600" bIns="7200" anchor="ctr">
+            <a:noAutofit/>
+          </a:bodyPr>
+          <a:lstStyle/>
+          <a:p>
+            <a:pPr marL="118800" indent="-118800" algn="l">
+              <a:lnSpc>
+                <a:spcPct val="110000"/>
+              </a:lnSpc>
+              <a:spcBef>
+                <a:spcPts val="0"/>
+              </a:spcBef>
+              <a:spcAft>
+                <a:spcPts val="50"/>
+              </a:spcAft>
+              <a:buClr>
+                <a:srgbClr val="000359"/>
+              </a:buClr>
+              <a:buFont typeface="Pretendard"/>
+              <a:buChar char="•"/>
+            </a:pPr>
+            <a:r>
+              <a:rPr lang="ko-KR" sz="1000" spc="-50" dirty="0">
+                <a:solidFill>
+                  <a:srgbClr val="000359"/>
+                </a:solidFill>
+                <a:latin typeface="Pretendard"/>
+                <a:ea typeface="Pretendard"/>
+              </a:rPr>
+              <a:t>경영진·노조 156명 참석</a:t>
+            </a:r>
+          </a:p>
+          <a:p>
+            <a:pPr marL="118800" indent="-118800" algn="l">
+              <a:lnSpc>
+                <a:spcPct val="110000"/>
+              </a:lnSpc>
+              <a:spcBef>
+                <a:spcPts val="0"/>
+              </a:spcBef>
+              <a:spcAft>
+                <a:spcPts val="50"/>
+              </a:spcAft>
+              <a:buClr>
+                <a:srgbClr val="000359"/>
+              </a:buClr>
+              <a:buFont typeface="Pretendard"/>
+              <a:buChar char="•"/>
+            </a:pPr>
+            <a:r>
+              <a:rPr lang="ko-KR" sz="1000" spc="-50" dirty="0">
+                <a:solidFill>
+                  <a:srgbClr val="000359"/>
+                </a:solidFill>
+                <a:latin typeface="Pretendard"/>
+                <a:ea typeface="Pretendard"/>
+              </a:rPr>
+              <a:t>화합과 소통의 장 마련</a:t>
+            </a:r>
+          </a:p>
+          <a:p>
+            <a:pPr marL="118800" indent="-118800" algn="l">
+              <a:lnSpc>
+                <a:spcPct val="110000"/>
+              </a:lnSpc>
+              <a:spcBef>
+                <a:spcPts val="0"/>
+              </a:spcBef>
+              <a:spcAft>
+                <a:spcPts val="50"/>
+              </a:spcAft>
+              <a:buClr>
+                <a:srgbClr val="000359"/>
+              </a:buClr>
+              <a:buFont typeface="Pretendard"/>
+              <a:buChar char="•"/>
+            </a:pPr>
+            <a:r>
+              <a:rPr lang="ko-KR" sz="1000" spc="-50" dirty="0">
+                <a:solidFill>
+                  <a:srgbClr val="000359"/>
+                </a:solidFill>
+                <a:latin typeface="Pretendard"/>
+                <a:ea typeface="Pretendard"/>
+              </a:rPr>
+              <a:t>노사관계 특강 교육 운영</a:t>
+            </a:r>
+          </a:p>
+        </p:txBody>
+      </p:sp>
+      <p:sp>
+        <p:nvSpPr>
+          <p:cNvPr id="37" name="칸 본문"/>
+          <p:cNvSpPr txBox="1"/>
+          <p:nvPr/>
+        </p:nvSpPr>
+        <p:spPr>
+          <a:xfrm>
+            <a:off x="3055043" y="3463200"/>
+            <a:ext cx="1860783" cy="567016"/>
+          </a:xfrm>
+          <a:prstGeom prst="rect">
+            <a:avLst/>
+          </a:prstGeom>
+          <a:noFill/>
+        </p:spPr>
+        <p:txBody>
+          <a:bodyPr wrap="square" lIns="50400" tIns="7200" rIns="21600" bIns="7200" anchor="ctr">
+            <a:noAutofit/>
+          </a:bodyPr>
+          <a:lstStyle/>
+          <a:p>
+            <a:pPr marL="118800" indent="-118800" algn="l">
+              <a:lnSpc>
+                <a:spcPct val="110000"/>
+              </a:lnSpc>
+              <a:spcBef>
+                <a:spcPts val="0"/>
+              </a:spcBef>
+              <a:spcAft>
+                <a:spcPts val="50"/>
+              </a:spcAft>
+              <a:buClr>
+                <a:srgbClr val="000359"/>
+              </a:buClr>
+              <a:buFont typeface="Pretendard"/>
+              <a:buChar char="•"/>
+            </a:pPr>
+            <a:r>
+              <a:rPr lang="ko-KR" sz="1000" spc="-50" dirty="0">
+                <a:solidFill>
+                  <a:srgbClr val="000359"/>
+                </a:solidFill>
+                <a:latin typeface="Pretendard"/>
+                <a:ea typeface="Pretendard"/>
+              </a:rPr>
+              <a:t>화합·상생 표어 공모</a:t>
+            </a:r>
+          </a:p>
+          <a:p>
+            <a:pPr marL="118800" indent="-118800" algn="l">
+              <a:lnSpc>
+                <a:spcPct val="110000"/>
+              </a:lnSpc>
+              <a:spcBef>
+                <a:spcPts val="0"/>
+              </a:spcBef>
+              <a:spcAft>
+                <a:spcPts val="50"/>
+              </a:spcAft>
+              <a:buClr>
+                <a:srgbClr val="000359"/>
+              </a:buClr>
+              <a:buFont typeface="Pretendard"/>
+              <a:buChar char="•"/>
+            </a:pPr>
+            <a:r>
+              <a:rPr lang="ko-KR" sz="1000" spc="-50" dirty="0">
+                <a:solidFill>
+                  <a:srgbClr val="000359"/>
+                </a:solidFill>
+                <a:latin typeface="Pretendard"/>
+                <a:ea typeface="Pretendard"/>
+              </a:rPr>
+              <a:t>61개 공모·우수작 3개</a:t>
+            </a:r>
+          </a:p>
+          <a:p>
+            <a:pPr marL="118800" indent="-118800" algn="l">
+              <a:lnSpc>
+                <a:spcPct val="110000"/>
+              </a:lnSpc>
+              <a:spcBef>
+                <a:spcPts val="0"/>
+              </a:spcBef>
+              <a:spcAft>
+                <a:spcPts val="50"/>
+              </a:spcAft>
+              <a:buClr>
+                <a:srgbClr val="000359"/>
+              </a:buClr>
+              <a:buFont typeface="Pretendard"/>
+              <a:buChar char="•"/>
+            </a:pPr>
+            <a:r>
+              <a:rPr lang="ko-KR" sz="1000" spc="-50" dirty="0">
+                <a:solidFill>
+                  <a:srgbClr val="000359"/>
+                </a:solidFill>
+                <a:latin typeface="Pretendard"/>
+                <a:ea typeface="Pretendard"/>
+              </a:rPr>
+              <a:t>꼬리말·행사 슬로건 활용</a:t>
+            </a:r>
+          </a:p>
+        </p:txBody>
+      </p:sp>
+      <p:cxnSp>
+        <p:nvCxnSpPr>
+          <p:cNvPr id="38" name="Connector 37"/>
+          <p:cNvCxnSpPr/>
+          <p:nvPr/>
+        </p:nvCxnSpPr>
+        <p:spPr>
+          <a:xfrm>
+            <a:off x="3044087" y="3496070"/>
+            <a:ext cx="0" cy="501276"/>
+          </a:xfrm>
+          <a:prstGeom prst="line">
+            <a:avLst/>
+          </a:prstGeom>
+          <a:ln w="9525">
+            <a:solidFill>
+              <a:srgbClr val="BDE0FF"/>
+            </a:solidFill>
+          </a:ln>
+        </p:spPr>
+      </p:cxnSp>
+      <p:sp>
+        <p:nvSpPr>
+          <p:cNvPr id="39" name="칸 본문"/>
+          <p:cNvSpPr txBox="1"/>
+          <p:nvPr/>
+        </p:nvSpPr>
+        <p:spPr>
+          <a:xfrm>
+            <a:off x="4937739" y="3463200"/>
+            <a:ext cx="1860783" cy="567016"/>
+          </a:xfrm>
+          <a:prstGeom prst="rect">
+            <a:avLst/>
+          </a:prstGeom>
+          <a:noFill/>
+        </p:spPr>
+        <p:txBody>
+          <a:bodyPr wrap="square" lIns="50400" tIns="7200" rIns="21600" bIns="7200" anchor="ctr">
+            <a:noAutofit/>
+          </a:bodyPr>
+          <a:lstStyle/>
+          <a:p>
+            <a:pPr marL="118800" indent="-118800" algn="l">
+              <a:lnSpc>
+                <a:spcPct val="110000"/>
+              </a:lnSpc>
+              <a:spcBef>
+                <a:spcPts val="0"/>
+              </a:spcBef>
+              <a:spcAft>
+                <a:spcPts val="50"/>
+              </a:spcAft>
+              <a:buClr>
+                <a:srgbClr val="000359"/>
+              </a:buClr>
+              <a:buFont typeface="Pretendard"/>
+              <a:buChar char="•"/>
+            </a:pPr>
+            <a:r>
+              <a:rPr lang="ko-KR" sz="1000" spc="-50" dirty="0">
+                <a:solidFill>
+                  <a:srgbClr val="000359"/>
+                </a:solidFill>
+                <a:latin typeface="Pretendard"/>
+                <a:ea typeface="Pretendard"/>
+              </a:rPr>
+              <a:t>실적평가 우수조직 시상(4개)</a:t>
+            </a:r>
+          </a:p>
+          <a:p>
+            <a:pPr marL="118800" indent="-118800" algn="l">
+              <a:lnSpc>
+                <a:spcPct val="110000"/>
+              </a:lnSpc>
+              <a:spcBef>
+                <a:spcPts val="0"/>
+              </a:spcBef>
+              <a:spcAft>
+                <a:spcPts val="50"/>
+              </a:spcAft>
+              <a:buClr>
+                <a:srgbClr val="000359"/>
+              </a:buClr>
+              <a:buFont typeface="Pretendard"/>
+              <a:buChar char="•"/>
+            </a:pPr>
+            <a:r>
+              <a:rPr lang="ko-KR" sz="1000" spc="-50" dirty="0">
+                <a:solidFill>
+                  <a:srgbClr val="000359"/>
+                </a:solidFill>
+                <a:latin typeface="Pretendard"/>
+                <a:ea typeface="Pretendard"/>
+              </a:rPr>
+              <a:t>이사장 표창·부상품 제공</a:t>
+            </a:r>
+          </a:p>
+        </p:txBody>
+      </p:sp>
+      <p:cxnSp>
+        <p:nvCxnSpPr>
+          <p:cNvPr id="40" name="Connector 39"/>
+          <p:cNvCxnSpPr/>
+          <p:nvPr/>
+        </p:nvCxnSpPr>
+        <p:spPr>
+          <a:xfrm>
+            <a:off x="4926783" y="3496070"/>
+            <a:ext cx="0" cy="501276"/>
+          </a:xfrm>
+          <a:prstGeom prst="line">
+            <a:avLst/>
+          </a:prstGeom>
+          <a:ln w="9525">
+            <a:solidFill>
+              <a:srgbClr val="BDE0FF"/>
+            </a:solidFill>
+          </a:ln>
+        </p:spPr>
+      </p:cxnSp>
+      <p:sp>
+        <p:nvSpPr>
+          <p:cNvPr id="41" name="표 외곽"/>
+          <p:cNvSpPr/>
+          <p:nvPr/>
+        </p:nvSpPr>
+        <p:spPr>
+          <a:xfrm>
+            <a:off x="536870" y="4112390"/>
             <a:ext cx="6300000" cy="710358"/>
           </a:xfrm>
           <a:prstGeom prst="rect">
@@ -24380,13 +24380,13 @@
       </p:sp>
       <p:sp>
         <p:nvSpPr>
-          <p:cNvPr id="8" name="레일"/>
+          <p:cNvPr id="42" name="레일"/>
           <p:cNvSpPr/>
           <p:nvPr/>
         </p:nvSpPr>
         <p:spPr>
           <a:xfrm>
-            <a:off x="547826" y="783391"/>
+            <a:off x="547826" y="4128824"/>
             <a:ext cx="580696" cy="677489"/>
           </a:xfrm>
           <a:prstGeom prst="rect">
@@ -24436,13 +24436,13 @@
       </p:sp>
       <p:sp>
         <p:nvSpPr>
-          <p:cNvPr id="9" name="머리칸"/>
+          <p:cNvPr id="43" name="머리칸"/>
           <p:cNvSpPr/>
           <p:nvPr/>
         </p:nvSpPr>
         <p:spPr>
           <a:xfrm>
-            <a:off x="1161391" y="805304"/>
+            <a:off x="1161391" y="4150737"/>
             <a:ext cx="2807609" cy="230087"/>
           </a:xfrm>
           <a:prstGeom prst="rect">
@@ -24487,13 +24487,13 @@
       </p:sp>
       <p:sp>
         <p:nvSpPr>
-          <p:cNvPr id="10" name="머리칸"/>
+          <p:cNvPr id="44" name="머리칸"/>
           <p:cNvSpPr/>
           <p:nvPr/>
         </p:nvSpPr>
         <p:spPr>
           <a:xfrm>
-            <a:off x="3985435" y="805304"/>
+            <a:off x="3985435" y="4150737"/>
             <a:ext cx="2807609" cy="230087"/>
           </a:xfrm>
           <a:prstGeom prst="rect">
@@ -24538,13 +24538,13 @@
       </p:sp>
       <p:sp>
         <p:nvSpPr>
-          <p:cNvPr id="11" name="칸 본문"/>
+          <p:cNvPr id="45" name="칸 본문"/>
           <p:cNvSpPr txBox="1"/>
           <p:nvPr/>
         </p:nvSpPr>
         <p:spPr>
           <a:xfrm>
-            <a:off x="1172348" y="1046348"/>
+            <a:off x="1172348" y="4391781"/>
             <a:ext cx="2802130" cy="392619"/>
           </a:xfrm>
           <a:prstGeom prst="rect">
@@ -24589,13 +24589,13 @@
       </p:sp>
       <p:sp>
         <p:nvSpPr>
-          <p:cNvPr id="12" name="칸 본문"/>
+          <p:cNvPr id="46" name="칸 본문"/>
           <p:cNvSpPr txBox="1"/>
           <p:nvPr/>
         </p:nvSpPr>
         <p:spPr>
           <a:xfrm>
-            <a:off x="3996391" y="1046348"/>
+            <a:off x="3996391" y="4391781"/>
             <a:ext cx="2802130" cy="392619"/>
           </a:xfrm>
           <a:prstGeom prst="rect">
@@ -24668,13 +24668,13 @@
       </p:sp>
       <p:cxnSp>
         <p:nvCxnSpPr>
-          <p:cNvPr id="13" name="Connector 12"/>
+          <p:cNvPr id="47" name="Connector 46"/>
           <p:cNvCxnSpPr/>
           <p:nvPr/>
         </p:nvCxnSpPr>
         <p:spPr>
           <a:xfrm>
-            <a:off x="3985435" y="1079217"/>
+            <a:off x="3985435" y="4424650"/>
             <a:ext cx="0" cy="326880"/>
           </a:xfrm>
           <a:prstGeom prst="line">
@@ -24689,13 +24689,13 @@
       </p:cxnSp>
       <p:sp>
         <p:nvSpPr>
-          <p:cNvPr id="14" name="핵심성과 박스"/>
+          <p:cNvPr id="48" name="핵심성과 박스"/>
           <p:cNvSpPr/>
           <p:nvPr/>
         </p:nvSpPr>
         <p:spPr>
           <a:xfrm>
-            <a:off x="536870" y="1564967"/>
+            <a:off x="536870" y="4910400"/>
             <a:ext cx="6300000" cy="311478"/>
           </a:xfrm>
           <a:prstGeom prst="rect">
@@ -24721,13 +24721,13 @@
       </p:sp>
       <p:sp>
         <p:nvSpPr>
-          <p:cNvPr id="15" name="핵심성과 라벨"/>
+          <p:cNvPr id="49" name="핵심성과 라벨"/>
           <p:cNvSpPr/>
           <p:nvPr/>
         </p:nvSpPr>
         <p:spPr>
           <a:xfrm>
-            <a:off x="569739" y="1603315"/>
+            <a:off x="569739" y="4948748"/>
             <a:ext cx="657391" cy="234783"/>
           </a:xfrm>
           <a:prstGeom prst="homePlate">
@@ -24774,13 +24774,13 @@
       </p:sp>
       <p:sp>
         <p:nvSpPr>
-          <p:cNvPr id="16" name="핵심성과 문구"/>
+          <p:cNvPr id="50" name="핵심성과 문구"/>
           <p:cNvSpPr txBox="1"/>
           <p:nvPr/>
         </p:nvSpPr>
         <p:spPr>
           <a:xfrm>
-            <a:off x="1314783" y="1581402"/>
+            <a:off x="1314783" y="4926835"/>
             <a:ext cx="5456348" cy="278609"/>
           </a:xfrm>
           <a:prstGeom prst="rect">
